--- a/output/wordlabs-fill-3day.pptx
+++ b/output/wordlabs-fill-3day.pptx
@@ -5622,7 +5622,7 @@
                 <a:ea typeface="Trebuchet MS" pitchFamily="34" charset="-122"/>
                 <a:cs typeface="Trebuchet MS" pitchFamily="34" charset="-120"/>
               </a:rPr>
-              <a:t>1</a:t>
+              <a:t>2</a:t>
             </a:r>
             <a:pPr algn="ctr" indent="0" marL="0">
               <a:buNone/>
@@ -5636,7 +5636,7 @@
                 <a:ea typeface="Trebuchet MS" pitchFamily="34" charset="-122"/>
                 <a:cs typeface="Trebuchet MS" pitchFamily="34" charset="-120"/>
               </a:rPr>
-              <a:t>  punctuation mark</a:t>
+              <a:t>  punctuation marks</a:t>
             </a:r>
             <a:endParaRPr lang="en-US" sz="2800" dirty="0"/>
           </a:p>
@@ -6040,7 +6040,7 @@
                 <a:ea typeface="Calibri" pitchFamily="34" charset="-122"/>
                 <a:cs typeface="Calibri" pitchFamily="34" charset="-120"/>
               </a:rPr>
-              <a:t>She was </a:t>
+              <a:t>Can you </a:t>
             </a:r>
             <a:pPr algn="l" indent="0" marL="0">
               <a:buNone/>
@@ -6057,7 +6057,7 @@
                 <a:ea typeface="Calibri" pitchFamily="34" charset="-122"/>
                 <a:cs typeface="Calibri" pitchFamily="34" charset="-120"/>
               </a:rPr>
-              <a:t>refilling</a:t>
+              <a:t>refill</a:t>
             </a:r>
             <a:pPr algn="l" indent="0" marL="0">
               <a:buNone/>
@@ -6071,7 +6071,7 @@
                 <a:ea typeface="Calibri" pitchFamily="34" charset="-122"/>
                 <a:cs typeface="Calibri" pitchFamily="34" charset="-120"/>
               </a:rPr>
-              <a:t> the bird bath, making sure she did not </a:t>
+              <a:t> the bottles, and make sure you don't </a:t>
             </a:r>
             <a:pPr algn="l" indent="0" marL="0">
               <a:buNone/>
@@ -6102,7 +6102,7 @@
                 <a:ea typeface="Calibri" pitchFamily="34" charset="-122"/>
                 <a:cs typeface="Calibri" pitchFamily="34" charset="-120"/>
               </a:rPr>
-              <a:t> it.</a:t>
+              <a:t> them?</a:t>
             </a:r>
             <a:endParaRPr lang="en-US" sz="1800" dirty="0"/>
           </a:p>
@@ -6257,7 +6257,7 @@
                 <a:ea typeface="Trebuchet MS" pitchFamily="34" charset="-122"/>
                 <a:cs typeface="Trebuchet MS" pitchFamily="34" charset="-120"/>
               </a:rPr>
-              <a:t>refilling</a:t>
+              <a:t>refill</a:t>
             </a:r>
             <a:endParaRPr lang="en-US" sz="1400" dirty="0"/>
           </a:p>
@@ -6855,7 +6855,7 @@
                 <a:ea typeface="Trebuchet MS" pitchFamily="34" charset="-122"/>
                 <a:cs typeface="Trebuchet MS" pitchFamily="34" charset="-120"/>
               </a:rPr>
-              <a:t>refilling</a:t>
+              <a:t>refill</a:t>
             </a:r>
             <a:endParaRPr lang="en-US" sz="2800" dirty="0"/>
           </a:p>
@@ -7682,7 +7682,7 @@
                 <a:ea typeface="Trebuchet MS" pitchFamily="34" charset="-122"/>
                 <a:cs typeface="Trebuchet MS" pitchFamily="34" charset="-120"/>
               </a:rPr>
-              <a:t>refilling</a:t>
+              <a:t>refill</a:t>
             </a:r>
             <a:endParaRPr lang="en-US" sz="2800" dirty="0"/>
           </a:p>
@@ -7762,7 +7762,7 @@
         </p:nvSpPr>
         <p:spPr>
           <a:xfrm>
-            <a:off x="2221992" y="2258568"/>
+            <a:off x="2938272" y="2258568"/>
             <a:ext cx="1828800" cy="292608"/>
           </a:xfrm>
           <a:prstGeom prst="rect">
@@ -7796,7 +7796,7 @@
         </p:nvSpPr>
         <p:spPr>
           <a:xfrm>
-            <a:off x="2221992" y="2258568"/>
+            <a:off x="2938272" y="2258568"/>
             <a:ext cx="1828800" cy="292608"/>
           </a:xfrm>
           <a:prstGeom prst="rect">
@@ -7835,7 +7835,7 @@
         </p:nvSpPr>
         <p:spPr>
           <a:xfrm>
-            <a:off x="2221992" y="2569464"/>
+            <a:off x="2938272" y="2569464"/>
             <a:ext cx="1828800" cy="201168"/>
           </a:xfrm>
           <a:prstGeom prst="rect">
@@ -7874,7 +7874,7 @@
         </p:nvSpPr>
         <p:spPr>
           <a:xfrm>
-            <a:off x="4370832" y="2258568"/>
+            <a:off x="5803392" y="2258568"/>
             <a:ext cx="1828800" cy="292608"/>
           </a:xfrm>
           <a:prstGeom prst="rect">
@@ -7908,7 +7908,7 @@
         </p:nvSpPr>
         <p:spPr>
           <a:xfrm>
-            <a:off x="4370832" y="2258568"/>
+            <a:off x="5803392" y="2258568"/>
             <a:ext cx="1828800" cy="292608"/>
           </a:xfrm>
           <a:prstGeom prst="rect">
@@ -7947,7 +7947,7 @@
         </p:nvSpPr>
         <p:spPr>
           <a:xfrm>
-            <a:off x="4370832" y="2569464"/>
+            <a:off x="5803392" y="2569464"/>
             <a:ext cx="1828800" cy="201168"/>
           </a:xfrm>
           <a:prstGeom prst="rect">
@@ -7986,30 +7986,23 @@
         </p:nvSpPr>
         <p:spPr>
           <a:xfrm>
-            <a:off x="6519672" y="2258568"/>
-            <a:ext cx="1828800" cy="292608"/>
+            <a:off x="365760" y="3273552"/>
+            <a:ext cx="1371600" cy="658368"/>
           </a:xfrm>
           <a:prstGeom prst="rect">
             <a:avLst>
-              <a:gd name="adj" fmla="val 25000"/>
+              <a:gd name="adj" fmla="val 8333"/>
             </a:avLst>
           </a:prstGeom>
           <a:solidFill>
-            <a:srgbClr val="FCE7F3"/>
-          </a:solidFill>
-          <a:ln w="19050">
-            <a:solidFill>
-              <a:srgbClr val="DB2777"/>
-            </a:solidFill>
-            <a:prstDash val="solid"/>
-          </a:ln>
-          <a:effectLst>
-            <a:outerShdw sx="100000" sy="100000" kx="0" ky="0" algn="bl" rotWithShape="0" blurRad="101600" dist="38100" dir="8100000">
-              <a:srgbClr val="000000">
-                <a:alpha val="12000"/>
-              </a:srgbClr>
-            </a:outerShdw>
-          </a:effectLst>
+            <a:srgbClr val="E2E8F0"/>
+          </a:solidFill>
+          <a:ln w="12700">
+            <a:solidFill>
+              <a:srgbClr val="E2E8F0"/>
+            </a:solidFill>
+            <a:prstDash val="solid"/>
+          </a:ln>
         </p:spPr>
       </p:sp>
       <p:sp>
@@ -8020,8 +8013,8 @@
         </p:nvSpPr>
         <p:spPr>
           <a:xfrm>
-            <a:off x="6519672" y="2258568"/>
-            <a:ext cx="1828800" cy="292608"/>
+            <a:off x="365760" y="3273552"/>
+            <a:ext cx="1371600" cy="658368"/>
           </a:xfrm>
           <a:prstGeom prst="rect">
             <a:avLst/>
@@ -8037,73 +8030,100 @@
               <a:buNone/>
             </a:pPr>
             <a:r>
-              <a:rPr lang="en-US" sz="1300" b="1" dirty="0">
-                <a:solidFill>
-                  <a:srgbClr val="9D174D"/>
+              <a:rPr lang="en-US" sz="1100" b="1" dirty="0">
+                <a:solidFill>
+                  <a:srgbClr val="475569"/>
                 </a:solidFill>
                 <a:latin typeface="Trebuchet MS" pitchFamily="34" charset="0"/>
                 <a:ea typeface="Trebuchet MS" pitchFamily="34" charset="-122"/>
                 <a:cs typeface="Trebuchet MS" pitchFamily="34" charset="-120"/>
               </a:rPr>
-              <a:t>ing</a:t>
-            </a:r>
-            <a:endParaRPr lang="en-US" sz="1300" dirty="0"/>
-          </a:p>
-        </p:txBody>
-      </p:sp>
-      <p:sp>
-        <p:nvSpPr>
-          <p:cNvPr id="24" name="Text 22"/>
-          <p:cNvSpPr/>
-          <p:nvPr/>
-        </p:nvSpPr>
-        <p:spPr>
-          <a:xfrm>
-            <a:off x="6519672" y="2569464"/>
-            <a:ext cx="1828800" cy="201168"/>
-          </a:xfrm>
-          <a:prstGeom prst="rect">
-            <a:avLst/>
-          </a:prstGeom>
-          <a:noFill/>
-          <a:ln/>
-        </p:spPr>
-        <p:txBody>
-          <a:bodyPr wrap="square" lIns="0" tIns="0" rIns="0" bIns="0" rtlCol="0" anchor="t"/>
-          <a:lstStyle/>
-          <a:p>
-            <a:pPr algn="ctr" indent="0" marL="0">
-              <a:buNone/>
-            </a:pPr>
-            <a:r>
-              <a:rPr lang="en-US" sz="850" dirty="0">
-                <a:solidFill>
-                  <a:srgbClr val="475569"/>
+              <a:t>Syllables</a:t>
+            </a:r>
+            <a:endParaRPr lang="en-US" sz="1100" dirty="0"/>
+          </a:p>
+        </p:txBody>
+      </p:sp>
+      <p:sp>
+        <p:nvSpPr>
+          <p:cNvPr id="24" name="Shape 22"/>
+          <p:cNvSpPr/>
+          <p:nvPr/>
+        </p:nvSpPr>
+        <p:spPr>
+          <a:xfrm>
+            <a:off x="1874520" y="3273552"/>
+            <a:ext cx="6903720" cy="658368"/>
+          </a:xfrm>
+          <a:prstGeom prst="rect">
+            <a:avLst>
+              <a:gd name="adj" fmla="val 8333"/>
+            </a:avLst>
+          </a:prstGeom>
+          <a:solidFill>
+            <a:srgbClr val="F8FAFC"/>
+          </a:solidFill>
+          <a:ln w="12700">
+            <a:solidFill>
+              <a:srgbClr val="E2E8F0"/>
+            </a:solidFill>
+            <a:prstDash val="dash"/>
+          </a:ln>
+        </p:spPr>
+      </p:sp>
+      <p:sp>
+        <p:nvSpPr>
+          <p:cNvPr id="25" name="Text 23"/>
+          <p:cNvSpPr/>
+          <p:nvPr/>
+        </p:nvSpPr>
+        <p:spPr>
+          <a:xfrm>
+            <a:off x="1874520" y="3273552"/>
+            <a:ext cx="6903720" cy="658368"/>
+          </a:xfrm>
+          <a:prstGeom prst="rect">
+            <a:avLst/>
+          </a:prstGeom>
+          <a:noFill/>
+          <a:ln/>
+        </p:spPr>
+        <p:txBody>
+          <a:bodyPr wrap="square" rtlCol="0" anchor="ctr"/>
+          <a:lstStyle/>
+          <a:p>
+            <a:pPr algn="ctr" indent="0" marL="0">
+              <a:buNone/>
+            </a:pPr>
+            <a:r>
+              <a:rPr lang="en-US" sz="1100" i="1" dirty="0">
+                <a:solidFill>
+                  <a:srgbClr val="CBD5E1"/>
                 </a:solidFill>
                 <a:latin typeface="Calibri" pitchFamily="34" charset="0"/>
                 <a:ea typeface="Calibri" pitchFamily="34" charset="-122"/>
                 <a:cs typeface="Calibri" pitchFamily="34" charset="-120"/>
               </a:rPr>
-              <a:t>ongoing action</a:t>
-            </a:r>
-            <a:endParaRPr lang="en-US" sz="850" dirty="0"/>
-          </a:p>
-        </p:txBody>
-      </p:sp>
-      <p:sp>
-        <p:nvSpPr>
-          <p:cNvPr id="25" name="Shape 23"/>
-          <p:cNvSpPr/>
-          <p:nvPr/>
-        </p:nvSpPr>
-        <p:spPr>
-          <a:xfrm>
-            <a:off x="365760" y="3273552"/>
-            <a:ext cx="1371600" cy="658368"/>
+              <a:t>Write here...</a:t>
+            </a:r>
+            <a:endParaRPr lang="en-US" sz="1100" dirty="0"/>
+          </a:p>
+        </p:txBody>
+      </p:sp>
+      <p:sp>
+        <p:nvSpPr>
+          <p:cNvPr id="26" name="Shape 24"/>
+          <p:cNvSpPr/>
+          <p:nvPr/>
+        </p:nvSpPr>
+        <p:spPr>
+          <a:xfrm>
+            <a:off x="365760" y="4096512"/>
+            <a:ext cx="1371600" cy="804672"/>
           </a:xfrm>
           <a:prstGeom prst="rect">
             <a:avLst>
-              <a:gd name="adj" fmla="val 8333"/>
+              <a:gd name="adj" fmla="val 6818"/>
             </a:avLst>
           </a:prstGeom>
           <a:solidFill>
@@ -8119,14 +8139,14 @@
       </p:sp>
       <p:sp>
         <p:nvSpPr>
-          <p:cNvPr id="26" name="Text 24"/>
-          <p:cNvSpPr/>
-          <p:nvPr/>
-        </p:nvSpPr>
-        <p:spPr>
-          <a:xfrm>
-            <a:off x="365760" y="3273552"/>
-            <a:ext cx="1371600" cy="658368"/>
+          <p:cNvPr id="27" name="Text 25"/>
+          <p:cNvSpPr/>
+          <p:nvPr/>
+        </p:nvSpPr>
+        <p:spPr>
+          <a:xfrm>
+            <a:off x="365760" y="4096512"/>
+            <a:ext cx="1371600" cy="804672"/>
           </a:xfrm>
           <a:prstGeom prst="rect">
             <a:avLst/>
@@ -8150,7 +8170,7 @@
                 <a:ea typeface="Trebuchet MS" pitchFamily="34" charset="-122"/>
                 <a:cs typeface="Trebuchet MS" pitchFamily="34" charset="-120"/>
               </a:rPr>
-              <a:t>Syllables</a:t>
+              <a:t>Phonemes</a:t>
             </a:r>
             <a:endParaRPr lang="en-US" sz="1100" dirty="0"/>
           </a:p>
@@ -8158,80 +8178,14 @@
       </p:sp>
       <p:sp>
         <p:nvSpPr>
-          <p:cNvPr id="27" name="Shape 25"/>
-          <p:cNvSpPr/>
-          <p:nvPr/>
-        </p:nvSpPr>
-        <p:spPr>
-          <a:xfrm>
-            <a:off x="1874520" y="3273552"/>
-            <a:ext cx="6903720" cy="658368"/>
-          </a:xfrm>
-          <a:prstGeom prst="rect">
-            <a:avLst>
-              <a:gd name="adj" fmla="val 8333"/>
-            </a:avLst>
-          </a:prstGeom>
-          <a:solidFill>
-            <a:srgbClr val="F8FAFC"/>
-          </a:solidFill>
-          <a:ln w="12700">
-            <a:solidFill>
-              <a:srgbClr val="E2E8F0"/>
-            </a:solidFill>
-            <a:prstDash val="dash"/>
-          </a:ln>
-        </p:spPr>
-      </p:sp>
-      <p:sp>
-        <p:nvSpPr>
-          <p:cNvPr id="28" name="Text 26"/>
-          <p:cNvSpPr/>
-          <p:nvPr/>
-        </p:nvSpPr>
-        <p:spPr>
-          <a:xfrm>
-            <a:off x="1874520" y="3273552"/>
-            <a:ext cx="6903720" cy="658368"/>
-          </a:xfrm>
-          <a:prstGeom prst="rect">
-            <a:avLst/>
-          </a:prstGeom>
-          <a:noFill/>
-          <a:ln/>
-        </p:spPr>
-        <p:txBody>
-          <a:bodyPr wrap="square" rtlCol="0" anchor="ctr"/>
-          <a:lstStyle/>
-          <a:p>
-            <a:pPr algn="ctr" indent="0" marL="0">
-              <a:buNone/>
-            </a:pPr>
-            <a:r>
-              <a:rPr lang="en-US" sz="1100" i="1" dirty="0">
-                <a:solidFill>
-                  <a:srgbClr val="CBD5E1"/>
-                </a:solidFill>
-                <a:latin typeface="Calibri" pitchFamily="34" charset="0"/>
-                <a:ea typeface="Calibri" pitchFamily="34" charset="-122"/>
-                <a:cs typeface="Calibri" pitchFamily="34" charset="-120"/>
-              </a:rPr>
-              <a:t>Write here...</a:t>
-            </a:r>
-            <a:endParaRPr lang="en-US" sz="1100" dirty="0"/>
-          </a:p>
-        </p:txBody>
-      </p:sp>
-      <p:sp>
-        <p:nvSpPr>
-          <p:cNvPr id="29" name="Shape 27"/>
-          <p:cNvSpPr/>
-          <p:nvPr/>
-        </p:nvSpPr>
-        <p:spPr>
-          <a:xfrm>
-            <a:off x="365760" y="4096512"/>
-            <a:ext cx="1371600" cy="804672"/>
+          <p:cNvPr id="28" name="Shape 26"/>
+          <p:cNvSpPr/>
+          <p:nvPr/>
+        </p:nvSpPr>
+        <p:spPr>
+          <a:xfrm>
+            <a:off x="1874520" y="4096512"/>
+            <a:ext cx="6903720" cy="804672"/>
           </a:xfrm>
           <a:prstGeom prst="rect">
             <a:avLst>
@@ -8239,85 +8193,19 @@
             </a:avLst>
           </a:prstGeom>
           <a:solidFill>
-            <a:srgbClr val="E2E8F0"/>
+            <a:srgbClr val="F8FAFC"/>
           </a:solidFill>
           <a:ln w="12700">
             <a:solidFill>
               <a:srgbClr val="E2E8F0"/>
             </a:solidFill>
-            <a:prstDash val="solid"/>
-          </a:ln>
-        </p:spPr>
-      </p:sp>
-      <p:sp>
-        <p:nvSpPr>
-          <p:cNvPr id="30" name="Text 28"/>
-          <p:cNvSpPr/>
-          <p:nvPr/>
-        </p:nvSpPr>
-        <p:spPr>
-          <a:xfrm>
-            <a:off x="365760" y="4096512"/>
-            <a:ext cx="1371600" cy="804672"/>
-          </a:xfrm>
-          <a:prstGeom prst="rect">
-            <a:avLst/>
-          </a:prstGeom>
-          <a:noFill/>
-          <a:ln/>
-        </p:spPr>
-        <p:txBody>
-          <a:bodyPr wrap="square" lIns="0" tIns="0" rIns="0" bIns="0" rtlCol="0" anchor="ctr"/>
-          <a:lstStyle/>
-          <a:p>
-            <a:pPr algn="ctr" indent="0" marL="0">
-              <a:buNone/>
-            </a:pPr>
-            <a:r>
-              <a:rPr lang="en-US" sz="1100" b="1" dirty="0">
-                <a:solidFill>
-                  <a:srgbClr val="475569"/>
-                </a:solidFill>
-                <a:latin typeface="Trebuchet MS" pitchFamily="34" charset="0"/>
-                <a:ea typeface="Trebuchet MS" pitchFamily="34" charset="-122"/>
-                <a:cs typeface="Trebuchet MS" pitchFamily="34" charset="-120"/>
-              </a:rPr>
-              <a:t>Phonemes</a:t>
-            </a:r>
-            <a:endParaRPr lang="en-US" sz="1100" dirty="0"/>
-          </a:p>
-        </p:txBody>
-      </p:sp>
-      <p:sp>
-        <p:nvSpPr>
-          <p:cNvPr id="31" name="Shape 29"/>
-          <p:cNvSpPr/>
-          <p:nvPr/>
-        </p:nvSpPr>
-        <p:spPr>
-          <a:xfrm>
-            <a:off x="1874520" y="4096512"/>
-            <a:ext cx="6903720" cy="804672"/>
-          </a:xfrm>
-          <a:prstGeom prst="rect">
-            <a:avLst>
-              <a:gd name="adj" fmla="val 6818"/>
-            </a:avLst>
-          </a:prstGeom>
-          <a:solidFill>
-            <a:srgbClr val="F8FAFC"/>
-          </a:solidFill>
-          <a:ln w="12700">
-            <a:solidFill>
-              <a:srgbClr val="E2E8F0"/>
-            </a:solidFill>
             <a:prstDash val="dash"/>
           </a:ln>
         </p:spPr>
       </p:sp>
       <p:sp>
         <p:nvSpPr>
-          <p:cNvPr id="32" name="Text 30"/>
+          <p:cNvPr id="29" name="Text 27"/>
           <p:cNvSpPr/>
           <p:nvPr/>
         </p:nvSpPr>
@@ -8779,7 +8667,7 @@
                 <a:ea typeface="Trebuchet MS" pitchFamily="34" charset="-122"/>
                 <a:cs typeface="Trebuchet MS" pitchFamily="34" charset="-120"/>
               </a:rPr>
-              <a:t>refilling</a:t>
+              <a:t>refill</a:t>
             </a:r>
             <a:endParaRPr lang="en-US" sz="2800" dirty="0"/>
           </a:p>
@@ -8859,7 +8747,7 @@
         </p:nvSpPr>
         <p:spPr>
           <a:xfrm>
-            <a:off x="2221992" y="2258568"/>
+            <a:off x="2938272" y="2258568"/>
             <a:ext cx="1828800" cy="292608"/>
           </a:xfrm>
           <a:prstGeom prst="rect">
@@ -8893,7 +8781,7 @@
         </p:nvSpPr>
         <p:spPr>
           <a:xfrm>
-            <a:off x="2221992" y="2258568"/>
+            <a:off x="2938272" y="2258568"/>
             <a:ext cx="1828800" cy="292608"/>
           </a:xfrm>
           <a:prstGeom prst="rect">
@@ -8932,7 +8820,7 @@
         </p:nvSpPr>
         <p:spPr>
           <a:xfrm>
-            <a:off x="2221992" y="2569464"/>
+            <a:off x="2938272" y="2569464"/>
             <a:ext cx="1828800" cy="201168"/>
           </a:xfrm>
           <a:prstGeom prst="rect">
@@ -8971,7 +8859,7 @@
         </p:nvSpPr>
         <p:spPr>
           <a:xfrm>
-            <a:off x="4370832" y="2258568"/>
+            <a:off x="5803392" y="2258568"/>
             <a:ext cx="1828800" cy="292608"/>
           </a:xfrm>
           <a:prstGeom prst="rect">
@@ -9005,7 +8893,7 @@
         </p:nvSpPr>
         <p:spPr>
           <a:xfrm>
-            <a:off x="4370832" y="2258568"/>
+            <a:off x="5803392" y="2258568"/>
             <a:ext cx="1828800" cy="292608"/>
           </a:xfrm>
           <a:prstGeom prst="rect">
@@ -9044,7 +8932,7 @@
         </p:nvSpPr>
         <p:spPr>
           <a:xfrm>
-            <a:off x="4370832" y="2569464"/>
+            <a:off x="5803392" y="2569464"/>
             <a:ext cx="1828800" cy="201168"/>
           </a:xfrm>
           <a:prstGeom prst="rect">
@@ -9083,30 +8971,23 @@
         </p:nvSpPr>
         <p:spPr>
           <a:xfrm>
-            <a:off x="6519672" y="2258568"/>
-            <a:ext cx="1828800" cy="292608"/>
+            <a:off x="365760" y="3273552"/>
+            <a:ext cx="1371600" cy="658368"/>
           </a:xfrm>
           <a:prstGeom prst="rect">
             <a:avLst>
-              <a:gd name="adj" fmla="val 25000"/>
+              <a:gd name="adj" fmla="val 8333"/>
             </a:avLst>
           </a:prstGeom>
           <a:solidFill>
-            <a:srgbClr val="FCE7F3"/>
-          </a:solidFill>
-          <a:ln w="19050">
-            <a:solidFill>
-              <a:srgbClr val="DB2777"/>
-            </a:solidFill>
-            <a:prstDash val="solid"/>
-          </a:ln>
-          <a:effectLst>
-            <a:outerShdw sx="100000" sy="100000" kx="0" ky="0" algn="bl" rotWithShape="0" blurRad="101600" dist="38100" dir="8100000">
-              <a:srgbClr val="000000">
-                <a:alpha val="12000"/>
-              </a:srgbClr>
-            </a:outerShdw>
-          </a:effectLst>
+            <a:srgbClr val="E2E8F0"/>
+          </a:solidFill>
+          <a:ln w="12700">
+            <a:solidFill>
+              <a:srgbClr val="E2E8F0"/>
+            </a:solidFill>
+            <a:prstDash val="solid"/>
+          </a:ln>
         </p:spPr>
       </p:sp>
       <p:sp>
@@ -9117,8 +8998,8 @@
         </p:nvSpPr>
         <p:spPr>
           <a:xfrm>
-            <a:off x="6519672" y="2258568"/>
-            <a:ext cx="1828800" cy="292608"/>
+            <a:off x="365760" y="3273552"/>
+            <a:ext cx="1371600" cy="658368"/>
           </a:xfrm>
           <a:prstGeom prst="rect">
             <a:avLst/>
@@ -9134,69 +9015,30 @@
               <a:buNone/>
             </a:pPr>
             <a:r>
-              <a:rPr lang="en-US" sz="1300" b="1" dirty="0">
-                <a:solidFill>
-                  <a:srgbClr val="9D174D"/>
+              <a:rPr lang="en-US" sz="1100" b="1" dirty="0">
+                <a:solidFill>
+                  <a:srgbClr val="475569"/>
                 </a:solidFill>
                 <a:latin typeface="Trebuchet MS" pitchFamily="34" charset="0"/>
                 <a:ea typeface="Trebuchet MS" pitchFamily="34" charset="-122"/>
                 <a:cs typeface="Trebuchet MS" pitchFamily="34" charset="-120"/>
               </a:rPr>
-              <a:t>ing</a:t>
-            </a:r>
-            <a:endParaRPr lang="en-US" sz="1300" dirty="0"/>
-          </a:p>
-        </p:txBody>
-      </p:sp>
-      <p:sp>
-        <p:nvSpPr>
-          <p:cNvPr id="24" name="Text 22"/>
-          <p:cNvSpPr/>
-          <p:nvPr/>
-        </p:nvSpPr>
-        <p:spPr>
-          <a:xfrm>
-            <a:off x="6519672" y="2569464"/>
-            <a:ext cx="1828800" cy="201168"/>
-          </a:xfrm>
-          <a:prstGeom prst="rect">
-            <a:avLst/>
-          </a:prstGeom>
-          <a:noFill/>
-          <a:ln/>
-        </p:spPr>
-        <p:txBody>
-          <a:bodyPr wrap="square" lIns="0" tIns="0" rIns="0" bIns="0" rtlCol="0" anchor="t"/>
-          <a:lstStyle/>
-          <a:p>
-            <a:pPr algn="ctr" indent="0" marL="0">
-              <a:buNone/>
-            </a:pPr>
-            <a:r>
-              <a:rPr lang="en-US" sz="850" dirty="0">
-                <a:solidFill>
-                  <a:srgbClr val="475569"/>
-                </a:solidFill>
-                <a:latin typeface="Calibri" pitchFamily="34" charset="0"/>
-                <a:ea typeface="Calibri" pitchFamily="34" charset="-122"/>
-                <a:cs typeface="Calibri" pitchFamily="34" charset="-120"/>
-              </a:rPr>
-              <a:t>ongoing action</a:t>
-            </a:r>
-            <a:endParaRPr lang="en-US" sz="850" dirty="0"/>
-          </a:p>
-        </p:txBody>
-      </p:sp>
-      <p:sp>
-        <p:nvSpPr>
-          <p:cNvPr id="25" name="Shape 23"/>
-          <p:cNvSpPr/>
-          <p:nvPr/>
-        </p:nvSpPr>
-        <p:spPr>
-          <a:xfrm>
-            <a:off x="365760" y="3273552"/>
-            <a:ext cx="1371600" cy="658368"/>
+              <a:t>Syllables</a:t>
+            </a:r>
+            <a:endParaRPr lang="en-US" sz="1100" dirty="0"/>
+          </a:p>
+        </p:txBody>
+      </p:sp>
+      <p:sp>
+        <p:nvSpPr>
+          <p:cNvPr id="24" name="Shape 22"/>
+          <p:cNvSpPr/>
+          <p:nvPr/>
+        </p:nvSpPr>
+        <p:spPr>
+          <a:xfrm>
+            <a:off x="1874520" y="3273552"/>
+            <a:ext cx="6903720" cy="658368"/>
           </a:xfrm>
           <a:prstGeom prst="rect">
             <a:avLst>
@@ -9204,11 +9046,38 @@
             </a:avLst>
           </a:prstGeom>
           <a:solidFill>
-            <a:srgbClr val="E2E8F0"/>
-          </a:solidFill>
-          <a:ln w="12700">
-            <a:solidFill>
-              <a:srgbClr val="E2E8F0"/>
+            <a:srgbClr val="CCFBF1"/>
+          </a:solidFill>
+          <a:ln w="12700">
+            <a:solidFill>
+              <a:srgbClr val="0D9488"/>
+            </a:solidFill>
+            <a:prstDash val="solid"/>
+          </a:ln>
+        </p:spPr>
+      </p:sp>
+      <p:sp>
+        <p:nvSpPr>
+          <p:cNvPr id="25" name="Shape 23"/>
+          <p:cNvSpPr/>
+          <p:nvPr/>
+        </p:nvSpPr>
+        <p:spPr>
+          <a:xfrm>
+            <a:off x="2999232" y="3364992"/>
+            <a:ext cx="1645920" cy="475488"/>
+          </a:xfrm>
+          <a:prstGeom prst="rect">
+            <a:avLst>
+              <a:gd name="adj" fmla="val 9615"/>
+            </a:avLst>
+          </a:prstGeom>
+          <a:solidFill>
+            <a:srgbClr val="FFFFFF"/>
+          </a:solidFill>
+          <a:ln w="12700">
+            <a:solidFill>
+              <a:srgbClr val="0D9488"/>
             </a:solidFill>
             <a:prstDash val="solid"/>
           </a:ln>
@@ -9222,8 +9091,8 @@
         </p:nvSpPr>
         <p:spPr>
           <a:xfrm>
-            <a:off x="365760" y="3273552"/>
-            <a:ext cx="1371600" cy="658368"/>
+            <a:off x="2999232" y="3364992"/>
+            <a:ext cx="1645920" cy="475488"/>
           </a:xfrm>
           <a:prstGeom prst="rect">
             <a:avLst/>
@@ -9239,46 +9108,58 @@
               <a:buNone/>
             </a:pPr>
             <a:r>
-              <a:rPr lang="en-US" sz="1100" b="1" dirty="0">
-                <a:solidFill>
-                  <a:srgbClr val="475569"/>
+              <a:rPr lang="en-US" sz="1400" b="1" dirty="0">
+                <a:solidFill>
+                  <a:srgbClr val="0D9488"/>
                 </a:solidFill>
                 <a:latin typeface="Trebuchet MS" pitchFamily="34" charset="0"/>
                 <a:ea typeface="Trebuchet MS" pitchFamily="34" charset="-122"/>
                 <a:cs typeface="Trebuchet MS" pitchFamily="34" charset="-120"/>
               </a:rPr>
-              <a:t>Syllables</a:t>
-            </a:r>
-            <a:endParaRPr lang="en-US" sz="1100" dirty="0"/>
-          </a:p>
-        </p:txBody>
-      </p:sp>
-      <p:sp>
-        <p:nvSpPr>
-          <p:cNvPr id="27" name="Shape 25"/>
-          <p:cNvSpPr/>
-          <p:nvPr/>
-        </p:nvSpPr>
-        <p:spPr>
-          <a:xfrm>
-            <a:off x="1874520" y="3273552"/>
-            <a:ext cx="6903720" cy="658368"/>
-          </a:xfrm>
-          <a:prstGeom prst="rect">
-            <a:avLst>
-              <a:gd name="adj" fmla="val 8333"/>
-            </a:avLst>
-          </a:prstGeom>
-          <a:solidFill>
-            <a:srgbClr val="CCFBF1"/>
-          </a:solidFill>
-          <a:ln w="12700">
-            <a:solidFill>
-              <a:srgbClr val="0D9488"/>
-            </a:solidFill>
-            <a:prstDash val="solid"/>
-          </a:ln>
-        </p:spPr>
+              <a:t>re</a:t>
+            </a:r>
+            <a:endParaRPr lang="en-US" sz="1400" dirty="0"/>
+          </a:p>
+        </p:txBody>
+      </p:sp>
+      <p:sp>
+        <p:nvSpPr>
+          <p:cNvPr id="27" name="Text 25"/>
+          <p:cNvSpPr/>
+          <p:nvPr/>
+        </p:nvSpPr>
+        <p:spPr>
+          <a:xfrm>
+            <a:off x="4645152" y="3364992"/>
+            <a:ext cx="1097280" cy="475488"/>
+          </a:xfrm>
+          <a:prstGeom prst="rect">
+            <a:avLst/>
+          </a:prstGeom>
+          <a:noFill/>
+          <a:ln/>
+        </p:spPr>
+        <p:txBody>
+          <a:bodyPr wrap="square" lIns="0" tIns="0" rIns="0" bIns="0" rtlCol="0" anchor="ctr"/>
+          <a:lstStyle/>
+          <a:p>
+            <a:pPr algn="ctr" indent="0" marL="0">
+              <a:buNone/>
+            </a:pPr>
+            <a:r>
+              <a:rPr lang="en-US" sz="1600" b="1" dirty="0">
+                <a:solidFill>
+                  <a:srgbClr val="0D9488"/>
+                </a:solidFill>
+                <a:latin typeface="Trebuchet MS" pitchFamily="34" charset="0"/>
+                <a:ea typeface="Trebuchet MS" pitchFamily="34" charset="-122"/>
+                <a:cs typeface="Trebuchet MS" pitchFamily="34" charset="-120"/>
+              </a:rPr>
+              <a:t>·</a:t>
+            </a:r>
+            <a:endParaRPr lang="en-US" sz="1600" dirty="0"/>
+          </a:p>
+        </p:txBody>
       </p:sp>
       <p:sp>
         <p:nvSpPr>
@@ -9288,7 +9169,7 @@
         </p:nvSpPr>
         <p:spPr>
           <a:xfrm>
-            <a:off x="2313432" y="3364992"/>
+            <a:off x="5742432" y="3364992"/>
             <a:ext cx="1645920" cy="475488"/>
           </a:xfrm>
           <a:prstGeom prst="rect">
@@ -9315,7 +9196,7 @@
         </p:nvSpPr>
         <p:spPr>
           <a:xfrm>
-            <a:off x="2313432" y="3364992"/>
+            <a:off x="5742432" y="3364992"/>
             <a:ext cx="1645920" cy="475488"/>
           </a:xfrm>
           <a:prstGeom prst="rect">
@@ -9340,7 +9221,7 @@
                 <a:ea typeface="Trebuchet MS" pitchFamily="34" charset="-122"/>
                 <a:cs typeface="Trebuchet MS" pitchFamily="34" charset="-120"/>
               </a:rPr>
-              <a:t>re</a:t>
+              <a:t>fill</a:t>
             </a:r>
             <a:endParaRPr lang="en-US" sz="1400" dirty="0"/>
           </a:p>
@@ -9348,14 +9229,41 @@
       </p:sp>
       <p:sp>
         <p:nvSpPr>
-          <p:cNvPr id="30" name="Text 28"/>
-          <p:cNvSpPr/>
-          <p:nvPr/>
-        </p:nvSpPr>
-        <p:spPr>
-          <a:xfrm>
-            <a:off x="3959352" y="3364992"/>
-            <a:ext cx="411480" cy="475488"/>
+          <p:cNvPr id="30" name="Shape 28"/>
+          <p:cNvSpPr/>
+          <p:nvPr/>
+        </p:nvSpPr>
+        <p:spPr>
+          <a:xfrm>
+            <a:off x="365760" y="4096512"/>
+            <a:ext cx="1371600" cy="804672"/>
+          </a:xfrm>
+          <a:prstGeom prst="rect">
+            <a:avLst>
+              <a:gd name="adj" fmla="val 6818"/>
+            </a:avLst>
+          </a:prstGeom>
+          <a:solidFill>
+            <a:srgbClr val="E2E8F0"/>
+          </a:solidFill>
+          <a:ln w="12700">
+            <a:solidFill>
+              <a:srgbClr val="E2E8F0"/>
+            </a:solidFill>
+            <a:prstDash val="solid"/>
+          </a:ln>
+        </p:spPr>
+      </p:sp>
+      <p:sp>
+        <p:nvSpPr>
+          <p:cNvPr id="31" name="Text 29"/>
+          <p:cNvSpPr/>
+          <p:nvPr/>
+        </p:nvSpPr>
+        <p:spPr>
+          <a:xfrm>
+            <a:off x="365760" y="4096512"/>
+            <a:ext cx="1371600" cy="804672"/>
           </a:xfrm>
           <a:prstGeom prst="rect">
             <a:avLst/>
@@ -9371,201 +9279,30 @@
               <a:buNone/>
             </a:pPr>
             <a:r>
-              <a:rPr lang="en-US" sz="1600" b="1" dirty="0">
-                <a:solidFill>
-                  <a:srgbClr val="0D9488"/>
+              <a:rPr lang="en-US" sz="1100" b="1" dirty="0">
+                <a:solidFill>
+                  <a:srgbClr val="475569"/>
                 </a:solidFill>
                 <a:latin typeface="Trebuchet MS" pitchFamily="34" charset="0"/>
                 <a:ea typeface="Trebuchet MS" pitchFamily="34" charset="-122"/>
                 <a:cs typeface="Trebuchet MS" pitchFamily="34" charset="-120"/>
               </a:rPr>
-              <a:t>·</a:t>
-            </a:r>
-            <a:endParaRPr lang="en-US" sz="1600" dirty="0"/>
-          </a:p>
-        </p:txBody>
-      </p:sp>
-      <p:sp>
-        <p:nvSpPr>
-          <p:cNvPr id="31" name="Shape 29"/>
-          <p:cNvSpPr/>
-          <p:nvPr/>
-        </p:nvSpPr>
-        <p:spPr>
-          <a:xfrm>
-            <a:off x="4370832" y="3364992"/>
-            <a:ext cx="1645920" cy="475488"/>
-          </a:xfrm>
-          <a:prstGeom prst="rect">
-            <a:avLst>
-              <a:gd name="adj" fmla="val 9615"/>
-            </a:avLst>
-          </a:prstGeom>
-          <a:solidFill>
-            <a:srgbClr val="FFFFFF"/>
-          </a:solidFill>
-          <a:ln w="12700">
-            <a:solidFill>
-              <a:srgbClr val="0D9488"/>
-            </a:solidFill>
-            <a:prstDash val="solid"/>
-          </a:ln>
-        </p:spPr>
-      </p:sp>
-      <p:sp>
-        <p:nvSpPr>
-          <p:cNvPr id="32" name="Text 30"/>
-          <p:cNvSpPr/>
-          <p:nvPr/>
-        </p:nvSpPr>
-        <p:spPr>
-          <a:xfrm>
-            <a:off x="4370832" y="3364992"/>
-            <a:ext cx="1645920" cy="475488"/>
-          </a:xfrm>
-          <a:prstGeom prst="rect">
-            <a:avLst/>
-          </a:prstGeom>
-          <a:noFill/>
-          <a:ln/>
-        </p:spPr>
-        <p:txBody>
-          <a:bodyPr wrap="square" lIns="0" tIns="0" rIns="0" bIns="0" rtlCol="0" anchor="ctr"/>
-          <a:lstStyle/>
-          <a:p>
-            <a:pPr algn="ctr" indent="0" marL="0">
-              <a:buNone/>
-            </a:pPr>
-            <a:r>
-              <a:rPr lang="en-US" sz="1400" b="1" dirty="0">
-                <a:solidFill>
-                  <a:srgbClr val="0D9488"/>
-                </a:solidFill>
-                <a:latin typeface="Trebuchet MS" pitchFamily="34" charset="0"/>
-                <a:ea typeface="Trebuchet MS" pitchFamily="34" charset="-122"/>
-                <a:cs typeface="Trebuchet MS" pitchFamily="34" charset="-120"/>
-              </a:rPr>
-              <a:t>fill</a:t>
-            </a:r>
-            <a:endParaRPr lang="en-US" sz="1400" dirty="0"/>
-          </a:p>
-        </p:txBody>
-      </p:sp>
-      <p:sp>
-        <p:nvSpPr>
-          <p:cNvPr id="33" name="Text 31"/>
-          <p:cNvSpPr/>
-          <p:nvPr/>
-        </p:nvSpPr>
-        <p:spPr>
-          <a:xfrm>
-            <a:off x="6016752" y="3364992"/>
-            <a:ext cx="411480" cy="475488"/>
-          </a:xfrm>
-          <a:prstGeom prst="rect">
-            <a:avLst/>
-          </a:prstGeom>
-          <a:noFill/>
-          <a:ln/>
-        </p:spPr>
-        <p:txBody>
-          <a:bodyPr wrap="square" lIns="0" tIns="0" rIns="0" bIns="0" rtlCol="0" anchor="ctr"/>
-          <a:lstStyle/>
-          <a:p>
-            <a:pPr algn="ctr" indent="0" marL="0">
-              <a:buNone/>
-            </a:pPr>
-            <a:r>
-              <a:rPr lang="en-US" sz="1600" b="1" dirty="0">
-                <a:solidFill>
-                  <a:srgbClr val="0D9488"/>
-                </a:solidFill>
-                <a:latin typeface="Trebuchet MS" pitchFamily="34" charset="0"/>
-                <a:ea typeface="Trebuchet MS" pitchFamily="34" charset="-122"/>
-                <a:cs typeface="Trebuchet MS" pitchFamily="34" charset="-120"/>
-              </a:rPr>
-              <a:t>·</a:t>
-            </a:r>
-            <a:endParaRPr lang="en-US" sz="1600" dirty="0"/>
-          </a:p>
-        </p:txBody>
-      </p:sp>
-      <p:sp>
-        <p:nvSpPr>
-          <p:cNvPr id="34" name="Shape 32"/>
-          <p:cNvSpPr/>
-          <p:nvPr/>
-        </p:nvSpPr>
-        <p:spPr>
-          <a:xfrm>
-            <a:off x="6428232" y="3364992"/>
-            <a:ext cx="1645920" cy="475488"/>
-          </a:xfrm>
-          <a:prstGeom prst="rect">
-            <a:avLst>
-              <a:gd name="adj" fmla="val 9615"/>
-            </a:avLst>
-          </a:prstGeom>
-          <a:solidFill>
-            <a:srgbClr val="FFFFFF"/>
-          </a:solidFill>
-          <a:ln w="12700">
-            <a:solidFill>
-              <a:srgbClr val="0D9488"/>
-            </a:solidFill>
-            <a:prstDash val="solid"/>
-          </a:ln>
-        </p:spPr>
-      </p:sp>
-      <p:sp>
-        <p:nvSpPr>
-          <p:cNvPr id="35" name="Text 33"/>
-          <p:cNvSpPr/>
-          <p:nvPr/>
-        </p:nvSpPr>
-        <p:spPr>
-          <a:xfrm>
-            <a:off x="6428232" y="3364992"/>
-            <a:ext cx="1645920" cy="475488"/>
-          </a:xfrm>
-          <a:prstGeom prst="rect">
-            <a:avLst/>
-          </a:prstGeom>
-          <a:noFill/>
-          <a:ln/>
-        </p:spPr>
-        <p:txBody>
-          <a:bodyPr wrap="square" lIns="0" tIns="0" rIns="0" bIns="0" rtlCol="0" anchor="ctr"/>
-          <a:lstStyle/>
-          <a:p>
-            <a:pPr algn="ctr" indent="0" marL="0">
-              <a:buNone/>
-            </a:pPr>
-            <a:r>
-              <a:rPr lang="en-US" sz="1400" b="1" dirty="0">
-                <a:solidFill>
-                  <a:srgbClr val="0D9488"/>
-                </a:solidFill>
-                <a:latin typeface="Trebuchet MS" pitchFamily="34" charset="0"/>
-                <a:ea typeface="Trebuchet MS" pitchFamily="34" charset="-122"/>
-                <a:cs typeface="Trebuchet MS" pitchFamily="34" charset="-120"/>
-              </a:rPr>
-              <a:t>ing</a:t>
-            </a:r>
-            <a:endParaRPr lang="en-US" sz="1400" dirty="0"/>
-          </a:p>
-        </p:txBody>
-      </p:sp>
-      <p:sp>
-        <p:nvSpPr>
-          <p:cNvPr id="36" name="Shape 34"/>
-          <p:cNvSpPr/>
-          <p:nvPr/>
-        </p:nvSpPr>
-        <p:spPr>
-          <a:xfrm>
-            <a:off x="365760" y="4096512"/>
-            <a:ext cx="1371600" cy="804672"/>
+              <a:t>Phonemes</a:t>
+            </a:r>
+            <a:endParaRPr lang="en-US" sz="1100" dirty="0"/>
+          </a:p>
+        </p:txBody>
+      </p:sp>
+      <p:sp>
+        <p:nvSpPr>
+          <p:cNvPr id="32" name="Shape 30"/>
+          <p:cNvSpPr/>
+          <p:nvPr/>
+        </p:nvSpPr>
+        <p:spPr>
+          <a:xfrm>
+            <a:off x="1874520" y="4096512"/>
+            <a:ext cx="6903720" cy="804672"/>
           </a:xfrm>
           <a:prstGeom prst="rect">
             <a:avLst>
@@ -9573,85 +9310,19 @@
             </a:avLst>
           </a:prstGeom>
           <a:solidFill>
-            <a:srgbClr val="E2E8F0"/>
+            <a:srgbClr val="F8FAFC"/>
           </a:solidFill>
           <a:ln w="12700">
             <a:solidFill>
               <a:srgbClr val="E2E8F0"/>
             </a:solidFill>
-            <a:prstDash val="solid"/>
-          </a:ln>
-        </p:spPr>
-      </p:sp>
-      <p:sp>
-        <p:nvSpPr>
-          <p:cNvPr id="37" name="Text 35"/>
-          <p:cNvSpPr/>
-          <p:nvPr/>
-        </p:nvSpPr>
-        <p:spPr>
-          <a:xfrm>
-            <a:off x="365760" y="4096512"/>
-            <a:ext cx="1371600" cy="804672"/>
-          </a:xfrm>
-          <a:prstGeom prst="rect">
-            <a:avLst/>
-          </a:prstGeom>
-          <a:noFill/>
-          <a:ln/>
-        </p:spPr>
-        <p:txBody>
-          <a:bodyPr wrap="square" lIns="0" tIns="0" rIns="0" bIns="0" rtlCol="0" anchor="ctr"/>
-          <a:lstStyle/>
-          <a:p>
-            <a:pPr algn="ctr" indent="0" marL="0">
-              <a:buNone/>
-            </a:pPr>
-            <a:r>
-              <a:rPr lang="en-US" sz="1100" b="1" dirty="0">
-                <a:solidFill>
-                  <a:srgbClr val="475569"/>
-                </a:solidFill>
-                <a:latin typeface="Trebuchet MS" pitchFamily="34" charset="0"/>
-                <a:ea typeface="Trebuchet MS" pitchFamily="34" charset="-122"/>
-                <a:cs typeface="Trebuchet MS" pitchFamily="34" charset="-120"/>
-              </a:rPr>
-              <a:t>Phonemes</a:t>
-            </a:r>
-            <a:endParaRPr lang="en-US" sz="1100" dirty="0"/>
-          </a:p>
-        </p:txBody>
-      </p:sp>
-      <p:sp>
-        <p:nvSpPr>
-          <p:cNvPr id="38" name="Shape 36"/>
-          <p:cNvSpPr/>
-          <p:nvPr/>
-        </p:nvSpPr>
-        <p:spPr>
-          <a:xfrm>
-            <a:off x="1874520" y="4096512"/>
-            <a:ext cx="6903720" cy="804672"/>
-          </a:xfrm>
-          <a:prstGeom prst="rect">
-            <a:avLst>
-              <a:gd name="adj" fmla="val 6818"/>
-            </a:avLst>
-          </a:prstGeom>
-          <a:solidFill>
-            <a:srgbClr val="F8FAFC"/>
-          </a:solidFill>
-          <a:ln w="12700">
-            <a:solidFill>
-              <a:srgbClr val="E2E8F0"/>
-            </a:solidFill>
             <a:prstDash val="dash"/>
           </a:ln>
         </p:spPr>
       </p:sp>
       <p:sp>
         <p:nvSpPr>
-          <p:cNvPr id="39" name="Text 37"/>
+          <p:cNvPr id="33" name="Text 31"/>
           <p:cNvSpPr/>
           <p:nvPr/>
         </p:nvSpPr>
@@ -10113,7 +9784,7 @@
                 <a:ea typeface="Trebuchet MS" pitchFamily="34" charset="-122"/>
                 <a:cs typeface="Trebuchet MS" pitchFamily="34" charset="-120"/>
               </a:rPr>
-              <a:t>refilling</a:t>
+              <a:t>refill</a:t>
             </a:r>
             <a:endParaRPr lang="en-US" sz="2800" dirty="0"/>
           </a:p>
@@ -10193,7 +9864,7 @@
         </p:nvSpPr>
         <p:spPr>
           <a:xfrm>
-            <a:off x="2221992" y="2258568"/>
+            <a:off x="2938272" y="2258568"/>
             <a:ext cx="1828800" cy="292608"/>
           </a:xfrm>
           <a:prstGeom prst="rect">
@@ -10227,7 +9898,7 @@
         </p:nvSpPr>
         <p:spPr>
           <a:xfrm>
-            <a:off x="2221992" y="2258568"/>
+            <a:off x="2938272" y="2258568"/>
             <a:ext cx="1828800" cy="292608"/>
           </a:xfrm>
           <a:prstGeom prst="rect">
@@ -10266,7 +9937,7 @@
         </p:nvSpPr>
         <p:spPr>
           <a:xfrm>
-            <a:off x="2221992" y="2569464"/>
+            <a:off x="2938272" y="2569464"/>
             <a:ext cx="1828800" cy="201168"/>
           </a:xfrm>
           <a:prstGeom prst="rect">
@@ -10305,7 +9976,7 @@
         </p:nvSpPr>
         <p:spPr>
           <a:xfrm>
-            <a:off x="4370832" y="2258568"/>
+            <a:off x="5803392" y="2258568"/>
             <a:ext cx="1828800" cy="292608"/>
           </a:xfrm>
           <a:prstGeom prst="rect">
@@ -10339,7 +10010,7 @@
         </p:nvSpPr>
         <p:spPr>
           <a:xfrm>
-            <a:off x="4370832" y="2258568"/>
+            <a:off x="5803392" y="2258568"/>
             <a:ext cx="1828800" cy="292608"/>
           </a:xfrm>
           <a:prstGeom prst="rect">
@@ -10378,7 +10049,7 @@
         </p:nvSpPr>
         <p:spPr>
           <a:xfrm>
-            <a:off x="4370832" y="2569464"/>
+            <a:off x="5803392" y="2569464"/>
             <a:ext cx="1828800" cy="201168"/>
           </a:xfrm>
           <a:prstGeom prst="rect">
@@ -10417,30 +10088,23 @@
         </p:nvSpPr>
         <p:spPr>
           <a:xfrm>
-            <a:off x="6519672" y="2258568"/>
-            <a:ext cx="1828800" cy="292608"/>
+            <a:off x="365760" y="3273552"/>
+            <a:ext cx="1371600" cy="658368"/>
           </a:xfrm>
           <a:prstGeom prst="rect">
             <a:avLst>
-              <a:gd name="adj" fmla="val 25000"/>
+              <a:gd name="adj" fmla="val 8333"/>
             </a:avLst>
           </a:prstGeom>
           <a:solidFill>
-            <a:srgbClr val="FCE7F3"/>
-          </a:solidFill>
-          <a:ln w="19050">
-            <a:solidFill>
-              <a:srgbClr val="DB2777"/>
-            </a:solidFill>
-            <a:prstDash val="solid"/>
-          </a:ln>
-          <a:effectLst>
-            <a:outerShdw sx="100000" sy="100000" kx="0" ky="0" algn="bl" rotWithShape="0" blurRad="101600" dist="38100" dir="8100000">
-              <a:srgbClr val="000000">
-                <a:alpha val="12000"/>
-              </a:srgbClr>
-            </a:outerShdw>
-          </a:effectLst>
+            <a:srgbClr val="E2E8F0"/>
+          </a:solidFill>
+          <a:ln w="12700">
+            <a:solidFill>
+              <a:srgbClr val="E2E8F0"/>
+            </a:solidFill>
+            <a:prstDash val="solid"/>
+          </a:ln>
         </p:spPr>
       </p:sp>
       <p:sp>
@@ -10451,8 +10115,8 @@
         </p:nvSpPr>
         <p:spPr>
           <a:xfrm>
-            <a:off x="6519672" y="2258568"/>
-            <a:ext cx="1828800" cy="292608"/>
+            <a:off x="365760" y="3273552"/>
+            <a:ext cx="1371600" cy="658368"/>
           </a:xfrm>
           <a:prstGeom prst="rect">
             <a:avLst/>
@@ -10468,69 +10132,30 @@
               <a:buNone/>
             </a:pPr>
             <a:r>
-              <a:rPr lang="en-US" sz="1300" b="1" dirty="0">
-                <a:solidFill>
-                  <a:srgbClr val="9D174D"/>
+              <a:rPr lang="en-US" sz="1100" b="1" dirty="0">
+                <a:solidFill>
+                  <a:srgbClr val="475569"/>
                 </a:solidFill>
                 <a:latin typeface="Trebuchet MS" pitchFamily="34" charset="0"/>
                 <a:ea typeface="Trebuchet MS" pitchFamily="34" charset="-122"/>
                 <a:cs typeface="Trebuchet MS" pitchFamily="34" charset="-120"/>
               </a:rPr>
-              <a:t>ing</a:t>
-            </a:r>
-            <a:endParaRPr lang="en-US" sz="1300" dirty="0"/>
-          </a:p>
-        </p:txBody>
-      </p:sp>
-      <p:sp>
-        <p:nvSpPr>
-          <p:cNvPr id="24" name="Text 22"/>
-          <p:cNvSpPr/>
-          <p:nvPr/>
-        </p:nvSpPr>
-        <p:spPr>
-          <a:xfrm>
-            <a:off x="6519672" y="2569464"/>
-            <a:ext cx="1828800" cy="201168"/>
-          </a:xfrm>
-          <a:prstGeom prst="rect">
-            <a:avLst/>
-          </a:prstGeom>
-          <a:noFill/>
-          <a:ln/>
-        </p:spPr>
-        <p:txBody>
-          <a:bodyPr wrap="square" lIns="0" tIns="0" rIns="0" bIns="0" rtlCol="0" anchor="t"/>
-          <a:lstStyle/>
-          <a:p>
-            <a:pPr algn="ctr" indent="0" marL="0">
-              <a:buNone/>
-            </a:pPr>
-            <a:r>
-              <a:rPr lang="en-US" sz="850" dirty="0">
-                <a:solidFill>
-                  <a:srgbClr val="475569"/>
-                </a:solidFill>
-                <a:latin typeface="Calibri" pitchFamily="34" charset="0"/>
-                <a:ea typeface="Calibri" pitchFamily="34" charset="-122"/>
-                <a:cs typeface="Calibri" pitchFamily="34" charset="-120"/>
-              </a:rPr>
-              <a:t>ongoing action</a:t>
-            </a:r>
-            <a:endParaRPr lang="en-US" sz="850" dirty="0"/>
-          </a:p>
-        </p:txBody>
-      </p:sp>
-      <p:sp>
-        <p:nvSpPr>
-          <p:cNvPr id="25" name="Shape 23"/>
-          <p:cNvSpPr/>
-          <p:nvPr/>
-        </p:nvSpPr>
-        <p:spPr>
-          <a:xfrm>
-            <a:off x="365760" y="3273552"/>
-            <a:ext cx="1371600" cy="658368"/>
+              <a:t>Syllables</a:t>
+            </a:r>
+            <a:endParaRPr lang="en-US" sz="1100" dirty="0"/>
+          </a:p>
+        </p:txBody>
+      </p:sp>
+      <p:sp>
+        <p:nvSpPr>
+          <p:cNvPr id="24" name="Shape 22"/>
+          <p:cNvSpPr/>
+          <p:nvPr/>
+        </p:nvSpPr>
+        <p:spPr>
+          <a:xfrm>
+            <a:off x="1874520" y="3273552"/>
+            <a:ext cx="6903720" cy="658368"/>
           </a:xfrm>
           <a:prstGeom prst="rect">
             <a:avLst>
@@ -10538,11 +10163,38 @@
             </a:avLst>
           </a:prstGeom>
           <a:solidFill>
-            <a:srgbClr val="E2E8F0"/>
-          </a:solidFill>
-          <a:ln w="12700">
-            <a:solidFill>
-              <a:srgbClr val="E2E8F0"/>
+            <a:srgbClr val="CCFBF1"/>
+          </a:solidFill>
+          <a:ln w="12700">
+            <a:solidFill>
+              <a:srgbClr val="0D9488"/>
+            </a:solidFill>
+            <a:prstDash val="solid"/>
+          </a:ln>
+        </p:spPr>
+      </p:sp>
+      <p:sp>
+        <p:nvSpPr>
+          <p:cNvPr id="25" name="Shape 23"/>
+          <p:cNvSpPr/>
+          <p:nvPr/>
+        </p:nvSpPr>
+        <p:spPr>
+          <a:xfrm>
+            <a:off x="2999232" y="3364992"/>
+            <a:ext cx="1645920" cy="475488"/>
+          </a:xfrm>
+          <a:prstGeom prst="rect">
+            <a:avLst>
+              <a:gd name="adj" fmla="val 9615"/>
+            </a:avLst>
+          </a:prstGeom>
+          <a:solidFill>
+            <a:srgbClr val="FFFFFF"/>
+          </a:solidFill>
+          <a:ln w="12700">
+            <a:solidFill>
+              <a:srgbClr val="0D9488"/>
             </a:solidFill>
             <a:prstDash val="solid"/>
           </a:ln>
@@ -10556,8 +10208,8 @@
         </p:nvSpPr>
         <p:spPr>
           <a:xfrm>
-            <a:off x="365760" y="3273552"/>
-            <a:ext cx="1371600" cy="658368"/>
+            <a:off x="2999232" y="3364992"/>
+            <a:ext cx="1645920" cy="475488"/>
           </a:xfrm>
           <a:prstGeom prst="rect">
             <a:avLst/>
@@ -10573,15 +10225,186 @@
               <a:buNone/>
             </a:pPr>
             <a:r>
-              <a:rPr lang="en-US" sz="1100" b="1" dirty="0">
-                <a:solidFill>
-                  <a:srgbClr val="475569"/>
+              <a:rPr lang="en-US" sz="1400" b="1" dirty="0">
+                <a:solidFill>
+                  <a:srgbClr val="0D9488"/>
                 </a:solidFill>
                 <a:latin typeface="Trebuchet MS" pitchFamily="34" charset="0"/>
                 <a:ea typeface="Trebuchet MS" pitchFamily="34" charset="-122"/>
                 <a:cs typeface="Trebuchet MS" pitchFamily="34" charset="-120"/>
               </a:rPr>
-              <a:t>Syllables</a:t>
+              <a:t>re</a:t>
+            </a:r>
+            <a:endParaRPr lang="en-US" sz="1400" dirty="0"/>
+          </a:p>
+        </p:txBody>
+      </p:sp>
+      <p:sp>
+        <p:nvSpPr>
+          <p:cNvPr id="27" name="Text 25"/>
+          <p:cNvSpPr/>
+          <p:nvPr/>
+        </p:nvSpPr>
+        <p:spPr>
+          <a:xfrm>
+            <a:off x="4645152" y="3364992"/>
+            <a:ext cx="1097280" cy="475488"/>
+          </a:xfrm>
+          <a:prstGeom prst="rect">
+            <a:avLst/>
+          </a:prstGeom>
+          <a:noFill/>
+          <a:ln/>
+        </p:spPr>
+        <p:txBody>
+          <a:bodyPr wrap="square" lIns="0" tIns="0" rIns="0" bIns="0" rtlCol="0" anchor="ctr"/>
+          <a:lstStyle/>
+          <a:p>
+            <a:pPr algn="ctr" indent="0" marL="0">
+              <a:buNone/>
+            </a:pPr>
+            <a:r>
+              <a:rPr lang="en-US" sz="1600" b="1" dirty="0">
+                <a:solidFill>
+                  <a:srgbClr val="0D9488"/>
+                </a:solidFill>
+                <a:latin typeface="Trebuchet MS" pitchFamily="34" charset="0"/>
+                <a:ea typeface="Trebuchet MS" pitchFamily="34" charset="-122"/>
+                <a:cs typeface="Trebuchet MS" pitchFamily="34" charset="-120"/>
+              </a:rPr>
+              <a:t>·</a:t>
+            </a:r>
+            <a:endParaRPr lang="en-US" sz="1600" dirty="0"/>
+          </a:p>
+        </p:txBody>
+      </p:sp>
+      <p:sp>
+        <p:nvSpPr>
+          <p:cNvPr id="28" name="Shape 26"/>
+          <p:cNvSpPr/>
+          <p:nvPr/>
+        </p:nvSpPr>
+        <p:spPr>
+          <a:xfrm>
+            <a:off x="5742432" y="3364992"/>
+            <a:ext cx="1645920" cy="475488"/>
+          </a:xfrm>
+          <a:prstGeom prst="rect">
+            <a:avLst>
+              <a:gd name="adj" fmla="val 9615"/>
+            </a:avLst>
+          </a:prstGeom>
+          <a:solidFill>
+            <a:srgbClr val="FFFFFF"/>
+          </a:solidFill>
+          <a:ln w="12700">
+            <a:solidFill>
+              <a:srgbClr val="0D9488"/>
+            </a:solidFill>
+            <a:prstDash val="solid"/>
+          </a:ln>
+        </p:spPr>
+      </p:sp>
+      <p:sp>
+        <p:nvSpPr>
+          <p:cNvPr id="29" name="Text 27"/>
+          <p:cNvSpPr/>
+          <p:nvPr/>
+        </p:nvSpPr>
+        <p:spPr>
+          <a:xfrm>
+            <a:off x="5742432" y="3364992"/>
+            <a:ext cx="1645920" cy="475488"/>
+          </a:xfrm>
+          <a:prstGeom prst="rect">
+            <a:avLst/>
+          </a:prstGeom>
+          <a:noFill/>
+          <a:ln/>
+        </p:spPr>
+        <p:txBody>
+          <a:bodyPr wrap="square" lIns="0" tIns="0" rIns="0" bIns="0" rtlCol="0" anchor="ctr"/>
+          <a:lstStyle/>
+          <a:p>
+            <a:pPr algn="ctr" indent="0" marL="0">
+              <a:buNone/>
+            </a:pPr>
+            <a:r>
+              <a:rPr lang="en-US" sz="1400" b="1" dirty="0">
+                <a:solidFill>
+                  <a:srgbClr val="0D9488"/>
+                </a:solidFill>
+                <a:latin typeface="Trebuchet MS" pitchFamily="34" charset="0"/>
+                <a:ea typeface="Trebuchet MS" pitchFamily="34" charset="-122"/>
+                <a:cs typeface="Trebuchet MS" pitchFamily="34" charset="-120"/>
+              </a:rPr>
+              <a:t>fill</a:t>
+            </a:r>
+            <a:endParaRPr lang="en-US" sz="1400" dirty="0"/>
+          </a:p>
+        </p:txBody>
+      </p:sp>
+      <p:sp>
+        <p:nvSpPr>
+          <p:cNvPr id="30" name="Shape 28"/>
+          <p:cNvSpPr/>
+          <p:nvPr/>
+        </p:nvSpPr>
+        <p:spPr>
+          <a:xfrm>
+            <a:off x="365760" y="4096512"/>
+            <a:ext cx="1371600" cy="804672"/>
+          </a:xfrm>
+          <a:prstGeom prst="rect">
+            <a:avLst>
+              <a:gd name="adj" fmla="val 6818"/>
+            </a:avLst>
+          </a:prstGeom>
+          <a:solidFill>
+            <a:srgbClr val="E2E8F0"/>
+          </a:solidFill>
+          <a:ln w="12700">
+            <a:solidFill>
+              <a:srgbClr val="E2E8F0"/>
+            </a:solidFill>
+            <a:prstDash val="solid"/>
+          </a:ln>
+        </p:spPr>
+      </p:sp>
+      <p:sp>
+        <p:nvSpPr>
+          <p:cNvPr id="31" name="Text 29"/>
+          <p:cNvSpPr/>
+          <p:nvPr/>
+        </p:nvSpPr>
+        <p:spPr>
+          <a:xfrm>
+            <a:off x="365760" y="4096512"/>
+            <a:ext cx="1371600" cy="804672"/>
+          </a:xfrm>
+          <a:prstGeom prst="rect">
+            <a:avLst/>
+          </a:prstGeom>
+          <a:noFill/>
+          <a:ln/>
+        </p:spPr>
+        <p:txBody>
+          <a:bodyPr wrap="square" lIns="0" tIns="0" rIns="0" bIns="0" rtlCol="0" anchor="ctr"/>
+          <a:lstStyle/>
+          <a:p>
+            <a:pPr algn="ctr" indent="0" marL="0">
+              <a:buNone/>
+            </a:pPr>
+            <a:r>
+              <a:rPr lang="en-US" sz="1100" b="1" dirty="0">
+                <a:solidFill>
+                  <a:srgbClr val="475569"/>
+                </a:solidFill>
+                <a:latin typeface="Trebuchet MS" pitchFamily="34" charset="0"/>
+                <a:ea typeface="Trebuchet MS" pitchFamily="34" charset="-122"/>
+                <a:cs typeface="Trebuchet MS" pitchFamily="34" charset="-120"/>
+              </a:rPr>
+              <a:t>Phonemes</a:t>
             </a:r>
             <a:endParaRPr lang="en-US" sz="1100" dirty="0"/>
           </a:p>
@@ -10589,13 +10412,13 @@
       </p:sp>
       <p:sp>
         <p:nvSpPr>
-          <p:cNvPr id="27" name="Shape 25"/>
-          <p:cNvSpPr/>
-          <p:nvPr/>
-        </p:nvSpPr>
-        <p:spPr>
-          <a:xfrm>
-            <a:off x="1874520" y="3273552"/>
+          <p:cNvPr id="32" name="Shape 30"/>
+          <p:cNvSpPr/>
+          <p:nvPr/>
+        </p:nvSpPr>
+        <p:spPr>
+          <a:xfrm>
+            <a:off x="1874520" y="4096512"/>
             <a:ext cx="6903720" cy="658368"/>
           </a:xfrm>
           <a:prstGeom prst="rect">
@@ -10604,30 +10427,30 @@
             </a:avLst>
           </a:prstGeom>
           <a:solidFill>
-            <a:srgbClr val="CCFBF1"/>
-          </a:solidFill>
-          <a:ln w="12700">
-            <a:solidFill>
-              <a:srgbClr val="0D9488"/>
-            </a:solidFill>
-            <a:prstDash val="solid"/>
-          </a:ln>
-        </p:spPr>
-      </p:sp>
-      <p:sp>
-        <p:nvSpPr>
-          <p:cNvPr id="28" name="Shape 26"/>
-          <p:cNvSpPr/>
-          <p:nvPr/>
-        </p:nvSpPr>
-        <p:spPr>
-          <a:xfrm>
-            <a:off x="2313432" y="3364992"/>
-            <a:ext cx="1645920" cy="475488"/>
+            <a:srgbClr val="FCE7F3"/>
+          </a:solidFill>
+          <a:ln w="12700">
+            <a:solidFill>
+              <a:srgbClr val="DB2777"/>
+            </a:solidFill>
+            <a:prstDash val="solid"/>
+          </a:ln>
+        </p:spPr>
+      </p:sp>
+      <p:sp>
+        <p:nvSpPr>
+          <p:cNvPr id="33" name="Shape 31"/>
+          <p:cNvSpPr/>
+          <p:nvPr/>
+        </p:nvSpPr>
+        <p:spPr>
+          <a:xfrm>
+            <a:off x="2427732" y="4169664"/>
+            <a:ext cx="685800" cy="475488"/>
           </a:xfrm>
           <a:prstGeom prst="rect">
             <a:avLst>
-              <a:gd name="adj" fmla="val 9615"/>
+              <a:gd name="adj" fmla="val 7692"/>
             </a:avLst>
           </a:prstGeom>
           <a:solidFill>
@@ -10635,22 +10458,22 @@
           </a:solidFill>
           <a:ln w="12700">
             <a:solidFill>
-              <a:srgbClr val="0D9488"/>
-            </a:solidFill>
-            <a:prstDash val="solid"/>
-          </a:ln>
-        </p:spPr>
-      </p:sp>
-      <p:sp>
-        <p:nvSpPr>
-          <p:cNvPr id="29" name="Text 27"/>
-          <p:cNvSpPr/>
-          <p:nvPr/>
-        </p:nvSpPr>
-        <p:spPr>
-          <a:xfrm>
-            <a:off x="2313432" y="3364992"/>
-            <a:ext cx="1645920" cy="475488"/>
+              <a:srgbClr val="DB2777"/>
+            </a:solidFill>
+            <a:prstDash val="solid"/>
+          </a:ln>
+        </p:spPr>
+      </p:sp>
+      <p:sp>
+        <p:nvSpPr>
+          <p:cNvPr id="34" name="Text 32"/>
+          <p:cNvSpPr/>
+          <p:nvPr/>
+        </p:nvSpPr>
+        <p:spPr>
+          <a:xfrm>
+            <a:off x="2427732" y="4169664"/>
+            <a:ext cx="685800" cy="475488"/>
           </a:xfrm>
           <a:prstGeom prst="rect">
             <a:avLst/>
@@ -10666,30 +10489,57 @@
               <a:buNone/>
             </a:pPr>
             <a:r>
-              <a:rPr lang="en-US" sz="1400" b="1" dirty="0">
-                <a:solidFill>
-                  <a:srgbClr val="0D9488"/>
+              <a:rPr lang="en-US" sz="900" b="1" dirty="0">
+                <a:solidFill>
+                  <a:srgbClr val="9D174D"/>
                 </a:solidFill>
                 <a:latin typeface="Trebuchet MS" pitchFamily="34" charset="0"/>
                 <a:ea typeface="Trebuchet MS" pitchFamily="34" charset="-122"/>
                 <a:cs typeface="Trebuchet MS" pitchFamily="34" charset="-120"/>
               </a:rPr>
-              <a:t>re</a:t>
-            </a:r>
-            <a:endParaRPr lang="en-US" sz="1400" dirty="0"/>
-          </a:p>
-        </p:txBody>
-      </p:sp>
-      <p:sp>
-        <p:nvSpPr>
-          <p:cNvPr id="30" name="Text 28"/>
-          <p:cNvSpPr/>
-          <p:nvPr/>
-        </p:nvSpPr>
-        <p:spPr>
-          <a:xfrm>
-            <a:off x="3959352" y="3364992"/>
-            <a:ext cx="411480" cy="475488"/>
+              <a:t>r</a:t>
+            </a:r>
+            <a:endParaRPr lang="en-US" sz="900" dirty="0"/>
+          </a:p>
+        </p:txBody>
+      </p:sp>
+      <p:sp>
+        <p:nvSpPr>
+          <p:cNvPr id="35" name="Shape 33"/>
+          <p:cNvSpPr/>
+          <p:nvPr/>
+        </p:nvSpPr>
+        <p:spPr>
+          <a:xfrm>
+            <a:off x="3639312" y="4169664"/>
+            <a:ext cx="685800" cy="475488"/>
+          </a:xfrm>
+          <a:prstGeom prst="rect">
+            <a:avLst>
+              <a:gd name="adj" fmla="val 7692"/>
+            </a:avLst>
+          </a:prstGeom>
+          <a:solidFill>
+            <a:srgbClr val="FFFFFF"/>
+          </a:solidFill>
+          <a:ln w="12700">
+            <a:solidFill>
+              <a:srgbClr val="DB2777"/>
+            </a:solidFill>
+            <a:prstDash val="solid"/>
+          </a:ln>
+        </p:spPr>
+      </p:sp>
+      <p:sp>
+        <p:nvSpPr>
+          <p:cNvPr id="36" name="Text 34"/>
+          <p:cNvSpPr/>
+          <p:nvPr/>
+        </p:nvSpPr>
+        <p:spPr>
+          <a:xfrm>
+            <a:off x="3639312" y="4169664"/>
+            <a:ext cx="685800" cy="475488"/>
           </a:xfrm>
           <a:prstGeom prst="rect">
             <a:avLst/>
@@ -10705,34 +10555,34 @@
               <a:buNone/>
             </a:pPr>
             <a:r>
-              <a:rPr lang="en-US" sz="1600" b="1" dirty="0">
-                <a:solidFill>
-                  <a:srgbClr val="0D9488"/>
+              <a:rPr lang="en-US" sz="900" b="1" dirty="0">
+                <a:solidFill>
+                  <a:srgbClr val="9D174D"/>
                 </a:solidFill>
                 <a:latin typeface="Trebuchet MS" pitchFamily="34" charset="0"/>
                 <a:ea typeface="Trebuchet MS" pitchFamily="34" charset="-122"/>
                 <a:cs typeface="Trebuchet MS" pitchFamily="34" charset="-120"/>
               </a:rPr>
-              <a:t>·</a:t>
-            </a:r>
-            <a:endParaRPr lang="en-US" sz="1600" dirty="0"/>
-          </a:p>
-        </p:txBody>
-      </p:sp>
-      <p:sp>
-        <p:nvSpPr>
-          <p:cNvPr id="31" name="Shape 29"/>
-          <p:cNvSpPr/>
-          <p:nvPr/>
-        </p:nvSpPr>
-        <p:spPr>
-          <a:xfrm>
-            <a:off x="4370832" y="3364992"/>
-            <a:ext cx="1645920" cy="475488"/>
+              <a:t>e</a:t>
+            </a:r>
+            <a:endParaRPr lang="en-US" sz="900" dirty="0"/>
+          </a:p>
+        </p:txBody>
+      </p:sp>
+      <p:sp>
+        <p:nvSpPr>
+          <p:cNvPr id="37" name="Shape 35"/>
+          <p:cNvSpPr/>
+          <p:nvPr/>
+        </p:nvSpPr>
+        <p:spPr>
+          <a:xfrm>
+            <a:off x="4850892" y="4169664"/>
+            <a:ext cx="685800" cy="475488"/>
           </a:xfrm>
           <a:prstGeom prst="rect">
             <a:avLst>
-              <a:gd name="adj" fmla="val 9615"/>
+              <a:gd name="adj" fmla="val 7692"/>
             </a:avLst>
           </a:prstGeom>
           <a:solidFill>
@@ -10740,22 +10590,22 @@
           </a:solidFill>
           <a:ln w="12700">
             <a:solidFill>
-              <a:srgbClr val="0D9488"/>
-            </a:solidFill>
-            <a:prstDash val="solid"/>
-          </a:ln>
-        </p:spPr>
-      </p:sp>
-      <p:sp>
-        <p:nvSpPr>
-          <p:cNvPr id="32" name="Text 30"/>
-          <p:cNvSpPr/>
-          <p:nvPr/>
-        </p:nvSpPr>
-        <p:spPr>
-          <a:xfrm>
-            <a:off x="4370832" y="3364992"/>
-            <a:ext cx="1645920" cy="475488"/>
+              <a:srgbClr val="DB2777"/>
+            </a:solidFill>
+            <a:prstDash val="solid"/>
+          </a:ln>
+        </p:spPr>
+      </p:sp>
+      <p:sp>
+        <p:nvSpPr>
+          <p:cNvPr id="38" name="Text 36"/>
+          <p:cNvSpPr/>
+          <p:nvPr/>
+        </p:nvSpPr>
+        <p:spPr>
+          <a:xfrm>
+            <a:off x="4850892" y="4169664"/>
+            <a:ext cx="685800" cy="475488"/>
           </a:xfrm>
           <a:prstGeom prst="rect">
             <a:avLst/>
@@ -10771,30 +10621,57 @@
               <a:buNone/>
             </a:pPr>
             <a:r>
-              <a:rPr lang="en-US" sz="1400" b="1" dirty="0">
-                <a:solidFill>
-                  <a:srgbClr val="0D9488"/>
+              <a:rPr lang="en-US" sz="900" b="1" dirty="0">
+                <a:solidFill>
+                  <a:srgbClr val="9D174D"/>
                 </a:solidFill>
                 <a:latin typeface="Trebuchet MS" pitchFamily="34" charset="0"/>
                 <a:ea typeface="Trebuchet MS" pitchFamily="34" charset="-122"/>
                 <a:cs typeface="Trebuchet MS" pitchFamily="34" charset="-120"/>
               </a:rPr>
-              <a:t>fill</a:t>
-            </a:r>
-            <a:endParaRPr lang="en-US" sz="1400" dirty="0"/>
-          </a:p>
-        </p:txBody>
-      </p:sp>
-      <p:sp>
-        <p:nvSpPr>
-          <p:cNvPr id="33" name="Text 31"/>
-          <p:cNvSpPr/>
-          <p:nvPr/>
-        </p:nvSpPr>
-        <p:spPr>
-          <a:xfrm>
-            <a:off x="6016752" y="3364992"/>
-            <a:ext cx="411480" cy="475488"/>
+              <a:t>f</a:t>
+            </a:r>
+            <a:endParaRPr lang="en-US" sz="900" dirty="0"/>
+          </a:p>
+        </p:txBody>
+      </p:sp>
+      <p:sp>
+        <p:nvSpPr>
+          <p:cNvPr id="39" name="Shape 37"/>
+          <p:cNvSpPr/>
+          <p:nvPr/>
+        </p:nvSpPr>
+        <p:spPr>
+          <a:xfrm>
+            <a:off x="6062472" y="4169664"/>
+            <a:ext cx="685800" cy="475488"/>
+          </a:xfrm>
+          <a:prstGeom prst="rect">
+            <a:avLst>
+              <a:gd name="adj" fmla="val 7692"/>
+            </a:avLst>
+          </a:prstGeom>
+          <a:solidFill>
+            <a:srgbClr val="FFFFFF"/>
+          </a:solidFill>
+          <a:ln w="12700">
+            <a:solidFill>
+              <a:srgbClr val="DB2777"/>
+            </a:solidFill>
+            <a:prstDash val="solid"/>
+          </a:ln>
+        </p:spPr>
+      </p:sp>
+      <p:sp>
+        <p:nvSpPr>
+          <p:cNvPr id="40" name="Text 38"/>
+          <p:cNvSpPr/>
+          <p:nvPr/>
+        </p:nvSpPr>
+        <p:spPr>
+          <a:xfrm>
+            <a:off x="6062472" y="4169664"/>
+            <a:ext cx="685800" cy="475488"/>
           </a:xfrm>
           <a:prstGeom prst="rect">
             <a:avLst/>
@@ -10810,34 +10687,34 @@
               <a:buNone/>
             </a:pPr>
             <a:r>
-              <a:rPr lang="en-US" sz="1600" b="1" dirty="0">
-                <a:solidFill>
-                  <a:srgbClr val="0D9488"/>
+              <a:rPr lang="en-US" sz="900" b="1" dirty="0">
+                <a:solidFill>
+                  <a:srgbClr val="9D174D"/>
                 </a:solidFill>
                 <a:latin typeface="Trebuchet MS" pitchFamily="34" charset="0"/>
                 <a:ea typeface="Trebuchet MS" pitchFamily="34" charset="-122"/>
                 <a:cs typeface="Trebuchet MS" pitchFamily="34" charset="-120"/>
               </a:rPr>
-              <a:t>·</a:t>
-            </a:r>
-            <a:endParaRPr lang="en-US" sz="1600" dirty="0"/>
-          </a:p>
-        </p:txBody>
-      </p:sp>
-      <p:sp>
-        <p:nvSpPr>
-          <p:cNvPr id="34" name="Shape 32"/>
-          <p:cNvSpPr/>
-          <p:nvPr/>
-        </p:nvSpPr>
-        <p:spPr>
-          <a:xfrm>
-            <a:off x="6428232" y="3364992"/>
-            <a:ext cx="1645920" cy="475488"/>
+              <a:t>i</a:t>
+            </a:r>
+            <a:endParaRPr lang="en-US" sz="900" dirty="0"/>
+          </a:p>
+        </p:txBody>
+      </p:sp>
+      <p:sp>
+        <p:nvSpPr>
+          <p:cNvPr id="41" name="Shape 39"/>
+          <p:cNvSpPr/>
+          <p:nvPr/>
+        </p:nvSpPr>
+        <p:spPr>
+          <a:xfrm>
+            <a:off x="7274052" y="4169664"/>
+            <a:ext cx="685800" cy="475488"/>
           </a:xfrm>
           <a:prstGeom prst="rect">
             <a:avLst>
-              <a:gd name="adj" fmla="val 9615"/>
+              <a:gd name="adj" fmla="val 7692"/>
             </a:avLst>
           </a:prstGeom>
           <a:solidFill>
@@ -10845,22 +10722,22 @@
           </a:solidFill>
           <a:ln w="12700">
             <a:solidFill>
-              <a:srgbClr val="0D9488"/>
-            </a:solidFill>
-            <a:prstDash val="solid"/>
-          </a:ln>
-        </p:spPr>
-      </p:sp>
-      <p:sp>
-        <p:nvSpPr>
-          <p:cNvPr id="35" name="Text 33"/>
-          <p:cNvSpPr/>
-          <p:nvPr/>
-        </p:nvSpPr>
-        <p:spPr>
-          <a:xfrm>
-            <a:off x="6428232" y="3364992"/>
-            <a:ext cx="1645920" cy="475488"/>
+              <a:srgbClr val="DB2777"/>
+            </a:solidFill>
+            <a:prstDash val="solid"/>
+          </a:ln>
+        </p:spPr>
+      </p:sp>
+      <p:sp>
+        <p:nvSpPr>
+          <p:cNvPr id="42" name="Text 40"/>
+          <p:cNvSpPr/>
+          <p:nvPr/>
+        </p:nvSpPr>
+        <p:spPr>
+          <a:xfrm>
+            <a:off x="7274052" y="4169664"/>
+            <a:ext cx="685800" cy="475488"/>
           </a:xfrm>
           <a:prstGeom prst="rect">
             <a:avLst/>
@@ -10876,570 +10753,15 @@
               <a:buNone/>
             </a:pPr>
             <a:r>
-              <a:rPr lang="en-US" sz="1400" b="1" dirty="0">
-                <a:solidFill>
-                  <a:srgbClr val="0D9488"/>
+              <a:rPr lang="en-US" sz="900" b="1" dirty="0">
+                <a:solidFill>
+                  <a:srgbClr val="9D174D"/>
                 </a:solidFill>
                 <a:latin typeface="Trebuchet MS" pitchFamily="34" charset="0"/>
                 <a:ea typeface="Trebuchet MS" pitchFamily="34" charset="-122"/>
                 <a:cs typeface="Trebuchet MS" pitchFamily="34" charset="-120"/>
               </a:rPr>
-              <a:t>ing</a:t>
-            </a:r>
-            <a:endParaRPr lang="en-US" sz="1400" dirty="0"/>
-          </a:p>
-        </p:txBody>
-      </p:sp>
-      <p:sp>
-        <p:nvSpPr>
-          <p:cNvPr id="36" name="Shape 34"/>
-          <p:cNvSpPr/>
-          <p:nvPr/>
-        </p:nvSpPr>
-        <p:spPr>
-          <a:xfrm>
-            <a:off x="365760" y="4096512"/>
-            <a:ext cx="1371600" cy="804672"/>
-          </a:xfrm>
-          <a:prstGeom prst="rect">
-            <a:avLst>
-              <a:gd name="adj" fmla="val 6818"/>
-            </a:avLst>
-          </a:prstGeom>
-          <a:solidFill>
-            <a:srgbClr val="E2E8F0"/>
-          </a:solidFill>
-          <a:ln w="12700">
-            <a:solidFill>
-              <a:srgbClr val="E2E8F0"/>
-            </a:solidFill>
-            <a:prstDash val="solid"/>
-          </a:ln>
-        </p:spPr>
-      </p:sp>
-      <p:sp>
-        <p:nvSpPr>
-          <p:cNvPr id="37" name="Text 35"/>
-          <p:cNvSpPr/>
-          <p:nvPr/>
-        </p:nvSpPr>
-        <p:spPr>
-          <a:xfrm>
-            <a:off x="365760" y="4096512"/>
-            <a:ext cx="1371600" cy="804672"/>
-          </a:xfrm>
-          <a:prstGeom prst="rect">
-            <a:avLst/>
-          </a:prstGeom>
-          <a:noFill/>
-          <a:ln/>
-        </p:spPr>
-        <p:txBody>
-          <a:bodyPr wrap="square" lIns="0" tIns="0" rIns="0" bIns="0" rtlCol="0" anchor="ctr"/>
-          <a:lstStyle/>
-          <a:p>
-            <a:pPr algn="ctr" indent="0" marL="0">
-              <a:buNone/>
-            </a:pPr>
-            <a:r>
-              <a:rPr lang="en-US" sz="1100" b="1" dirty="0">
-                <a:solidFill>
-                  <a:srgbClr val="475569"/>
-                </a:solidFill>
-                <a:latin typeface="Trebuchet MS" pitchFamily="34" charset="0"/>
-                <a:ea typeface="Trebuchet MS" pitchFamily="34" charset="-122"/>
-                <a:cs typeface="Trebuchet MS" pitchFamily="34" charset="-120"/>
-              </a:rPr>
-              <a:t>Phonemes</a:t>
-            </a:r>
-            <a:endParaRPr lang="en-US" sz="1100" dirty="0"/>
-          </a:p>
-        </p:txBody>
-      </p:sp>
-      <p:sp>
-        <p:nvSpPr>
-          <p:cNvPr id="38" name="Shape 36"/>
-          <p:cNvSpPr/>
-          <p:nvPr/>
-        </p:nvSpPr>
-        <p:spPr>
-          <a:xfrm>
-            <a:off x="1874520" y="4096512"/>
-            <a:ext cx="6903720" cy="658368"/>
-          </a:xfrm>
-          <a:prstGeom prst="rect">
-            <a:avLst>
-              <a:gd name="adj" fmla="val 8333"/>
-            </a:avLst>
-          </a:prstGeom>
-          <a:solidFill>
-            <a:srgbClr val="FCE7F3"/>
-          </a:solidFill>
-          <a:ln w="12700">
-            <a:solidFill>
-              <a:srgbClr val="DB2777"/>
-            </a:solidFill>
-            <a:prstDash val="solid"/>
-          </a:ln>
-        </p:spPr>
-      </p:sp>
-      <p:sp>
-        <p:nvSpPr>
-          <p:cNvPr id="39" name="Shape 37"/>
-          <p:cNvSpPr/>
-          <p:nvPr/>
-        </p:nvSpPr>
-        <p:spPr>
-          <a:xfrm>
-            <a:off x="2124837" y="4169664"/>
-            <a:ext cx="685800" cy="475488"/>
-          </a:xfrm>
-          <a:prstGeom prst="rect">
-            <a:avLst>
-              <a:gd name="adj" fmla="val 7692"/>
-            </a:avLst>
-          </a:prstGeom>
-          <a:solidFill>
-            <a:srgbClr val="FFFFFF"/>
-          </a:solidFill>
-          <a:ln w="12700">
-            <a:solidFill>
-              <a:srgbClr val="DB2777"/>
-            </a:solidFill>
-            <a:prstDash val="solid"/>
-          </a:ln>
-        </p:spPr>
-      </p:sp>
-      <p:sp>
-        <p:nvSpPr>
-          <p:cNvPr id="40" name="Text 38"/>
-          <p:cNvSpPr/>
-          <p:nvPr/>
-        </p:nvSpPr>
-        <p:spPr>
-          <a:xfrm>
-            <a:off x="2124837" y="4169664"/>
-            <a:ext cx="685800" cy="475488"/>
-          </a:xfrm>
-          <a:prstGeom prst="rect">
-            <a:avLst/>
-          </a:prstGeom>
-          <a:noFill/>
-          <a:ln/>
-        </p:spPr>
-        <p:txBody>
-          <a:bodyPr wrap="square" lIns="0" tIns="0" rIns="0" bIns="0" rtlCol="0" anchor="ctr"/>
-          <a:lstStyle/>
-          <a:p>
-            <a:pPr algn="ctr" indent="0" marL="0">
-              <a:buNone/>
-            </a:pPr>
-            <a:r>
-              <a:rPr lang="en-US" sz="900" b="1" dirty="0">
-                <a:solidFill>
-                  <a:srgbClr val="9D174D"/>
-                </a:solidFill>
-                <a:latin typeface="Trebuchet MS" pitchFamily="34" charset="0"/>
-                <a:ea typeface="Trebuchet MS" pitchFamily="34" charset="-122"/>
-                <a:cs typeface="Trebuchet MS" pitchFamily="34" charset="-120"/>
-              </a:rPr>
-              <a:t>r</a:t>
-            </a:r>
-            <a:endParaRPr lang="en-US" sz="900" dirty="0"/>
-          </a:p>
-        </p:txBody>
-      </p:sp>
-      <p:sp>
-        <p:nvSpPr>
-          <p:cNvPr id="41" name="Shape 39"/>
-          <p:cNvSpPr/>
-          <p:nvPr/>
-        </p:nvSpPr>
-        <p:spPr>
-          <a:xfrm>
-            <a:off x="3033522" y="4169664"/>
-            <a:ext cx="685800" cy="475488"/>
-          </a:xfrm>
-          <a:prstGeom prst="rect">
-            <a:avLst>
-              <a:gd name="adj" fmla="val 7692"/>
-            </a:avLst>
-          </a:prstGeom>
-          <a:solidFill>
-            <a:srgbClr val="FFFFFF"/>
-          </a:solidFill>
-          <a:ln w="12700">
-            <a:solidFill>
-              <a:srgbClr val="DB2777"/>
-            </a:solidFill>
-            <a:prstDash val="solid"/>
-          </a:ln>
-        </p:spPr>
-      </p:sp>
-      <p:sp>
-        <p:nvSpPr>
-          <p:cNvPr id="42" name="Text 40"/>
-          <p:cNvSpPr/>
-          <p:nvPr/>
-        </p:nvSpPr>
-        <p:spPr>
-          <a:xfrm>
-            <a:off x="3033522" y="4169664"/>
-            <a:ext cx="685800" cy="475488"/>
-          </a:xfrm>
-          <a:prstGeom prst="rect">
-            <a:avLst/>
-          </a:prstGeom>
-          <a:noFill/>
-          <a:ln/>
-        </p:spPr>
-        <p:txBody>
-          <a:bodyPr wrap="square" lIns="0" tIns="0" rIns="0" bIns="0" rtlCol="0" anchor="ctr"/>
-          <a:lstStyle/>
-          <a:p>
-            <a:pPr algn="ctr" indent="0" marL="0">
-              <a:buNone/>
-            </a:pPr>
-            <a:r>
-              <a:rPr lang="en-US" sz="900" b="1" dirty="0">
-                <a:solidFill>
-                  <a:srgbClr val="9D174D"/>
-                </a:solidFill>
-                <a:latin typeface="Trebuchet MS" pitchFamily="34" charset="0"/>
-                <a:ea typeface="Trebuchet MS" pitchFamily="34" charset="-122"/>
-                <a:cs typeface="Trebuchet MS" pitchFamily="34" charset="-120"/>
-              </a:rPr>
-              <a:t>e</a:t>
-            </a:r>
-            <a:endParaRPr lang="en-US" sz="900" dirty="0"/>
-          </a:p>
-        </p:txBody>
-      </p:sp>
-      <p:sp>
-        <p:nvSpPr>
-          <p:cNvPr id="43" name="Shape 41"/>
-          <p:cNvSpPr/>
-          <p:nvPr/>
-        </p:nvSpPr>
-        <p:spPr>
-          <a:xfrm>
-            <a:off x="3942207" y="4169664"/>
-            <a:ext cx="685800" cy="475488"/>
-          </a:xfrm>
-          <a:prstGeom prst="rect">
-            <a:avLst>
-              <a:gd name="adj" fmla="val 7692"/>
-            </a:avLst>
-          </a:prstGeom>
-          <a:solidFill>
-            <a:srgbClr val="FFFFFF"/>
-          </a:solidFill>
-          <a:ln w="12700">
-            <a:solidFill>
-              <a:srgbClr val="DB2777"/>
-            </a:solidFill>
-            <a:prstDash val="solid"/>
-          </a:ln>
-        </p:spPr>
-      </p:sp>
-      <p:sp>
-        <p:nvSpPr>
-          <p:cNvPr id="44" name="Text 42"/>
-          <p:cNvSpPr/>
-          <p:nvPr/>
-        </p:nvSpPr>
-        <p:spPr>
-          <a:xfrm>
-            <a:off x="3942207" y="4169664"/>
-            <a:ext cx="685800" cy="475488"/>
-          </a:xfrm>
-          <a:prstGeom prst="rect">
-            <a:avLst/>
-          </a:prstGeom>
-          <a:noFill/>
-          <a:ln/>
-        </p:spPr>
-        <p:txBody>
-          <a:bodyPr wrap="square" lIns="0" tIns="0" rIns="0" bIns="0" rtlCol="0" anchor="ctr"/>
-          <a:lstStyle/>
-          <a:p>
-            <a:pPr algn="ctr" indent="0" marL="0">
-              <a:buNone/>
-            </a:pPr>
-            <a:r>
-              <a:rPr lang="en-US" sz="900" b="1" dirty="0">
-                <a:solidFill>
-                  <a:srgbClr val="9D174D"/>
-                </a:solidFill>
-                <a:latin typeface="Trebuchet MS" pitchFamily="34" charset="0"/>
-                <a:ea typeface="Trebuchet MS" pitchFamily="34" charset="-122"/>
-                <a:cs typeface="Trebuchet MS" pitchFamily="34" charset="-120"/>
-              </a:rPr>
-              <a:t>f</a:t>
-            </a:r>
-            <a:endParaRPr lang="en-US" sz="900" dirty="0"/>
-          </a:p>
-        </p:txBody>
-      </p:sp>
-      <p:sp>
-        <p:nvSpPr>
-          <p:cNvPr id="45" name="Shape 43"/>
-          <p:cNvSpPr/>
-          <p:nvPr/>
-        </p:nvSpPr>
-        <p:spPr>
-          <a:xfrm>
-            <a:off x="4850892" y="4169664"/>
-            <a:ext cx="685800" cy="475488"/>
-          </a:xfrm>
-          <a:prstGeom prst="rect">
-            <a:avLst>
-              <a:gd name="adj" fmla="val 7692"/>
-            </a:avLst>
-          </a:prstGeom>
-          <a:solidFill>
-            <a:srgbClr val="FFFFFF"/>
-          </a:solidFill>
-          <a:ln w="12700">
-            <a:solidFill>
-              <a:srgbClr val="DB2777"/>
-            </a:solidFill>
-            <a:prstDash val="solid"/>
-          </a:ln>
-        </p:spPr>
-      </p:sp>
-      <p:sp>
-        <p:nvSpPr>
-          <p:cNvPr id="46" name="Text 44"/>
-          <p:cNvSpPr/>
-          <p:nvPr/>
-        </p:nvSpPr>
-        <p:spPr>
-          <a:xfrm>
-            <a:off x="4850892" y="4169664"/>
-            <a:ext cx="685800" cy="475488"/>
-          </a:xfrm>
-          <a:prstGeom prst="rect">
-            <a:avLst/>
-          </a:prstGeom>
-          <a:noFill/>
-          <a:ln/>
-        </p:spPr>
-        <p:txBody>
-          <a:bodyPr wrap="square" lIns="0" tIns="0" rIns="0" bIns="0" rtlCol="0" anchor="ctr"/>
-          <a:lstStyle/>
-          <a:p>
-            <a:pPr algn="ctr" indent="0" marL="0">
-              <a:buNone/>
-            </a:pPr>
-            <a:r>
-              <a:rPr lang="en-US" sz="900" b="1" dirty="0">
-                <a:solidFill>
-                  <a:srgbClr val="9D174D"/>
-                </a:solidFill>
-                <a:latin typeface="Trebuchet MS" pitchFamily="34" charset="0"/>
-                <a:ea typeface="Trebuchet MS" pitchFamily="34" charset="-122"/>
-                <a:cs typeface="Trebuchet MS" pitchFamily="34" charset="-120"/>
-              </a:rPr>
-              <a:t>i</a:t>
-            </a:r>
-            <a:endParaRPr lang="en-US" sz="900" dirty="0"/>
-          </a:p>
-        </p:txBody>
-      </p:sp>
-      <p:sp>
-        <p:nvSpPr>
-          <p:cNvPr id="47" name="Shape 45"/>
-          <p:cNvSpPr/>
-          <p:nvPr/>
-        </p:nvSpPr>
-        <p:spPr>
-          <a:xfrm>
-            <a:off x="5759577" y="4169664"/>
-            <a:ext cx="685800" cy="475488"/>
-          </a:xfrm>
-          <a:prstGeom prst="rect">
-            <a:avLst>
-              <a:gd name="adj" fmla="val 7692"/>
-            </a:avLst>
-          </a:prstGeom>
-          <a:solidFill>
-            <a:srgbClr val="FFFFFF"/>
-          </a:solidFill>
-          <a:ln w="12700">
-            <a:solidFill>
-              <a:srgbClr val="DB2777"/>
-            </a:solidFill>
-            <a:prstDash val="solid"/>
-          </a:ln>
-        </p:spPr>
-      </p:sp>
-      <p:sp>
-        <p:nvSpPr>
-          <p:cNvPr id="48" name="Text 46"/>
-          <p:cNvSpPr/>
-          <p:nvPr/>
-        </p:nvSpPr>
-        <p:spPr>
-          <a:xfrm>
-            <a:off x="5759577" y="4169664"/>
-            <a:ext cx="685800" cy="475488"/>
-          </a:xfrm>
-          <a:prstGeom prst="rect">
-            <a:avLst/>
-          </a:prstGeom>
-          <a:noFill/>
-          <a:ln/>
-        </p:spPr>
-        <p:txBody>
-          <a:bodyPr wrap="square" lIns="0" tIns="0" rIns="0" bIns="0" rtlCol="0" anchor="ctr"/>
-          <a:lstStyle/>
-          <a:p>
-            <a:pPr algn="ctr" indent="0" marL="0">
-              <a:buNone/>
-            </a:pPr>
-            <a:r>
-              <a:rPr lang="en-US" sz="900" b="1" dirty="0">
-                <a:solidFill>
-                  <a:srgbClr val="9D174D"/>
-                </a:solidFill>
-                <a:latin typeface="Trebuchet MS" pitchFamily="34" charset="0"/>
-                <a:ea typeface="Trebuchet MS" pitchFamily="34" charset="-122"/>
-                <a:cs typeface="Trebuchet MS" pitchFamily="34" charset="-120"/>
-              </a:rPr>
               <a:t>ll</a:t>
-            </a:r>
-            <a:endParaRPr lang="en-US" sz="900" dirty="0"/>
-          </a:p>
-        </p:txBody>
-      </p:sp>
-      <p:sp>
-        <p:nvSpPr>
-          <p:cNvPr id="49" name="Shape 47"/>
-          <p:cNvSpPr/>
-          <p:nvPr/>
-        </p:nvSpPr>
-        <p:spPr>
-          <a:xfrm>
-            <a:off x="6668262" y="4169664"/>
-            <a:ext cx="685800" cy="475488"/>
-          </a:xfrm>
-          <a:prstGeom prst="rect">
-            <a:avLst>
-              <a:gd name="adj" fmla="val 7692"/>
-            </a:avLst>
-          </a:prstGeom>
-          <a:solidFill>
-            <a:srgbClr val="FFFFFF"/>
-          </a:solidFill>
-          <a:ln w="12700">
-            <a:solidFill>
-              <a:srgbClr val="DB2777"/>
-            </a:solidFill>
-            <a:prstDash val="solid"/>
-          </a:ln>
-        </p:spPr>
-      </p:sp>
-      <p:sp>
-        <p:nvSpPr>
-          <p:cNvPr id="50" name="Text 48"/>
-          <p:cNvSpPr/>
-          <p:nvPr/>
-        </p:nvSpPr>
-        <p:spPr>
-          <a:xfrm>
-            <a:off x="6668262" y="4169664"/>
-            <a:ext cx="685800" cy="475488"/>
-          </a:xfrm>
-          <a:prstGeom prst="rect">
-            <a:avLst/>
-          </a:prstGeom>
-          <a:noFill/>
-          <a:ln/>
-        </p:spPr>
-        <p:txBody>
-          <a:bodyPr wrap="square" lIns="0" tIns="0" rIns="0" bIns="0" rtlCol="0" anchor="ctr"/>
-          <a:lstStyle/>
-          <a:p>
-            <a:pPr algn="ctr" indent="0" marL="0">
-              <a:buNone/>
-            </a:pPr>
-            <a:r>
-              <a:rPr lang="en-US" sz="900" b="1" dirty="0">
-                <a:solidFill>
-                  <a:srgbClr val="9D174D"/>
-                </a:solidFill>
-                <a:latin typeface="Trebuchet MS" pitchFamily="34" charset="0"/>
-                <a:ea typeface="Trebuchet MS" pitchFamily="34" charset="-122"/>
-                <a:cs typeface="Trebuchet MS" pitchFamily="34" charset="-120"/>
-              </a:rPr>
-              <a:t>i</a:t>
-            </a:r>
-            <a:endParaRPr lang="en-US" sz="900" dirty="0"/>
-          </a:p>
-        </p:txBody>
-      </p:sp>
-      <p:sp>
-        <p:nvSpPr>
-          <p:cNvPr id="51" name="Shape 49"/>
-          <p:cNvSpPr/>
-          <p:nvPr/>
-        </p:nvSpPr>
-        <p:spPr>
-          <a:xfrm>
-            <a:off x="7576947" y="4169664"/>
-            <a:ext cx="685800" cy="475488"/>
-          </a:xfrm>
-          <a:prstGeom prst="rect">
-            <a:avLst>
-              <a:gd name="adj" fmla="val 7692"/>
-            </a:avLst>
-          </a:prstGeom>
-          <a:solidFill>
-            <a:srgbClr val="FFFFFF"/>
-          </a:solidFill>
-          <a:ln w="12700">
-            <a:solidFill>
-              <a:srgbClr val="DB2777"/>
-            </a:solidFill>
-            <a:prstDash val="solid"/>
-          </a:ln>
-        </p:spPr>
-      </p:sp>
-      <p:sp>
-        <p:nvSpPr>
-          <p:cNvPr id="52" name="Text 50"/>
-          <p:cNvSpPr/>
-          <p:nvPr/>
-        </p:nvSpPr>
-        <p:spPr>
-          <a:xfrm>
-            <a:off x="7576947" y="4169664"/>
-            <a:ext cx="685800" cy="475488"/>
-          </a:xfrm>
-          <a:prstGeom prst="rect">
-            <a:avLst/>
-          </a:prstGeom>
-          <a:noFill/>
-          <a:ln/>
-        </p:spPr>
-        <p:txBody>
-          <a:bodyPr wrap="square" lIns="0" tIns="0" rIns="0" bIns="0" rtlCol="0" anchor="ctr"/>
-          <a:lstStyle/>
-          <a:p>
-            <a:pPr algn="ctr" indent="0" marL="0">
-              <a:buNone/>
-            </a:pPr>
-            <a:r>
-              <a:rPr lang="en-US" sz="900" b="1" dirty="0">
-                <a:solidFill>
-                  <a:srgbClr val="9D174D"/>
-                </a:solidFill>
-                <a:latin typeface="Trebuchet MS" pitchFamily="34" charset="0"/>
-                <a:ea typeface="Trebuchet MS" pitchFamily="34" charset="-122"/>
-                <a:cs typeface="Trebuchet MS" pitchFamily="34" charset="-120"/>
-              </a:rPr>
-              <a:t>ng</a:t>
             </a:r>
             <a:endParaRPr lang="en-US" sz="900" dirty="0"/>
           </a:p>
@@ -12875,7 +12197,7 @@
                 <a:ea typeface="Calibri" pitchFamily="34" charset="-122"/>
                 <a:cs typeface="Calibri" pitchFamily="34" charset="-120"/>
               </a:rPr>
-              <a:t>too much, beyond</a:t>
+              <a:t>too much, above</a:t>
             </a:r>
             <a:endParaRPr lang="en-US" sz="850" dirty="0"/>
           </a:p>
@@ -13860,7 +13182,7 @@
                 <a:ea typeface="Calibri" pitchFamily="34" charset="-122"/>
                 <a:cs typeface="Calibri" pitchFamily="34" charset="-120"/>
               </a:rPr>
-              <a:t>too much, beyond</a:t>
+              <a:t>too much, above</a:t>
             </a:r>
             <a:endParaRPr lang="en-US" sz="850" dirty="0"/>
           </a:p>
@@ -15347,7 +14669,7 @@
                 <a:ea typeface="Calibri" pitchFamily="34" charset="-122"/>
                 <a:cs typeface="Calibri" pitchFamily="34" charset="-120"/>
               </a:rPr>
-              <a:t>too much, beyond</a:t>
+              <a:t>too much, above</a:t>
             </a:r>
             <a:endParaRPr lang="en-US" sz="850" dirty="0"/>
           </a:p>
@@ -17660,7 +16982,7 @@
                 <a:ea typeface="Calibri" pitchFamily="34" charset="-122"/>
                 <a:cs typeface="Calibri" pitchFamily="34" charset="-120"/>
               </a:rPr>
-              <a:t>unfilled</a:t>
+              <a:t>filling</a:t>
             </a:r>
             <a:pPr algn="l" indent="0" marL="0">
               <a:buNone/>
@@ -17674,7 +16996,7 @@
                 <a:ea typeface="Calibri" pitchFamily="34" charset="-122"/>
                 <a:cs typeface="Calibri" pitchFamily="34" charset="-120"/>
               </a:rPr>
-              <a:t> holes in the wall needed a good </a:t>
+              <a:t> inside the pie was delicious, and the baker used </a:t>
             </a:r>
             <a:pPr algn="l" indent="0" marL="0">
               <a:buNone/>
@@ -17691,7 +17013,7 @@
                 <a:ea typeface="Calibri" pitchFamily="34" charset="-122"/>
                 <a:cs typeface="Calibri" pitchFamily="34" charset="-120"/>
               </a:rPr>
-              <a:t>filler</a:t>
+              <a:t>infill</a:t>
             </a:r>
             <a:pPr algn="l" indent="0" marL="0">
               <a:buNone/>
@@ -17705,7 +17027,7 @@
                 <a:ea typeface="Calibri" pitchFamily="34" charset="-122"/>
                 <a:cs typeface="Calibri" pitchFamily="34" charset="-120"/>
               </a:rPr>
-              <a:t>, so we spent the afternoon </a:t>
+              <a:t> pastry to cover the gaps; she was careful not to </a:t>
             </a:r>
             <a:pPr algn="l" indent="0" marL="0">
               <a:buNone/>
@@ -17722,7 +17044,7 @@
                 <a:ea typeface="Calibri" pitchFamily="34" charset="-122"/>
                 <a:cs typeface="Calibri" pitchFamily="34" charset="-120"/>
               </a:rPr>
-              <a:t>refilling</a:t>
+              <a:t>underfill</a:t>
             </a:r>
             <a:pPr algn="l" indent="0" marL="0">
               <a:buNone/>
@@ -17736,7 +17058,7 @@
                 <a:ea typeface="Calibri" pitchFamily="34" charset="-122"/>
                 <a:cs typeface="Calibri" pitchFamily="34" charset="-120"/>
               </a:rPr>
-              <a:t> each gap carefully.</a:t>
+              <a:t> it.</a:t>
             </a:r>
             <a:endParaRPr lang="en-US" sz="1800" dirty="0"/>
           </a:p>
@@ -17891,7 +17213,7 @@
                 <a:ea typeface="Trebuchet MS" pitchFamily="34" charset="-122"/>
                 <a:cs typeface="Trebuchet MS" pitchFamily="34" charset="-120"/>
               </a:rPr>
-              <a:t>unfilled</a:t>
+              <a:t>filling</a:t>
             </a:r>
             <a:endParaRPr lang="en-US" sz="1400" dirty="0"/>
           </a:p>
@@ -18019,7 +17341,7 @@
                 <a:ea typeface="Trebuchet MS" pitchFamily="34" charset="-122"/>
                 <a:cs typeface="Trebuchet MS" pitchFamily="34" charset="-120"/>
               </a:rPr>
-              <a:t>filler</a:t>
+              <a:t>infill</a:t>
             </a:r>
             <a:endParaRPr lang="en-US" sz="1400" dirty="0"/>
           </a:p>
@@ -18147,7 +17469,7 @@
                 <a:ea typeface="Trebuchet MS" pitchFamily="34" charset="-122"/>
                 <a:cs typeface="Trebuchet MS" pitchFamily="34" charset="-120"/>
               </a:rPr>
-              <a:t>refilling</a:t>
+              <a:t>underfill</a:t>
             </a:r>
             <a:endParaRPr lang="en-US" sz="1400" dirty="0"/>
           </a:p>
@@ -18617,7 +17939,7 @@
                 <a:ea typeface="Trebuchet MS" pitchFamily="34" charset="-122"/>
                 <a:cs typeface="Trebuchet MS" pitchFamily="34" charset="-120"/>
               </a:rPr>
-              <a:t>unfilled</a:t>
+              <a:t>filling</a:t>
             </a:r>
             <a:endParaRPr lang="en-US" sz="2800" dirty="0"/>
           </a:p>
@@ -19444,7 +18766,7 @@
                 <a:ea typeface="Trebuchet MS" pitchFamily="34" charset="-122"/>
                 <a:cs typeface="Trebuchet MS" pitchFamily="34" charset="-120"/>
               </a:rPr>
-              <a:t>unfilled</a:t>
+              <a:t>filling</a:t>
             </a:r>
             <a:endParaRPr lang="en-US" sz="2800" dirty="0"/>
           </a:p>
@@ -19524,7 +18846,7 @@
         </p:nvSpPr>
         <p:spPr>
           <a:xfrm>
-            <a:off x="2221992" y="2258568"/>
+            <a:off x="2938272" y="2258568"/>
             <a:ext cx="1828800" cy="292608"/>
           </a:xfrm>
           <a:prstGeom prst="rect">
@@ -19533,11 +18855,11 @@
             </a:avLst>
           </a:prstGeom>
           <a:solidFill>
-            <a:srgbClr val="DDD6FE"/>
+            <a:srgbClr val="CCFBF1"/>
           </a:solidFill>
           <a:ln w="19050">
             <a:solidFill>
-              <a:srgbClr val="7C3AED"/>
+              <a:srgbClr val="0D9488"/>
             </a:solidFill>
             <a:prstDash val="solid"/>
           </a:ln>
@@ -19558,7 +18880,7 @@
         </p:nvSpPr>
         <p:spPr>
           <a:xfrm>
-            <a:off x="2221992" y="2258568"/>
+            <a:off x="2938272" y="2258568"/>
             <a:ext cx="1828800" cy="292608"/>
           </a:xfrm>
           <a:prstGeom prst="rect">
@@ -19577,13 +18899,13 @@
             <a:r>
               <a:rPr lang="en-US" sz="1300" b="1" dirty="0">
                 <a:solidFill>
-                  <a:srgbClr val="4C1D95"/>
+                  <a:srgbClr val="0F766E"/>
                 </a:solidFill>
                 <a:latin typeface="Trebuchet MS" pitchFamily="34" charset="0"/>
                 <a:ea typeface="Trebuchet MS" pitchFamily="34" charset="-122"/>
                 <a:cs typeface="Trebuchet MS" pitchFamily="34" charset="-120"/>
               </a:rPr>
-              <a:t>un</a:t>
+              <a:t>fill</a:t>
             </a:r>
             <a:endParaRPr lang="en-US" sz="1300" dirty="0"/>
           </a:p>
@@ -19597,7 +18919,7 @@
         </p:nvSpPr>
         <p:spPr>
           <a:xfrm>
-            <a:off x="2221992" y="2569464"/>
+            <a:off x="2938272" y="2569464"/>
             <a:ext cx="1828800" cy="201168"/>
           </a:xfrm>
           <a:prstGeom prst="rect">
@@ -19622,7 +18944,7 @@
                 <a:ea typeface="Calibri" pitchFamily="34" charset="-122"/>
                 <a:cs typeface="Calibri" pitchFamily="34" charset="-120"/>
               </a:rPr>
-              <a:t>not</a:t>
+              <a:t>to make full</a:t>
             </a:r>
             <a:endParaRPr lang="en-US" sz="850" dirty="0"/>
           </a:p>
@@ -19636,7 +18958,7 @@
         </p:nvSpPr>
         <p:spPr>
           <a:xfrm>
-            <a:off x="4370832" y="2258568"/>
+            <a:off x="5803392" y="2258568"/>
             <a:ext cx="1828800" cy="292608"/>
           </a:xfrm>
           <a:prstGeom prst="rect">
@@ -19645,11 +18967,11 @@
             </a:avLst>
           </a:prstGeom>
           <a:solidFill>
-            <a:srgbClr val="CCFBF1"/>
+            <a:srgbClr val="FCE7F3"/>
           </a:solidFill>
           <a:ln w="19050">
             <a:solidFill>
-              <a:srgbClr val="0D9488"/>
+              <a:srgbClr val="DB2777"/>
             </a:solidFill>
             <a:prstDash val="solid"/>
           </a:ln>
@@ -19670,7 +18992,7 @@
         </p:nvSpPr>
         <p:spPr>
           <a:xfrm>
-            <a:off x="4370832" y="2258568"/>
+            <a:off x="5803392" y="2258568"/>
             <a:ext cx="1828800" cy="292608"/>
           </a:xfrm>
           <a:prstGeom prst="rect">
@@ -19689,13 +19011,13 @@
             <a:r>
               <a:rPr lang="en-US" sz="1300" b="1" dirty="0">
                 <a:solidFill>
-                  <a:srgbClr val="0F766E"/>
+                  <a:srgbClr val="9D174D"/>
                 </a:solidFill>
                 <a:latin typeface="Trebuchet MS" pitchFamily="34" charset="0"/>
                 <a:ea typeface="Trebuchet MS" pitchFamily="34" charset="-122"/>
                 <a:cs typeface="Trebuchet MS" pitchFamily="34" charset="-120"/>
               </a:rPr>
-              <a:t>fill</a:t>
+              <a:t>ing</a:t>
             </a:r>
             <a:endParaRPr lang="en-US" sz="1300" dirty="0"/>
           </a:p>
@@ -19709,7 +19031,7 @@
         </p:nvSpPr>
         <p:spPr>
           <a:xfrm>
-            <a:off x="4370832" y="2569464"/>
+            <a:off x="5803392" y="2569464"/>
             <a:ext cx="1828800" cy="201168"/>
           </a:xfrm>
           <a:prstGeom prst="rect">
@@ -19734,7 +19056,7 @@
                 <a:ea typeface="Calibri" pitchFamily="34" charset="-122"/>
                 <a:cs typeface="Calibri" pitchFamily="34" charset="-120"/>
               </a:rPr>
-              <a:t>to make full</a:t>
+              <a:t>action or thing doing</a:t>
             </a:r>
             <a:endParaRPr lang="en-US" sz="850" dirty="0"/>
           </a:p>
@@ -19748,30 +19070,23 @@
         </p:nvSpPr>
         <p:spPr>
           <a:xfrm>
-            <a:off x="6519672" y="2258568"/>
-            <a:ext cx="1828800" cy="292608"/>
+            <a:off x="365760" y="3273552"/>
+            <a:ext cx="1371600" cy="658368"/>
           </a:xfrm>
           <a:prstGeom prst="rect">
             <a:avLst>
-              <a:gd name="adj" fmla="val 25000"/>
+              <a:gd name="adj" fmla="val 8333"/>
             </a:avLst>
           </a:prstGeom>
           <a:solidFill>
-            <a:srgbClr val="FCE7F3"/>
-          </a:solidFill>
-          <a:ln w="19050">
-            <a:solidFill>
-              <a:srgbClr val="DB2777"/>
-            </a:solidFill>
-            <a:prstDash val="solid"/>
-          </a:ln>
-          <a:effectLst>
-            <a:outerShdw sx="100000" sy="100000" kx="0" ky="0" algn="bl" rotWithShape="0" blurRad="101600" dist="38100" dir="8100000">
-              <a:srgbClr val="000000">
-                <a:alpha val="12000"/>
-              </a:srgbClr>
-            </a:outerShdw>
-          </a:effectLst>
+            <a:srgbClr val="E2E8F0"/>
+          </a:solidFill>
+          <a:ln w="12700">
+            <a:solidFill>
+              <a:srgbClr val="E2E8F0"/>
+            </a:solidFill>
+            <a:prstDash val="solid"/>
+          </a:ln>
         </p:spPr>
       </p:sp>
       <p:sp>
@@ -19782,8 +19097,8 @@
         </p:nvSpPr>
         <p:spPr>
           <a:xfrm>
-            <a:off x="6519672" y="2258568"/>
-            <a:ext cx="1828800" cy="292608"/>
+            <a:off x="365760" y="3273552"/>
+            <a:ext cx="1371600" cy="658368"/>
           </a:xfrm>
           <a:prstGeom prst="rect">
             <a:avLst/>
@@ -19799,73 +19114,100 @@
               <a:buNone/>
             </a:pPr>
             <a:r>
-              <a:rPr lang="en-US" sz="1300" b="1" dirty="0">
-                <a:solidFill>
-                  <a:srgbClr val="9D174D"/>
+              <a:rPr lang="en-US" sz="1100" b="1" dirty="0">
+                <a:solidFill>
+                  <a:srgbClr val="475569"/>
                 </a:solidFill>
                 <a:latin typeface="Trebuchet MS" pitchFamily="34" charset="0"/>
                 <a:ea typeface="Trebuchet MS" pitchFamily="34" charset="-122"/>
                 <a:cs typeface="Trebuchet MS" pitchFamily="34" charset="-120"/>
               </a:rPr>
-              <a:t>ed</a:t>
-            </a:r>
-            <a:endParaRPr lang="en-US" sz="1300" dirty="0"/>
-          </a:p>
-        </p:txBody>
-      </p:sp>
-      <p:sp>
-        <p:nvSpPr>
-          <p:cNvPr id="24" name="Text 22"/>
-          <p:cNvSpPr/>
-          <p:nvPr/>
-        </p:nvSpPr>
-        <p:spPr>
-          <a:xfrm>
-            <a:off x="6519672" y="2569464"/>
-            <a:ext cx="1828800" cy="201168"/>
-          </a:xfrm>
-          <a:prstGeom prst="rect">
-            <a:avLst/>
-          </a:prstGeom>
-          <a:noFill/>
-          <a:ln/>
-        </p:spPr>
-        <p:txBody>
-          <a:bodyPr wrap="square" lIns="0" tIns="0" rIns="0" bIns="0" rtlCol="0" anchor="t"/>
-          <a:lstStyle/>
-          <a:p>
-            <a:pPr algn="ctr" indent="0" marL="0">
-              <a:buNone/>
-            </a:pPr>
-            <a:r>
-              <a:rPr lang="en-US" sz="850" dirty="0">
-                <a:solidFill>
-                  <a:srgbClr val="475569"/>
+              <a:t>Syllables</a:t>
+            </a:r>
+            <a:endParaRPr lang="en-US" sz="1100" dirty="0"/>
+          </a:p>
+        </p:txBody>
+      </p:sp>
+      <p:sp>
+        <p:nvSpPr>
+          <p:cNvPr id="24" name="Shape 22"/>
+          <p:cNvSpPr/>
+          <p:nvPr/>
+        </p:nvSpPr>
+        <p:spPr>
+          <a:xfrm>
+            <a:off x="1874520" y="3273552"/>
+            <a:ext cx="6903720" cy="658368"/>
+          </a:xfrm>
+          <a:prstGeom prst="rect">
+            <a:avLst>
+              <a:gd name="adj" fmla="val 8333"/>
+            </a:avLst>
+          </a:prstGeom>
+          <a:solidFill>
+            <a:srgbClr val="F8FAFC"/>
+          </a:solidFill>
+          <a:ln w="12700">
+            <a:solidFill>
+              <a:srgbClr val="E2E8F0"/>
+            </a:solidFill>
+            <a:prstDash val="dash"/>
+          </a:ln>
+        </p:spPr>
+      </p:sp>
+      <p:sp>
+        <p:nvSpPr>
+          <p:cNvPr id="25" name="Text 23"/>
+          <p:cNvSpPr/>
+          <p:nvPr/>
+        </p:nvSpPr>
+        <p:spPr>
+          <a:xfrm>
+            <a:off x="1874520" y="3273552"/>
+            <a:ext cx="6903720" cy="658368"/>
+          </a:xfrm>
+          <a:prstGeom prst="rect">
+            <a:avLst/>
+          </a:prstGeom>
+          <a:noFill/>
+          <a:ln/>
+        </p:spPr>
+        <p:txBody>
+          <a:bodyPr wrap="square" rtlCol="0" anchor="ctr"/>
+          <a:lstStyle/>
+          <a:p>
+            <a:pPr algn="ctr" indent="0" marL="0">
+              <a:buNone/>
+            </a:pPr>
+            <a:r>
+              <a:rPr lang="en-US" sz="1100" i="1" dirty="0">
+                <a:solidFill>
+                  <a:srgbClr val="CBD5E1"/>
                 </a:solidFill>
                 <a:latin typeface="Calibri" pitchFamily="34" charset="0"/>
                 <a:ea typeface="Calibri" pitchFamily="34" charset="-122"/>
                 <a:cs typeface="Calibri" pitchFamily="34" charset="-120"/>
               </a:rPr>
-              <a:t>already happened</a:t>
-            </a:r>
-            <a:endParaRPr lang="en-US" sz="850" dirty="0"/>
-          </a:p>
-        </p:txBody>
-      </p:sp>
-      <p:sp>
-        <p:nvSpPr>
-          <p:cNvPr id="25" name="Shape 23"/>
-          <p:cNvSpPr/>
-          <p:nvPr/>
-        </p:nvSpPr>
-        <p:spPr>
-          <a:xfrm>
-            <a:off x="365760" y="3273552"/>
-            <a:ext cx="1371600" cy="658368"/>
+              <a:t>Write here...</a:t>
+            </a:r>
+            <a:endParaRPr lang="en-US" sz="1100" dirty="0"/>
+          </a:p>
+        </p:txBody>
+      </p:sp>
+      <p:sp>
+        <p:nvSpPr>
+          <p:cNvPr id="26" name="Shape 24"/>
+          <p:cNvSpPr/>
+          <p:nvPr/>
+        </p:nvSpPr>
+        <p:spPr>
+          <a:xfrm>
+            <a:off x="365760" y="4096512"/>
+            <a:ext cx="1371600" cy="804672"/>
           </a:xfrm>
           <a:prstGeom prst="rect">
             <a:avLst>
-              <a:gd name="adj" fmla="val 8333"/>
+              <a:gd name="adj" fmla="val 6818"/>
             </a:avLst>
           </a:prstGeom>
           <a:solidFill>
@@ -19881,14 +19223,14 @@
       </p:sp>
       <p:sp>
         <p:nvSpPr>
-          <p:cNvPr id="26" name="Text 24"/>
-          <p:cNvSpPr/>
-          <p:nvPr/>
-        </p:nvSpPr>
-        <p:spPr>
-          <a:xfrm>
-            <a:off x="365760" y="3273552"/>
-            <a:ext cx="1371600" cy="658368"/>
+          <p:cNvPr id="27" name="Text 25"/>
+          <p:cNvSpPr/>
+          <p:nvPr/>
+        </p:nvSpPr>
+        <p:spPr>
+          <a:xfrm>
+            <a:off x="365760" y="4096512"/>
+            <a:ext cx="1371600" cy="804672"/>
           </a:xfrm>
           <a:prstGeom prst="rect">
             <a:avLst/>
@@ -19912,7 +19254,7 @@
                 <a:ea typeface="Trebuchet MS" pitchFamily="34" charset="-122"/>
                 <a:cs typeface="Trebuchet MS" pitchFamily="34" charset="-120"/>
               </a:rPr>
-              <a:t>Syllables</a:t>
+              <a:t>Phonemes</a:t>
             </a:r>
             <a:endParaRPr lang="en-US" sz="1100" dirty="0"/>
           </a:p>
@@ -19920,80 +19262,14 @@
       </p:sp>
       <p:sp>
         <p:nvSpPr>
-          <p:cNvPr id="27" name="Shape 25"/>
-          <p:cNvSpPr/>
-          <p:nvPr/>
-        </p:nvSpPr>
-        <p:spPr>
-          <a:xfrm>
-            <a:off x="1874520" y="3273552"/>
-            <a:ext cx="6903720" cy="658368"/>
-          </a:xfrm>
-          <a:prstGeom prst="rect">
-            <a:avLst>
-              <a:gd name="adj" fmla="val 8333"/>
-            </a:avLst>
-          </a:prstGeom>
-          <a:solidFill>
-            <a:srgbClr val="F8FAFC"/>
-          </a:solidFill>
-          <a:ln w="12700">
-            <a:solidFill>
-              <a:srgbClr val="E2E8F0"/>
-            </a:solidFill>
-            <a:prstDash val="dash"/>
-          </a:ln>
-        </p:spPr>
-      </p:sp>
-      <p:sp>
-        <p:nvSpPr>
-          <p:cNvPr id="28" name="Text 26"/>
-          <p:cNvSpPr/>
-          <p:nvPr/>
-        </p:nvSpPr>
-        <p:spPr>
-          <a:xfrm>
-            <a:off x="1874520" y="3273552"/>
-            <a:ext cx="6903720" cy="658368"/>
-          </a:xfrm>
-          <a:prstGeom prst="rect">
-            <a:avLst/>
-          </a:prstGeom>
-          <a:noFill/>
-          <a:ln/>
-        </p:spPr>
-        <p:txBody>
-          <a:bodyPr wrap="square" rtlCol="0" anchor="ctr"/>
-          <a:lstStyle/>
-          <a:p>
-            <a:pPr algn="ctr" indent="0" marL="0">
-              <a:buNone/>
-            </a:pPr>
-            <a:r>
-              <a:rPr lang="en-US" sz="1100" i="1" dirty="0">
-                <a:solidFill>
-                  <a:srgbClr val="CBD5E1"/>
-                </a:solidFill>
-                <a:latin typeface="Calibri" pitchFamily="34" charset="0"/>
-                <a:ea typeface="Calibri" pitchFamily="34" charset="-122"/>
-                <a:cs typeface="Calibri" pitchFamily="34" charset="-120"/>
-              </a:rPr>
-              <a:t>Write here...</a:t>
-            </a:r>
-            <a:endParaRPr lang="en-US" sz="1100" dirty="0"/>
-          </a:p>
-        </p:txBody>
-      </p:sp>
-      <p:sp>
-        <p:nvSpPr>
-          <p:cNvPr id="29" name="Shape 27"/>
-          <p:cNvSpPr/>
-          <p:nvPr/>
-        </p:nvSpPr>
-        <p:spPr>
-          <a:xfrm>
-            <a:off x="365760" y="4096512"/>
-            <a:ext cx="1371600" cy="804672"/>
+          <p:cNvPr id="28" name="Shape 26"/>
+          <p:cNvSpPr/>
+          <p:nvPr/>
+        </p:nvSpPr>
+        <p:spPr>
+          <a:xfrm>
+            <a:off x="1874520" y="4096512"/>
+            <a:ext cx="6903720" cy="804672"/>
           </a:xfrm>
           <a:prstGeom prst="rect">
             <a:avLst>
@@ -20001,85 +19277,19 @@
             </a:avLst>
           </a:prstGeom>
           <a:solidFill>
-            <a:srgbClr val="E2E8F0"/>
+            <a:srgbClr val="F8FAFC"/>
           </a:solidFill>
           <a:ln w="12700">
             <a:solidFill>
               <a:srgbClr val="E2E8F0"/>
             </a:solidFill>
-            <a:prstDash val="solid"/>
-          </a:ln>
-        </p:spPr>
-      </p:sp>
-      <p:sp>
-        <p:nvSpPr>
-          <p:cNvPr id="30" name="Text 28"/>
-          <p:cNvSpPr/>
-          <p:nvPr/>
-        </p:nvSpPr>
-        <p:spPr>
-          <a:xfrm>
-            <a:off x="365760" y="4096512"/>
-            <a:ext cx="1371600" cy="804672"/>
-          </a:xfrm>
-          <a:prstGeom prst="rect">
-            <a:avLst/>
-          </a:prstGeom>
-          <a:noFill/>
-          <a:ln/>
-        </p:spPr>
-        <p:txBody>
-          <a:bodyPr wrap="square" lIns="0" tIns="0" rIns="0" bIns="0" rtlCol="0" anchor="ctr"/>
-          <a:lstStyle/>
-          <a:p>
-            <a:pPr algn="ctr" indent="0" marL="0">
-              <a:buNone/>
-            </a:pPr>
-            <a:r>
-              <a:rPr lang="en-US" sz="1100" b="1" dirty="0">
-                <a:solidFill>
-                  <a:srgbClr val="475569"/>
-                </a:solidFill>
-                <a:latin typeface="Trebuchet MS" pitchFamily="34" charset="0"/>
-                <a:ea typeface="Trebuchet MS" pitchFamily="34" charset="-122"/>
-                <a:cs typeface="Trebuchet MS" pitchFamily="34" charset="-120"/>
-              </a:rPr>
-              <a:t>Phonemes</a:t>
-            </a:r>
-            <a:endParaRPr lang="en-US" sz="1100" dirty="0"/>
-          </a:p>
-        </p:txBody>
-      </p:sp>
-      <p:sp>
-        <p:nvSpPr>
-          <p:cNvPr id="31" name="Shape 29"/>
-          <p:cNvSpPr/>
-          <p:nvPr/>
-        </p:nvSpPr>
-        <p:spPr>
-          <a:xfrm>
-            <a:off x="1874520" y="4096512"/>
-            <a:ext cx="6903720" cy="804672"/>
-          </a:xfrm>
-          <a:prstGeom prst="rect">
-            <a:avLst>
-              <a:gd name="adj" fmla="val 6818"/>
-            </a:avLst>
-          </a:prstGeom>
-          <a:solidFill>
-            <a:srgbClr val="F8FAFC"/>
-          </a:solidFill>
-          <a:ln w="12700">
-            <a:solidFill>
-              <a:srgbClr val="E2E8F0"/>
-            </a:solidFill>
             <a:prstDash val="dash"/>
           </a:ln>
         </p:spPr>
       </p:sp>
       <p:sp>
         <p:nvSpPr>
-          <p:cNvPr id="32" name="Text 30"/>
+          <p:cNvPr id="29" name="Text 27"/>
           <p:cNvSpPr/>
           <p:nvPr/>
         </p:nvSpPr>
@@ -20541,7 +19751,7 @@
                 <a:ea typeface="Trebuchet MS" pitchFamily="34" charset="-122"/>
                 <a:cs typeface="Trebuchet MS" pitchFamily="34" charset="-120"/>
               </a:rPr>
-              <a:t>unfilled</a:t>
+              <a:t>filling</a:t>
             </a:r>
             <a:endParaRPr lang="en-US" sz="2800" dirty="0"/>
           </a:p>
@@ -20621,7 +19831,7 @@
         </p:nvSpPr>
         <p:spPr>
           <a:xfrm>
-            <a:off x="2221992" y="2258568"/>
+            <a:off x="2938272" y="2258568"/>
             <a:ext cx="1828800" cy="292608"/>
           </a:xfrm>
           <a:prstGeom prst="rect">
@@ -20630,11 +19840,11 @@
             </a:avLst>
           </a:prstGeom>
           <a:solidFill>
-            <a:srgbClr val="DDD6FE"/>
+            <a:srgbClr val="CCFBF1"/>
           </a:solidFill>
           <a:ln w="19050">
             <a:solidFill>
-              <a:srgbClr val="7C3AED"/>
+              <a:srgbClr val="0D9488"/>
             </a:solidFill>
             <a:prstDash val="solid"/>
           </a:ln>
@@ -20655,7 +19865,7 @@
         </p:nvSpPr>
         <p:spPr>
           <a:xfrm>
-            <a:off x="2221992" y="2258568"/>
+            <a:off x="2938272" y="2258568"/>
             <a:ext cx="1828800" cy="292608"/>
           </a:xfrm>
           <a:prstGeom prst="rect">
@@ -20674,13 +19884,13 @@
             <a:r>
               <a:rPr lang="en-US" sz="1300" b="1" dirty="0">
                 <a:solidFill>
-                  <a:srgbClr val="4C1D95"/>
+                  <a:srgbClr val="0F766E"/>
                 </a:solidFill>
                 <a:latin typeface="Trebuchet MS" pitchFamily="34" charset="0"/>
                 <a:ea typeface="Trebuchet MS" pitchFamily="34" charset="-122"/>
                 <a:cs typeface="Trebuchet MS" pitchFamily="34" charset="-120"/>
               </a:rPr>
-              <a:t>un</a:t>
+              <a:t>fill</a:t>
             </a:r>
             <a:endParaRPr lang="en-US" sz="1300" dirty="0"/>
           </a:p>
@@ -20694,7 +19904,7 @@
         </p:nvSpPr>
         <p:spPr>
           <a:xfrm>
-            <a:off x="2221992" y="2569464"/>
+            <a:off x="2938272" y="2569464"/>
             <a:ext cx="1828800" cy="201168"/>
           </a:xfrm>
           <a:prstGeom prst="rect">
@@ -20719,7 +19929,7 @@
                 <a:ea typeface="Calibri" pitchFamily="34" charset="-122"/>
                 <a:cs typeface="Calibri" pitchFamily="34" charset="-120"/>
               </a:rPr>
-              <a:t>not</a:t>
+              <a:t>to make full</a:t>
             </a:r>
             <a:endParaRPr lang="en-US" sz="850" dirty="0"/>
           </a:p>
@@ -20733,7 +19943,7 @@
         </p:nvSpPr>
         <p:spPr>
           <a:xfrm>
-            <a:off x="4370832" y="2258568"/>
+            <a:off x="5803392" y="2258568"/>
             <a:ext cx="1828800" cy="292608"/>
           </a:xfrm>
           <a:prstGeom prst="rect">
@@ -20742,11 +19952,11 @@
             </a:avLst>
           </a:prstGeom>
           <a:solidFill>
-            <a:srgbClr val="CCFBF1"/>
+            <a:srgbClr val="FCE7F3"/>
           </a:solidFill>
           <a:ln w="19050">
             <a:solidFill>
-              <a:srgbClr val="0D9488"/>
+              <a:srgbClr val="DB2777"/>
             </a:solidFill>
             <a:prstDash val="solid"/>
           </a:ln>
@@ -20767,7 +19977,7 @@
         </p:nvSpPr>
         <p:spPr>
           <a:xfrm>
-            <a:off x="4370832" y="2258568"/>
+            <a:off x="5803392" y="2258568"/>
             <a:ext cx="1828800" cy="292608"/>
           </a:xfrm>
           <a:prstGeom prst="rect">
@@ -20786,13 +19996,13 @@
             <a:r>
               <a:rPr lang="en-US" sz="1300" b="1" dirty="0">
                 <a:solidFill>
-                  <a:srgbClr val="0F766E"/>
+                  <a:srgbClr val="9D174D"/>
                 </a:solidFill>
                 <a:latin typeface="Trebuchet MS" pitchFamily="34" charset="0"/>
                 <a:ea typeface="Trebuchet MS" pitchFamily="34" charset="-122"/>
                 <a:cs typeface="Trebuchet MS" pitchFamily="34" charset="-120"/>
               </a:rPr>
-              <a:t>fill</a:t>
+              <a:t>ing</a:t>
             </a:r>
             <a:endParaRPr lang="en-US" sz="1300" dirty="0"/>
           </a:p>
@@ -20806,7 +20016,7 @@
         </p:nvSpPr>
         <p:spPr>
           <a:xfrm>
-            <a:off x="4370832" y="2569464"/>
+            <a:off x="5803392" y="2569464"/>
             <a:ext cx="1828800" cy="201168"/>
           </a:xfrm>
           <a:prstGeom prst="rect">
@@ -20831,7 +20041,7 @@
                 <a:ea typeface="Calibri" pitchFamily="34" charset="-122"/>
                 <a:cs typeface="Calibri" pitchFamily="34" charset="-120"/>
               </a:rPr>
-              <a:t>to make full</a:t>
+              <a:t>action or thing doing</a:t>
             </a:r>
             <a:endParaRPr lang="en-US" sz="850" dirty="0"/>
           </a:p>
@@ -20845,30 +20055,23 @@
         </p:nvSpPr>
         <p:spPr>
           <a:xfrm>
-            <a:off x="6519672" y="2258568"/>
-            <a:ext cx="1828800" cy="292608"/>
+            <a:off x="365760" y="3273552"/>
+            <a:ext cx="1371600" cy="658368"/>
           </a:xfrm>
           <a:prstGeom prst="rect">
             <a:avLst>
-              <a:gd name="adj" fmla="val 25000"/>
+              <a:gd name="adj" fmla="val 8333"/>
             </a:avLst>
           </a:prstGeom>
           <a:solidFill>
-            <a:srgbClr val="FCE7F3"/>
-          </a:solidFill>
-          <a:ln w="19050">
-            <a:solidFill>
-              <a:srgbClr val="DB2777"/>
-            </a:solidFill>
-            <a:prstDash val="solid"/>
-          </a:ln>
-          <a:effectLst>
-            <a:outerShdw sx="100000" sy="100000" kx="0" ky="0" algn="bl" rotWithShape="0" blurRad="101600" dist="38100" dir="8100000">
-              <a:srgbClr val="000000">
-                <a:alpha val="12000"/>
-              </a:srgbClr>
-            </a:outerShdw>
-          </a:effectLst>
+            <a:srgbClr val="E2E8F0"/>
+          </a:solidFill>
+          <a:ln w="12700">
+            <a:solidFill>
+              <a:srgbClr val="E2E8F0"/>
+            </a:solidFill>
+            <a:prstDash val="solid"/>
+          </a:ln>
         </p:spPr>
       </p:sp>
       <p:sp>
@@ -20879,8 +20082,8 @@
         </p:nvSpPr>
         <p:spPr>
           <a:xfrm>
-            <a:off x="6519672" y="2258568"/>
-            <a:ext cx="1828800" cy="292608"/>
+            <a:off x="365760" y="3273552"/>
+            <a:ext cx="1371600" cy="658368"/>
           </a:xfrm>
           <a:prstGeom prst="rect">
             <a:avLst/>
@@ -20896,69 +20099,30 @@
               <a:buNone/>
             </a:pPr>
             <a:r>
-              <a:rPr lang="en-US" sz="1300" b="1" dirty="0">
-                <a:solidFill>
-                  <a:srgbClr val="9D174D"/>
+              <a:rPr lang="en-US" sz="1100" b="1" dirty="0">
+                <a:solidFill>
+                  <a:srgbClr val="475569"/>
                 </a:solidFill>
                 <a:latin typeface="Trebuchet MS" pitchFamily="34" charset="0"/>
                 <a:ea typeface="Trebuchet MS" pitchFamily="34" charset="-122"/>
                 <a:cs typeface="Trebuchet MS" pitchFamily="34" charset="-120"/>
               </a:rPr>
-              <a:t>ed</a:t>
-            </a:r>
-            <a:endParaRPr lang="en-US" sz="1300" dirty="0"/>
-          </a:p>
-        </p:txBody>
-      </p:sp>
-      <p:sp>
-        <p:nvSpPr>
-          <p:cNvPr id="24" name="Text 22"/>
-          <p:cNvSpPr/>
-          <p:nvPr/>
-        </p:nvSpPr>
-        <p:spPr>
-          <a:xfrm>
-            <a:off x="6519672" y="2569464"/>
-            <a:ext cx="1828800" cy="201168"/>
-          </a:xfrm>
-          <a:prstGeom prst="rect">
-            <a:avLst/>
-          </a:prstGeom>
-          <a:noFill/>
-          <a:ln/>
-        </p:spPr>
-        <p:txBody>
-          <a:bodyPr wrap="square" lIns="0" tIns="0" rIns="0" bIns="0" rtlCol="0" anchor="t"/>
-          <a:lstStyle/>
-          <a:p>
-            <a:pPr algn="ctr" indent="0" marL="0">
-              <a:buNone/>
-            </a:pPr>
-            <a:r>
-              <a:rPr lang="en-US" sz="850" dirty="0">
-                <a:solidFill>
-                  <a:srgbClr val="475569"/>
-                </a:solidFill>
-                <a:latin typeface="Calibri" pitchFamily="34" charset="0"/>
-                <a:ea typeface="Calibri" pitchFamily="34" charset="-122"/>
-                <a:cs typeface="Calibri" pitchFamily="34" charset="-120"/>
-              </a:rPr>
-              <a:t>already happened</a:t>
-            </a:r>
-            <a:endParaRPr lang="en-US" sz="850" dirty="0"/>
-          </a:p>
-        </p:txBody>
-      </p:sp>
-      <p:sp>
-        <p:nvSpPr>
-          <p:cNvPr id="25" name="Shape 23"/>
-          <p:cNvSpPr/>
-          <p:nvPr/>
-        </p:nvSpPr>
-        <p:spPr>
-          <a:xfrm>
-            <a:off x="365760" y="3273552"/>
-            <a:ext cx="1371600" cy="658368"/>
+              <a:t>Syllables</a:t>
+            </a:r>
+            <a:endParaRPr lang="en-US" sz="1100" dirty="0"/>
+          </a:p>
+        </p:txBody>
+      </p:sp>
+      <p:sp>
+        <p:nvSpPr>
+          <p:cNvPr id="24" name="Shape 22"/>
+          <p:cNvSpPr/>
+          <p:nvPr/>
+        </p:nvSpPr>
+        <p:spPr>
+          <a:xfrm>
+            <a:off x="1874520" y="3273552"/>
+            <a:ext cx="6903720" cy="658368"/>
           </a:xfrm>
           <a:prstGeom prst="rect">
             <a:avLst>
@@ -20966,11 +20130,38 @@
             </a:avLst>
           </a:prstGeom>
           <a:solidFill>
-            <a:srgbClr val="E2E8F0"/>
-          </a:solidFill>
-          <a:ln w="12700">
-            <a:solidFill>
-              <a:srgbClr val="E2E8F0"/>
+            <a:srgbClr val="CCFBF1"/>
+          </a:solidFill>
+          <a:ln w="12700">
+            <a:solidFill>
+              <a:srgbClr val="0D9488"/>
+            </a:solidFill>
+            <a:prstDash val="solid"/>
+          </a:ln>
+        </p:spPr>
+      </p:sp>
+      <p:sp>
+        <p:nvSpPr>
+          <p:cNvPr id="25" name="Shape 23"/>
+          <p:cNvSpPr/>
+          <p:nvPr/>
+        </p:nvSpPr>
+        <p:spPr>
+          <a:xfrm>
+            <a:off x="2999232" y="3364992"/>
+            <a:ext cx="1645920" cy="475488"/>
+          </a:xfrm>
+          <a:prstGeom prst="rect">
+            <a:avLst>
+              <a:gd name="adj" fmla="val 9615"/>
+            </a:avLst>
+          </a:prstGeom>
+          <a:solidFill>
+            <a:srgbClr val="FFFFFF"/>
+          </a:solidFill>
+          <a:ln w="12700">
+            <a:solidFill>
+              <a:srgbClr val="0D9488"/>
             </a:solidFill>
             <a:prstDash val="solid"/>
           </a:ln>
@@ -20984,8 +20175,8 @@
         </p:nvSpPr>
         <p:spPr>
           <a:xfrm>
-            <a:off x="365760" y="3273552"/>
-            <a:ext cx="1371600" cy="658368"/>
+            <a:off x="2999232" y="3364992"/>
+            <a:ext cx="1645920" cy="475488"/>
           </a:xfrm>
           <a:prstGeom prst="rect">
             <a:avLst/>
@@ -21001,46 +20192,58 @@
               <a:buNone/>
             </a:pPr>
             <a:r>
-              <a:rPr lang="en-US" sz="1100" b="1" dirty="0">
-                <a:solidFill>
-                  <a:srgbClr val="475569"/>
+              <a:rPr lang="en-US" sz="1400" b="1" dirty="0">
+                <a:solidFill>
+                  <a:srgbClr val="0D9488"/>
                 </a:solidFill>
                 <a:latin typeface="Trebuchet MS" pitchFamily="34" charset="0"/>
                 <a:ea typeface="Trebuchet MS" pitchFamily="34" charset="-122"/>
                 <a:cs typeface="Trebuchet MS" pitchFamily="34" charset="-120"/>
               </a:rPr>
-              <a:t>Syllables</a:t>
-            </a:r>
-            <a:endParaRPr lang="en-US" sz="1100" dirty="0"/>
-          </a:p>
-        </p:txBody>
-      </p:sp>
-      <p:sp>
-        <p:nvSpPr>
-          <p:cNvPr id="27" name="Shape 25"/>
-          <p:cNvSpPr/>
-          <p:nvPr/>
-        </p:nvSpPr>
-        <p:spPr>
-          <a:xfrm>
-            <a:off x="1874520" y="3273552"/>
-            <a:ext cx="6903720" cy="658368"/>
-          </a:xfrm>
-          <a:prstGeom prst="rect">
-            <a:avLst>
-              <a:gd name="adj" fmla="val 8333"/>
-            </a:avLst>
-          </a:prstGeom>
-          <a:solidFill>
-            <a:srgbClr val="CCFBF1"/>
-          </a:solidFill>
-          <a:ln w="12700">
-            <a:solidFill>
-              <a:srgbClr val="0D9488"/>
-            </a:solidFill>
-            <a:prstDash val="solid"/>
-          </a:ln>
-        </p:spPr>
+              <a:t>fill</a:t>
+            </a:r>
+            <a:endParaRPr lang="en-US" sz="1400" dirty="0"/>
+          </a:p>
+        </p:txBody>
+      </p:sp>
+      <p:sp>
+        <p:nvSpPr>
+          <p:cNvPr id="27" name="Text 25"/>
+          <p:cNvSpPr/>
+          <p:nvPr/>
+        </p:nvSpPr>
+        <p:spPr>
+          <a:xfrm>
+            <a:off x="4645152" y="3364992"/>
+            <a:ext cx="1097280" cy="475488"/>
+          </a:xfrm>
+          <a:prstGeom prst="rect">
+            <a:avLst/>
+          </a:prstGeom>
+          <a:noFill/>
+          <a:ln/>
+        </p:spPr>
+        <p:txBody>
+          <a:bodyPr wrap="square" lIns="0" tIns="0" rIns="0" bIns="0" rtlCol="0" anchor="ctr"/>
+          <a:lstStyle/>
+          <a:p>
+            <a:pPr algn="ctr" indent="0" marL="0">
+              <a:buNone/>
+            </a:pPr>
+            <a:r>
+              <a:rPr lang="en-US" sz="1600" b="1" dirty="0">
+                <a:solidFill>
+                  <a:srgbClr val="0D9488"/>
+                </a:solidFill>
+                <a:latin typeface="Trebuchet MS" pitchFamily="34" charset="0"/>
+                <a:ea typeface="Trebuchet MS" pitchFamily="34" charset="-122"/>
+                <a:cs typeface="Trebuchet MS" pitchFamily="34" charset="-120"/>
+              </a:rPr>
+              <a:t>·</a:t>
+            </a:r>
+            <a:endParaRPr lang="en-US" sz="1600" dirty="0"/>
+          </a:p>
+        </p:txBody>
       </p:sp>
       <p:sp>
         <p:nvSpPr>
@@ -21050,7 +20253,7 @@
         </p:nvSpPr>
         <p:spPr>
           <a:xfrm>
-            <a:off x="2999232" y="3364992"/>
+            <a:off x="5742432" y="3364992"/>
             <a:ext cx="1645920" cy="475488"/>
           </a:xfrm>
           <a:prstGeom prst="rect">
@@ -21077,7 +20280,7 @@
         </p:nvSpPr>
         <p:spPr>
           <a:xfrm>
-            <a:off x="2999232" y="3364992"/>
+            <a:off x="5742432" y="3364992"/>
             <a:ext cx="1645920" cy="475488"/>
           </a:xfrm>
           <a:prstGeom prst="rect">
@@ -21102,7 +20305,7 @@
                 <a:ea typeface="Trebuchet MS" pitchFamily="34" charset="-122"/>
                 <a:cs typeface="Trebuchet MS" pitchFamily="34" charset="-120"/>
               </a:rPr>
-              <a:t>un</a:t>
+              <a:t>ing</a:t>
             </a:r>
             <a:endParaRPr lang="en-US" sz="1400" dirty="0"/>
           </a:p>
@@ -21110,14 +20313,41 @@
       </p:sp>
       <p:sp>
         <p:nvSpPr>
-          <p:cNvPr id="30" name="Text 28"/>
-          <p:cNvSpPr/>
-          <p:nvPr/>
-        </p:nvSpPr>
-        <p:spPr>
-          <a:xfrm>
-            <a:off x="4645152" y="3364992"/>
-            <a:ext cx="1097280" cy="475488"/>
+          <p:cNvPr id="30" name="Shape 28"/>
+          <p:cNvSpPr/>
+          <p:nvPr/>
+        </p:nvSpPr>
+        <p:spPr>
+          <a:xfrm>
+            <a:off x="365760" y="4096512"/>
+            <a:ext cx="1371600" cy="804672"/>
+          </a:xfrm>
+          <a:prstGeom prst="rect">
+            <a:avLst>
+              <a:gd name="adj" fmla="val 6818"/>
+            </a:avLst>
+          </a:prstGeom>
+          <a:solidFill>
+            <a:srgbClr val="E2E8F0"/>
+          </a:solidFill>
+          <a:ln w="12700">
+            <a:solidFill>
+              <a:srgbClr val="E2E8F0"/>
+            </a:solidFill>
+            <a:prstDash val="solid"/>
+          </a:ln>
+        </p:spPr>
+      </p:sp>
+      <p:sp>
+        <p:nvSpPr>
+          <p:cNvPr id="31" name="Text 29"/>
+          <p:cNvSpPr/>
+          <p:nvPr/>
+        </p:nvSpPr>
+        <p:spPr>
+          <a:xfrm>
+            <a:off x="365760" y="4096512"/>
+            <a:ext cx="1371600" cy="804672"/>
           </a:xfrm>
           <a:prstGeom prst="rect">
             <a:avLst/>
@@ -21133,96 +20363,30 @@
               <a:buNone/>
             </a:pPr>
             <a:r>
-              <a:rPr lang="en-US" sz="1600" b="1" dirty="0">
-                <a:solidFill>
-                  <a:srgbClr val="0D9488"/>
+              <a:rPr lang="en-US" sz="1100" b="1" dirty="0">
+                <a:solidFill>
+                  <a:srgbClr val="475569"/>
                 </a:solidFill>
                 <a:latin typeface="Trebuchet MS" pitchFamily="34" charset="0"/>
                 <a:ea typeface="Trebuchet MS" pitchFamily="34" charset="-122"/>
                 <a:cs typeface="Trebuchet MS" pitchFamily="34" charset="-120"/>
               </a:rPr>
-              <a:t>·</a:t>
-            </a:r>
-            <a:endParaRPr lang="en-US" sz="1600" dirty="0"/>
-          </a:p>
-        </p:txBody>
-      </p:sp>
-      <p:sp>
-        <p:nvSpPr>
-          <p:cNvPr id="31" name="Shape 29"/>
-          <p:cNvSpPr/>
-          <p:nvPr/>
-        </p:nvSpPr>
-        <p:spPr>
-          <a:xfrm>
-            <a:off x="5742432" y="3364992"/>
-            <a:ext cx="1645920" cy="475488"/>
-          </a:xfrm>
-          <a:prstGeom prst="rect">
-            <a:avLst>
-              <a:gd name="adj" fmla="val 9615"/>
-            </a:avLst>
-          </a:prstGeom>
-          <a:solidFill>
-            <a:srgbClr val="FFFFFF"/>
-          </a:solidFill>
-          <a:ln w="12700">
-            <a:solidFill>
-              <a:srgbClr val="0D9488"/>
-            </a:solidFill>
-            <a:prstDash val="solid"/>
-          </a:ln>
-        </p:spPr>
-      </p:sp>
-      <p:sp>
-        <p:nvSpPr>
-          <p:cNvPr id="32" name="Text 30"/>
-          <p:cNvSpPr/>
-          <p:nvPr/>
-        </p:nvSpPr>
-        <p:spPr>
-          <a:xfrm>
-            <a:off x="5742432" y="3364992"/>
-            <a:ext cx="1645920" cy="475488"/>
-          </a:xfrm>
-          <a:prstGeom prst="rect">
-            <a:avLst/>
-          </a:prstGeom>
-          <a:noFill/>
-          <a:ln/>
-        </p:spPr>
-        <p:txBody>
-          <a:bodyPr wrap="square" lIns="0" tIns="0" rIns="0" bIns="0" rtlCol="0" anchor="ctr"/>
-          <a:lstStyle/>
-          <a:p>
-            <a:pPr algn="ctr" indent="0" marL="0">
-              <a:buNone/>
-            </a:pPr>
-            <a:r>
-              <a:rPr lang="en-US" sz="1400" b="1" dirty="0">
-                <a:solidFill>
-                  <a:srgbClr val="0D9488"/>
-                </a:solidFill>
-                <a:latin typeface="Trebuchet MS" pitchFamily="34" charset="0"/>
-                <a:ea typeface="Trebuchet MS" pitchFamily="34" charset="-122"/>
-                <a:cs typeface="Trebuchet MS" pitchFamily="34" charset="-120"/>
-              </a:rPr>
-              <a:t>filled</a:t>
-            </a:r>
-            <a:endParaRPr lang="en-US" sz="1400" dirty="0"/>
-          </a:p>
-        </p:txBody>
-      </p:sp>
-      <p:sp>
-        <p:nvSpPr>
-          <p:cNvPr id="33" name="Shape 31"/>
-          <p:cNvSpPr/>
-          <p:nvPr/>
-        </p:nvSpPr>
-        <p:spPr>
-          <a:xfrm>
-            <a:off x="365760" y="4096512"/>
-            <a:ext cx="1371600" cy="804672"/>
+              <a:t>Phonemes</a:t>
+            </a:r>
+            <a:endParaRPr lang="en-US" sz="1100" dirty="0"/>
+          </a:p>
+        </p:txBody>
+      </p:sp>
+      <p:sp>
+        <p:nvSpPr>
+          <p:cNvPr id="32" name="Shape 30"/>
+          <p:cNvSpPr/>
+          <p:nvPr/>
+        </p:nvSpPr>
+        <p:spPr>
+          <a:xfrm>
+            <a:off x="1874520" y="4096512"/>
+            <a:ext cx="6903720" cy="804672"/>
           </a:xfrm>
           <a:prstGeom prst="rect">
             <a:avLst>
@@ -21230,85 +20394,19 @@
             </a:avLst>
           </a:prstGeom>
           <a:solidFill>
-            <a:srgbClr val="E2E8F0"/>
+            <a:srgbClr val="F8FAFC"/>
           </a:solidFill>
           <a:ln w="12700">
             <a:solidFill>
               <a:srgbClr val="E2E8F0"/>
             </a:solidFill>
-            <a:prstDash val="solid"/>
-          </a:ln>
-        </p:spPr>
-      </p:sp>
-      <p:sp>
-        <p:nvSpPr>
-          <p:cNvPr id="34" name="Text 32"/>
-          <p:cNvSpPr/>
-          <p:nvPr/>
-        </p:nvSpPr>
-        <p:spPr>
-          <a:xfrm>
-            <a:off x="365760" y="4096512"/>
-            <a:ext cx="1371600" cy="804672"/>
-          </a:xfrm>
-          <a:prstGeom prst="rect">
-            <a:avLst/>
-          </a:prstGeom>
-          <a:noFill/>
-          <a:ln/>
-        </p:spPr>
-        <p:txBody>
-          <a:bodyPr wrap="square" lIns="0" tIns="0" rIns="0" bIns="0" rtlCol="0" anchor="ctr"/>
-          <a:lstStyle/>
-          <a:p>
-            <a:pPr algn="ctr" indent="0" marL="0">
-              <a:buNone/>
-            </a:pPr>
-            <a:r>
-              <a:rPr lang="en-US" sz="1100" b="1" dirty="0">
-                <a:solidFill>
-                  <a:srgbClr val="475569"/>
-                </a:solidFill>
-                <a:latin typeface="Trebuchet MS" pitchFamily="34" charset="0"/>
-                <a:ea typeface="Trebuchet MS" pitchFamily="34" charset="-122"/>
-                <a:cs typeface="Trebuchet MS" pitchFamily="34" charset="-120"/>
-              </a:rPr>
-              <a:t>Phonemes</a:t>
-            </a:r>
-            <a:endParaRPr lang="en-US" sz="1100" dirty="0"/>
-          </a:p>
-        </p:txBody>
-      </p:sp>
-      <p:sp>
-        <p:nvSpPr>
-          <p:cNvPr id="35" name="Shape 33"/>
-          <p:cNvSpPr/>
-          <p:nvPr/>
-        </p:nvSpPr>
-        <p:spPr>
-          <a:xfrm>
-            <a:off x="1874520" y="4096512"/>
-            <a:ext cx="6903720" cy="804672"/>
-          </a:xfrm>
-          <a:prstGeom prst="rect">
-            <a:avLst>
-              <a:gd name="adj" fmla="val 6818"/>
-            </a:avLst>
-          </a:prstGeom>
-          <a:solidFill>
-            <a:srgbClr val="F8FAFC"/>
-          </a:solidFill>
-          <a:ln w="12700">
-            <a:solidFill>
-              <a:srgbClr val="E2E8F0"/>
-            </a:solidFill>
             <a:prstDash val="dash"/>
           </a:ln>
         </p:spPr>
       </p:sp>
       <p:sp>
         <p:nvSpPr>
-          <p:cNvPr id="36" name="Text 34"/>
+          <p:cNvPr id="33" name="Text 31"/>
           <p:cNvSpPr/>
           <p:nvPr/>
         </p:nvSpPr>
@@ -21770,7 +20868,7 @@
                 <a:ea typeface="Trebuchet MS" pitchFamily="34" charset="-122"/>
                 <a:cs typeface="Trebuchet MS" pitchFamily="34" charset="-120"/>
               </a:rPr>
-              <a:t>unfilled</a:t>
+              <a:t>filling</a:t>
             </a:r>
             <a:endParaRPr lang="en-US" sz="2800" dirty="0"/>
           </a:p>
@@ -21850,7 +20948,7 @@
         </p:nvSpPr>
         <p:spPr>
           <a:xfrm>
-            <a:off x="2221992" y="2258568"/>
+            <a:off x="2938272" y="2258568"/>
             <a:ext cx="1828800" cy="292608"/>
           </a:xfrm>
           <a:prstGeom prst="rect">
@@ -21859,11 +20957,11 @@
             </a:avLst>
           </a:prstGeom>
           <a:solidFill>
-            <a:srgbClr val="DDD6FE"/>
+            <a:srgbClr val="CCFBF1"/>
           </a:solidFill>
           <a:ln w="19050">
             <a:solidFill>
-              <a:srgbClr val="7C3AED"/>
+              <a:srgbClr val="0D9488"/>
             </a:solidFill>
             <a:prstDash val="solid"/>
           </a:ln>
@@ -21884,7 +20982,7 @@
         </p:nvSpPr>
         <p:spPr>
           <a:xfrm>
-            <a:off x="2221992" y="2258568"/>
+            <a:off x="2938272" y="2258568"/>
             <a:ext cx="1828800" cy="292608"/>
           </a:xfrm>
           <a:prstGeom prst="rect">
@@ -21903,13 +21001,13 @@
             <a:r>
               <a:rPr lang="en-US" sz="1300" b="1" dirty="0">
                 <a:solidFill>
-                  <a:srgbClr val="4C1D95"/>
+                  <a:srgbClr val="0F766E"/>
                 </a:solidFill>
                 <a:latin typeface="Trebuchet MS" pitchFamily="34" charset="0"/>
                 <a:ea typeface="Trebuchet MS" pitchFamily="34" charset="-122"/>
                 <a:cs typeface="Trebuchet MS" pitchFamily="34" charset="-120"/>
               </a:rPr>
-              <a:t>un</a:t>
+              <a:t>fill</a:t>
             </a:r>
             <a:endParaRPr lang="en-US" sz="1300" dirty="0"/>
           </a:p>
@@ -21923,7 +21021,7 @@
         </p:nvSpPr>
         <p:spPr>
           <a:xfrm>
-            <a:off x="2221992" y="2569464"/>
+            <a:off x="2938272" y="2569464"/>
             <a:ext cx="1828800" cy="201168"/>
           </a:xfrm>
           <a:prstGeom prst="rect">
@@ -21948,7 +21046,7 @@
                 <a:ea typeface="Calibri" pitchFamily="34" charset="-122"/>
                 <a:cs typeface="Calibri" pitchFamily="34" charset="-120"/>
               </a:rPr>
-              <a:t>not</a:t>
+              <a:t>to make full</a:t>
             </a:r>
             <a:endParaRPr lang="en-US" sz="850" dirty="0"/>
           </a:p>
@@ -21962,7 +21060,7 @@
         </p:nvSpPr>
         <p:spPr>
           <a:xfrm>
-            <a:off x="4370832" y="2258568"/>
+            <a:off x="5803392" y="2258568"/>
             <a:ext cx="1828800" cy="292608"/>
           </a:xfrm>
           <a:prstGeom prst="rect">
@@ -21971,11 +21069,11 @@
             </a:avLst>
           </a:prstGeom>
           <a:solidFill>
-            <a:srgbClr val="CCFBF1"/>
+            <a:srgbClr val="FCE7F3"/>
           </a:solidFill>
           <a:ln w="19050">
             <a:solidFill>
-              <a:srgbClr val="0D9488"/>
+              <a:srgbClr val="DB2777"/>
             </a:solidFill>
             <a:prstDash val="solid"/>
           </a:ln>
@@ -21996,7 +21094,7 @@
         </p:nvSpPr>
         <p:spPr>
           <a:xfrm>
-            <a:off x="4370832" y="2258568"/>
+            <a:off x="5803392" y="2258568"/>
             <a:ext cx="1828800" cy="292608"/>
           </a:xfrm>
           <a:prstGeom prst="rect">
@@ -22015,13 +21113,13 @@
             <a:r>
               <a:rPr lang="en-US" sz="1300" b="1" dirty="0">
                 <a:solidFill>
-                  <a:srgbClr val="0F766E"/>
+                  <a:srgbClr val="9D174D"/>
                 </a:solidFill>
                 <a:latin typeface="Trebuchet MS" pitchFamily="34" charset="0"/>
                 <a:ea typeface="Trebuchet MS" pitchFamily="34" charset="-122"/>
                 <a:cs typeface="Trebuchet MS" pitchFamily="34" charset="-120"/>
               </a:rPr>
-              <a:t>fill</a:t>
+              <a:t>ing</a:t>
             </a:r>
             <a:endParaRPr lang="en-US" sz="1300" dirty="0"/>
           </a:p>
@@ -22035,7 +21133,7 @@
         </p:nvSpPr>
         <p:spPr>
           <a:xfrm>
-            <a:off x="4370832" y="2569464"/>
+            <a:off x="5803392" y="2569464"/>
             <a:ext cx="1828800" cy="201168"/>
           </a:xfrm>
           <a:prstGeom prst="rect">
@@ -22060,7 +21158,7 @@
                 <a:ea typeface="Calibri" pitchFamily="34" charset="-122"/>
                 <a:cs typeface="Calibri" pitchFamily="34" charset="-120"/>
               </a:rPr>
-              <a:t>to make full</a:t>
+              <a:t>action or thing doing</a:t>
             </a:r>
             <a:endParaRPr lang="en-US" sz="850" dirty="0"/>
           </a:p>
@@ -22074,30 +21172,23 @@
         </p:nvSpPr>
         <p:spPr>
           <a:xfrm>
-            <a:off x="6519672" y="2258568"/>
-            <a:ext cx="1828800" cy="292608"/>
+            <a:off x="365760" y="3273552"/>
+            <a:ext cx="1371600" cy="658368"/>
           </a:xfrm>
           <a:prstGeom prst="rect">
             <a:avLst>
-              <a:gd name="adj" fmla="val 25000"/>
+              <a:gd name="adj" fmla="val 8333"/>
             </a:avLst>
           </a:prstGeom>
           <a:solidFill>
-            <a:srgbClr val="FCE7F3"/>
-          </a:solidFill>
-          <a:ln w="19050">
-            <a:solidFill>
-              <a:srgbClr val="DB2777"/>
-            </a:solidFill>
-            <a:prstDash val="solid"/>
-          </a:ln>
-          <a:effectLst>
-            <a:outerShdw sx="100000" sy="100000" kx="0" ky="0" algn="bl" rotWithShape="0" blurRad="101600" dist="38100" dir="8100000">
-              <a:srgbClr val="000000">
-                <a:alpha val="12000"/>
-              </a:srgbClr>
-            </a:outerShdw>
-          </a:effectLst>
+            <a:srgbClr val="E2E8F0"/>
+          </a:solidFill>
+          <a:ln w="12700">
+            <a:solidFill>
+              <a:srgbClr val="E2E8F0"/>
+            </a:solidFill>
+            <a:prstDash val="solid"/>
+          </a:ln>
         </p:spPr>
       </p:sp>
       <p:sp>
@@ -22108,8 +21199,8 @@
         </p:nvSpPr>
         <p:spPr>
           <a:xfrm>
-            <a:off x="6519672" y="2258568"/>
-            <a:ext cx="1828800" cy="292608"/>
+            <a:off x="365760" y="3273552"/>
+            <a:ext cx="1371600" cy="658368"/>
           </a:xfrm>
           <a:prstGeom prst="rect">
             <a:avLst/>
@@ -22125,69 +21216,30 @@
               <a:buNone/>
             </a:pPr>
             <a:r>
-              <a:rPr lang="en-US" sz="1300" b="1" dirty="0">
-                <a:solidFill>
-                  <a:srgbClr val="9D174D"/>
+              <a:rPr lang="en-US" sz="1100" b="1" dirty="0">
+                <a:solidFill>
+                  <a:srgbClr val="475569"/>
                 </a:solidFill>
                 <a:latin typeface="Trebuchet MS" pitchFamily="34" charset="0"/>
                 <a:ea typeface="Trebuchet MS" pitchFamily="34" charset="-122"/>
                 <a:cs typeface="Trebuchet MS" pitchFamily="34" charset="-120"/>
               </a:rPr>
-              <a:t>ed</a:t>
-            </a:r>
-            <a:endParaRPr lang="en-US" sz="1300" dirty="0"/>
-          </a:p>
-        </p:txBody>
-      </p:sp>
-      <p:sp>
-        <p:nvSpPr>
-          <p:cNvPr id="24" name="Text 22"/>
-          <p:cNvSpPr/>
-          <p:nvPr/>
-        </p:nvSpPr>
-        <p:spPr>
-          <a:xfrm>
-            <a:off x="6519672" y="2569464"/>
-            <a:ext cx="1828800" cy="201168"/>
-          </a:xfrm>
-          <a:prstGeom prst="rect">
-            <a:avLst/>
-          </a:prstGeom>
-          <a:noFill/>
-          <a:ln/>
-        </p:spPr>
-        <p:txBody>
-          <a:bodyPr wrap="square" lIns="0" tIns="0" rIns="0" bIns="0" rtlCol="0" anchor="t"/>
-          <a:lstStyle/>
-          <a:p>
-            <a:pPr algn="ctr" indent="0" marL="0">
-              <a:buNone/>
-            </a:pPr>
-            <a:r>
-              <a:rPr lang="en-US" sz="850" dirty="0">
-                <a:solidFill>
-                  <a:srgbClr val="475569"/>
-                </a:solidFill>
-                <a:latin typeface="Calibri" pitchFamily="34" charset="0"/>
-                <a:ea typeface="Calibri" pitchFamily="34" charset="-122"/>
-                <a:cs typeface="Calibri" pitchFamily="34" charset="-120"/>
-              </a:rPr>
-              <a:t>already happened</a:t>
-            </a:r>
-            <a:endParaRPr lang="en-US" sz="850" dirty="0"/>
-          </a:p>
-        </p:txBody>
-      </p:sp>
-      <p:sp>
-        <p:nvSpPr>
-          <p:cNvPr id="25" name="Shape 23"/>
-          <p:cNvSpPr/>
-          <p:nvPr/>
-        </p:nvSpPr>
-        <p:spPr>
-          <a:xfrm>
-            <a:off x="365760" y="3273552"/>
-            <a:ext cx="1371600" cy="658368"/>
+              <a:t>Syllables</a:t>
+            </a:r>
+            <a:endParaRPr lang="en-US" sz="1100" dirty="0"/>
+          </a:p>
+        </p:txBody>
+      </p:sp>
+      <p:sp>
+        <p:nvSpPr>
+          <p:cNvPr id="24" name="Shape 22"/>
+          <p:cNvSpPr/>
+          <p:nvPr/>
+        </p:nvSpPr>
+        <p:spPr>
+          <a:xfrm>
+            <a:off x="1874520" y="3273552"/>
+            <a:ext cx="6903720" cy="658368"/>
           </a:xfrm>
           <a:prstGeom prst="rect">
             <a:avLst>
@@ -22195,11 +21247,38 @@
             </a:avLst>
           </a:prstGeom>
           <a:solidFill>
-            <a:srgbClr val="E2E8F0"/>
-          </a:solidFill>
-          <a:ln w="12700">
-            <a:solidFill>
-              <a:srgbClr val="E2E8F0"/>
+            <a:srgbClr val="CCFBF1"/>
+          </a:solidFill>
+          <a:ln w="12700">
+            <a:solidFill>
+              <a:srgbClr val="0D9488"/>
+            </a:solidFill>
+            <a:prstDash val="solid"/>
+          </a:ln>
+        </p:spPr>
+      </p:sp>
+      <p:sp>
+        <p:nvSpPr>
+          <p:cNvPr id="25" name="Shape 23"/>
+          <p:cNvSpPr/>
+          <p:nvPr/>
+        </p:nvSpPr>
+        <p:spPr>
+          <a:xfrm>
+            <a:off x="2999232" y="3364992"/>
+            <a:ext cx="1645920" cy="475488"/>
+          </a:xfrm>
+          <a:prstGeom prst="rect">
+            <a:avLst>
+              <a:gd name="adj" fmla="val 9615"/>
+            </a:avLst>
+          </a:prstGeom>
+          <a:solidFill>
+            <a:srgbClr val="FFFFFF"/>
+          </a:solidFill>
+          <a:ln w="12700">
+            <a:solidFill>
+              <a:srgbClr val="0D9488"/>
             </a:solidFill>
             <a:prstDash val="solid"/>
           </a:ln>
@@ -22213,8 +21292,8 @@
         </p:nvSpPr>
         <p:spPr>
           <a:xfrm>
-            <a:off x="365760" y="3273552"/>
-            <a:ext cx="1371600" cy="658368"/>
+            <a:off x="2999232" y="3364992"/>
+            <a:ext cx="1645920" cy="475488"/>
           </a:xfrm>
           <a:prstGeom prst="rect">
             <a:avLst/>
@@ -22230,15 +21309,186 @@
               <a:buNone/>
             </a:pPr>
             <a:r>
-              <a:rPr lang="en-US" sz="1100" b="1" dirty="0">
-                <a:solidFill>
-                  <a:srgbClr val="475569"/>
+              <a:rPr lang="en-US" sz="1400" b="1" dirty="0">
+                <a:solidFill>
+                  <a:srgbClr val="0D9488"/>
                 </a:solidFill>
                 <a:latin typeface="Trebuchet MS" pitchFamily="34" charset="0"/>
                 <a:ea typeface="Trebuchet MS" pitchFamily="34" charset="-122"/>
                 <a:cs typeface="Trebuchet MS" pitchFamily="34" charset="-120"/>
               </a:rPr>
-              <a:t>Syllables</a:t>
+              <a:t>fill</a:t>
+            </a:r>
+            <a:endParaRPr lang="en-US" sz="1400" dirty="0"/>
+          </a:p>
+        </p:txBody>
+      </p:sp>
+      <p:sp>
+        <p:nvSpPr>
+          <p:cNvPr id="27" name="Text 25"/>
+          <p:cNvSpPr/>
+          <p:nvPr/>
+        </p:nvSpPr>
+        <p:spPr>
+          <a:xfrm>
+            <a:off x="4645152" y="3364992"/>
+            <a:ext cx="1097280" cy="475488"/>
+          </a:xfrm>
+          <a:prstGeom prst="rect">
+            <a:avLst/>
+          </a:prstGeom>
+          <a:noFill/>
+          <a:ln/>
+        </p:spPr>
+        <p:txBody>
+          <a:bodyPr wrap="square" lIns="0" tIns="0" rIns="0" bIns="0" rtlCol="0" anchor="ctr"/>
+          <a:lstStyle/>
+          <a:p>
+            <a:pPr algn="ctr" indent="0" marL="0">
+              <a:buNone/>
+            </a:pPr>
+            <a:r>
+              <a:rPr lang="en-US" sz="1600" b="1" dirty="0">
+                <a:solidFill>
+                  <a:srgbClr val="0D9488"/>
+                </a:solidFill>
+                <a:latin typeface="Trebuchet MS" pitchFamily="34" charset="0"/>
+                <a:ea typeface="Trebuchet MS" pitchFamily="34" charset="-122"/>
+                <a:cs typeface="Trebuchet MS" pitchFamily="34" charset="-120"/>
+              </a:rPr>
+              <a:t>·</a:t>
+            </a:r>
+            <a:endParaRPr lang="en-US" sz="1600" dirty="0"/>
+          </a:p>
+        </p:txBody>
+      </p:sp>
+      <p:sp>
+        <p:nvSpPr>
+          <p:cNvPr id="28" name="Shape 26"/>
+          <p:cNvSpPr/>
+          <p:nvPr/>
+        </p:nvSpPr>
+        <p:spPr>
+          <a:xfrm>
+            <a:off x="5742432" y="3364992"/>
+            <a:ext cx="1645920" cy="475488"/>
+          </a:xfrm>
+          <a:prstGeom prst="rect">
+            <a:avLst>
+              <a:gd name="adj" fmla="val 9615"/>
+            </a:avLst>
+          </a:prstGeom>
+          <a:solidFill>
+            <a:srgbClr val="FFFFFF"/>
+          </a:solidFill>
+          <a:ln w="12700">
+            <a:solidFill>
+              <a:srgbClr val="0D9488"/>
+            </a:solidFill>
+            <a:prstDash val="solid"/>
+          </a:ln>
+        </p:spPr>
+      </p:sp>
+      <p:sp>
+        <p:nvSpPr>
+          <p:cNvPr id="29" name="Text 27"/>
+          <p:cNvSpPr/>
+          <p:nvPr/>
+        </p:nvSpPr>
+        <p:spPr>
+          <a:xfrm>
+            <a:off x="5742432" y="3364992"/>
+            <a:ext cx="1645920" cy="475488"/>
+          </a:xfrm>
+          <a:prstGeom prst="rect">
+            <a:avLst/>
+          </a:prstGeom>
+          <a:noFill/>
+          <a:ln/>
+        </p:spPr>
+        <p:txBody>
+          <a:bodyPr wrap="square" lIns="0" tIns="0" rIns="0" bIns="0" rtlCol="0" anchor="ctr"/>
+          <a:lstStyle/>
+          <a:p>
+            <a:pPr algn="ctr" indent="0" marL="0">
+              <a:buNone/>
+            </a:pPr>
+            <a:r>
+              <a:rPr lang="en-US" sz="1400" b="1" dirty="0">
+                <a:solidFill>
+                  <a:srgbClr val="0D9488"/>
+                </a:solidFill>
+                <a:latin typeface="Trebuchet MS" pitchFamily="34" charset="0"/>
+                <a:ea typeface="Trebuchet MS" pitchFamily="34" charset="-122"/>
+                <a:cs typeface="Trebuchet MS" pitchFamily="34" charset="-120"/>
+              </a:rPr>
+              <a:t>ing</a:t>
+            </a:r>
+            <a:endParaRPr lang="en-US" sz="1400" dirty="0"/>
+          </a:p>
+        </p:txBody>
+      </p:sp>
+      <p:sp>
+        <p:nvSpPr>
+          <p:cNvPr id="30" name="Shape 28"/>
+          <p:cNvSpPr/>
+          <p:nvPr/>
+        </p:nvSpPr>
+        <p:spPr>
+          <a:xfrm>
+            <a:off x="365760" y="4096512"/>
+            <a:ext cx="1371600" cy="804672"/>
+          </a:xfrm>
+          <a:prstGeom prst="rect">
+            <a:avLst>
+              <a:gd name="adj" fmla="val 6818"/>
+            </a:avLst>
+          </a:prstGeom>
+          <a:solidFill>
+            <a:srgbClr val="E2E8F0"/>
+          </a:solidFill>
+          <a:ln w="12700">
+            <a:solidFill>
+              <a:srgbClr val="E2E8F0"/>
+            </a:solidFill>
+            <a:prstDash val="solid"/>
+          </a:ln>
+        </p:spPr>
+      </p:sp>
+      <p:sp>
+        <p:nvSpPr>
+          <p:cNvPr id="31" name="Text 29"/>
+          <p:cNvSpPr/>
+          <p:nvPr/>
+        </p:nvSpPr>
+        <p:spPr>
+          <a:xfrm>
+            <a:off x="365760" y="4096512"/>
+            <a:ext cx="1371600" cy="804672"/>
+          </a:xfrm>
+          <a:prstGeom prst="rect">
+            <a:avLst/>
+          </a:prstGeom>
+          <a:noFill/>
+          <a:ln/>
+        </p:spPr>
+        <p:txBody>
+          <a:bodyPr wrap="square" lIns="0" tIns="0" rIns="0" bIns="0" rtlCol="0" anchor="ctr"/>
+          <a:lstStyle/>
+          <a:p>
+            <a:pPr algn="ctr" indent="0" marL="0">
+              <a:buNone/>
+            </a:pPr>
+            <a:r>
+              <a:rPr lang="en-US" sz="1100" b="1" dirty="0">
+                <a:solidFill>
+                  <a:srgbClr val="475569"/>
+                </a:solidFill>
+                <a:latin typeface="Trebuchet MS" pitchFamily="34" charset="0"/>
+                <a:ea typeface="Trebuchet MS" pitchFamily="34" charset="-122"/>
+                <a:cs typeface="Trebuchet MS" pitchFamily="34" charset="-120"/>
+              </a:rPr>
+              <a:t>Phonemes</a:t>
             </a:r>
             <a:endParaRPr lang="en-US" sz="1100" dirty="0"/>
           </a:p>
@@ -22246,13 +21496,13 @@
       </p:sp>
       <p:sp>
         <p:nvSpPr>
-          <p:cNvPr id="27" name="Shape 25"/>
-          <p:cNvSpPr/>
-          <p:nvPr/>
-        </p:nvSpPr>
-        <p:spPr>
-          <a:xfrm>
-            <a:off x="1874520" y="3273552"/>
+          <p:cNvPr id="32" name="Shape 30"/>
+          <p:cNvSpPr/>
+          <p:nvPr/>
+        </p:nvSpPr>
+        <p:spPr>
+          <a:xfrm>
+            <a:off x="1874520" y="4096512"/>
             <a:ext cx="6903720" cy="658368"/>
           </a:xfrm>
           <a:prstGeom prst="rect">
@@ -22261,30 +21511,30 @@
             </a:avLst>
           </a:prstGeom>
           <a:solidFill>
-            <a:srgbClr val="CCFBF1"/>
-          </a:solidFill>
-          <a:ln w="12700">
-            <a:solidFill>
-              <a:srgbClr val="0D9488"/>
-            </a:solidFill>
-            <a:prstDash val="solid"/>
-          </a:ln>
-        </p:spPr>
-      </p:sp>
-      <p:sp>
-        <p:nvSpPr>
-          <p:cNvPr id="28" name="Shape 26"/>
-          <p:cNvSpPr/>
-          <p:nvPr/>
-        </p:nvSpPr>
-        <p:spPr>
-          <a:xfrm>
-            <a:off x="2999232" y="3364992"/>
-            <a:ext cx="1645920" cy="475488"/>
+            <a:srgbClr val="FCE7F3"/>
+          </a:solidFill>
+          <a:ln w="12700">
+            <a:solidFill>
+              <a:srgbClr val="DB2777"/>
+            </a:solidFill>
+            <a:prstDash val="solid"/>
+          </a:ln>
+        </p:spPr>
+      </p:sp>
+      <p:sp>
+        <p:nvSpPr>
+          <p:cNvPr id="33" name="Shape 31"/>
+          <p:cNvSpPr/>
+          <p:nvPr/>
+        </p:nvSpPr>
+        <p:spPr>
+          <a:xfrm>
+            <a:off x="2427732" y="4169664"/>
+            <a:ext cx="685800" cy="475488"/>
           </a:xfrm>
           <a:prstGeom prst="rect">
             <a:avLst>
-              <a:gd name="adj" fmla="val 9615"/>
+              <a:gd name="adj" fmla="val 7692"/>
             </a:avLst>
           </a:prstGeom>
           <a:solidFill>
@@ -22292,22 +21542,22 @@
           </a:solidFill>
           <a:ln w="12700">
             <a:solidFill>
-              <a:srgbClr val="0D9488"/>
-            </a:solidFill>
-            <a:prstDash val="solid"/>
-          </a:ln>
-        </p:spPr>
-      </p:sp>
-      <p:sp>
-        <p:nvSpPr>
-          <p:cNvPr id="29" name="Text 27"/>
-          <p:cNvSpPr/>
-          <p:nvPr/>
-        </p:nvSpPr>
-        <p:spPr>
-          <a:xfrm>
-            <a:off x="2999232" y="3364992"/>
-            <a:ext cx="1645920" cy="475488"/>
+              <a:srgbClr val="DB2777"/>
+            </a:solidFill>
+            <a:prstDash val="solid"/>
+          </a:ln>
+        </p:spPr>
+      </p:sp>
+      <p:sp>
+        <p:nvSpPr>
+          <p:cNvPr id="34" name="Text 32"/>
+          <p:cNvSpPr/>
+          <p:nvPr/>
+        </p:nvSpPr>
+        <p:spPr>
+          <a:xfrm>
+            <a:off x="2427732" y="4169664"/>
+            <a:ext cx="685800" cy="475488"/>
           </a:xfrm>
           <a:prstGeom prst="rect">
             <a:avLst/>
@@ -22323,30 +21573,57 @@
               <a:buNone/>
             </a:pPr>
             <a:r>
-              <a:rPr lang="en-US" sz="1400" b="1" dirty="0">
-                <a:solidFill>
-                  <a:srgbClr val="0D9488"/>
+              <a:rPr lang="en-US" sz="900" b="1" dirty="0">
+                <a:solidFill>
+                  <a:srgbClr val="9D174D"/>
                 </a:solidFill>
                 <a:latin typeface="Trebuchet MS" pitchFamily="34" charset="0"/>
                 <a:ea typeface="Trebuchet MS" pitchFamily="34" charset="-122"/>
                 <a:cs typeface="Trebuchet MS" pitchFamily="34" charset="-120"/>
               </a:rPr>
-              <a:t>un</a:t>
-            </a:r>
-            <a:endParaRPr lang="en-US" sz="1400" dirty="0"/>
-          </a:p>
-        </p:txBody>
-      </p:sp>
-      <p:sp>
-        <p:nvSpPr>
-          <p:cNvPr id="30" name="Text 28"/>
-          <p:cNvSpPr/>
-          <p:nvPr/>
-        </p:nvSpPr>
-        <p:spPr>
-          <a:xfrm>
-            <a:off x="4645152" y="3364992"/>
-            <a:ext cx="1097280" cy="475488"/>
+              <a:t>f</a:t>
+            </a:r>
+            <a:endParaRPr lang="en-US" sz="900" dirty="0"/>
+          </a:p>
+        </p:txBody>
+      </p:sp>
+      <p:sp>
+        <p:nvSpPr>
+          <p:cNvPr id="35" name="Shape 33"/>
+          <p:cNvSpPr/>
+          <p:nvPr/>
+        </p:nvSpPr>
+        <p:spPr>
+          <a:xfrm>
+            <a:off x="3639312" y="4169664"/>
+            <a:ext cx="685800" cy="475488"/>
+          </a:xfrm>
+          <a:prstGeom prst="rect">
+            <a:avLst>
+              <a:gd name="adj" fmla="val 7692"/>
+            </a:avLst>
+          </a:prstGeom>
+          <a:solidFill>
+            <a:srgbClr val="FFFFFF"/>
+          </a:solidFill>
+          <a:ln w="12700">
+            <a:solidFill>
+              <a:srgbClr val="DB2777"/>
+            </a:solidFill>
+            <a:prstDash val="solid"/>
+          </a:ln>
+        </p:spPr>
+      </p:sp>
+      <p:sp>
+        <p:nvSpPr>
+          <p:cNvPr id="36" name="Text 34"/>
+          <p:cNvSpPr/>
+          <p:nvPr/>
+        </p:nvSpPr>
+        <p:spPr>
+          <a:xfrm>
+            <a:off x="3639312" y="4169664"/>
+            <a:ext cx="685800" cy="475488"/>
           </a:xfrm>
           <a:prstGeom prst="rect">
             <a:avLst/>
@@ -22362,34 +21639,34 @@
               <a:buNone/>
             </a:pPr>
             <a:r>
-              <a:rPr lang="en-US" sz="1600" b="1" dirty="0">
-                <a:solidFill>
-                  <a:srgbClr val="0D9488"/>
+              <a:rPr lang="en-US" sz="900" b="1" dirty="0">
+                <a:solidFill>
+                  <a:srgbClr val="9D174D"/>
                 </a:solidFill>
                 <a:latin typeface="Trebuchet MS" pitchFamily="34" charset="0"/>
                 <a:ea typeface="Trebuchet MS" pitchFamily="34" charset="-122"/>
                 <a:cs typeface="Trebuchet MS" pitchFamily="34" charset="-120"/>
               </a:rPr>
-              <a:t>·</a:t>
-            </a:r>
-            <a:endParaRPr lang="en-US" sz="1600" dirty="0"/>
-          </a:p>
-        </p:txBody>
-      </p:sp>
-      <p:sp>
-        <p:nvSpPr>
-          <p:cNvPr id="31" name="Shape 29"/>
-          <p:cNvSpPr/>
-          <p:nvPr/>
-        </p:nvSpPr>
-        <p:spPr>
-          <a:xfrm>
-            <a:off x="5742432" y="3364992"/>
-            <a:ext cx="1645920" cy="475488"/>
+              <a:t>i</a:t>
+            </a:r>
+            <a:endParaRPr lang="en-US" sz="900" dirty="0"/>
+          </a:p>
+        </p:txBody>
+      </p:sp>
+      <p:sp>
+        <p:nvSpPr>
+          <p:cNvPr id="37" name="Shape 35"/>
+          <p:cNvSpPr/>
+          <p:nvPr/>
+        </p:nvSpPr>
+        <p:spPr>
+          <a:xfrm>
+            <a:off x="4850892" y="4169664"/>
+            <a:ext cx="685800" cy="475488"/>
           </a:xfrm>
           <a:prstGeom prst="rect">
             <a:avLst>
-              <a:gd name="adj" fmla="val 9615"/>
+              <a:gd name="adj" fmla="val 7692"/>
             </a:avLst>
           </a:prstGeom>
           <a:solidFill>
@@ -22397,22 +21674,22 @@
           </a:solidFill>
           <a:ln w="12700">
             <a:solidFill>
-              <a:srgbClr val="0D9488"/>
-            </a:solidFill>
-            <a:prstDash val="solid"/>
-          </a:ln>
-        </p:spPr>
-      </p:sp>
-      <p:sp>
-        <p:nvSpPr>
-          <p:cNvPr id="32" name="Text 30"/>
-          <p:cNvSpPr/>
-          <p:nvPr/>
-        </p:nvSpPr>
-        <p:spPr>
-          <a:xfrm>
-            <a:off x="5742432" y="3364992"/>
-            <a:ext cx="1645920" cy="475488"/>
+              <a:srgbClr val="DB2777"/>
+            </a:solidFill>
+            <a:prstDash val="solid"/>
+          </a:ln>
+        </p:spPr>
+      </p:sp>
+      <p:sp>
+        <p:nvSpPr>
+          <p:cNvPr id="38" name="Text 36"/>
+          <p:cNvSpPr/>
+          <p:nvPr/>
+        </p:nvSpPr>
+        <p:spPr>
+          <a:xfrm>
+            <a:off x="4850892" y="4169664"/>
+            <a:ext cx="685800" cy="475488"/>
           </a:xfrm>
           <a:prstGeom prst="rect">
             <a:avLst/>
@@ -22428,57 +21705,57 @@
               <a:buNone/>
             </a:pPr>
             <a:r>
-              <a:rPr lang="en-US" sz="1400" b="1" dirty="0">
-                <a:solidFill>
-                  <a:srgbClr val="0D9488"/>
+              <a:rPr lang="en-US" sz="900" b="1" dirty="0">
+                <a:solidFill>
+                  <a:srgbClr val="9D174D"/>
                 </a:solidFill>
                 <a:latin typeface="Trebuchet MS" pitchFamily="34" charset="0"/>
                 <a:ea typeface="Trebuchet MS" pitchFamily="34" charset="-122"/>
                 <a:cs typeface="Trebuchet MS" pitchFamily="34" charset="-120"/>
               </a:rPr>
-              <a:t>filled</a:t>
-            </a:r>
-            <a:endParaRPr lang="en-US" sz="1400" dirty="0"/>
-          </a:p>
-        </p:txBody>
-      </p:sp>
-      <p:sp>
-        <p:nvSpPr>
-          <p:cNvPr id="33" name="Shape 31"/>
-          <p:cNvSpPr/>
-          <p:nvPr/>
-        </p:nvSpPr>
-        <p:spPr>
-          <a:xfrm>
-            <a:off x="365760" y="4096512"/>
-            <a:ext cx="1371600" cy="804672"/>
+              <a:t>ll</a:t>
+            </a:r>
+            <a:endParaRPr lang="en-US" sz="900" dirty="0"/>
+          </a:p>
+        </p:txBody>
+      </p:sp>
+      <p:sp>
+        <p:nvSpPr>
+          <p:cNvPr id="39" name="Shape 37"/>
+          <p:cNvSpPr/>
+          <p:nvPr/>
+        </p:nvSpPr>
+        <p:spPr>
+          <a:xfrm>
+            <a:off x="6062472" y="4169664"/>
+            <a:ext cx="685800" cy="475488"/>
           </a:xfrm>
           <a:prstGeom prst="rect">
             <a:avLst>
-              <a:gd name="adj" fmla="val 6818"/>
+              <a:gd name="adj" fmla="val 7692"/>
             </a:avLst>
           </a:prstGeom>
           <a:solidFill>
-            <a:srgbClr val="E2E8F0"/>
-          </a:solidFill>
-          <a:ln w="12700">
-            <a:solidFill>
-              <a:srgbClr val="E2E8F0"/>
-            </a:solidFill>
-            <a:prstDash val="solid"/>
-          </a:ln>
-        </p:spPr>
-      </p:sp>
-      <p:sp>
-        <p:nvSpPr>
-          <p:cNvPr id="34" name="Text 32"/>
-          <p:cNvSpPr/>
-          <p:nvPr/>
-        </p:nvSpPr>
-        <p:spPr>
-          <a:xfrm>
-            <a:off x="365760" y="4096512"/>
-            <a:ext cx="1371600" cy="804672"/>
+            <a:srgbClr val="FFFFFF"/>
+          </a:solidFill>
+          <a:ln w="12700">
+            <a:solidFill>
+              <a:srgbClr val="DB2777"/>
+            </a:solidFill>
+            <a:prstDash val="solid"/>
+          </a:ln>
+        </p:spPr>
+      </p:sp>
+      <p:sp>
+        <p:nvSpPr>
+          <p:cNvPr id="40" name="Text 38"/>
+          <p:cNvSpPr/>
+          <p:nvPr/>
+        </p:nvSpPr>
+        <p:spPr>
+          <a:xfrm>
+            <a:off x="6062472" y="4169664"/>
+            <a:ext cx="685800" cy="475488"/>
           </a:xfrm>
           <a:prstGeom prst="rect">
             <a:avLst/>
@@ -22494,38 +21771,38 @@
               <a:buNone/>
             </a:pPr>
             <a:r>
-              <a:rPr lang="en-US" sz="1100" b="1" dirty="0">
-                <a:solidFill>
-                  <a:srgbClr val="475569"/>
+              <a:rPr lang="en-US" sz="900" b="1" dirty="0">
+                <a:solidFill>
+                  <a:srgbClr val="9D174D"/>
                 </a:solidFill>
                 <a:latin typeface="Trebuchet MS" pitchFamily="34" charset="0"/>
                 <a:ea typeface="Trebuchet MS" pitchFamily="34" charset="-122"/>
                 <a:cs typeface="Trebuchet MS" pitchFamily="34" charset="-120"/>
               </a:rPr>
-              <a:t>Phonemes</a:t>
-            </a:r>
-            <a:endParaRPr lang="en-US" sz="1100" dirty="0"/>
-          </a:p>
-        </p:txBody>
-      </p:sp>
-      <p:sp>
-        <p:nvSpPr>
-          <p:cNvPr id="35" name="Shape 33"/>
-          <p:cNvSpPr/>
-          <p:nvPr/>
-        </p:nvSpPr>
-        <p:spPr>
-          <a:xfrm>
-            <a:off x="1874520" y="4096512"/>
-            <a:ext cx="6903720" cy="804672"/>
+              <a:t>i</a:t>
+            </a:r>
+            <a:endParaRPr lang="en-US" sz="900" dirty="0"/>
+          </a:p>
+        </p:txBody>
+      </p:sp>
+      <p:sp>
+        <p:nvSpPr>
+          <p:cNvPr id="41" name="Shape 39"/>
+          <p:cNvSpPr/>
+          <p:nvPr/>
+        </p:nvSpPr>
+        <p:spPr>
+          <a:xfrm>
+            <a:off x="7274052" y="4169664"/>
+            <a:ext cx="685800" cy="475488"/>
           </a:xfrm>
           <a:prstGeom prst="rect">
             <a:avLst>
-              <a:gd name="adj" fmla="val 6818"/>
+              <a:gd name="adj" fmla="val 7692"/>
             </a:avLst>
           </a:prstGeom>
           <a:solidFill>
-            <a:srgbClr val="FCE7F3"/>
+            <a:srgbClr val="FFFFFF"/>
           </a:solidFill>
           <a:ln w="12700">
             <a:solidFill>
@@ -22537,41 +21814,14 @@
       </p:sp>
       <p:sp>
         <p:nvSpPr>
-          <p:cNvPr id="36" name="Shape 34"/>
-          <p:cNvSpPr/>
-          <p:nvPr/>
-        </p:nvSpPr>
-        <p:spPr>
-          <a:xfrm>
-            <a:off x="2254649" y="4169664"/>
-            <a:ext cx="685800" cy="384048"/>
-          </a:xfrm>
-          <a:prstGeom prst="rect">
-            <a:avLst>
-              <a:gd name="adj" fmla="val 9524"/>
-            </a:avLst>
-          </a:prstGeom>
-          <a:solidFill>
-            <a:srgbClr val="FFFFFF"/>
-          </a:solidFill>
-          <a:ln w="12700">
-            <a:solidFill>
-              <a:srgbClr val="DB2777"/>
-            </a:solidFill>
-            <a:prstDash val="solid"/>
-          </a:ln>
-        </p:spPr>
-      </p:sp>
-      <p:sp>
-        <p:nvSpPr>
-          <p:cNvPr id="37" name="Text 35"/>
-          <p:cNvSpPr/>
-          <p:nvPr/>
-        </p:nvSpPr>
-        <p:spPr>
-          <a:xfrm>
-            <a:off x="2254649" y="4169664"/>
-            <a:ext cx="685800" cy="384048"/>
+          <p:cNvPr id="42" name="Text 40"/>
+          <p:cNvSpPr/>
+          <p:nvPr/>
+        </p:nvSpPr>
+        <p:spPr>
+          <a:xfrm>
+            <a:off x="7274052" y="4169664"/>
+            <a:ext cx="685800" cy="475488"/>
           </a:xfrm>
           <a:prstGeom prst="rect">
             <a:avLst/>
@@ -22595,378 +21845,9 @@
                 <a:ea typeface="Trebuchet MS" pitchFamily="34" charset="-122"/>
                 <a:cs typeface="Trebuchet MS" pitchFamily="34" charset="-120"/>
               </a:rPr>
-              <a:t>u</a:t>
+              <a:t>ng</a:t>
             </a:r>
             <a:endParaRPr lang="en-US" sz="900" dirty="0"/>
-          </a:p>
-        </p:txBody>
-      </p:sp>
-      <p:sp>
-        <p:nvSpPr>
-          <p:cNvPr id="38" name="Shape 36"/>
-          <p:cNvSpPr/>
-          <p:nvPr/>
-        </p:nvSpPr>
-        <p:spPr>
-          <a:xfrm>
-            <a:off x="3293146" y="4169664"/>
-            <a:ext cx="685800" cy="384048"/>
-          </a:xfrm>
-          <a:prstGeom prst="rect">
-            <a:avLst>
-              <a:gd name="adj" fmla="val 9524"/>
-            </a:avLst>
-          </a:prstGeom>
-          <a:solidFill>
-            <a:srgbClr val="FFFFFF"/>
-          </a:solidFill>
-          <a:ln w="12700">
-            <a:solidFill>
-              <a:srgbClr val="DB2777"/>
-            </a:solidFill>
-            <a:prstDash val="solid"/>
-          </a:ln>
-        </p:spPr>
-      </p:sp>
-      <p:sp>
-        <p:nvSpPr>
-          <p:cNvPr id="39" name="Text 37"/>
-          <p:cNvSpPr/>
-          <p:nvPr/>
-        </p:nvSpPr>
-        <p:spPr>
-          <a:xfrm>
-            <a:off x="3293146" y="4169664"/>
-            <a:ext cx="685800" cy="384048"/>
-          </a:xfrm>
-          <a:prstGeom prst="rect">
-            <a:avLst/>
-          </a:prstGeom>
-          <a:noFill/>
-          <a:ln/>
-        </p:spPr>
-        <p:txBody>
-          <a:bodyPr wrap="square" lIns="0" tIns="0" rIns="0" bIns="0" rtlCol="0" anchor="ctr"/>
-          <a:lstStyle/>
-          <a:p>
-            <a:pPr algn="ctr" indent="0" marL="0">
-              <a:buNone/>
-            </a:pPr>
-            <a:r>
-              <a:rPr lang="en-US" sz="900" b="1" dirty="0">
-                <a:solidFill>
-                  <a:srgbClr val="9D174D"/>
-                </a:solidFill>
-                <a:latin typeface="Trebuchet MS" pitchFamily="34" charset="0"/>
-                <a:ea typeface="Trebuchet MS" pitchFamily="34" charset="-122"/>
-                <a:cs typeface="Trebuchet MS" pitchFamily="34" charset="-120"/>
-              </a:rPr>
-              <a:t>n</a:t>
-            </a:r>
-            <a:endParaRPr lang="en-US" sz="900" dirty="0"/>
-          </a:p>
-        </p:txBody>
-      </p:sp>
-      <p:sp>
-        <p:nvSpPr>
-          <p:cNvPr id="40" name="Shape 38"/>
-          <p:cNvSpPr/>
-          <p:nvPr/>
-        </p:nvSpPr>
-        <p:spPr>
-          <a:xfrm>
-            <a:off x="4331643" y="4169664"/>
-            <a:ext cx="685800" cy="384048"/>
-          </a:xfrm>
-          <a:prstGeom prst="rect">
-            <a:avLst>
-              <a:gd name="adj" fmla="val 9524"/>
-            </a:avLst>
-          </a:prstGeom>
-          <a:solidFill>
-            <a:srgbClr val="FFFFFF"/>
-          </a:solidFill>
-          <a:ln w="12700">
-            <a:solidFill>
-              <a:srgbClr val="DB2777"/>
-            </a:solidFill>
-            <a:prstDash val="solid"/>
-          </a:ln>
-        </p:spPr>
-      </p:sp>
-      <p:sp>
-        <p:nvSpPr>
-          <p:cNvPr id="41" name="Text 39"/>
-          <p:cNvSpPr/>
-          <p:nvPr/>
-        </p:nvSpPr>
-        <p:spPr>
-          <a:xfrm>
-            <a:off x="4331643" y="4169664"/>
-            <a:ext cx="685800" cy="384048"/>
-          </a:xfrm>
-          <a:prstGeom prst="rect">
-            <a:avLst/>
-          </a:prstGeom>
-          <a:noFill/>
-          <a:ln/>
-        </p:spPr>
-        <p:txBody>
-          <a:bodyPr wrap="square" lIns="0" tIns="0" rIns="0" bIns="0" rtlCol="0" anchor="ctr"/>
-          <a:lstStyle/>
-          <a:p>
-            <a:pPr algn="ctr" indent="0" marL="0">
-              <a:buNone/>
-            </a:pPr>
-            <a:r>
-              <a:rPr lang="en-US" sz="900" b="1" dirty="0">
-                <a:solidFill>
-                  <a:srgbClr val="9D174D"/>
-                </a:solidFill>
-                <a:latin typeface="Trebuchet MS" pitchFamily="34" charset="0"/>
-                <a:ea typeface="Trebuchet MS" pitchFamily="34" charset="-122"/>
-                <a:cs typeface="Trebuchet MS" pitchFamily="34" charset="-120"/>
-              </a:rPr>
-              <a:t>f</a:t>
-            </a:r>
-            <a:endParaRPr lang="en-US" sz="900" dirty="0"/>
-          </a:p>
-        </p:txBody>
-      </p:sp>
-      <p:sp>
-        <p:nvSpPr>
-          <p:cNvPr id="42" name="Shape 40"/>
-          <p:cNvSpPr/>
-          <p:nvPr/>
-        </p:nvSpPr>
-        <p:spPr>
-          <a:xfrm>
-            <a:off x="5370141" y="4169664"/>
-            <a:ext cx="685800" cy="384048"/>
-          </a:xfrm>
-          <a:prstGeom prst="rect">
-            <a:avLst>
-              <a:gd name="adj" fmla="val 9524"/>
-            </a:avLst>
-          </a:prstGeom>
-          <a:solidFill>
-            <a:srgbClr val="FFFFFF"/>
-          </a:solidFill>
-          <a:ln w="12700">
-            <a:solidFill>
-              <a:srgbClr val="DB2777"/>
-            </a:solidFill>
-            <a:prstDash val="solid"/>
-          </a:ln>
-        </p:spPr>
-      </p:sp>
-      <p:sp>
-        <p:nvSpPr>
-          <p:cNvPr id="43" name="Text 41"/>
-          <p:cNvSpPr/>
-          <p:nvPr/>
-        </p:nvSpPr>
-        <p:spPr>
-          <a:xfrm>
-            <a:off x="5370141" y="4169664"/>
-            <a:ext cx="685800" cy="384048"/>
-          </a:xfrm>
-          <a:prstGeom prst="rect">
-            <a:avLst/>
-          </a:prstGeom>
-          <a:noFill/>
-          <a:ln/>
-        </p:spPr>
-        <p:txBody>
-          <a:bodyPr wrap="square" lIns="0" tIns="0" rIns="0" bIns="0" rtlCol="0" anchor="ctr"/>
-          <a:lstStyle/>
-          <a:p>
-            <a:pPr algn="ctr" indent="0" marL="0">
-              <a:buNone/>
-            </a:pPr>
-            <a:r>
-              <a:rPr lang="en-US" sz="900" b="1" dirty="0">
-                <a:solidFill>
-                  <a:srgbClr val="9D174D"/>
-                </a:solidFill>
-                <a:latin typeface="Trebuchet MS" pitchFamily="34" charset="0"/>
-                <a:ea typeface="Trebuchet MS" pitchFamily="34" charset="-122"/>
-                <a:cs typeface="Trebuchet MS" pitchFamily="34" charset="-120"/>
-              </a:rPr>
-              <a:t>i</a:t>
-            </a:r>
-            <a:endParaRPr lang="en-US" sz="900" dirty="0"/>
-          </a:p>
-        </p:txBody>
-      </p:sp>
-      <p:sp>
-        <p:nvSpPr>
-          <p:cNvPr id="44" name="Shape 42"/>
-          <p:cNvSpPr/>
-          <p:nvPr/>
-        </p:nvSpPr>
-        <p:spPr>
-          <a:xfrm>
-            <a:off x="6408638" y="4169664"/>
-            <a:ext cx="685800" cy="384048"/>
-          </a:xfrm>
-          <a:prstGeom prst="rect">
-            <a:avLst>
-              <a:gd name="adj" fmla="val 9524"/>
-            </a:avLst>
-          </a:prstGeom>
-          <a:solidFill>
-            <a:srgbClr val="FFFFFF"/>
-          </a:solidFill>
-          <a:ln w="12700">
-            <a:solidFill>
-              <a:srgbClr val="DB2777"/>
-            </a:solidFill>
-            <a:prstDash val="solid"/>
-          </a:ln>
-        </p:spPr>
-      </p:sp>
-      <p:sp>
-        <p:nvSpPr>
-          <p:cNvPr id="45" name="Text 43"/>
-          <p:cNvSpPr/>
-          <p:nvPr/>
-        </p:nvSpPr>
-        <p:spPr>
-          <a:xfrm>
-            <a:off x="6408638" y="4169664"/>
-            <a:ext cx="685800" cy="384048"/>
-          </a:xfrm>
-          <a:prstGeom prst="rect">
-            <a:avLst/>
-          </a:prstGeom>
-          <a:noFill/>
-          <a:ln/>
-        </p:spPr>
-        <p:txBody>
-          <a:bodyPr wrap="square" lIns="0" tIns="0" rIns="0" bIns="0" rtlCol="0" anchor="ctr"/>
-          <a:lstStyle/>
-          <a:p>
-            <a:pPr algn="ctr" indent="0" marL="0">
-              <a:buNone/>
-            </a:pPr>
-            <a:r>
-              <a:rPr lang="en-US" sz="900" b="1" dirty="0">
-                <a:solidFill>
-                  <a:srgbClr val="9D174D"/>
-                </a:solidFill>
-                <a:latin typeface="Trebuchet MS" pitchFamily="34" charset="0"/>
-                <a:ea typeface="Trebuchet MS" pitchFamily="34" charset="-122"/>
-                <a:cs typeface="Trebuchet MS" pitchFamily="34" charset="-120"/>
-              </a:rPr>
-              <a:t>ll</a:t>
-            </a:r>
-            <a:endParaRPr lang="en-US" sz="900" dirty="0"/>
-          </a:p>
-        </p:txBody>
-      </p:sp>
-      <p:sp>
-        <p:nvSpPr>
-          <p:cNvPr id="46" name="Shape 44"/>
-          <p:cNvSpPr/>
-          <p:nvPr/>
-        </p:nvSpPr>
-        <p:spPr>
-          <a:xfrm>
-            <a:off x="7447135" y="4169664"/>
-            <a:ext cx="685800" cy="384048"/>
-          </a:xfrm>
-          <a:prstGeom prst="rect">
-            <a:avLst>
-              <a:gd name="adj" fmla="val 9524"/>
-            </a:avLst>
-          </a:prstGeom>
-          <a:solidFill>
-            <a:srgbClr val="FFFFFF"/>
-          </a:solidFill>
-          <a:ln w="12700">
-            <a:solidFill>
-              <a:srgbClr val="DB2777"/>
-            </a:solidFill>
-            <a:prstDash val="solid"/>
-          </a:ln>
-        </p:spPr>
-      </p:sp>
-      <p:sp>
-        <p:nvSpPr>
-          <p:cNvPr id="47" name="Text 45"/>
-          <p:cNvSpPr/>
-          <p:nvPr/>
-        </p:nvSpPr>
-        <p:spPr>
-          <a:xfrm>
-            <a:off x="7447135" y="4169664"/>
-            <a:ext cx="685800" cy="384048"/>
-          </a:xfrm>
-          <a:prstGeom prst="rect">
-            <a:avLst/>
-          </a:prstGeom>
-          <a:noFill/>
-          <a:ln/>
-        </p:spPr>
-        <p:txBody>
-          <a:bodyPr wrap="square" lIns="0" tIns="0" rIns="0" bIns="0" rtlCol="0" anchor="ctr"/>
-          <a:lstStyle/>
-          <a:p>
-            <a:pPr algn="ctr" indent="0" marL="0">
-              <a:buNone/>
-            </a:pPr>
-            <a:r>
-              <a:rPr lang="en-US" sz="900" b="1" dirty="0">
-                <a:solidFill>
-                  <a:srgbClr val="9D174D"/>
-                </a:solidFill>
-                <a:latin typeface="Trebuchet MS" pitchFamily="34" charset="0"/>
-                <a:ea typeface="Trebuchet MS" pitchFamily="34" charset="-122"/>
-                <a:cs typeface="Trebuchet MS" pitchFamily="34" charset="-120"/>
-              </a:rPr>
-              <a:t>ed</a:t>
-            </a:r>
-            <a:endParaRPr lang="en-US" sz="900" dirty="0"/>
-          </a:p>
-        </p:txBody>
-      </p:sp>
-      <p:sp>
-        <p:nvSpPr>
-          <p:cNvPr id="48" name="Text 46"/>
-          <p:cNvSpPr/>
-          <p:nvPr/>
-        </p:nvSpPr>
-        <p:spPr>
-          <a:xfrm>
-            <a:off x="7447135" y="4572000"/>
-            <a:ext cx="685800" cy="219456"/>
-          </a:xfrm>
-          <a:prstGeom prst="rect">
-            <a:avLst/>
-          </a:prstGeom>
-          <a:noFill/>
-          <a:ln/>
-        </p:spPr>
-        <p:txBody>
-          <a:bodyPr wrap="square" lIns="0" tIns="0" rIns="0" bIns="0" rtlCol="0" anchor="t"/>
-          <a:lstStyle/>
-          <a:p>
-            <a:pPr algn="ctr" indent="0" marL="0">
-              <a:buNone/>
-            </a:pPr>
-            <a:r>
-              <a:rPr lang="en-US" sz="750" i="1" dirty="0">
-                <a:solidFill>
-                  <a:srgbClr val="94A3B8"/>
-                </a:solidFill>
-                <a:latin typeface="Calibri" pitchFamily="34" charset="0"/>
-                <a:ea typeface="Calibri" pitchFamily="34" charset="-122"/>
-                <a:cs typeface="Calibri" pitchFamily="34" charset="-120"/>
-              </a:rPr>
-              <a:t>/d/</a:t>
-            </a:r>
-            <a:endParaRPr lang="en-US" sz="750" dirty="0"/>
           </a:p>
         </p:txBody>
       </p:sp>
@@ -23395,7 +22276,7 @@
                 <a:ea typeface="Trebuchet MS" pitchFamily="34" charset="-122"/>
                 <a:cs typeface="Trebuchet MS" pitchFamily="34" charset="-120"/>
               </a:rPr>
-              <a:t>filler</a:t>
+              <a:t>infill</a:t>
             </a:r>
             <a:endParaRPr lang="en-US" sz="2800" dirty="0"/>
           </a:p>
@@ -24222,7 +23103,7 @@
                 <a:ea typeface="Trebuchet MS" pitchFamily="34" charset="-122"/>
                 <a:cs typeface="Trebuchet MS" pitchFamily="34" charset="-120"/>
               </a:rPr>
-              <a:t>filler</a:t>
+              <a:t>infill</a:t>
             </a:r>
             <a:endParaRPr lang="en-US" sz="2800" dirty="0"/>
           </a:p>
@@ -24311,11 +23192,11 @@
             </a:avLst>
           </a:prstGeom>
           <a:solidFill>
-            <a:srgbClr val="CCFBF1"/>
+            <a:srgbClr val="DDD6FE"/>
           </a:solidFill>
           <a:ln w="19050">
             <a:solidFill>
-              <a:srgbClr val="0D9488"/>
+              <a:srgbClr val="7C3AED"/>
             </a:solidFill>
             <a:prstDash val="solid"/>
           </a:ln>
@@ -24355,13 +23236,13 @@
             <a:r>
               <a:rPr lang="en-US" sz="1300" b="1" dirty="0">
                 <a:solidFill>
-                  <a:srgbClr val="0F766E"/>
+                  <a:srgbClr val="4C1D95"/>
                 </a:solidFill>
                 <a:latin typeface="Trebuchet MS" pitchFamily="34" charset="0"/>
                 <a:ea typeface="Trebuchet MS" pitchFamily="34" charset="-122"/>
                 <a:cs typeface="Trebuchet MS" pitchFamily="34" charset="-120"/>
               </a:rPr>
-              <a:t>fill</a:t>
+              <a:t>in</a:t>
             </a:r>
             <a:endParaRPr lang="en-US" sz="1300" dirty="0"/>
           </a:p>
@@ -24400,7 +23281,7 @@
                 <a:ea typeface="Calibri" pitchFamily="34" charset="-122"/>
                 <a:cs typeface="Calibri" pitchFamily="34" charset="-120"/>
               </a:rPr>
-              <a:t>to make full</a:t>
+              <a:t>into, within</a:t>
             </a:r>
             <a:endParaRPr lang="en-US" sz="850" dirty="0"/>
           </a:p>
@@ -24423,11 +23304,11 @@
             </a:avLst>
           </a:prstGeom>
           <a:solidFill>
-            <a:srgbClr val="FCE7F3"/>
+            <a:srgbClr val="CCFBF1"/>
           </a:solidFill>
           <a:ln w="19050">
             <a:solidFill>
-              <a:srgbClr val="DB2777"/>
+              <a:srgbClr val="0D9488"/>
             </a:solidFill>
             <a:prstDash val="solid"/>
           </a:ln>
@@ -24467,13 +23348,13 @@
             <a:r>
               <a:rPr lang="en-US" sz="1300" b="1" dirty="0">
                 <a:solidFill>
-                  <a:srgbClr val="9D174D"/>
+                  <a:srgbClr val="0F766E"/>
                 </a:solidFill>
                 <a:latin typeface="Trebuchet MS" pitchFamily="34" charset="0"/>
                 <a:ea typeface="Trebuchet MS" pitchFamily="34" charset="-122"/>
                 <a:cs typeface="Trebuchet MS" pitchFamily="34" charset="-120"/>
               </a:rPr>
-              <a:t>er</a:t>
+              <a:t>fill</a:t>
             </a:r>
             <a:endParaRPr lang="en-US" sz="1300" dirty="0"/>
           </a:p>
@@ -24512,7 +23393,7 @@
                 <a:ea typeface="Calibri" pitchFamily="34" charset="-122"/>
                 <a:cs typeface="Calibri" pitchFamily="34" charset="-120"/>
               </a:rPr>
-              <a:t>a thing that does something</a:t>
+              <a:t>to make full</a:t>
             </a:r>
             <a:endParaRPr lang="en-US" sz="850" dirty="0"/>
           </a:p>
@@ -25926,7 +24807,7 @@
                 <a:ea typeface="Trebuchet MS" pitchFamily="34" charset="-122"/>
                 <a:cs typeface="Trebuchet MS" pitchFamily="34" charset="-120"/>
               </a:rPr>
-              <a:t>filler</a:t>
+              <a:t>infill</a:t>
             </a:r>
             <a:endParaRPr lang="en-US" sz="2800" dirty="0"/>
           </a:p>
@@ -26015,11 +24896,11 @@
             </a:avLst>
           </a:prstGeom>
           <a:solidFill>
-            <a:srgbClr val="CCFBF1"/>
+            <a:srgbClr val="DDD6FE"/>
           </a:solidFill>
           <a:ln w="19050">
             <a:solidFill>
-              <a:srgbClr val="0D9488"/>
+              <a:srgbClr val="7C3AED"/>
             </a:solidFill>
             <a:prstDash val="solid"/>
           </a:ln>
@@ -26059,13 +24940,13 @@
             <a:r>
               <a:rPr lang="en-US" sz="1300" b="1" dirty="0">
                 <a:solidFill>
-                  <a:srgbClr val="0F766E"/>
+                  <a:srgbClr val="4C1D95"/>
                 </a:solidFill>
                 <a:latin typeface="Trebuchet MS" pitchFamily="34" charset="0"/>
                 <a:ea typeface="Trebuchet MS" pitchFamily="34" charset="-122"/>
                 <a:cs typeface="Trebuchet MS" pitchFamily="34" charset="-120"/>
               </a:rPr>
-              <a:t>fill</a:t>
+              <a:t>in</a:t>
             </a:r>
             <a:endParaRPr lang="en-US" sz="1300" dirty="0"/>
           </a:p>
@@ -26104,7 +24985,7 @@
                 <a:ea typeface="Calibri" pitchFamily="34" charset="-122"/>
                 <a:cs typeface="Calibri" pitchFamily="34" charset="-120"/>
               </a:rPr>
-              <a:t>to make full</a:t>
+              <a:t>into, within</a:t>
             </a:r>
             <a:endParaRPr lang="en-US" sz="850" dirty="0"/>
           </a:p>
@@ -26127,11 +25008,11 @@
             </a:avLst>
           </a:prstGeom>
           <a:solidFill>
-            <a:srgbClr val="FCE7F3"/>
+            <a:srgbClr val="CCFBF1"/>
           </a:solidFill>
           <a:ln w="19050">
             <a:solidFill>
-              <a:srgbClr val="DB2777"/>
+              <a:srgbClr val="0D9488"/>
             </a:solidFill>
             <a:prstDash val="solid"/>
           </a:ln>
@@ -26171,13 +25052,13 @@
             <a:r>
               <a:rPr lang="en-US" sz="1300" b="1" dirty="0">
                 <a:solidFill>
-                  <a:srgbClr val="9D174D"/>
+                  <a:srgbClr val="0F766E"/>
                 </a:solidFill>
                 <a:latin typeface="Trebuchet MS" pitchFamily="34" charset="0"/>
                 <a:ea typeface="Trebuchet MS" pitchFamily="34" charset="-122"/>
                 <a:cs typeface="Trebuchet MS" pitchFamily="34" charset="-120"/>
               </a:rPr>
-              <a:t>er</a:t>
+              <a:t>fill</a:t>
             </a:r>
             <a:endParaRPr lang="en-US" sz="1300" dirty="0"/>
           </a:p>
@@ -26216,7 +25097,7 @@
                 <a:ea typeface="Calibri" pitchFamily="34" charset="-122"/>
                 <a:cs typeface="Calibri" pitchFamily="34" charset="-120"/>
               </a:rPr>
-              <a:t>a thing that does something</a:t>
+              <a:t>to make full</a:t>
             </a:r>
             <a:endParaRPr lang="en-US" sz="850" dirty="0"/>
           </a:p>
@@ -26375,7 +25256,7 @@
                 <a:ea typeface="Trebuchet MS" pitchFamily="34" charset="-122"/>
                 <a:cs typeface="Trebuchet MS" pitchFamily="34" charset="-120"/>
               </a:rPr>
-              <a:t>fill</a:t>
+              <a:t>in</a:t>
             </a:r>
             <a:endParaRPr lang="en-US" sz="1400" dirty="0"/>
           </a:p>
@@ -26480,7 +25361,7 @@
                 <a:ea typeface="Trebuchet MS" pitchFamily="34" charset="-122"/>
                 <a:cs typeface="Trebuchet MS" pitchFamily="34" charset="-120"/>
               </a:rPr>
-              <a:t>er</a:t>
+              <a:t>fill</a:t>
             </a:r>
             <a:endParaRPr lang="en-US" sz="1400" dirty="0"/>
           </a:p>
@@ -27043,7 +25924,7 @@
                 <a:ea typeface="Trebuchet MS" pitchFamily="34" charset="-122"/>
                 <a:cs typeface="Trebuchet MS" pitchFamily="34" charset="-120"/>
               </a:rPr>
-              <a:t>filler</a:t>
+              <a:t>infill</a:t>
             </a:r>
             <a:endParaRPr lang="en-US" sz="2800" dirty="0"/>
           </a:p>
@@ -27132,11 +26013,11 @@
             </a:avLst>
           </a:prstGeom>
           <a:solidFill>
-            <a:srgbClr val="CCFBF1"/>
+            <a:srgbClr val="DDD6FE"/>
           </a:solidFill>
           <a:ln w="19050">
             <a:solidFill>
-              <a:srgbClr val="0D9488"/>
+              <a:srgbClr val="7C3AED"/>
             </a:solidFill>
             <a:prstDash val="solid"/>
           </a:ln>
@@ -27176,13 +26057,13 @@
             <a:r>
               <a:rPr lang="en-US" sz="1300" b="1" dirty="0">
                 <a:solidFill>
-                  <a:srgbClr val="0F766E"/>
+                  <a:srgbClr val="4C1D95"/>
                 </a:solidFill>
                 <a:latin typeface="Trebuchet MS" pitchFamily="34" charset="0"/>
                 <a:ea typeface="Trebuchet MS" pitchFamily="34" charset="-122"/>
                 <a:cs typeface="Trebuchet MS" pitchFamily="34" charset="-120"/>
               </a:rPr>
-              <a:t>fill</a:t>
+              <a:t>in</a:t>
             </a:r>
             <a:endParaRPr lang="en-US" sz="1300" dirty="0"/>
           </a:p>
@@ -27221,7 +26102,7 @@
                 <a:ea typeface="Calibri" pitchFamily="34" charset="-122"/>
                 <a:cs typeface="Calibri" pitchFamily="34" charset="-120"/>
               </a:rPr>
-              <a:t>to make full</a:t>
+              <a:t>into, within</a:t>
             </a:r>
             <a:endParaRPr lang="en-US" sz="850" dirty="0"/>
           </a:p>
@@ -27244,11 +26125,11 @@
             </a:avLst>
           </a:prstGeom>
           <a:solidFill>
-            <a:srgbClr val="FCE7F3"/>
+            <a:srgbClr val="CCFBF1"/>
           </a:solidFill>
           <a:ln w="19050">
             <a:solidFill>
-              <a:srgbClr val="DB2777"/>
+              <a:srgbClr val="0D9488"/>
             </a:solidFill>
             <a:prstDash val="solid"/>
           </a:ln>
@@ -27288,13 +26169,13 @@
             <a:r>
               <a:rPr lang="en-US" sz="1300" b="1" dirty="0">
                 <a:solidFill>
-                  <a:srgbClr val="9D174D"/>
+                  <a:srgbClr val="0F766E"/>
                 </a:solidFill>
                 <a:latin typeface="Trebuchet MS" pitchFamily="34" charset="0"/>
                 <a:ea typeface="Trebuchet MS" pitchFamily="34" charset="-122"/>
                 <a:cs typeface="Trebuchet MS" pitchFamily="34" charset="-120"/>
               </a:rPr>
-              <a:t>er</a:t>
+              <a:t>fill</a:t>
             </a:r>
             <a:endParaRPr lang="en-US" sz="1300" dirty="0"/>
           </a:p>
@@ -27333,7 +26214,7 @@
                 <a:ea typeface="Calibri" pitchFamily="34" charset="-122"/>
                 <a:cs typeface="Calibri" pitchFamily="34" charset="-120"/>
               </a:rPr>
-              <a:t>a thing that does something</a:t>
+              <a:t>to make full</a:t>
             </a:r>
             <a:endParaRPr lang="en-US" sz="850" dirty="0"/>
           </a:p>
@@ -27492,7 +26373,7 @@
                 <a:ea typeface="Trebuchet MS" pitchFamily="34" charset="-122"/>
                 <a:cs typeface="Trebuchet MS" pitchFamily="34" charset="-120"/>
               </a:rPr>
-              <a:t>fill</a:t>
+              <a:t>in</a:t>
             </a:r>
             <a:endParaRPr lang="en-US" sz="1400" dirty="0"/>
           </a:p>
@@ -27597,7 +26478,7 @@
                 <a:ea typeface="Trebuchet MS" pitchFamily="34" charset="-122"/>
                 <a:cs typeface="Trebuchet MS" pitchFamily="34" charset="-120"/>
               </a:rPr>
-              <a:t>er</a:t>
+              <a:t>fill</a:t>
             </a:r>
             <a:endParaRPr lang="en-US" sz="1400" dirty="0"/>
           </a:p>
@@ -27704,7 +26585,7 @@
         </p:nvSpPr>
         <p:spPr>
           <a:xfrm>
-            <a:off x="2670048" y="4169664"/>
+            <a:off x="2427732" y="4169664"/>
             <a:ext cx="685800" cy="475488"/>
           </a:xfrm>
           <a:prstGeom prst="rect">
@@ -27731,7 +26612,7 @@
         </p:nvSpPr>
         <p:spPr>
           <a:xfrm>
-            <a:off x="2670048" y="4169664"/>
+            <a:off x="2427732" y="4169664"/>
             <a:ext cx="685800" cy="475488"/>
           </a:xfrm>
           <a:prstGeom prst="rect">
@@ -27756,7 +26637,7 @@
                 <a:ea typeface="Trebuchet MS" pitchFamily="34" charset="-122"/>
                 <a:cs typeface="Trebuchet MS" pitchFamily="34" charset="-120"/>
               </a:rPr>
-              <a:t>f</a:t>
+              <a:t>i</a:t>
             </a:r>
             <a:endParaRPr lang="en-US" sz="900" dirty="0"/>
           </a:p>
@@ -27770,7 +26651,7 @@
         </p:nvSpPr>
         <p:spPr>
           <a:xfrm>
-            <a:off x="4123944" y="4169664"/>
+            <a:off x="3639312" y="4169664"/>
             <a:ext cx="685800" cy="475488"/>
           </a:xfrm>
           <a:prstGeom prst="rect">
@@ -27797,7 +26678,7 @@
         </p:nvSpPr>
         <p:spPr>
           <a:xfrm>
-            <a:off x="4123944" y="4169664"/>
+            <a:off x="3639312" y="4169664"/>
             <a:ext cx="685800" cy="475488"/>
           </a:xfrm>
           <a:prstGeom prst="rect">
@@ -27822,7 +26703,7 @@
                 <a:ea typeface="Trebuchet MS" pitchFamily="34" charset="-122"/>
                 <a:cs typeface="Trebuchet MS" pitchFamily="34" charset="-120"/>
               </a:rPr>
-              <a:t>i</a:t>
+              <a:t>n</a:t>
             </a:r>
             <a:endParaRPr lang="en-US" sz="900" dirty="0"/>
           </a:p>
@@ -27836,7 +26717,7 @@
         </p:nvSpPr>
         <p:spPr>
           <a:xfrm>
-            <a:off x="5577840" y="4169664"/>
+            <a:off x="4850892" y="4169664"/>
             <a:ext cx="685800" cy="475488"/>
           </a:xfrm>
           <a:prstGeom prst="rect">
@@ -27863,7 +26744,7 @@
         </p:nvSpPr>
         <p:spPr>
           <a:xfrm>
-            <a:off x="5577840" y="4169664"/>
+            <a:off x="4850892" y="4169664"/>
             <a:ext cx="685800" cy="475488"/>
           </a:xfrm>
           <a:prstGeom prst="rect">
@@ -27888,7 +26769,7 @@
                 <a:ea typeface="Trebuchet MS" pitchFamily="34" charset="-122"/>
                 <a:cs typeface="Trebuchet MS" pitchFamily="34" charset="-120"/>
               </a:rPr>
-              <a:t>ll</a:t>
+              <a:t>f</a:t>
             </a:r>
             <a:endParaRPr lang="en-US" sz="900" dirty="0"/>
           </a:p>
@@ -27902,7 +26783,7 @@
         </p:nvSpPr>
         <p:spPr>
           <a:xfrm>
-            <a:off x="7031736" y="4169664"/>
+            <a:off x="6062472" y="4169664"/>
             <a:ext cx="685800" cy="475488"/>
           </a:xfrm>
           <a:prstGeom prst="rect">
@@ -27929,7 +26810,7 @@
         </p:nvSpPr>
         <p:spPr>
           <a:xfrm>
-            <a:off x="7031736" y="4169664"/>
+            <a:off x="6062472" y="4169664"/>
             <a:ext cx="685800" cy="475488"/>
           </a:xfrm>
           <a:prstGeom prst="rect">
@@ -27954,7 +26835,73 @@
                 <a:ea typeface="Trebuchet MS" pitchFamily="34" charset="-122"/>
                 <a:cs typeface="Trebuchet MS" pitchFamily="34" charset="-120"/>
               </a:rPr>
-              <a:t>er</a:t>
+              <a:t>i</a:t>
+            </a:r>
+            <a:endParaRPr lang="en-US" sz="900" dirty="0"/>
+          </a:p>
+        </p:txBody>
+      </p:sp>
+      <p:sp>
+        <p:nvSpPr>
+          <p:cNvPr id="41" name="Shape 39"/>
+          <p:cNvSpPr/>
+          <p:nvPr/>
+        </p:nvSpPr>
+        <p:spPr>
+          <a:xfrm>
+            <a:off x="7274052" y="4169664"/>
+            <a:ext cx="685800" cy="475488"/>
+          </a:xfrm>
+          <a:prstGeom prst="rect">
+            <a:avLst>
+              <a:gd name="adj" fmla="val 7692"/>
+            </a:avLst>
+          </a:prstGeom>
+          <a:solidFill>
+            <a:srgbClr val="FFFFFF"/>
+          </a:solidFill>
+          <a:ln w="12700">
+            <a:solidFill>
+              <a:srgbClr val="DB2777"/>
+            </a:solidFill>
+            <a:prstDash val="solid"/>
+          </a:ln>
+        </p:spPr>
+      </p:sp>
+      <p:sp>
+        <p:nvSpPr>
+          <p:cNvPr id="42" name="Text 40"/>
+          <p:cNvSpPr/>
+          <p:nvPr/>
+        </p:nvSpPr>
+        <p:spPr>
+          <a:xfrm>
+            <a:off x="7274052" y="4169664"/>
+            <a:ext cx="685800" cy="475488"/>
+          </a:xfrm>
+          <a:prstGeom prst="rect">
+            <a:avLst/>
+          </a:prstGeom>
+          <a:noFill/>
+          <a:ln/>
+        </p:spPr>
+        <p:txBody>
+          <a:bodyPr wrap="square" lIns="0" tIns="0" rIns="0" bIns="0" rtlCol="0" anchor="ctr"/>
+          <a:lstStyle/>
+          <a:p>
+            <a:pPr algn="ctr" indent="0" marL="0">
+              <a:buNone/>
+            </a:pPr>
+            <a:r>
+              <a:rPr lang="en-US" sz="900" b="1" dirty="0">
+                <a:solidFill>
+                  <a:srgbClr val="9D174D"/>
+                </a:solidFill>
+                <a:latin typeface="Trebuchet MS" pitchFamily="34" charset="0"/>
+                <a:ea typeface="Trebuchet MS" pitchFamily="34" charset="-122"/>
+                <a:cs typeface="Trebuchet MS" pitchFamily="34" charset="-120"/>
+              </a:rPr>
+              <a:t>ll</a:t>
             </a:r>
             <a:endParaRPr lang="en-US" sz="900" dirty="0"/>
           </a:p>
@@ -28385,7 +27332,7 @@
                 <a:ea typeface="Trebuchet MS" pitchFamily="34" charset="-122"/>
                 <a:cs typeface="Trebuchet MS" pitchFamily="34" charset="-120"/>
               </a:rPr>
-              <a:t>refilling</a:t>
+              <a:t>underfill</a:t>
             </a:r>
             <a:endParaRPr lang="en-US" sz="2800" dirty="0"/>
           </a:p>
@@ -29212,7 +28159,7 @@
                 <a:ea typeface="Trebuchet MS" pitchFamily="34" charset="-122"/>
                 <a:cs typeface="Trebuchet MS" pitchFamily="34" charset="-120"/>
               </a:rPr>
-              <a:t>refilling</a:t>
+              <a:t>underfill</a:t>
             </a:r>
             <a:endParaRPr lang="en-US" sz="2800" dirty="0"/>
           </a:p>
@@ -29292,7 +28239,7 @@
         </p:nvSpPr>
         <p:spPr>
           <a:xfrm>
-            <a:off x="2221992" y="2258568"/>
+            <a:off x="2938272" y="2258568"/>
             <a:ext cx="1828800" cy="292608"/>
           </a:xfrm>
           <a:prstGeom prst="rect">
@@ -29326,7 +28273,7 @@
         </p:nvSpPr>
         <p:spPr>
           <a:xfrm>
-            <a:off x="2221992" y="2258568"/>
+            <a:off x="2938272" y="2258568"/>
             <a:ext cx="1828800" cy="292608"/>
           </a:xfrm>
           <a:prstGeom prst="rect">
@@ -29351,7 +28298,7 @@
                 <a:ea typeface="Trebuchet MS" pitchFamily="34" charset="-122"/>
                 <a:cs typeface="Trebuchet MS" pitchFamily="34" charset="-120"/>
               </a:rPr>
-              <a:t>re</a:t>
+              <a:t>under</a:t>
             </a:r>
             <a:endParaRPr lang="en-US" sz="1300" dirty="0"/>
           </a:p>
@@ -29365,7 +28312,7 @@
         </p:nvSpPr>
         <p:spPr>
           <a:xfrm>
-            <a:off x="2221992" y="2569464"/>
+            <a:off x="2938272" y="2569464"/>
             <a:ext cx="1828800" cy="201168"/>
           </a:xfrm>
           <a:prstGeom prst="rect">
@@ -29390,7 +28337,7 @@
                 <a:ea typeface="Calibri" pitchFamily="34" charset="-122"/>
                 <a:cs typeface="Calibri" pitchFamily="34" charset="-120"/>
               </a:rPr>
-              <a:t>again</a:t>
+              <a:t>below, not enough</a:t>
             </a:r>
             <a:endParaRPr lang="en-US" sz="850" dirty="0"/>
           </a:p>
@@ -29404,7 +28351,7 @@
         </p:nvSpPr>
         <p:spPr>
           <a:xfrm>
-            <a:off x="4370832" y="2258568"/>
+            <a:off x="5803392" y="2258568"/>
             <a:ext cx="1828800" cy="292608"/>
           </a:xfrm>
           <a:prstGeom prst="rect">
@@ -29438,7 +28385,7 @@
         </p:nvSpPr>
         <p:spPr>
           <a:xfrm>
-            <a:off x="4370832" y="2258568"/>
+            <a:off x="5803392" y="2258568"/>
             <a:ext cx="1828800" cy="292608"/>
           </a:xfrm>
           <a:prstGeom prst="rect">
@@ -29477,7 +28424,7 @@
         </p:nvSpPr>
         <p:spPr>
           <a:xfrm>
-            <a:off x="4370832" y="2569464"/>
+            <a:off x="5803392" y="2569464"/>
             <a:ext cx="1828800" cy="201168"/>
           </a:xfrm>
           <a:prstGeom prst="rect">
@@ -29516,30 +28463,23 @@
         </p:nvSpPr>
         <p:spPr>
           <a:xfrm>
-            <a:off x="6519672" y="2258568"/>
-            <a:ext cx="1828800" cy="292608"/>
+            <a:off x="365760" y="3273552"/>
+            <a:ext cx="1371600" cy="658368"/>
           </a:xfrm>
           <a:prstGeom prst="rect">
             <a:avLst>
-              <a:gd name="adj" fmla="val 25000"/>
+              <a:gd name="adj" fmla="val 8333"/>
             </a:avLst>
           </a:prstGeom>
           <a:solidFill>
-            <a:srgbClr val="FCE7F3"/>
-          </a:solidFill>
-          <a:ln w="19050">
-            <a:solidFill>
-              <a:srgbClr val="DB2777"/>
-            </a:solidFill>
-            <a:prstDash val="solid"/>
-          </a:ln>
-          <a:effectLst>
-            <a:outerShdw sx="100000" sy="100000" kx="0" ky="0" algn="bl" rotWithShape="0" blurRad="101600" dist="38100" dir="8100000">
-              <a:srgbClr val="000000">
-                <a:alpha val="12000"/>
-              </a:srgbClr>
-            </a:outerShdw>
-          </a:effectLst>
+            <a:srgbClr val="E2E8F0"/>
+          </a:solidFill>
+          <a:ln w="12700">
+            <a:solidFill>
+              <a:srgbClr val="E2E8F0"/>
+            </a:solidFill>
+            <a:prstDash val="solid"/>
+          </a:ln>
         </p:spPr>
       </p:sp>
       <p:sp>
@@ -29550,8 +28490,8 @@
         </p:nvSpPr>
         <p:spPr>
           <a:xfrm>
-            <a:off x="6519672" y="2258568"/>
-            <a:ext cx="1828800" cy="292608"/>
+            <a:off x="365760" y="3273552"/>
+            <a:ext cx="1371600" cy="658368"/>
           </a:xfrm>
           <a:prstGeom prst="rect">
             <a:avLst/>
@@ -29567,73 +28507,100 @@
               <a:buNone/>
             </a:pPr>
             <a:r>
-              <a:rPr lang="en-US" sz="1300" b="1" dirty="0">
-                <a:solidFill>
-                  <a:srgbClr val="9D174D"/>
+              <a:rPr lang="en-US" sz="1100" b="1" dirty="0">
+                <a:solidFill>
+                  <a:srgbClr val="475569"/>
                 </a:solidFill>
                 <a:latin typeface="Trebuchet MS" pitchFamily="34" charset="0"/>
                 <a:ea typeface="Trebuchet MS" pitchFamily="34" charset="-122"/>
                 <a:cs typeface="Trebuchet MS" pitchFamily="34" charset="-120"/>
               </a:rPr>
-              <a:t>ing</a:t>
-            </a:r>
-            <a:endParaRPr lang="en-US" sz="1300" dirty="0"/>
-          </a:p>
-        </p:txBody>
-      </p:sp>
-      <p:sp>
-        <p:nvSpPr>
-          <p:cNvPr id="24" name="Text 22"/>
-          <p:cNvSpPr/>
-          <p:nvPr/>
-        </p:nvSpPr>
-        <p:spPr>
-          <a:xfrm>
-            <a:off x="6519672" y="2569464"/>
-            <a:ext cx="1828800" cy="201168"/>
-          </a:xfrm>
-          <a:prstGeom prst="rect">
-            <a:avLst/>
-          </a:prstGeom>
-          <a:noFill/>
-          <a:ln/>
-        </p:spPr>
-        <p:txBody>
-          <a:bodyPr wrap="square" lIns="0" tIns="0" rIns="0" bIns="0" rtlCol="0" anchor="t"/>
-          <a:lstStyle/>
-          <a:p>
-            <a:pPr algn="ctr" indent="0" marL="0">
-              <a:buNone/>
-            </a:pPr>
-            <a:r>
-              <a:rPr lang="en-US" sz="850" dirty="0">
-                <a:solidFill>
-                  <a:srgbClr val="475569"/>
+              <a:t>Syllables</a:t>
+            </a:r>
+            <a:endParaRPr lang="en-US" sz="1100" dirty="0"/>
+          </a:p>
+        </p:txBody>
+      </p:sp>
+      <p:sp>
+        <p:nvSpPr>
+          <p:cNvPr id="24" name="Shape 22"/>
+          <p:cNvSpPr/>
+          <p:nvPr/>
+        </p:nvSpPr>
+        <p:spPr>
+          <a:xfrm>
+            <a:off x="1874520" y="3273552"/>
+            <a:ext cx="6903720" cy="658368"/>
+          </a:xfrm>
+          <a:prstGeom prst="rect">
+            <a:avLst>
+              <a:gd name="adj" fmla="val 8333"/>
+            </a:avLst>
+          </a:prstGeom>
+          <a:solidFill>
+            <a:srgbClr val="F8FAFC"/>
+          </a:solidFill>
+          <a:ln w="12700">
+            <a:solidFill>
+              <a:srgbClr val="E2E8F0"/>
+            </a:solidFill>
+            <a:prstDash val="dash"/>
+          </a:ln>
+        </p:spPr>
+      </p:sp>
+      <p:sp>
+        <p:nvSpPr>
+          <p:cNvPr id="25" name="Text 23"/>
+          <p:cNvSpPr/>
+          <p:nvPr/>
+        </p:nvSpPr>
+        <p:spPr>
+          <a:xfrm>
+            <a:off x="1874520" y="3273552"/>
+            <a:ext cx="6903720" cy="658368"/>
+          </a:xfrm>
+          <a:prstGeom prst="rect">
+            <a:avLst/>
+          </a:prstGeom>
+          <a:noFill/>
+          <a:ln/>
+        </p:spPr>
+        <p:txBody>
+          <a:bodyPr wrap="square" rtlCol="0" anchor="ctr"/>
+          <a:lstStyle/>
+          <a:p>
+            <a:pPr algn="ctr" indent="0" marL="0">
+              <a:buNone/>
+            </a:pPr>
+            <a:r>
+              <a:rPr lang="en-US" sz="1100" i="1" dirty="0">
+                <a:solidFill>
+                  <a:srgbClr val="CBD5E1"/>
                 </a:solidFill>
                 <a:latin typeface="Calibri" pitchFamily="34" charset="0"/>
                 <a:ea typeface="Calibri" pitchFamily="34" charset="-122"/>
                 <a:cs typeface="Calibri" pitchFamily="34" charset="-120"/>
               </a:rPr>
-              <a:t>ongoing action</a:t>
-            </a:r>
-            <a:endParaRPr lang="en-US" sz="850" dirty="0"/>
-          </a:p>
-        </p:txBody>
-      </p:sp>
-      <p:sp>
-        <p:nvSpPr>
-          <p:cNvPr id="25" name="Shape 23"/>
-          <p:cNvSpPr/>
-          <p:nvPr/>
-        </p:nvSpPr>
-        <p:spPr>
-          <a:xfrm>
-            <a:off x="365760" y="3273552"/>
-            <a:ext cx="1371600" cy="658368"/>
+              <a:t>Write here...</a:t>
+            </a:r>
+            <a:endParaRPr lang="en-US" sz="1100" dirty="0"/>
+          </a:p>
+        </p:txBody>
+      </p:sp>
+      <p:sp>
+        <p:nvSpPr>
+          <p:cNvPr id="26" name="Shape 24"/>
+          <p:cNvSpPr/>
+          <p:nvPr/>
+        </p:nvSpPr>
+        <p:spPr>
+          <a:xfrm>
+            <a:off x="365760" y="4096512"/>
+            <a:ext cx="1371600" cy="804672"/>
           </a:xfrm>
           <a:prstGeom prst="rect">
             <a:avLst>
-              <a:gd name="adj" fmla="val 8333"/>
+              <a:gd name="adj" fmla="val 6818"/>
             </a:avLst>
           </a:prstGeom>
           <a:solidFill>
@@ -29649,14 +28616,14 @@
       </p:sp>
       <p:sp>
         <p:nvSpPr>
-          <p:cNvPr id="26" name="Text 24"/>
-          <p:cNvSpPr/>
-          <p:nvPr/>
-        </p:nvSpPr>
-        <p:spPr>
-          <a:xfrm>
-            <a:off x="365760" y="3273552"/>
-            <a:ext cx="1371600" cy="658368"/>
+          <p:cNvPr id="27" name="Text 25"/>
+          <p:cNvSpPr/>
+          <p:nvPr/>
+        </p:nvSpPr>
+        <p:spPr>
+          <a:xfrm>
+            <a:off x="365760" y="4096512"/>
+            <a:ext cx="1371600" cy="804672"/>
           </a:xfrm>
           <a:prstGeom prst="rect">
             <a:avLst/>
@@ -29680,7 +28647,7 @@
                 <a:ea typeface="Trebuchet MS" pitchFamily="34" charset="-122"/>
                 <a:cs typeface="Trebuchet MS" pitchFamily="34" charset="-120"/>
               </a:rPr>
-              <a:t>Syllables</a:t>
+              <a:t>Phonemes</a:t>
             </a:r>
             <a:endParaRPr lang="en-US" sz="1100" dirty="0"/>
           </a:p>
@@ -29688,80 +28655,14 @@
       </p:sp>
       <p:sp>
         <p:nvSpPr>
-          <p:cNvPr id="27" name="Shape 25"/>
-          <p:cNvSpPr/>
-          <p:nvPr/>
-        </p:nvSpPr>
-        <p:spPr>
-          <a:xfrm>
-            <a:off x="1874520" y="3273552"/>
-            <a:ext cx="6903720" cy="658368"/>
-          </a:xfrm>
-          <a:prstGeom prst="rect">
-            <a:avLst>
-              <a:gd name="adj" fmla="val 8333"/>
-            </a:avLst>
-          </a:prstGeom>
-          <a:solidFill>
-            <a:srgbClr val="F8FAFC"/>
-          </a:solidFill>
-          <a:ln w="12700">
-            <a:solidFill>
-              <a:srgbClr val="E2E8F0"/>
-            </a:solidFill>
-            <a:prstDash val="dash"/>
-          </a:ln>
-        </p:spPr>
-      </p:sp>
-      <p:sp>
-        <p:nvSpPr>
-          <p:cNvPr id="28" name="Text 26"/>
-          <p:cNvSpPr/>
-          <p:nvPr/>
-        </p:nvSpPr>
-        <p:spPr>
-          <a:xfrm>
-            <a:off x="1874520" y="3273552"/>
-            <a:ext cx="6903720" cy="658368"/>
-          </a:xfrm>
-          <a:prstGeom prst="rect">
-            <a:avLst/>
-          </a:prstGeom>
-          <a:noFill/>
-          <a:ln/>
-        </p:spPr>
-        <p:txBody>
-          <a:bodyPr wrap="square" rtlCol="0" anchor="ctr"/>
-          <a:lstStyle/>
-          <a:p>
-            <a:pPr algn="ctr" indent="0" marL="0">
-              <a:buNone/>
-            </a:pPr>
-            <a:r>
-              <a:rPr lang="en-US" sz="1100" i="1" dirty="0">
-                <a:solidFill>
-                  <a:srgbClr val="CBD5E1"/>
-                </a:solidFill>
-                <a:latin typeface="Calibri" pitchFamily="34" charset="0"/>
-                <a:ea typeface="Calibri" pitchFamily="34" charset="-122"/>
-                <a:cs typeface="Calibri" pitchFamily="34" charset="-120"/>
-              </a:rPr>
-              <a:t>Write here...</a:t>
-            </a:r>
-            <a:endParaRPr lang="en-US" sz="1100" dirty="0"/>
-          </a:p>
-        </p:txBody>
-      </p:sp>
-      <p:sp>
-        <p:nvSpPr>
-          <p:cNvPr id="29" name="Shape 27"/>
-          <p:cNvSpPr/>
-          <p:nvPr/>
-        </p:nvSpPr>
-        <p:spPr>
-          <a:xfrm>
-            <a:off x="365760" y="4096512"/>
-            <a:ext cx="1371600" cy="804672"/>
+          <p:cNvPr id="28" name="Shape 26"/>
+          <p:cNvSpPr/>
+          <p:nvPr/>
+        </p:nvSpPr>
+        <p:spPr>
+          <a:xfrm>
+            <a:off x="1874520" y="4096512"/>
+            <a:ext cx="6903720" cy="804672"/>
           </a:xfrm>
           <a:prstGeom prst="rect">
             <a:avLst>
@@ -29769,85 +28670,19 @@
             </a:avLst>
           </a:prstGeom>
           <a:solidFill>
-            <a:srgbClr val="E2E8F0"/>
+            <a:srgbClr val="F8FAFC"/>
           </a:solidFill>
           <a:ln w="12700">
             <a:solidFill>
               <a:srgbClr val="E2E8F0"/>
             </a:solidFill>
-            <a:prstDash val="solid"/>
-          </a:ln>
-        </p:spPr>
-      </p:sp>
-      <p:sp>
-        <p:nvSpPr>
-          <p:cNvPr id="30" name="Text 28"/>
-          <p:cNvSpPr/>
-          <p:nvPr/>
-        </p:nvSpPr>
-        <p:spPr>
-          <a:xfrm>
-            <a:off x="365760" y="4096512"/>
-            <a:ext cx="1371600" cy="804672"/>
-          </a:xfrm>
-          <a:prstGeom prst="rect">
-            <a:avLst/>
-          </a:prstGeom>
-          <a:noFill/>
-          <a:ln/>
-        </p:spPr>
-        <p:txBody>
-          <a:bodyPr wrap="square" lIns="0" tIns="0" rIns="0" bIns="0" rtlCol="0" anchor="ctr"/>
-          <a:lstStyle/>
-          <a:p>
-            <a:pPr algn="ctr" indent="0" marL="0">
-              <a:buNone/>
-            </a:pPr>
-            <a:r>
-              <a:rPr lang="en-US" sz="1100" b="1" dirty="0">
-                <a:solidFill>
-                  <a:srgbClr val="475569"/>
-                </a:solidFill>
-                <a:latin typeface="Trebuchet MS" pitchFamily="34" charset="0"/>
-                <a:ea typeface="Trebuchet MS" pitchFamily="34" charset="-122"/>
-                <a:cs typeface="Trebuchet MS" pitchFamily="34" charset="-120"/>
-              </a:rPr>
-              <a:t>Phonemes</a:t>
-            </a:r>
-            <a:endParaRPr lang="en-US" sz="1100" dirty="0"/>
-          </a:p>
-        </p:txBody>
-      </p:sp>
-      <p:sp>
-        <p:nvSpPr>
-          <p:cNvPr id="31" name="Shape 29"/>
-          <p:cNvSpPr/>
-          <p:nvPr/>
-        </p:nvSpPr>
-        <p:spPr>
-          <a:xfrm>
-            <a:off x="1874520" y="4096512"/>
-            <a:ext cx="6903720" cy="804672"/>
-          </a:xfrm>
-          <a:prstGeom prst="rect">
-            <a:avLst>
-              <a:gd name="adj" fmla="val 6818"/>
-            </a:avLst>
-          </a:prstGeom>
-          <a:solidFill>
-            <a:srgbClr val="F8FAFC"/>
-          </a:solidFill>
-          <a:ln w="12700">
-            <a:solidFill>
-              <a:srgbClr val="E2E8F0"/>
-            </a:solidFill>
             <a:prstDash val="dash"/>
           </a:ln>
         </p:spPr>
       </p:sp>
       <p:sp>
         <p:nvSpPr>
-          <p:cNvPr id="32" name="Text 30"/>
+          <p:cNvPr id="29" name="Text 27"/>
           <p:cNvSpPr/>
           <p:nvPr/>
         </p:nvSpPr>
@@ -30309,7 +29144,7 @@
                 <a:ea typeface="Trebuchet MS" pitchFamily="34" charset="-122"/>
                 <a:cs typeface="Trebuchet MS" pitchFamily="34" charset="-120"/>
               </a:rPr>
-              <a:t>refilling</a:t>
+              <a:t>underfill</a:t>
             </a:r>
             <a:endParaRPr lang="en-US" sz="2800" dirty="0"/>
           </a:p>
@@ -30389,7 +29224,7 @@
         </p:nvSpPr>
         <p:spPr>
           <a:xfrm>
-            <a:off x="2221992" y="2258568"/>
+            <a:off x="2938272" y="2258568"/>
             <a:ext cx="1828800" cy="292608"/>
           </a:xfrm>
           <a:prstGeom prst="rect">
@@ -30423,7 +29258,7 @@
         </p:nvSpPr>
         <p:spPr>
           <a:xfrm>
-            <a:off x="2221992" y="2258568"/>
+            <a:off x="2938272" y="2258568"/>
             <a:ext cx="1828800" cy="292608"/>
           </a:xfrm>
           <a:prstGeom prst="rect">
@@ -30448,7 +29283,7 @@
                 <a:ea typeface="Trebuchet MS" pitchFamily="34" charset="-122"/>
                 <a:cs typeface="Trebuchet MS" pitchFamily="34" charset="-120"/>
               </a:rPr>
-              <a:t>re</a:t>
+              <a:t>under</a:t>
             </a:r>
             <a:endParaRPr lang="en-US" sz="1300" dirty="0"/>
           </a:p>
@@ -30462,7 +29297,7 @@
         </p:nvSpPr>
         <p:spPr>
           <a:xfrm>
-            <a:off x="2221992" y="2569464"/>
+            <a:off x="2938272" y="2569464"/>
             <a:ext cx="1828800" cy="201168"/>
           </a:xfrm>
           <a:prstGeom prst="rect">
@@ -30487,7 +29322,7 @@
                 <a:ea typeface="Calibri" pitchFamily="34" charset="-122"/>
                 <a:cs typeface="Calibri" pitchFamily="34" charset="-120"/>
               </a:rPr>
-              <a:t>again</a:t>
+              <a:t>below, not enough</a:t>
             </a:r>
             <a:endParaRPr lang="en-US" sz="850" dirty="0"/>
           </a:p>
@@ -30501,7 +29336,7 @@
         </p:nvSpPr>
         <p:spPr>
           <a:xfrm>
-            <a:off x="4370832" y="2258568"/>
+            <a:off x="5803392" y="2258568"/>
             <a:ext cx="1828800" cy="292608"/>
           </a:xfrm>
           <a:prstGeom prst="rect">
@@ -30535,7 +29370,7 @@
         </p:nvSpPr>
         <p:spPr>
           <a:xfrm>
-            <a:off x="4370832" y="2258568"/>
+            <a:off x="5803392" y="2258568"/>
             <a:ext cx="1828800" cy="292608"/>
           </a:xfrm>
           <a:prstGeom prst="rect">
@@ -30574,7 +29409,7 @@
         </p:nvSpPr>
         <p:spPr>
           <a:xfrm>
-            <a:off x="4370832" y="2569464"/>
+            <a:off x="5803392" y="2569464"/>
             <a:ext cx="1828800" cy="201168"/>
           </a:xfrm>
           <a:prstGeom prst="rect">
@@ -30613,30 +29448,23 @@
         </p:nvSpPr>
         <p:spPr>
           <a:xfrm>
-            <a:off x="6519672" y="2258568"/>
-            <a:ext cx="1828800" cy="292608"/>
+            <a:off x="365760" y="3273552"/>
+            <a:ext cx="1371600" cy="658368"/>
           </a:xfrm>
           <a:prstGeom prst="rect">
             <a:avLst>
-              <a:gd name="adj" fmla="val 25000"/>
+              <a:gd name="adj" fmla="val 8333"/>
             </a:avLst>
           </a:prstGeom>
           <a:solidFill>
-            <a:srgbClr val="FCE7F3"/>
-          </a:solidFill>
-          <a:ln w="19050">
-            <a:solidFill>
-              <a:srgbClr val="DB2777"/>
-            </a:solidFill>
-            <a:prstDash val="solid"/>
-          </a:ln>
-          <a:effectLst>
-            <a:outerShdw sx="100000" sy="100000" kx="0" ky="0" algn="bl" rotWithShape="0" blurRad="101600" dist="38100" dir="8100000">
-              <a:srgbClr val="000000">
-                <a:alpha val="12000"/>
-              </a:srgbClr>
-            </a:outerShdw>
-          </a:effectLst>
+            <a:srgbClr val="E2E8F0"/>
+          </a:solidFill>
+          <a:ln w="12700">
+            <a:solidFill>
+              <a:srgbClr val="E2E8F0"/>
+            </a:solidFill>
+            <a:prstDash val="solid"/>
+          </a:ln>
         </p:spPr>
       </p:sp>
       <p:sp>
@@ -30647,8 +29475,8 @@
         </p:nvSpPr>
         <p:spPr>
           <a:xfrm>
-            <a:off x="6519672" y="2258568"/>
-            <a:ext cx="1828800" cy="292608"/>
+            <a:off x="365760" y="3273552"/>
+            <a:ext cx="1371600" cy="658368"/>
           </a:xfrm>
           <a:prstGeom prst="rect">
             <a:avLst/>
@@ -30664,69 +29492,30 @@
               <a:buNone/>
             </a:pPr>
             <a:r>
-              <a:rPr lang="en-US" sz="1300" b="1" dirty="0">
-                <a:solidFill>
-                  <a:srgbClr val="9D174D"/>
+              <a:rPr lang="en-US" sz="1100" b="1" dirty="0">
+                <a:solidFill>
+                  <a:srgbClr val="475569"/>
                 </a:solidFill>
                 <a:latin typeface="Trebuchet MS" pitchFamily="34" charset="0"/>
                 <a:ea typeface="Trebuchet MS" pitchFamily="34" charset="-122"/>
                 <a:cs typeface="Trebuchet MS" pitchFamily="34" charset="-120"/>
               </a:rPr>
-              <a:t>ing</a:t>
-            </a:r>
-            <a:endParaRPr lang="en-US" sz="1300" dirty="0"/>
-          </a:p>
-        </p:txBody>
-      </p:sp>
-      <p:sp>
-        <p:nvSpPr>
-          <p:cNvPr id="24" name="Text 22"/>
-          <p:cNvSpPr/>
-          <p:nvPr/>
-        </p:nvSpPr>
-        <p:spPr>
-          <a:xfrm>
-            <a:off x="6519672" y="2569464"/>
-            <a:ext cx="1828800" cy="201168"/>
-          </a:xfrm>
-          <a:prstGeom prst="rect">
-            <a:avLst/>
-          </a:prstGeom>
-          <a:noFill/>
-          <a:ln/>
-        </p:spPr>
-        <p:txBody>
-          <a:bodyPr wrap="square" lIns="0" tIns="0" rIns="0" bIns="0" rtlCol="0" anchor="t"/>
-          <a:lstStyle/>
-          <a:p>
-            <a:pPr algn="ctr" indent="0" marL="0">
-              <a:buNone/>
-            </a:pPr>
-            <a:r>
-              <a:rPr lang="en-US" sz="850" dirty="0">
-                <a:solidFill>
-                  <a:srgbClr val="475569"/>
-                </a:solidFill>
-                <a:latin typeface="Calibri" pitchFamily="34" charset="0"/>
-                <a:ea typeface="Calibri" pitchFamily="34" charset="-122"/>
-                <a:cs typeface="Calibri" pitchFamily="34" charset="-120"/>
-              </a:rPr>
-              <a:t>ongoing action</a:t>
-            </a:r>
-            <a:endParaRPr lang="en-US" sz="850" dirty="0"/>
-          </a:p>
-        </p:txBody>
-      </p:sp>
-      <p:sp>
-        <p:nvSpPr>
-          <p:cNvPr id="25" name="Shape 23"/>
-          <p:cNvSpPr/>
-          <p:nvPr/>
-        </p:nvSpPr>
-        <p:spPr>
-          <a:xfrm>
-            <a:off x="365760" y="3273552"/>
-            <a:ext cx="1371600" cy="658368"/>
+              <a:t>Syllables</a:t>
+            </a:r>
+            <a:endParaRPr lang="en-US" sz="1100" dirty="0"/>
+          </a:p>
+        </p:txBody>
+      </p:sp>
+      <p:sp>
+        <p:nvSpPr>
+          <p:cNvPr id="24" name="Shape 22"/>
+          <p:cNvSpPr/>
+          <p:nvPr/>
+        </p:nvSpPr>
+        <p:spPr>
+          <a:xfrm>
+            <a:off x="1874520" y="3273552"/>
+            <a:ext cx="6903720" cy="658368"/>
           </a:xfrm>
           <a:prstGeom prst="rect">
             <a:avLst>
@@ -30734,11 +29523,38 @@
             </a:avLst>
           </a:prstGeom>
           <a:solidFill>
-            <a:srgbClr val="E2E8F0"/>
-          </a:solidFill>
-          <a:ln w="12700">
-            <a:solidFill>
-              <a:srgbClr val="E2E8F0"/>
+            <a:srgbClr val="CCFBF1"/>
+          </a:solidFill>
+          <a:ln w="12700">
+            <a:solidFill>
+              <a:srgbClr val="0D9488"/>
+            </a:solidFill>
+            <a:prstDash val="solid"/>
+          </a:ln>
+        </p:spPr>
+      </p:sp>
+      <p:sp>
+        <p:nvSpPr>
+          <p:cNvPr id="25" name="Shape 23"/>
+          <p:cNvSpPr/>
+          <p:nvPr/>
+        </p:nvSpPr>
+        <p:spPr>
+          <a:xfrm>
+            <a:off x="2313432" y="3364992"/>
+            <a:ext cx="1645920" cy="475488"/>
+          </a:xfrm>
+          <a:prstGeom prst="rect">
+            <a:avLst>
+              <a:gd name="adj" fmla="val 9615"/>
+            </a:avLst>
+          </a:prstGeom>
+          <a:solidFill>
+            <a:srgbClr val="FFFFFF"/>
+          </a:solidFill>
+          <a:ln w="12700">
+            <a:solidFill>
+              <a:srgbClr val="0D9488"/>
             </a:solidFill>
             <a:prstDash val="solid"/>
           </a:ln>
@@ -30752,8 +29568,8 @@
         </p:nvSpPr>
         <p:spPr>
           <a:xfrm>
-            <a:off x="365760" y="3273552"/>
-            <a:ext cx="1371600" cy="658368"/>
+            <a:off x="2313432" y="3364992"/>
+            <a:ext cx="1645920" cy="475488"/>
           </a:xfrm>
           <a:prstGeom prst="rect">
             <a:avLst/>
@@ -30769,46 +29585,58 @@
               <a:buNone/>
             </a:pPr>
             <a:r>
-              <a:rPr lang="en-US" sz="1100" b="1" dirty="0">
-                <a:solidFill>
-                  <a:srgbClr val="475569"/>
+              <a:rPr lang="en-US" sz="1400" b="1" dirty="0">
+                <a:solidFill>
+                  <a:srgbClr val="0D9488"/>
                 </a:solidFill>
                 <a:latin typeface="Trebuchet MS" pitchFamily="34" charset="0"/>
                 <a:ea typeface="Trebuchet MS" pitchFamily="34" charset="-122"/>
                 <a:cs typeface="Trebuchet MS" pitchFamily="34" charset="-120"/>
               </a:rPr>
-              <a:t>Syllables</a:t>
-            </a:r>
-            <a:endParaRPr lang="en-US" sz="1100" dirty="0"/>
-          </a:p>
-        </p:txBody>
-      </p:sp>
-      <p:sp>
-        <p:nvSpPr>
-          <p:cNvPr id="27" name="Shape 25"/>
-          <p:cNvSpPr/>
-          <p:nvPr/>
-        </p:nvSpPr>
-        <p:spPr>
-          <a:xfrm>
-            <a:off x="1874520" y="3273552"/>
-            <a:ext cx="6903720" cy="658368"/>
-          </a:xfrm>
-          <a:prstGeom prst="rect">
-            <a:avLst>
-              <a:gd name="adj" fmla="val 8333"/>
-            </a:avLst>
-          </a:prstGeom>
-          <a:solidFill>
-            <a:srgbClr val="CCFBF1"/>
-          </a:solidFill>
-          <a:ln w="12700">
-            <a:solidFill>
-              <a:srgbClr val="0D9488"/>
-            </a:solidFill>
-            <a:prstDash val="solid"/>
-          </a:ln>
-        </p:spPr>
+              <a:t>un</a:t>
+            </a:r>
+            <a:endParaRPr lang="en-US" sz="1400" dirty="0"/>
+          </a:p>
+        </p:txBody>
+      </p:sp>
+      <p:sp>
+        <p:nvSpPr>
+          <p:cNvPr id="27" name="Text 25"/>
+          <p:cNvSpPr/>
+          <p:nvPr/>
+        </p:nvSpPr>
+        <p:spPr>
+          <a:xfrm>
+            <a:off x="3959352" y="3364992"/>
+            <a:ext cx="411480" cy="475488"/>
+          </a:xfrm>
+          <a:prstGeom prst="rect">
+            <a:avLst/>
+          </a:prstGeom>
+          <a:noFill/>
+          <a:ln/>
+        </p:spPr>
+        <p:txBody>
+          <a:bodyPr wrap="square" lIns="0" tIns="0" rIns="0" bIns="0" rtlCol="0" anchor="ctr"/>
+          <a:lstStyle/>
+          <a:p>
+            <a:pPr algn="ctr" indent="0" marL="0">
+              <a:buNone/>
+            </a:pPr>
+            <a:r>
+              <a:rPr lang="en-US" sz="1600" b="1" dirty="0">
+                <a:solidFill>
+                  <a:srgbClr val="0D9488"/>
+                </a:solidFill>
+                <a:latin typeface="Trebuchet MS" pitchFamily="34" charset="0"/>
+                <a:ea typeface="Trebuchet MS" pitchFamily="34" charset="-122"/>
+                <a:cs typeface="Trebuchet MS" pitchFamily="34" charset="-120"/>
+              </a:rPr>
+              <a:t>·</a:t>
+            </a:r>
+            <a:endParaRPr lang="en-US" sz="1600" dirty="0"/>
+          </a:p>
+        </p:txBody>
       </p:sp>
       <p:sp>
         <p:nvSpPr>
@@ -30818,7 +29646,7 @@
         </p:nvSpPr>
         <p:spPr>
           <a:xfrm>
-            <a:off x="2313432" y="3364992"/>
+            <a:off x="4370832" y="3364992"/>
             <a:ext cx="1645920" cy="475488"/>
           </a:xfrm>
           <a:prstGeom prst="rect">
@@ -30845,7 +29673,7 @@
         </p:nvSpPr>
         <p:spPr>
           <a:xfrm>
-            <a:off x="2313432" y="3364992"/>
+            <a:off x="4370832" y="3364992"/>
             <a:ext cx="1645920" cy="475488"/>
           </a:xfrm>
           <a:prstGeom prst="rect">
@@ -30870,7 +29698,7 @@
                 <a:ea typeface="Trebuchet MS" pitchFamily="34" charset="-122"/>
                 <a:cs typeface="Trebuchet MS" pitchFamily="34" charset="-120"/>
               </a:rPr>
-              <a:t>re</a:t>
+              <a:t>der</a:t>
             </a:r>
             <a:endParaRPr lang="en-US" sz="1400" dirty="0"/>
           </a:p>
@@ -30884,7 +29712,7 @@
         </p:nvSpPr>
         <p:spPr>
           <a:xfrm>
-            <a:off x="3959352" y="3364992"/>
+            <a:off x="6016752" y="3364992"/>
             <a:ext cx="411480" cy="475488"/>
           </a:xfrm>
           <a:prstGeom prst="rect">
@@ -30923,7 +29751,7 @@
         </p:nvSpPr>
         <p:spPr>
           <a:xfrm>
-            <a:off x="4370832" y="3364992"/>
+            <a:off x="6428232" y="3364992"/>
             <a:ext cx="1645920" cy="475488"/>
           </a:xfrm>
           <a:prstGeom prst="rect">
@@ -30950,7 +29778,7 @@
         </p:nvSpPr>
         <p:spPr>
           <a:xfrm>
-            <a:off x="4370832" y="3364992"/>
+            <a:off x="6428232" y="3364992"/>
             <a:ext cx="1645920" cy="475488"/>
           </a:xfrm>
           <a:prstGeom prst="rect">
@@ -30983,14 +29811,41 @@
       </p:sp>
       <p:sp>
         <p:nvSpPr>
-          <p:cNvPr id="33" name="Text 31"/>
-          <p:cNvSpPr/>
-          <p:nvPr/>
-        </p:nvSpPr>
-        <p:spPr>
-          <a:xfrm>
-            <a:off x="6016752" y="3364992"/>
-            <a:ext cx="411480" cy="475488"/>
+          <p:cNvPr id="33" name="Shape 31"/>
+          <p:cNvSpPr/>
+          <p:nvPr/>
+        </p:nvSpPr>
+        <p:spPr>
+          <a:xfrm>
+            <a:off x="365760" y="4096512"/>
+            <a:ext cx="1371600" cy="804672"/>
+          </a:xfrm>
+          <a:prstGeom prst="rect">
+            <a:avLst>
+              <a:gd name="adj" fmla="val 6818"/>
+            </a:avLst>
+          </a:prstGeom>
+          <a:solidFill>
+            <a:srgbClr val="E2E8F0"/>
+          </a:solidFill>
+          <a:ln w="12700">
+            <a:solidFill>
+              <a:srgbClr val="E2E8F0"/>
+            </a:solidFill>
+            <a:prstDash val="solid"/>
+          </a:ln>
+        </p:spPr>
+      </p:sp>
+      <p:sp>
+        <p:nvSpPr>
+          <p:cNvPr id="34" name="Text 32"/>
+          <p:cNvSpPr/>
+          <p:nvPr/>
+        </p:nvSpPr>
+        <p:spPr>
+          <a:xfrm>
+            <a:off x="365760" y="4096512"/>
+            <a:ext cx="1371600" cy="804672"/>
           </a:xfrm>
           <a:prstGeom prst="rect">
             <a:avLst/>
@@ -31006,96 +29861,30 @@
               <a:buNone/>
             </a:pPr>
             <a:r>
-              <a:rPr lang="en-US" sz="1600" b="1" dirty="0">
-                <a:solidFill>
-                  <a:srgbClr val="0D9488"/>
+              <a:rPr lang="en-US" sz="1100" b="1" dirty="0">
+                <a:solidFill>
+                  <a:srgbClr val="475569"/>
                 </a:solidFill>
                 <a:latin typeface="Trebuchet MS" pitchFamily="34" charset="0"/>
                 <a:ea typeface="Trebuchet MS" pitchFamily="34" charset="-122"/>
                 <a:cs typeface="Trebuchet MS" pitchFamily="34" charset="-120"/>
               </a:rPr>
-              <a:t>·</a:t>
-            </a:r>
-            <a:endParaRPr lang="en-US" sz="1600" dirty="0"/>
-          </a:p>
-        </p:txBody>
-      </p:sp>
-      <p:sp>
-        <p:nvSpPr>
-          <p:cNvPr id="34" name="Shape 32"/>
-          <p:cNvSpPr/>
-          <p:nvPr/>
-        </p:nvSpPr>
-        <p:spPr>
-          <a:xfrm>
-            <a:off x="6428232" y="3364992"/>
-            <a:ext cx="1645920" cy="475488"/>
-          </a:xfrm>
-          <a:prstGeom prst="rect">
-            <a:avLst>
-              <a:gd name="adj" fmla="val 9615"/>
-            </a:avLst>
-          </a:prstGeom>
-          <a:solidFill>
-            <a:srgbClr val="FFFFFF"/>
-          </a:solidFill>
-          <a:ln w="12700">
-            <a:solidFill>
-              <a:srgbClr val="0D9488"/>
-            </a:solidFill>
-            <a:prstDash val="solid"/>
-          </a:ln>
-        </p:spPr>
-      </p:sp>
-      <p:sp>
-        <p:nvSpPr>
-          <p:cNvPr id="35" name="Text 33"/>
-          <p:cNvSpPr/>
-          <p:nvPr/>
-        </p:nvSpPr>
-        <p:spPr>
-          <a:xfrm>
-            <a:off x="6428232" y="3364992"/>
-            <a:ext cx="1645920" cy="475488"/>
-          </a:xfrm>
-          <a:prstGeom prst="rect">
-            <a:avLst/>
-          </a:prstGeom>
-          <a:noFill/>
-          <a:ln/>
-        </p:spPr>
-        <p:txBody>
-          <a:bodyPr wrap="square" lIns="0" tIns="0" rIns="0" bIns="0" rtlCol="0" anchor="ctr"/>
-          <a:lstStyle/>
-          <a:p>
-            <a:pPr algn="ctr" indent="0" marL="0">
-              <a:buNone/>
-            </a:pPr>
-            <a:r>
-              <a:rPr lang="en-US" sz="1400" b="1" dirty="0">
-                <a:solidFill>
-                  <a:srgbClr val="0D9488"/>
-                </a:solidFill>
-                <a:latin typeface="Trebuchet MS" pitchFamily="34" charset="0"/>
-                <a:ea typeface="Trebuchet MS" pitchFamily="34" charset="-122"/>
-                <a:cs typeface="Trebuchet MS" pitchFamily="34" charset="-120"/>
-              </a:rPr>
-              <a:t>ing</a:t>
-            </a:r>
-            <a:endParaRPr lang="en-US" sz="1400" dirty="0"/>
-          </a:p>
-        </p:txBody>
-      </p:sp>
-      <p:sp>
-        <p:nvSpPr>
-          <p:cNvPr id="36" name="Shape 34"/>
-          <p:cNvSpPr/>
-          <p:nvPr/>
-        </p:nvSpPr>
-        <p:spPr>
-          <a:xfrm>
-            <a:off x="365760" y="4096512"/>
-            <a:ext cx="1371600" cy="804672"/>
+              <a:t>Phonemes</a:t>
+            </a:r>
+            <a:endParaRPr lang="en-US" sz="1100" dirty="0"/>
+          </a:p>
+        </p:txBody>
+      </p:sp>
+      <p:sp>
+        <p:nvSpPr>
+          <p:cNvPr id="35" name="Shape 33"/>
+          <p:cNvSpPr/>
+          <p:nvPr/>
+        </p:nvSpPr>
+        <p:spPr>
+          <a:xfrm>
+            <a:off x="1874520" y="4096512"/>
+            <a:ext cx="6903720" cy="804672"/>
           </a:xfrm>
           <a:prstGeom prst="rect">
             <a:avLst>
@@ -31103,85 +29892,19 @@
             </a:avLst>
           </a:prstGeom>
           <a:solidFill>
-            <a:srgbClr val="E2E8F0"/>
+            <a:srgbClr val="F8FAFC"/>
           </a:solidFill>
           <a:ln w="12700">
             <a:solidFill>
               <a:srgbClr val="E2E8F0"/>
             </a:solidFill>
-            <a:prstDash val="solid"/>
-          </a:ln>
-        </p:spPr>
-      </p:sp>
-      <p:sp>
-        <p:nvSpPr>
-          <p:cNvPr id="37" name="Text 35"/>
-          <p:cNvSpPr/>
-          <p:nvPr/>
-        </p:nvSpPr>
-        <p:spPr>
-          <a:xfrm>
-            <a:off x="365760" y="4096512"/>
-            <a:ext cx="1371600" cy="804672"/>
-          </a:xfrm>
-          <a:prstGeom prst="rect">
-            <a:avLst/>
-          </a:prstGeom>
-          <a:noFill/>
-          <a:ln/>
-        </p:spPr>
-        <p:txBody>
-          <a:bodyPr wrap="square" lIns="0" tIns="0" rIns="0" bIns="0" rtlCol="0" anchor="ctr"/>
-          <a:lstStyle/>
-          <a:p>
-            <a:pPr algn="ctr" indent="0" marL="0">
-              <a:buNone/>
-            </a:pPr>
-            <a:r>
-              <a:rPr lang="en-US" sz="1100" b="1" dirty="0">
-                <a:solidFill>
-                  <a:srgbClr val="475569"/>
-                </a:solidFill>
-                <a:latin typeface="Trebuchet MS" pitchFamily="34" charset="0"/>
-                <a:ea typeface="Trebuchet MS" pitchFamily="34" charset="-122"/>
-                <a:cs typeface="Trebuchet MS" pitchFamily="34" charset="-120"/>
-              </a:rPr>
-              <a:t>Phonemes</a:t>
-            </a:r>
-            <a:endParaRPr lang="en-US" sz="1100" dirty="0"/>
-          </a:p>
-        </p:txBody>
-      </p:sp>
-      <p:sp>
-        <p:nvSpPr>
-          <p:cNvPr id="38" name="Shape 36"/>
-          <p:cNvSpPr/>
-          <p:nvPr/>
-        </p:nvSpPr>
-        <p:spPr>
-          <a:xfrm>
-            <a:off x="1874520" y="4096512"/>
-            <a:ext cx="6903720" cy="804672"/>
-          </a:xfrm>
-          <a:prstGeom prst="rect">
-            <a:avLst>
-              <a:gd name="adj" fmla="val 6818"/>
-            </a:avLst>
-          </a:prstGeom>
-          <a:solidFill>
-            <a:srgbClr val="F8FAFC"/>
-          </a:solidFill>
-          <a:ln w="12700">
-            <a:solidFill>
-              <a:srgbClr val="E2E8F0"/>
-            </a:solidFill>
             <a:prstDash val="dash"/>
           </a:ln>
         </p:spPr>
       </p:sp>
       <p:sp>
         <p:nvSpPr>
-          <p:cNvPr id="39" name="Text 37"/>
+          <p:cNvPr id="36" name="Text 34"/>
           <p:cNvSpPr/>
           <p:nvPr/>
         </p:nvSpPr>
@@ -31643,7 +30366,7 @@
                 <a:ea typeface="Trebuchet MS" pitchFamily="34" charset="-122"/>
                 <a:cs typeface="Trebuchet MS" pitchFamily="34" charset="-120"/>
               </a:rPr>
-              <a:t>refilling</a:t>
+              <a:t>underfill</a:t>
             </a:r>
             <a:endParaRPr lang="en-US" sz="2800" dirty="0"/>
           </a:p>
@@ -31723,7 +30446,7 @@
         </p:nvSpPr>
         <p:spPr>
           <a:xfrm>
-            <a:off x="2221992" y="2258568"/>
+            <a:off x="2938272" y="2258568"/>
             <a:ext cx="1828800" cy="292608"/>
           </a:xfrm>
           <a:prstGeom prst="rect">
@@ -31757,7 +30480,7 @@
         </p:nvSpPr>
         <p:spPr>
           <a:xfrm>
-            <a:off x="2221992" y="2258568"/>
+            <a:off x="2938272" y="2258568"/>
             <a:ext cx="1828800" cy="292608"/>
           </a:xfrm>
           <a:prstGeom prst="rect">
@@ -31782,7 +30505,7 @@
                 <a:ea typeface="Trebuchet MS" pitchFamily="34" charset="-122"/>
                 <a:cs typeface="Trebuchet MS" pitchFamily="34" charset="-120"/>
               </a:rPr>
-              <a:t>re</a:t>
+              <a:t>under</a:t>
             </a:r>
             <a:endParaRPr lang="en-US" sz="1300" dirty="0"/>
           </a:p>
@@ -31796,7 +30519,7 @@
         </p:nvSpPr>
         <p:spPr>
           <a:xfrm>
-            <a:off x="2221992" y="2569464"/>
+            <a:off x="2938272" y="2569464"/>
             <a:ext cx="1828800" cy="201168"/>
           </a:xfrm>
           <a:prstGeom prst="rect">
@@ -31821,7 +30544,7 @@
                 <a:ea typeface="Calibri" pitchFamily="34" charset="-122"/>
                 <a:cs typeface="Calibri" pitchFamily="34" charset="-120"/>
               </a:rPr>
-              <a:t>again</a:t>
+              <a:t>below, not enough</a:t>
             </a:r>
             <a:endParaRPr lang="en-US" sz="850" dirty="0"/>
           </a:p>
@@ -31835,7 +30558,7 @@
         </p:nvSpPr>
         <p:spPr>
           <a:xfrm>
-            <a:off x="4370832" y="2258568"/>
+            <a:off x="5803392" y="2258568"/>
             <a:ext cx="1828800" cy="292608"/>
           </a:xfrm>
           <a:prstGeom prst="rect">
@@ -31869,7 +30592,7 @@
         </p:nvSpPr>
         <p:spPr>
           <a:xfrm>
-            <a:off x="4370832" y="2258568"/>
+            <a:off x="5803392" y="2258568"/>
             <a:ext cx="1828800" cy="292608"/>
           </a:xfrm>
           <a:prstGeom prst="rect">
@@ -31908,7 +30631,7 @@
         </p:nvSpPr>
         <p:spPr>
           <a:xfrm>
-            <a:off x="4370832" y="2569464"/>
+            <a:off x="5803392" y="2569464"/>
             <a:ext cx="1828800" cy="201168"/>
           </a:xfrm>
           <a:prstGeom prst="rect">
@@ -31947,30 +30670,23 @@
         </p:nvSpPr>
         <p:spPr>
           <a:xfrm>
-            <a:off x="6519672" y="2258568"/>
-            <a:ext cx="1828800" cy="292608"/>
+            <a:off x="365760" y="3273552"/>
+            <a:ext cx="1371600" cy="658368"/>
           </a:xfrm>
           <a:prstGeom prst="rect">
             <a:avLst>
-              <a:gd name="adj" fmla="val 25000"/>
+              <a:gd name="adj" fmla="val 8333"/>
             </a:avLst>
           </a:prstGeom>
           <a:solidFill>
-            <a:srgbClr val="FCE7F3"/>
-          </a:solidFill>
-          <a:ln w="19050">
-            <a:solidFill>
-              <a:srgbClr val="DB2777"/>
-            </a:solidFill>
-            <a:prstDash val="solid"/>
-          </a:ln>
-          <a:effectLst>
-            <a:outerShdw sx="100000" sy="100000" kx="0" ky="0" algn="bl" rotWithShape="0" blurRad="101600" dist="38100" dir="8100000">
-              <a:srgbClr val="000000">
-                <a:alpha val="12000"/>
-              </a:srgbClr>
-            </a:outerShdw>
-          </a:effectLst>
+            <a:srgbClr val="E2E8F0"/>
+          </a:solidFill>
+          <a:ln w="12700">
+            <a:solidFill>
+              <a:srgbClr val="E2E8F0"/>
+            </a:solidFill>
+            <a:prstDash val="solid"/>
+          </a:ln>
         </p:spPr>
       </p:sp>
       <p:sp>
@@ -31981,8 +30697,8 @@
         </p:nvSpPr>
         <p:spPr>
           <a:xfrm>
-            <a:off x="6519672" y="2258568"/>
-            <a:ext cx="1828800" cy="292608"/>
+            <a:off x="365760" y="3273552"/>
+            <a:ext cx="1371600" cy="658368"/>
           </a:xfrm>
           <a:prstGeom prst="rect">
             <a:avLst/>
@@ -31998,69 +30714,30 @@
               <a:buNone/>
             </a:pPr>
             <a:r>
-              <a:rPr lang="en-US" sz="1300" b="1" dirty="0">
-                <a:solidFill>
-                  <a:srgbClr val="9D174D"/>
+              <a:rPr lang="en-US" sz="1100" b="1" dirty="0">
+                <a:solidFill>
+                  <a:srgbClr val="475569"/>
                 </a:solidFill>
                 <a:latin typeface="Trebuchet MS" pitchFamily="34" charset="0"/>
                 <a:ea typeface="Trebuchet MS" pitchFamily="34" charset="-122"/>
                 <a:cs typeface="Trebuchet MS" pitchFamily="34" charset="-120"/>
               </a:rPr>
-              <a:t>ing</a:t>
-            </a:r>
-            <a:endParaRPr lang="en-US" sz="1300" dirty="0"/>
-          </a:p>
-        </p:txBody>
-      </p:sp>
-      <p:sp>
-        <p:nvSpPr>
-          <p:cNvPr id="24" name="Text 22"/>
-          <p:cNvSpPr/>
-          <p:nvPr/>
-        </p:nvSpPr>
-        <p:spPr>
-          <a:xfrm>
-            <a:off x="6519672" y="2569464"/>
-            <a:ext cx="1828800" cy="201168"/>
-          </a:xfrm>
-          <a:prstGeom prst="rect">
-            <a:avLst/>
-          </a:prstGeom>
-          <a:noFill/>
-          <a:ln/>
-        </p:spPr>
-        <p:txBody>
-          <a:bodyPr wrap="square" lIns="0" tIns="0" rIns="0" bIns="0" rtlCol="0" anchor="t"/>
-          <a:lstStyle/>
-          <a:p>
-            <a:pPr algn="ctr" indent="0" marL="0">
-              <a:buNone/>
-            </a:pPr>
-            <a:r>
-              <a:rPr lang="en-US" sz="850" dirty="0">
-                <a:solidFill>
-                  <a:srgbClr val="475569"/>
-                </a:solidFill>
-                <a:latin typeface="Calibri" pitchFamily="34" charset="0"/>
-                <a:ea typeface="Calibri" pitchFamily="34" charset="-122"/>
-                <a:cs typeface="Calibri" pitchFamily="34" charset="-120"/>
-              </a:rPr>
-              <a:t>ongoing action</a:t>
-            </a:r>
-            <a:endParaRPr lang="en-US" sz="850" dirty="0"/>
-          </a:p>
-        </p:txBody>
-      </p:sp>
-      <p:sp>
-        <p:nvSpPr>
-          <p:cNvPr id="25" name="Shape 23"/>
-          <p:cNvSpPr/>
-          <p:nvPr/>
-        </p:nvSpPr>
-        <p:spPr>
-          <a:xfrm>
-            <a:off x="365760" y="3273552"/>
-            <a:ext cx="1371600" cy="658368"/>
+              <a:t>Syllables</a:t>
+            </a:r>
+            <a:endParaRPr lang="en-US" sz="1100" dirty="0"/>
+          </a:p>
+        </p:txBody>
+      </p:sp>
+      <p:sp>
+        <p:nvSpPr>
+          <p:cNvPr id="24" name="Shape 22"/>
+          <p:cNvSpPr/>
+          <p:nvPr/>
+        </p:nvSpPr>
+        <p:spPr>
+          <a:xfrm>
+            <a:off x="1874520" y="3273552"/>
+            <a:ext cx="6903720" cy="658368"/>
           </a:xfrm>
           <a:prstGeom prst="rect">
             <a:avLst>
@@ -32068,11 +30745,38 @@
             </a:avLst>
           </a:prstGeom>
           <a:solidFill>
-            <a:srgbClr val="E2E8F0"/>
-          </a:solidFill>
-          <a:ln w="12700">
-            <a:solidFill>
-              <a:srgbClr val="E2E8F0"/>
+            <a:srgbClr val="CCFBF1"/>
+          </a:solidFill>
+          <a:ln w="12700">
+            <a:solidFill>
+              <a:srgbClr val="0D9488"/>
+            </a:solidFill>
+            <a:prstDash val="solid"/>
+          </a:ln>
+        </p:spPr>
+      </p:sp>
+      <p:sp>
+        <p:nvSpPr>
+          <p:cNvPr id="25" name="Shape 23"/>
+          <p:cNvSpPr/>
+          <p:nvPr/>
+        </p:nvSpPr>
+        <p:spPr>
+          <a:xfrm>
+            <a:off x="2313432" y="3364992"/>
+            <a:ext cx="1645920" cy="475488"/>
+          </a:xfrm>
+          <a:prstGeom prst="rect">
+            <a:avLst>
+              <a:gd name="adj" fmla="val 9615"/>
+            </a:avLst>
+          </a:prstGeom>
+          <a:solidFill>
+            <a:srgbClr val="FFFFFF"/>
+          </a:solidFill>
+          <a:ln w="12700">
+            <a:solidFill>
+              <a:srgbClr val="0D9488"/>
             </a:solidFill>
             <a:prstDash val="solid"/>
           </a:ln>
@@ -32086,8 +30790,8 @@
         </p:nvSpPr>
         <p:spPr>
           <a:xfrm>
-            <a:off x="365760" y="3273552"/>
-            <a:ext cx="1371600" cy="658368"/>
+            <a:off x="2313432" y="3364992"/>
+            <a:ext cx="1645920" cy="475488"/>
           </a:xfrm>
           <a:prstGeom prst="rect">
             <a:avLst/>
@@ -32103,15 +30807,291 @@
               <a:buNone/>
             </a:pPr>
             <a:r>
-              <a:rPr lang="en-US" sz="1100" b="1" dirty="0">
-                <a:solidFill>
-                  <a:srgbClr val="475569"/>
+              <a:rPr lang="en-US" sz="1400" b="1" dirty="0">
+                <a:solidFill>
+                  <a:srgbClr val="0D9488"/>
                 </a:solidFill>
                 <a:latin typeface="Trebuchet MS" pitchFamily="34" charset="0"/>
                 <a:ea typeface="Trebuchet MS" pitchFamily="34" charset="-122"/>
                 <a:cs typeface="Trebuchet MS" pitchFamily="34" charset="-120"/>
               </a:rPr>
-              <a:t>Syllables</a:t>
+              <a:t>un</a:t>
+            </a:r>
+            <a:endParaRPr lang="en-US" sz="1400" dirty="0"/>
+          </a:p>
+        </p:txBody>
+      </p:sp>
+      <p:sp>
+        <p:nvSpPr>
+          <p:cNvPr id="27" name="Text 25"/>
+          <p:cNvSpPr/>
+          <p:nvPr/>
+        </p:nvSpPr>
+        <p:spPr>
+          <a:xfrm>
+            <a:off x="3959352" y="3364992"/>
+            <a:ext cx="411480" cy="475488"/>
+          </a:xfrm>
+          <a:prstGeom prst="rect">
+            <a:avLst/>
+          </a:prstGeom>
+          <a:noFill/>
+          <a:ln/>
+        </p:spPr>
+        <p:txBody>
+          <a:bodyPr wrap="square" lIns="0" tIns="0" rIns="0" bIns="0" rtlCol="0" anchor="ctr"/>
+          <a:lstStyle/>
+          <a:p>
+            <a:pPr algn="ctr" indent="0" marL="0">
+              <a:buNone/>
+            </a:pPr>
+            <a:r>
+              <a:rPr lang="en-US" sz="1600" b="1" dirty="0">
+                <a:solidFill>
+                  <a:srgbClr val="0D9488"/>
+                </a:solidFill>
+                <a:latin typeface="Trebuchet MS" pitchFamily="34" charset="0"/>
+                <a:ea typeface="Trebuchet MS" pitchFamily="34" charset="-122"/>
+                <a:cs typeface="Trebuchet MS" pitchFamily="34" charset="-120"/>
+              </a:rPr>
+              <a:t>·</a:t>
+            </a:r>
+            <a:endParaRPr lang="en-US" sz="1600" dirty="0"/>
+          </a:p>
+        </p:txBody>
+      </p:sp>
+      <p:sp>
+        <p:nvSpPr>
+          <p:cNvPr id="28" name="Shape 26"/>
+          <p:cNvSpPr/>
+          <p:nvPr/>
+        </p:nvSpPr>
+        <p:spPr>
+          <a:xfrm>
+            <a:off x="4370832" y="3364992"/>
+            <a:ext cx="1645920" cy="475488"/>
+          </a:xfrm>
+          <a:prstGeom prst="rect">
+            <a:avLst>
+              <a:gd name="adj" fmla="val 9615"/>
+            </a:avLst>
+          </a:prstGeom>
+          <a:solidFill>
+            <a:srgbClr val="FFFFFF"/>
+          </a:solidFill>
+          <a:ln w="12700">
+            <a:solidFill>
+              <a:srgbClr val="0D9488"/>
+            </a:solidFill>
+            <a:prstDash val="solid"/>
+          </a:ln>
+        </p:spPr>
+      </p:sp>
+      <p:sp>
+        <p:nvSpPr>
+          <p:cNvPr id="29" name="Text 27"/>
+          <p:cNvSpPr/>
+          <p:nvPr/>
+        </p:nvSpPr>
+        <p:spPr>
+          <a:xfrm>
+            <a:off x="4370832" y="3364992"/>
+            <a:ext cx="1645920" cy="475488"/>
+          </a:xfrm>
+          <a:prstGeom prst="rect">
+            <a:avLst/>
+          </a:prstGeom>
+          <a:noFill/>
+          <a:ln/>
+        </p:spPr>
+        <p:txBody>
+          <a:bodyPr wrap="square" lIns="0" tIns="0" rIns="0" bIns="0" rtlCol="0" anchor="ctr"/>
+          <a:lstStyle/>
+          <a:p>
+            <a:pPr algn="ctr" indent="0" marL="0">
+              <a:buNone/>
+            </a:pPr>
+            <a:r>
+              <a:rPr lang="en-US" sz="1400" b="1" dirty="0">
+                <a:solidFill>
+                  <a:srgbClr val="0D9488"/>
+                </a:solidFill>
+                <a:latin typeface="Trebuchet MS" pitchFamily="34" charset="0"/>
+                <a:ea typeface="Trebuchet MS" pitchFamily="34" charset="-122"/>
+                <a:cs typeface="Trebuchet MS" pitchFamily="34" charset="-120"/>
+              </a:rPr>
+              <a:t>der</a:t>
+            </a:r>
+            <a:endParaRPr lang="en-US" sz="1400" dirty="0"/>
+          </a:p>
+        </p:txBody>
+      </p:sp>
+      <p:sp>
+        <p:nvSpPr>
+          <p:cNvPr id="30" name="Text 28"/>
+          <p:cNvSpPr/>
+          <p:nvPr/>
+        </p:nvSpPr>
+        <p:spPr>
+          <a:xfrm>
+            <a:off x="6016752" y="3364992"/>
+            <a:ext cx="411480" cy="475488"/>
+          </a:xfrm>
+          <a:prstGeom prst="rect">
+            <a:avLst/>
+          </a:prstGeom>
+          <a:noFill/>
+          <a:ln/>
+        </p:spPr>
+        <p:txBody>
+          <a:bodyPr wrap="square" lIns="0" tIns="0" rIns="0" bIns="0" rtlCol="0" anchor="ctr"/>
+          <a:lstStyle/>
+          <a:p>
+            <a:pPr algn="ctr" indent="0" marL="0">
+              <a:buNone/>
+            </a:pPr>
+            <a:r>
+              <a:rPr lang="en-US" sz="1600" b="1" dirty="0">
+                <a:solidFill>
+                  <a:srgbClr val="0D9488"/>
+                </a:solidFill>
+                <a:latin typeface="Trebuchet MS" pitchFamily="34" charset="0"/>
+                <a:ea typeface="Trebuchet MS" pitchFamily="34" charset="-122"/>
+                <a:cs typeface="Trebuchet MS" pitchFamily="34" charset="-120"/>
+              </a:rPr>
+              <a:t>·</a:t>
+            </a:r>
+            <a:endParaRPr lang="en-US" sz="1600" dirty="0"/>
+          </a:p>
+        </p:txBody>
+      </p:sp>
+      <p:sp>
+        <p:nvSpPr>
+          <p:cNvPr id="31" name="Shape 29"/>
+          <p:cNvSpPr/>
+          <p:nvPr/>
+        </p:nvSpPr>
+        <p:spPr>
+          <a:xfrm>
+            <a:off x="6428232" y="3364992"/>
+            <a:ext cx="1645920" cy="475488"/>
+          </a:xfrm>
+          <a:prstGeom prst="rect">
+            <a:avLst>
+              <a:gd name="adj" fmla="val 9615"/>
+            </a:avLst>
+          </a:prstGeom>
+          <a:solidFill>
+            <a:srgbClr val="FFFFFF"/>
+          </a:solidFill>
+          <a:ln w="12700">
+            <a:solidFill>
+              <a:srgbClr val="0D9488"/>
+            </a:solidFill>
+            <a:prstDash val="solid"/>
+          </a:ln>
+        </p:spPr>
+      </p:sp>
+      <p:sp>
+        <p:nvSpPr>
+          <p:cNvPr id="32" name="Text 30"/>
+          <p:cNvSpPr/>
+          <p:nvPr/>
+        </p:nvSpPr>
+        <p:spPr>
+          <a:xfrm>
+            <a:off x="6428232" y="3364992"/>
+            <a:ext cx="1645920" cy="475488"/>
+          </a:xfrm>
+          <a:prstGeom prst="rect">
+            <a:avLst/>
+          </a:prstGeom>
+          <a:noFill/>
+          <a:ln/>
+        </p:spPr>
+        <p:txBody>
+          <a:bodyPr wrap="square" lIns="0" tIns="0" rIns="0" bIns="0" rtlCol="0" anchor="ctr"/>
+          <a:lstStyle/>
+          <a:p>
+            <a:pPr algn="ctr" indent="0" marL="0">
+              <a:buNone/>
+            </a:pPr>
+            <a:r>
+              <a:rPr lang="en-US" sz="1400" b="1" dirty="0">
+                <a:solidFill>
+                  <a:srgbClr val="0D9488"/>
+                </a:solidFill>
+                <a:latin typeface="Trebuchet MS" pitchFamily="34" charset="0"/>
+                <a:ea typeface="Trebuchet MS" pitchFamily="34" charset="-122"/>
+                <a:cs typeface="Trebuchet MS" pitchFamily="34" charset="-120"/>
+              </a:rPr>
+              <a:t>fill</a:t>
+            </a:r>
+            <a:endParaRPr lang="en-US" sz="1400" dirty="0"/>
+          </a:p>
+        </p:txBody>
+      </p:sp>
+      <p:sp>
+        <p:nvSpPr>
+          <p:cNvPr id="33" name="Shape 31"/>
+          <p:cNvSpPr/>
+          <p:nvPr/>
+        </p:nvSpPr>
+        <p:spPr>
+          <a:xfrm>
+            <a:off x="365760" y="4096512"/>
+            <a:ext cx="1371600" cy="804672"/>
+          </a:xfrm>
+          <a:prstGeom prst="rect">
+            <a:avLst>
+              <a:gd name="adj" fmla="val 6818"/>
+            </a:avLst>
+          </a:prstGeom>
+          <a:solidFill>
+            <a:srgbClr val="E2E8F0"/>
+          </a:solidFill>
+          <a:ln w="12700">
+            <a:solidFill>
+              <a:srgbClr val="E2E8F0"/>
+            </a:solidFill>
+            <a:prstDash val="solid"/>
+          </a:ln>
+        </p:spPr>
+      </p:sp>
+      <p:sp>
+        <p:nvSpPr>
+          <p:cNvPr id="34" name="Text 32"/>
+          <p:cNvSpPr/>
+          <p:nvPr/>
+        </p:nvSpPr>
+        <p:spPr>
+          <a:xfrm>
+            <a:off x="365760" y="4096512"/>
+            <a:ext cx="1371600" cy="804672"/>
+          </a:xfrm>
+          <a:prstGeom prst="rect">
+            <a:avLst/>
+          </a:prstGeom>
+          <a:noFill/>
+          <a:ln/>
+        </p:spPr>
+        <p:txBody>
+          <a:bodyPr wrap="square" lIns="0" tIns="0" rIns="0" bIns="0" rtlCol="0" anchor="ctr"/>
+          <a:lstStyle/>
+          <a:p>
+            <a:pPr algn="ctr" indent="0" marL="0">
+              <a:buNone/>
+            </a:pPr>
+            <a:r>
+              <a:rPr lang="en-US" sz="1100" b="1" dirty="0">
+                <a:solidFill>
+                  <a:srgbClr val="475569"/>
+                </a:solidFill>
+                <a:latin typeface="Trebuchet MS" pitchFamily="34" charset="0"/>
+                <a:ea typeface="Trebuchet MS" pitchFamily="34" charset="-122"/>
+                <a:cs typeface="Trebuchet MS" pitchFamily="34" charset="-120"/>
+              </a:rPr>
+              <a:t>Phonemes</a:t>
             </a:r>
             <a:endParaRPr lang="en-US" sz="1100" dirty="0"/>
           </a:p>
@@ -32119,13 +31099,13 @@
       </p:sp>
       <p:sp>
         <p:nvSpPr>
-          <p:cNvPr id="27" name="Shape 25"/>
-          <p:cNvSpPr/>
-          <p:nvPr/>
-        </p:nvSpPr>
-        <p:spPr>
-          <a:xfrm>
-            <a:off x="1874520" y="3273552"/>
+          <p:cNvPr id="35" name="Shape 33"/>
+          <p:cNvSpPr/>
+          <p:nvPr/>
+        </p:nvSpPr>
+        <p:spPr>
+          <a:xfrm>
+            <a:off x="1874520" y="4096512"/>
             <a:ext cx="6903720" cy="658368"/>
           </a:xfrm>
           <a:prstGeom prst="rect">
@@ -32134,30 +31114,30 @@
             </a:avLst>
           </a:prstGeom>
           <a:solidFill>
-            <a:srgbClr val="CCFBF1"/>
-          </a:solidFill>
-          <a:ln w="12700">
-            <a:solidFill>
-              <a:srgbClr val="0D9488"/>
-            </a:solidFill>
-            <a:prstDash val="solid"/>
-          </a:ln>
-        </p:spPr>
-      </p:sp>
-      <p:sp>
-        <p:nvSpPr>
-          <p:cNvPr id="28" name="Shape 26"/>
-          <p:cNvSpPr/>
-          <p:nvPr/>
-        </p:nvSpPr>
-        <p:spPr>
-          <a:xfrm>
-            <a:off x="2313432" y="3364992"/>
-            <a:ext cx="1645920" cy="475488"/>
+            <a:srgbClr val="FCE7F3"/>
+          </a:solidFill>
+          <a:ln w="12700">
+            <a:solidFill>
+              <a:srgbClr val="DB2777"/>
+            </a:solidFill>
+            <a:prstDash val="solid"/>
+          </a:ln>
+        </p:spPr>
+      </p:sp>
+      <p:sp>
+        <p:nvSpPr>
+          <p:cNvPr id="36" name="Shape 34"/>
+          <p:cNvSpPr/>
+          <p:nvPr/>
+        </p:nvSpPr>
+        <p:spPr>
+          <a:xfrm>
+            <a:off x="2124837" y="4169664"/>
+            <a:ext cx="685800" cy="475488"/>
           </a:xfrm>
           <a:prstGeom prst="rect">
             <a:avLst>
-              <a:gd name="adj" fmla="val 9615"/>
+              <a:gd name="adj" fmla="val 7692"/>
             </a:avLst>
           </a:prstGeom>
           <a:solidFill>
@@ -32165,22 +31145,22 @@
           </a:solidFill>
           <a:ln w="12700">
             <a:solidFill>
-              <a:srgbClr val="0D9488"/>
-            </a:solidFill>
-            <a:prstDash val="solid"/>
-          </a:ln>
-        </p:spPr>
-      </p:sp>
-      <p:sp>
-        <p:nvSpPr>
-          <p:cNvPr id="29" name="Text 27"/>
-          <p:cNvSpPr/>
-          <p:nvPr/>
-        </p:nvSpPr>
-        <p:spPr>
-          <a:xfrm>
-            <a:off x="2313432" y="3364992"/>
-            <a:ext cx="1645920" cy="475488"/>
+              <a:srgbClr val="DB2777"/>
+            </a:solidFill>
+            <a:prstDash val="solid"/>
+          </a:ln>
+        </p:spPr>
+      </p:sp>
+      <p:sp>
+        <p:nvSpPr>
+          <p:cNvPr id="37" name="Text 35"/>
+          <p:cNvSpPr/>
+          <p:nvPr/>
+        </p:nvSpPr>
+        <p:spPr>
+          <a:xfrm>
+            <a:off x="2124837" y="4169664"/>
+            <a:ext cx="685800" cy="475488"/>
           </a:xfrm>
           <a:prstGeom prst="rect">
             <a:avLst/>
@@ -32196,30 +31176,57 @@
               <a:buNone/>
             </a:pPr>
             <a:r>
-              <a:rPr lang="en-US" sz="1400" b="1" dirty="0">
-                <a:solidFill>
-                  <a:srgbClr val="0D9488"/>
+              <a:rPr lang="en-US" sz="900" b="1" dirty="0">
+                <a:solidFill>
+                  <a:srgbClr val="9D174D"/>
                 </a:solidFill>
                 <a:latin typeface="Trebuchet MS" pitchFamily="34" charset="0"/>
                 <a:ea typeface="Trebuchet MS" pitchFamily="34" charset="-122"/>
                 <a:cs typeface="Trebuchet MS" pitchFamily="34" charset="-120"/>
               </a:rPr>
-              <a:t>re</a:t>
-            </a:r>
-            <a:endParaRPr lang="en-US" sz="1400" dirty="0"/>
-          </a:p>
-        </p:txBody>
-      </p:sp>
-      <p:sp>
-        <p:nvSpPr>
-          <p:cNvPr id="30" name="Text 28"/>
-          <p:cNvSpPr/>
-          <p:nvPr/>
-        </p:nvSpPr>
-        <p:spPr>
-          <a:xfrm>
-            <a:off x="3959352" y="3364992"/>
-            <a:ext cx="411480" cy="475488"/>
+              <a:t>u</a:t>
+            </a:r>
+            <a:endParaRPr lang="en-US" sz="900" dirty="0"/>
+          </a:p>
+        </p:txBody>
+      </p:sp>
+      <p:sp>
+        <p:nvSpPr>
+          <p:cNvPr id="38" name="Shape 36"/>
+          <p:cNvSpPr/>
+          <p:nvPr/>
+        </p:nvSpPr>
+        <p:spPr>
+          <a:xfrm>
+            <a:off x="3033522" y="4169664"/>
+            <a:ext cx="685800" cy="475488"/>
+          </a:xfrm>
+          <a:prstGeom prst="rect">
+            <a:avLst>
+              <a:gd name="adj" fmla="val 7692"/>
+            </a:avLst>
+          </a:prstGeom>
+          <a:solidFill>
+            <a:srgbClr val="FFFFFF"/>
+          </a:solidFill>
+          <a:ln w="12700">
+            <a:solidFill>
+              <a:srgbClr val="DB2777"/>
+            </a:solidFill>
+            <a:prstDash val="solid"/>
+          </a:ln>
+        </p:spPr>
+      </p:sp>
+      <p:sp>
+        <p:nvSpPr>
+          <p:cNvPr id="39" name="Text 37"/>
+          <p:cNvSpPr/>
+          <p:nvPr/>
+        </p:nvSpPr>
+        <p:spPr>
+          <a:xfrm>
+            <a:off x="3033522" y="4169664"/>
+            <a:ext cx="685800" cy="475488"/>
           </a:xfrm>
           <a:prstGeom prst="rect">
             <a:avLst/>
@@ -32235,34 +31242,34 @@
               <a:buNone/>
             </a:pPr>
             <a:r>
-              <a:rPr lang="en-US" sz="1600" b="1" dirty="0">
-                <a:solidFill>
-                  <a:srgbClr val="0D9488"/>
+              <a:rPr lang="en-US" sz="900" b="1" dirty="0">
+                <a:solidFill>
+                  <a:srgbClr val="9D174D"/>
                 </a:solidFill>
                 <a:latin typeface="Trebuchet MS" pitchFamily="34" charset="0"/>
                 <a:ea typeface="Trebuchet MS" pitchFamily="34" charset="-122"/>
                 <a:cs typeface="Trebuchet MS" pitchFamily="34" charset="-120"/>
               </a:rPr>
-              <a:t>·</a:t>
-            </a:r>
-            <a:endParaRPr lang="en-US" sz="1600" dirty="0"/>
-          </a:p>
-        </p:txBody>
-      </p:sp>
-      <p:sp>
-        <p:nvSpPr>
-          <p:cNvPr id="31" name="Shape 29"/>
-          <p:cNvSpPr/>
-          <p:nvPr/>
-        </p:nvSpPr>
-        <p:spPr>
-          <a:xfrm>
-            <a:off x="4370832" y="3364992"/>
-            <a:ext cx="1645920" cy="475488"/>
+              <a:t>n</a:t>
+            </a:r>
+            <a:endParaRPr lang="en-US" sz="900" dirty="0"/>
+          </a:p>
+        </p:txBody>
+      </p:sp>
+      <p:sp>
+        <p:nvSpPr>
+          <p:cNvPr id="40" name="Shape 38"/>
+          <p:cNvSpPr/>
+          <p:nvPr/>
+        </p:nvSpPr>
+        <p:spPr>
+          <a:xfrm>
+            <a:off x="3942207" y="4169664"/>
+            <a:ext cx="685800" cy="475488"/>
           </a:xfrm>
           <a:prstGeom prst="rect">
             <a:avLst>
-              <a:gd name="adj" fmla="val 9615"/>
+              <a:gd name="adj" fmla="val 7692"/>
             </a:avLst>
           </a:prstGeom>
           <a:solidFill>
@@ -32270,22 +31277,22 @@
           </a:solidFill>
           <a:ln w="12700">
             <a:solidFill>
-              <a:srgbClr val="0D9488"/>
-            </a:solidFill>
-            <a:prstDash val="solid"/>
-          </a:ln>
-        </p:spPr>
-      </p:sp>
-      <p:sp>
-        <p:nvSpPr>
-          <p:cNvPr id="32" name="Text 30"/>
-          <p:cNvSpPr/>
-          <p:nvPr/>
-        </p:nvSpPr>
-        <p:spPr>
-          <a:xfrm>
-            <a:off x="4370832" y="3364992"/>
-            <a:ext cx="1645920" cy="475488"/>
+              <a:srgbClr val="DB2777"/>
+            </a:solidFill>
+            <a:prstDash val="solid"/>
+          </a:ln>
+        </p:spPr>
+      </p:sp>
+      <p:sp>
+        <p:nvSpPr>
+          <p:cNvPr id="41" name="Text 39"/>
+          <p:cNvSpPr/>
+          <p:nvPr/>
+        </p:nvSpPr>
+        <p:spPr>
+          <a:xfrm>
+            <a:off x="3942207" y="4169664"/>
+            <a:ext cx="685800" cy="475488"/>
           </a:xfrm>
           <a:prstGeom prst="rect">
             <a:avLst/>
@@ -32301,30 +31308,57 @@
               <a:buNone/>
             </a:pPr>
             <a:r>
-              <a:rPr lang="en-US" sz="1400" b="1" dirty="0">
-                <a:solidFill>
-                  <a:srgbClr val="0D9488"/>
+              <a:rPr lang="en-US" sz="900" b="1" dirty="0">
+                <a:solidFill>
+                  <a:srgbClr val="9D174D"/>
                 </a:solidFill>
                 <a:latin typeface="Trebuchet MS" pitchFamily="34" charset="0"/>
                 <a:ea typeface="Trebuchet MS" pitchFamily="34" charset="-122"/>
                 <a:cs typeface="Trebuchet MS" pitchFamily="34" charset="-120"/>
               </a:rPr>
-              <a:t>fill</a:t>
-            </a:r>
-            <a:endParaRPr lang="en-US" sz="1400" dirty="0"/>
-          </a:p>
-        </p:txBody>
-      </p:sp>
-      <p:sp>
-        <p:nvSpPr>
-          <p:cNvPr id="33" name="Text 31"/>
-          <p:cNvSpPr/>
-          <p:nvPr/>
-        </p:nvSpPr>
-        <p:spPr>
-          <a:xfrm>
-            <a:off x="6016752" y="3364992"/>
-            <a:ext cx="411480" cy="475488"/>
+              <a:t>d</a:t>
+            </a:r>
+            <a:endParaRPr lang="en-US" sz="900" dirty="0"/>
+          </a:p>
+        </p:txBody>
+      </p:sp>
+      <p:sp>
+        <p:nvSpPr>
+          <p:cNvPr id="42" name="Shape 40"/>
+          <p:cNvSpPr/>
+          <p:nvPr/>
+        </p:nvSpPr>
+        <p:spPr>
+          <a:xfrm>
+            <a:off x="4850892" y="4169664"/>
+            <a:ext cx="685800" cy="475488"/>
+          </a:xfrm>
+          <a:prstGeom prst="rect">
+            <a:avLst>
+              <a:gd name="adj" fmla="val 7692"/>
+            </a:avLst>
+          </a:prstGeom>
+          <a:solidFill>
+            <a:srgbClr val="FFFFFF"/>
+          </a:solidFill>
+          <a:ln w="12700">
+            <a:solidFill>
+              <a:srgbClr val="DB2777"/>
+            </a:solidFill>
+            <a:prstDash val="solid"/>
+          </a:ln>
+        </p:spPr>
+      </p:sp>
+      <p:sp>
+        <p:nvSpPr>
+          <p:cNvPr id="43" name="Text 41"/>
+          <p:cNvSpPr/>
+          <p:nvPr/>
+        </p:nvSpPr>
+        <p:spPr>
+          <a:xfrm>
+            <a:off x="4850892" y="4169664"/>
+            <a:ext cx="685800" cy="475488"/>
           </a:xfrm>
           <a:prstGeom prst="rect">
             <a:avLst/>
@@ -32340,34 +31374,34 @@
               <a:buNone/>
             </a:pPr>
             <a:r>
-              <a:rPr lang="en-US" sz="1600" b="1" dirty="0">
-                <a:solidFill>
-                  <a:srgbClr val="0D9488"/>
+              <a:rPr lang="en-US" sz="900" b="1" dirty="0">
+                <a:solidFill>
+                  <a:srgbClr val="9D174D"/>
                 </a:solidFill>
                 <a:latin typeface="Trebuchet MS" pitchFamily="34" charset="0"/>
                 <a:ea typeface="Trebuchet MS" pitchFamily="34" charset="-122"/>
                 <a:cs typeface="Trebuchet MS" pitchFamily="34" charset="-120"/>
               </a:rPr>
-              <a:t>·</a:t>
-            </a:r>
-            <a:endParaRPr lang="en-US" sz="1600" dirty="0"/>
-          </a:p>
-        </p:txBody>
-      </p:sp>
-      <p:sp>
-        <p:nvSpPr>
-          <p:cNvPr id="34" name="Shape 32"/>
-          <p:cNvSpPr/>
-          <p:nvPr/>
-        </p:nvSpPr>
-        <p:spPr>
-          <a:xfrm>
-            <a:off x="6428232" y="3364992"/>
-            <a:ext cx="1645920" cy="475488"/>
+              <a:t>er</a:t>
+            </a:r>
+            <a:endParaRPr lang="en-US" sz="900" dirty="0"/>
+          </a:p>
+        </p:txBody>
+      </p:sp>
+      <p:sp>
+        <p:nvSpPr>
+          <p:cNvPr id="44" name="Shape 42"/>
+          <p:cNvSpPr/>
+          <p:nvPr/>
+        </p:nvSpPr>
+        <p:spPr>
+          <a:xfrm>
+            <a:off x="5759577" y="4169664"/>
+            <a:ext cx="685800" cy="475488"/>
           </a:xfrm>
           <a:prstGeom prst="rect">
             <a:avLst>
-              <a:gd name="adj" fmla="val 9615"/>
+              <a:gd name="adj" fmla="val 7692"/>
             </a:avLst>
           </a:prstGeom>
           <a:solidFill>
@@ -32375,22 +31409,22 @@
           </a:solidFill>
           <a:ln w="12700">
             <a:solidFill>
-              <a:srgbClr val="0D9488"/>
-            </a:solidFill>
-            <a:prstDash val="solid"/>
-          </a:ln>
-        </p:spPr>
-      </p:sp>
-      <p:sp>
-        <p:nvSpPr>
-          <p:cNvPr id="35" name="Text 33"/>
-          <p:cNvSpPr/>
-          <p:nvPr/>
-        </p:nvSpPr>
-        <p:spPr>
-          <a:xfrm>
-            <a:off x="6428232" y="3364992"/>
-            <a:ext cx="1645920" cy="475488"/>
+              <a:srgbClr val="DB2777"/>
+            </a:solidFill>
+            <a:prstDash val="solid"/>
+          </a:ln>
+        </p:spPr>
+      </p:sp>
+      <p:sp>
+        <p:nvSpPr>
+          <p:cNvPr id="45" name="Text 43"/>
+          <p:cNvSpPr/>
+          <p:nvPr/>
+        </p:nvSpPr>
+        <p:spPr>
+          <a:xfrm>
+            <a:off x="5759577" y="4169664"/>
+            <a:ext cx="685800" cy="475488"/>
           </a:xfrm>
           <a:prstGeom prst="rect">
             <a:avLst/>
@@ -32406,57 +31440,57 @@
               <a:buNone/>
             </a:pPr>
             <a:r>
-              <a:rPr lang="en-US" sz="1400" b="1" dirty="0">
-                <a:solidFill>
-                  <a:srgbClr val="0D9488"/>
+              <a:rPr lang="en-US" sz="900" b="1" dirty="0">
+                <a:solidFill>
+                  <a:srgbClr val="9D174D"/>
                 </a:solidFill>
                 <a:latin typeface="Trebuchet MS" pitchFamily="34" charset="0"/>
                 <a:ea typeface="Trebuchet MS" pitchFamily="34" charset="-122"/>
                 <a:cs typeface="Trebuchet MS" pitchFamily="34" charset="-120"/>
               </a:rPr>
-              <a:t>ing</a:t>
-            </a:r>
-            <a:endParaRPr lang="en-US" sz="1400" dirty="0"/>
-          </a:p>
-        </p:txBody>
-      </p:sp>
-      <p:sp>
-        <p:nvSpPr>
-          <p:cNvPr id="36" name="Shape 34"/>
-          <p:cNvSpPr/>
-          <p:nvPr/>
-        </p:nvSpPr>
-        <p:spPr>
-          <a:xfrm>
-            <a:off x="365760" y="4096512"/>
-            <a:ext cx="1371600" cy="804672"/>
+              <a:t>f</a:t>
+            </a:r>
+            <a:endParaRPr lang="en-US" sz="900" dirty="0"/>
+          </a:p>
+        </p:txBody>
+      </p:sp>
+      <p:sp>
+        <p:nvSpPr>
+          <p:cNvPr id="46" name="Shape 44"/>
+          <p:cNvSpPr/>
+          <p:nvPr/>
+        </p:nvSpPr>
+        <p:spPr>
+          <a:xfrm>
+            <a:off x="6668262" y="4169664"/>
+            <a:ext cx="685800" cy="475488"/>
           </a:xfrm>
           <a:prstGeom prst="rect">
             <a:avLst>
-              <a:gd name="adj" fmla="val 6818"/>
+              <a:gd name="adj" fmla="val 7692"/>
             </a:avLst>
           </a:prstGeom>
           <a:solidFill>
-            <a:srgbClr val="E2E8F0"/>
-          </a:solidFill>
-          <a:ln w="12700">
-            <a:solidFill>
-              <a:srgbClr val="E2E8F0"/>
-            </a:solidFill>
-            <a:prstDash val="solid"/>
-          </a:ln>
-        </p:spPr>
-      </p:sp>
-      <p:sp>
-        <p:nvSpPr>
-          <p:cNvPr id="37" name="Text 35"/>
-          <p:cNvSpPr/>
-          <p:nvPr/>
-        </p:nvSpPr>
-        <p:spPr>
-          <a:xfrm>
-            <a:off x="365760" y="4096512"/>
-            <a:ext cx="1371600" cy="804672"/>
+            <a:srgbClr val="FFFFFF"/>
+          </a:solidFill>
+          <a:ln w="12700">
+            <a:solidFill>
+              <a:srgbClr val="DB2777"/>
+            </a:solidFill>
+            <a:prstDash val="solid"/>
+          </a:ln>
+        </p:spPr>
+      </p:sp>
+      <p:sp>
+        <p:nvSpPr>
+          <p:cNvPr id="47" name="Text 45"/>
+          <p:cNvSpPr/>
+          <p:nvPr/>
+        </p:nvSpPr>
+        <p:spPr>
+          <a:xfrm>
+            <a:off x="6668262" y="4169664"/>
+            <a:ext cx="685800" cy="475488"/>
           </a:xfrm>
           <a:prstGeom prst="rect">
             <a:avLst/>
@@ -32472,56 +31506,29 @@
               <a:buNone/>
             </a:pPr>
             <a:r>
-              <a:rPr lang="en-US" sz="1100" b="1" dirty="0">
-                <a:solidFill>
-                  <a:srgbClr val="475569"/>
+              <a:rPr lang="en-US" sz="900" b="1" dirty="0">
+                <a:solidFill>
+                  <a:srgbClr val="9D174D"/>
                 </a:solidFill>
                 <a:latin typeface="Trebuchet MS" pitchFamily="34" charset="0"/>
                 <a:ea typeface="Trebuchet MS" pitchFamily="34" charset="-122"/>
                 <a:cs typeface="Trebuchet MS" pitchFamily="34" charset="-120"/>
               </a:rPr>
-              <a:t>Phonemes</a:t>
-            </a:r>
-            <a:endParaRPr lang="en-US" sz="1100" dirty="0"/>
-          </a:p>
-        </p:txBody>
-      </p:sp>
-      <p:sp>
-        <p:nvSpPr>
-          <p:cNvPr id="38" name="Shape 36"/>
-          <p:cNvSpPr/>
-          <p:nvPr/>
-        </p:nvSpPr>
-        <p:spPr>
-          <a:xfrm>
-            <a:off x="1874520" y="4096512"/>
-            <a:ext cx="6903720" cy="658368"/>
-          </a:xfrm>
-          <a:prstGeom prst="rect">
-            <a:avLst>
-              <a:gd name="adj" fmla="val 8333"/>
-            </a:avLst>
-          </a:prstGeom>
-          <a:solidFill>
-            <a:srgbClr val="FCE7F3"/>
-          </a:solidFill>
-          <a:ln w="12700">
-            <a:solidFill>
-              <a:srgbClr val="DB2777"/>
-            </a:solidFill>
-            <a:prstDash val="solid"/>
-          </a:ln>
-        </p:spPr>
-      </p:sp>
-      <p:sp>
-        <p:nvSpPr>
-          <p:cNvPr id="39" name="Shape 37"/>
-          <p:cNvSpPr/>
-          <p:nvPr/>
-        </p:nvSpPr>
-        <p:spPr>
-          <a:xfrm>
-            <a:off x="2124837" y="4169664"/>
+              <a:t>i</a:t>
+            </a:r>
+            <a:endParaRPr lang="en-US" sz="900" dirty="0"/>
+          </a:p>
+        </p:txBody>
+      </p:sp>
+      <p:sp>
+        <p:nvSpPr>
+          <p:cNvPr id="48" name="Shape 46"/>
+          <p:cNvSpPr/>
+          <p:nvPr/>
+        </p:nvSpPr>
+        <p:spPr>
+          <a:xfrm>
+            <a:off x="7576947" y="4169664"/>
             <a:ext cx="685800" cy="475488"/>
           </a:xfrm>
           <a:prstGeom prst="rect">
@@ -32542,13 +31549,13 @@
       </p:sp>
       <p:sp>
         <p:nvSpPr>
-          <p:cNvPr id="40" name="Text 38"/>
-          <p:cNvSpPr/>
-          <p:nvPr/>
-        </p:nvSpPr>
-        <p:spPr>
-          <a:xfrm>
-            <a:off x="2124837" y="4169664"/>
+          <p:cNvPr id="49" name="Text 47"/>
+          <p:cNvSpPr/>
+          <p:nvPr/>
+        </p:nvSpPr>
+        <p:spPr>
+          <a:xfrm>
+            <a:off x="7576947" y="4169664"/>
             <a:ext cx="685800" cy="475488"/>
           </a:xfrm>
           <a:prstGeom prst="rect">
@@ -32573,403 +31580,7 @@
                 <a:ea typeface="Trebuchet MS" pitchFamily="34" charset="-122"/>
                 <a:cs typeface="Trebuchet MS" pitchFamily="34" charset="-120"/>
               </a:rPr>
-              <a:t>r</a:t>
-            </a:r>
-            <a:endParaRPr lang="en-US" sz="900" dirty="0"/>
-          </a:p>
-        </p:txBody>
-      </p:sp>
-      <p:sp>
-        <p:nvSpPr>
-          <p:cNvPr id="41" name="Shape 39"/>
-          <p:cNvSpPr/>
-          <p:nvPr/>
-        </p:nvSpPr>
-        <p:spPr>
-          <a:xfrm>
-            <a:off x="3033522" y="4169664"/>
-            <a:ext cx="685800" cy="475488"/>
-          </a:xfrm>
-          <a:prstGeom prst="rect">
-            <a:avLst>
-              <a:gd name="adj" fmla="val 7692"/>
-            </a:avLst>
-          </a:prstGeom>
-          <a:solidFill>
-            <a:srgbClr val="FFFFFF"/>
-          </a:solidFill>
-          <a:ln w="12700">
-            <a:solidFill>
-              <a:srgbClr val="DB2777"/>
-            </a:solidFill>
-            <a:prstDash val="solid"/>
-          </a:ln>
-        </p:spPr>
-      </p:sp>
-      <p:sp>
-        <p:nvSpPr>
-          <p:cNvPr id="42" name="Text 40"/>
-          <p:cNvSpPr/>
-          <p:nvPr/>
-        </p:nvSpPr>
-        <p:spPr>
-          <a:xfrm>
-            <a:off x="3033522" y="4169664"/>
-            <a:ext cx="685800" cy="475488"/>
-          </a:xfrm>
-          <a:prstGeom prst="rect">
-            <a:avLst/>
-          </a:prstGeom>
-          <a:noFill/>
-          <a:ln/>
-        </p:spPr>
-        <p:txBody>
-          <a:bodyPr wrap="square" lIns="0" tIns="0" rIns="0" bIns="0" rtlCol="0" anchor="ctr"/>
-          <a:lstStyle/>
-          <a:p>
-            <a:pPr algn="ctr" indent="0" marL="0">
-              <a:buNone/>
-            </a:pPr>
-            <a:r>
-              <a:rPr lang="en-US" sz="900" b="1" dirty="0">
-                <a:solidFill>
-                  <a:srgbClr val="9D174D"/>
-                </a:solidFill>
-                <a:latin typeface="Trebuchet MS" pitchFamily="34" charset="0"/>
-                <a:ea typeface="Trebuchet MS" pitchFamily="34" charset="-122"/>
-                <a:cs typeface="Trebuchet MS" pitchFamily="34" charset="-120"/>
-              </a:rPr>
-              <a:t>e</a:t>
-            </a:r>
-            <a:endParaRPr lang="en-US" sz="900" dirty="0"/>
-          </a:p>
-        </p:txBody>
-      </p:sp>
-      <p:sp>
-        <p:nvSpPr>
-          <p:cNvPr id="43" name="Shape 41"/>
-          <p:cNvSpPr/>
-          <p:nvPr/>
-        </p:nvSpPr>
-        <p:spPr>
-          <a:xfrm>
-            <a:off x="3942207" y="4169664"/>
-            <a:ext cx="685800" cy="475488"/>
-          </a:xfrm>
-          <a:prstGeom prst="rect">
-            <a:avLst>
-              <a:gd name="adj" fmla="val 7692"/>
-            </a:avLst>
-          </a:prstGeom>
-          <a:solidFill>
-            <a:srgbClr val="FFFFFF"/>
-          </a:solidFill>
-          <a:ln w="12700">
-            <a:solidFill>
-              <a:srgbClr val="DB2777"/>
-            </a:solidFill>
-            <a:prstDash val="solid"/>
-          </a:ln>
-        </p:spPr>
-      </p:sp>
-      <p:sp>
-        <p:nvSpPr>
-          <p:cNvPr id="44" name="Text 42"/>
-          <p:cNvSpPr/>
-          <p:nvPr/>
-        </p:nvSpPr>
-        <p:spPr>
-          <a:xfrm>
-            <a:off x="3942207" y="4169664"/>
-            <a:ext cx="685800" cy="475488"/>
-          </a:xfrm>
-          <a:prstGeom prst="rect">
-            <a:avLst/>
-          </a:prstGeom>
-          <a:noFill/>
-          <a:ln/>
-        </p:spPr>
-        <p:txBody>
-          <a:bodyPr wrap="square" lIns="0" tIns="0" rIns="0" bIns="0" rtlCol="0" anchor="ctr"/>
-          <a:lstStyle/>
-          <a:p>
-            <a:pPr algn="ctr" indent="0" marL="0">
-              <a:buNone/>
-            </a:pPr>
-            <a:r>
-              <a:rPr lang="en-US" sz="900" b="1" dirty="0">
-                <a:solidFill>
-                  <a:srgbClr val="9D174D"/>
-                </a:solidFill>
-                <a:latin typeface="Trebuchet MS" pitchFamily="34" charset="0"/>
-                <a:ea typeface="Trebuchet MS" pitchFamily="34" charset="-122"/>
-                <a:cs typeface="Trebuchet MS" pitchFamily="34" charset="-120"/>
-              </a:rPr>
-              <a:t>f</a:t>
-            </a:r>
-            <a:endParaRPr lang="en-US" sz="900" dirty="0"/>
-          </a:p>
-        </p:txBody>
-      </p:sp>
-      <p:sp>
-        <p:nvSpPr>
-          <p:cNvPr id="45" name="Shape 43"/>
-          <p:cNvSpPr/>
-          <p:nvPr/>
-        </p:nvSpPr>
-        <p:spPr>
-          <a:xfrm>
-            <a:off x="4850892" y="4169664"/>
-            <a:ext cx="685800" cy="475488"/>
-          </a:xfrm>
-          <a:prstGeom prst="rect">
-            <a:avLst>
-              <a:gd name="adj" fmla="val 7692"/>
-            </a:avLst>
-          </a:prstGeom>
-          <a:solidFill>
-            <a:srgbClr val="FFFFFF"/>
-          </a:solidFill>
-          <a:ln w="12700">
-            <a:solidFill>
-              <a:srgbClr val="DB2777"/>
-            </a:solidFill>
-            <a:prstDash val="solid"/>
-          </a:ln>
-        </p:spPr>
-      </p:sp>
-      <p:sp>
-        <p:nvSpPr>
-          <p:cNvPr id="46" name="Text 44"/>
-          <p:cNvSpPr/>
-          <p:nvPr/>
-        </p:nvSpPr>
-        <p:spPr>
-          <a:xfrm>
-            <a:off x="4850892" y="4169664"/>
-            <a:ext cx="685800" cy="475488"/>
-          </a:xfrm>
-          <a:prstGeom prst="rect">
-            <a:avLst/>
-          </a:prstGeom>
-          <a:noFill/>
-          <a:ln/>
-        </p:spPr>
-        <p:txBody>
-          <a:bodyPr wrap="square" lIns="0" tIns="0" rIns="0" bIns="0" rtlCol="0" anchor="ctr"/>
-          <a:lstStyle/>
-          <a:p>
-            <a:pPr algn="ctr" indent="0" marL="0">
-              <a:buNone/>
-            </a:pPr>
-            <a:r>
-              <a:rPr lang="en-US" sz="900" b="1" dirty="0">
-                <a:solidFill>
-                  <a:srgbClr val="9D174D"/>
-                </a:solidFill>
-                <a:latin typeface="Trebuchet MS" pitchFamily="34" charset="0"/>
-                <a:ea typeface="Trebuchet MS" pitchFamily="34" charset="-122"/>
-                <a:cs typeface="Trebuchet MS" pitchFamily="34" charset="-120"/>
-              </a:rPr>
-              <a:t>i</a:t>
-            </a:r>
-            <a:endParaRPr lang="en-US" sz="900" dirty="0"/>
-          </a:p>
-        </p:txBody>
-      </p:sp>
-      <p:sp>
-        <p:nvSpPr>
-          <p:cNvPr id="47" name="Shape 45"/>
-          <p:cNvSpPr/>
-          <p:nvPr/>
-        </p:nvSpPr>
-        <p:spPr>
-          <a:xfrm>
-            <a:off x="5759577" y="4169664"/>
-            <a:ext cx="685800" cy="475488"/>
-          </a:xfrm>
-          <a:prstGeom prst="rect">
-            <a:avLst>
-              <a:gd name="adj" fmla="val 7692"/>
-            </a:avLst>
-          </a:prstGeom>
-          <a:solidFill>
-            <a:srgbClr val="FFFFFF"/>
-          </a:solidFill>
-          <a:ln w="12700">
-            <a:solidFill>
-              <a:srgbClr val="DB2777"/>
-            </a:solidFill>
-            <a:prstDash val="solid"/>
-          </a:ln>
-        </p:spPr>
-      </p:sp>
-      <p:sp>
-        <p:nvSpPr>
-          <p:cNvPr id="48" name="Text 46"/>
-          <p:cNvSpPr/>
-          <p:nvPr/>
-        </p:nvSpPr>
-        <p:spPr>
-          <a:xfrm>
-            <a:off x="5759577" y="4169664"/>
-            <a:ext cx="685800" cy="475488"/>
-          </a:xfrm>
-          <a:prstGeom prst="rect">
-            <a:avLst/>
-          </a:prstGeom>
-          <a:noFill/>
-          <a:ln/>
-        </p:spPr>
-        <p:txBody>
-          <a:bodyPr wrap="square" lIns="0" tIns="0" rIns="0" bIns="0" rtlCol="0" anchor="ctr"/>
-          <a:lstStyle/>
-          <a:p>
-            <a:pPr algn="ctr" indent="0" marL="0">
-              <a:buNone/>
-            </a:pPr>
-            <a:r>
-              <a:rPr lang="en-US" sz="900" b="1" dirty="0">
-                <a:solidFill>
-                  <a:srgbClr val="9D174D"/>
-                </a:solidFill>
-                <a:latin typeface="Trebuchet MS" pitchFamily="34" charset="0"/>
-                <a:ea typeface="Trebuchet MS" pitchFamily="34" charset="-122"/>
-                <a:cs typeface="Trebuchet MS" pitchFamily="34" charset="-120"/>
-              </a:rPr>
               <a:t>ll</a:t>
-            </a:r>
-            <a:endParaRPr lang="en-US" sz="900" dirty="0"/>
-          </a:p>
-        </p:txBody>
-      </p:sp>
-      <p:sp>
-        <p:nvSpPr>
-          <p:cNvPr id="49" name="Shape 47"/>
-          <p:cNvSpPr/>
-          <p:nvPr/>
-        </p:nvSpPr>
-        <p:spPr>
-          <a:xfrm>
-            <a:off x="6668262" y="4169664"/>
-            <a:ext cx="685800" cy="475488"/>
-          </a:xfrm>
-          <a:prstGeom prst="rect">
-            <a:avLst>
-              <a:gd name="adj" fmla="val 7692"/>
-            </a:avLst>
-          </a:prstGeom>
-          <a:solidFill>
-            <a:srgbClr val="FFFFFF"/>
-          </a:solidFill>
-          <a:ln w="12700">
-            <a:solidFill>
-              <a:srgbClr val="DB2777"/>
-            </a:solidFill>
-            <a:prstDash val="solid"/>
-          </a:ln>
-        </p:spPr>
-      </p:sp>
-      <p:sp>
-        <p:nvSpPr>
-          <p:cNvPr id="50" name="Text 48"/>
-          <p:cNvSpPr/>
-          <p:nvPr/>
-        </p:nvSpPr>
-        <p:spPr>
-          <a:xfrm>
-            <a:off x="6668262" y="4169664"/>
-            <a:ext cx="685800" cy="475488"/>
-          </a:xfrm>
-          <a:prstGeom prst="rect">
-            <a:avLst/>
-          </a:prstGeom>
-          <a:noFill/>
-          <a:ln/>
-        </p:spPr>
-        <p:txBody>
-          <a:bodyPr wrap="square" lIns="0" tIns="0" rIns="0" bIns="0" rtlCol="0" anchor="ctr"/>
-          <a:lstStyle/>
-          <a:p>
-            <a:pPr algn="ctr" indent="0" marL="0">
-              <a:buNone/>
-            </a:pPr>
-            <a:r>
-              <a:rPr lang="en-US" sz="900" b="1" dirty="0">
-                <a:solidFill>
-                  <a:srgbClr val="9D174D"/>
-                </a:solidFill>
-                <a:latin typeface="Trebuchet MS" pitchFamily="34" charset="0"/>
-                <a:ea typeface="Trebuchet MS" pitchFamily="34" charset="-122"/>
-                <a:cs typeface="Trebuchet MS" pitchFamily="34" charset="-120"/>
-              </a:rPr>
-              <a:t>i</a:t>
-            </a:r>
-            <a:endParaRPr lang="en-US" sz="900" dirty="0"/>
-          </a:p>
-        </p:txBody>
-      </p:sp>
-      <p:sp>
-        <p:nvSpPr>
-          <p:cNvPr id="51" name="Shape 49"/>
-          <p:cNvSpPr/>
-          <p:nvPr/>
-        </p:nvSpPr>
-        <p:spPr>
-          <a:xfrm>
-            <a:off x="7576947" y="4169664"/>
-            <a:ext cx="685800" cy="475488"/>
-          </a:xfrm>
-          <a:prstGeom prst="rect">
-            <a:avLst>
-              <a:gd name="adj" fmla="val 7692"/>
-            </a:avLst>
-          </a:prstGeom>
-          <a:solidFill>
-            <a:srgbClr val="FFFFFF"/>
-          </a:solidFill>
-          <a:ln w="12700">
-            <a:solidFill>
-              <a:srgbClr val="DB2777"/>
-            </a:solidFill>
-            <a:prstDash val="solid"/>
-          </a:ln>
-        </p:spPr>
-      </p:sp>
-      <p:sp>
-        <p:nvSpPr>
-          <p:cNvPr id="52" name="Text 50"/>
-          <p:cNvSpPr/>
-          <p:nvPr/>
-        </p:nvSpPr>
-        <p:spPr>
-          <a:xfrm>
-            <a:off x="7576947" y="4169664"/>
-            <a:ext cx="685800" cy="475488"/>
-          </a:xfrm>
-          <a:prstGeom prst="rect">
-            <a:avLst/>
-          </a:prstGeom>
-          <a:noFill/>
-          <a:ln/>
-        </p:spPr>
-        <p:txBody>
-          <a:bodyPr wrap="square" lIns="0" tIns="0" rIns="0" bIns="0" rtlCol="0" anchor="ctr"/>
-          <a:lstStyle/>
-          <a:p>
-            <a:pPr algn="ctr" indent="0" marL="0">
-              <a:buNone/>
-            </a:pPr>
-            <a:r>
-              <a:rPr lang="en-US" sz="900" b="1" dirty="0">
-                <a:solidFill>
-                  <a:srgbClr val="9D174D"/>
-                </a:solidFill>
-                <a:latin typeface="Trebuchet MS" pitchFamily="34" charset="0"/>
-                <a:ea typeface="Trebuchet MS" pitchFamily="34" charset="-122"/>
-                <a:cs typeface="Trebuchet MS" pitchFamily="34" charset="-120"/>
-              </a:rPr>
-              <a:t>ng</a:t>
             </a:r>
             <a:endParaRPr lang="en-US" sz="900" dirty="0"/>
           </a:p>
@@ -35076,7 +33687,7 @@
                 <a:ea typeface="Trebuchet MS" pitchFamily="34" charset="-122"/>
                 <a:cs typeface="Trebuchet MS" pitchFamily="34" charset="-120"/>
               </a:rPr>
-              <a:t>un-</a:t>
+              <a:t>in-</a:t>
             </a:r>
             <a:endParaRPr lang="en-US" sz="1300" dirty="0"/>
           </a:p>
@@ -35229,7 +33840,7 @@
                 <a:ea typeface="Trebuchet MS" pitchFamily="34" charset="-122"/>
                 <a:cs typeface="Trebuchet MS" pitchFamily="34" charset="-120"/>
               </a:rPr>
-              <a:t>in-</a:t>
+              <a:t>under-</a:t>
             </a:r>
             <a:endParaRPr lang="en-US" sz="1300" dirty="0"/>
           </a:p>
@@ -35471,7 +34082,7 @@
                 <a:ea typeface="Trebuchet MS" pitchFamily="34" charset="-122"/>
                 <a:cs typeface="Trebuchet MS" pitchFamily="34" charset="-120"/>
               </a:rPr>
-              <a:t>-s</a:t>
+              <a:t>-able</a:t>
             </a:r>
             <a:endParaRPr lang="en-US" sz="1300" dirty="0"/>
           </a:p>
@@ -35642,7 +34253,7 @@
                 <a:ea typeface="Trebuchet MS" pitchFamily="34" charset="-122"/>
                 <a:cs typeface="Trebuchet MS" pitchFamily="34" charset="-120"/>
               </a:rPr>
-              <a:t>overfill</a:t>
+              <a:t>filling</a:t>
             </a:r>
             <a:endParaRPr lang="en-US" sz="1200" dirty="0"/>
           </a:p>
@@ -35708,7 +34319,7 @@
                 <a:ea typeface="Trebuchet MS" pitchFamily="34" charset="-122"/>
                 <a:cs typeface="Trebuchet MS" pitchFamily="34" charset="-120"/>
               </a:rPr>
-              <a:t>filling</a:t>
+              <a:t>filled</a:t>
             </a:r>
             <a:endParaRPr lang="en-US" sz="1200" dirty="0"/>
           </a:p>
@@ -35774,7 +34385,7 @@
                 <a:ea typeface="Trebuchet MS" pitchFamily="34" charset="-122"/>
                 <a:cs typeface="Trebuchet MS" pitchFamily="34" charset="-120"/>
               </a:rPr>
-              <a:t>filled</a:t>
+              <a:t>overfill</a:t>
             </a:r>
             <a:endParaRPr lang="en-US" sz="1200" dirty="0"/>
           </a:p>
@@ -35972,7 +34583,7 @@
                 <a:ea typeface="Trebuchet MS" pitchFamily="34" charset="-122"/>
                 <a:cs typeface="Trebuchet MS" pitchFamily="34" charset="-120"/>
               </a:rPr>
-              <a:t>unfilled</a:t>
+              <a:t>infill</a:t>
             </a:r>
             <a:endParaRPr lang="en-US" sz="1200" dirty="0"/>
           </a:p>
@@ -36038,7 +34649,7 @@
                 <a:ea typeface="Trebuchet MS" pitchFamily="34" charset="-122"/>
                 <a:cs typeface="Trebuchet MS" pitchFamily="34" charset="-120"/>
               </a:rPr>
-              <a:t>refilling</a:t>
+              <a:t>backfill</a:t>
             </a:r>
             <a:endParaRPr lang="en-US" sz="1200" dirty="0"/>
           </a:p>
@@ -37226,7 +35837,7 @@
                 <a:ea typeface="Calibri" pitchFamily="34" charset="-122"/>
                 <a:cs typeface="Calibri" pitchFamily="34" charset="-120"/>
               </a:rPr>
-              <a:t>1.  The word 'refill' contains the prefix 're-' meaning again.</a:t>
+              <a:t>1.  The root 'fill' comes from a Greek word.</a:t>
             </a:r>
             <a:endParaRPr lang="en-US" sz="1300" dirty="0"/>
           </a:p>
@@ -37249,11 +35860,11 @@
             </a:avLst>
           </a:prstGeom>
           <a:solidFill>
-            <a:srgbClr val="DCFCE7"/>
-          </a:solidFill>
-          <a:ln w="12700">
-            <a:solidFill>
-              <a:srgbClr val="16A34A"/>
+            <a:srgbClr val="FEE2E2"/>
+          </a:solidFill>
+          <a:ln w="12700">
+            <a:solidFill>
+              <a:srgbClr val="DC2626"/>
             </a:solidFill>
             <a:prstDash val="solid"/>
           </a:ln>
@@ -37286,13 +35897,13 @@
             <a:r>
               <a:rPr lang="en-US" sz="1100" b="1" dirty="0">
                 <a:solidFill>
-                  <a:srgbClr val="16A34A"/>
+                  <a:srgbClr val="DC2626"/>
                 </a:solidFill>
                 <a:latin typeface="Trebuchet MS" pitchFamily="34" charset="0"/>
                 <a:ea typeface="Trebuchet MS" pitchFamily="34" charset="-122"/>
                 <a:cs typeface="Trebuchet MS" pitchFamily="34" charset="-120"/>
               </a:rPr>
-              <a:t>TRUE</a:t>
+              <a:t>FALSE</a:t>
             </a:r>
             <a:endParaRPr lang="en-US" sz="1100" dirty="0"/>
           </a:p>
@@ -37365,7 +35976,7 @@
                 <a:ea typeface="Calibri" pitchFamily="34" charset="-122"/>
                 <a:cs typeface="Calibri" pitchFamily="34" charset="-120"/>
               </a:rPr>
-              <a:t>2.  The word 'filled' means something that is completely empty.</a:t>
+              <a:t>2.  Adding the prefix 're' to 'fill' creates a word meaning to fill again.</a:t>
             </a:r>
             <a:endParaRPr lang="en-US" sz="1300" dirty="0"/>
           </a:p>
@@ -37388,11 +35999,11 @@
             </a:avLst>
           </a:prstGeom>
           <a:solidFill>
-            <a:srgbClr val="FEE2E2"/>
-          </a:solidFill>
-          <a:ln w="12700">
-            <a:solidFill>
-              <a:srgbClr val="DC2626"/>
+            <a:srgbClr val="DCFCE7"/>
+          </a:solidFill>
+          <a:ln w="12700">
+            <a:solidFill>
+              <a:srgbClr val="16A34A"/>
             </a:solidFill>
             <a:prstDash val="solid"/>
           </a:ln>
@@ -37425,13 +36036,13 @@
             <a:r>
               <a:rPr lang="en-US" sz="1100" b="1" dirty="0">
                 <a:solidFill>
-                  <a:srgbClr val="DC2626"/>
+                  <a:srgbClr val="16A34A"/>
                 </a:solidFill>
                 <a:latin typeface="Trebuchet MS" pitchFamily="34" charset="0"/>
                 <a:ea typeface="Trebuchet MS" pitchFamily="34" charset="-122"/>
                 <a:cs typeface="Trebuchet MS" pitchFamily="34" charset="-120"/>
               </a:rPr>
-              <a:t>FALSE</a:t>
+              <a:t>TRUE</a:t>
             </a:r>
             <a:endParaRPr lang="en-US" sz="1100" dirty="0"/>
           </a:p>
@@ -37504,7 +36115,7 @@
                 <a:ea typeface="Calibri" pitchFamily="34" charset="-122"/>
                 <a:cs typeface="Calibri" pitchFamily="34" charset="-120"/>
               </a:rPr>
-              <a:t>3.  Adding '-ing' to 'fill' makes the word 'filling'.</a:t>
+              <a:t>3.  The suffix '-ment' in 'fulfilment' means to do again.</a:t>
             </a:r>
             <a:endParaRPr lang="en-US" sz="1300" dirty="0"/>
           </a:p>
@@ -37527,11 +36138,11 @@
             </a:avLst>
           </a:prstGeom>
           <a:solidFill>
-            <a:srgbClr val="DCFCE7"/>
-          </a:solidFill>
-          <a:ln w="12700">
-            <a:solidFill>
-              <a:srgbClr val="16A34A"/>
+            <a:srgbClr val="FEE2E2"/>
+          </a:solidFill>
+          <a:ln w="12700">
+            <a:solidFill>
+              <a:srgbClr val="DC2626"/>
             </a:solidFill>
             <a:prstDash val="solid"/>
           </a:ln>
@@ -37564,13 +36175,13 @@
             <a:r>
               <a:rPr lang="en-US" sz="1100" b="1" dirty="0">
                 <a:solidFill>
-                  <a:srgbClr val="16A34A"/>
+                  <a:srgbClr val="DC2626"/>
                 </a:solidFill>
                 <a:latin typeface="Trebuchet MS" pitchFamily="34" charset="0"/>
                 <a:ea typeface="Trebuchet MS" pitchFamily="34" charset="-122"/>
                 <a:cs typeface="Trebuchet MS" pitchFamily="34" charset="-120"/>
               </a:rPr>
-              <a:t>TRUE</a:t>
+              <a:t>FALSE</a:t>
             </a:r>
             <a:endParaRPr lang="en-US" sz="1100" dirty="0"/>
           </a:p>
@@ -37643,7 +36254,7 @@
                 <a:ea typeface="Calibri" pitchFamily="34" charset="-122"/>
                 <a:cs typeface="Calibri" pitchFamily="34" charset="-120"/>
               </a:rPr>
-              <a:t>4.  The word 'overfill' means to fill something with too much.</a:t>
+              <a:t>4.  The word 'refill' contains the root 'fill' meaning to make full.</a:t>
             </a:r>
             <a:endParaRPr lang="en-US" sz="1300" dirty="0"/>
           </a:p>
@@ -37782,7 +36393,7 @@
                 <a:ea typeface="Calibri" pitchFamily="34" charset="-122"/>
                 <a:cs typeface="Calibri" pitchFamily="34" charset="-120"/>
               </a:rPr>
-              <a:t>5.  The root 'fill' comes from an ancient Greek word.</a:t>
+              <a:t>5.  The word 'overfill' means to put too much into something.</a:t>
             </a:r>
             <a:endParaRPr lang="en-US" sz="1300" dirty="0"/>
           </a:p>
@@ -37805,11 +36416,11 @@
             </a:avLst>
           </a:prstGeom>
           <a:solidFill>
-            <a:srgbClr val="FEE2E2"/>
-          </a:solidFill>
-          <a:ln w="12700">
-            <a:solidFill>
-              <a:srgbClr val="DC2626"/>
+            <a:srgbClr val="DCFCE7"/>
+          </a:solidFill>
+          <a:ln w="12700">
+            <a:solidFill>
+              <a:srgbClr val="16A34A"/>
             </a:solidFill>
             <a:prstDash val="solid"/>
           </a:ln>
@@ -37842,13 +36453,13 @@
             <a:r>
               <a:rPr lang="en-US" sz="1100" b="1" dirty="0">
                 <a:solidFill>
-                  <a:srgbClr val="DC2626"/>
+                  <a:srgbClr val="16A34A"/>
                 </a:solidFill>
                 <a:latin typeface="Trebuchet MS" pitchFamily="34" charset="0"/>
                 <a:ea typeface="Trebuchet MS" pitchFamily="34" charset="-122"/>
                 <a:cs typeface="Trebuchet MS" pitchFamily="34" charset="-120"/>
               </a:rPr>
-              <a:t>FALSE</a:t>
+              <a:t>TRUE</a:t>
             </a:r>
             <a:endParaRPr lang="en-US" sz="1100" dirty="0"/>
           </a:p>
@@ -38487,7 +37098,7 @@
                 <a:ea typeface="Trebuchet MS" pitchFamily="34" charset="-122"/>
                 <a:cs typeface="Trebuchet MS" pitchFamily="34" charset="-120"/>
               </a:rPr>
-              <a:t>overfill</a:t>
+              <a:t>filling</a:t>
             </a:r>
             <a:endParaRPr lang="en-US" sz="1300" dirty="0"/>
           </a:p>
@@ -38553,7 +37164,7 @@
                 <a:ea typeface="Trebuchet MS" pitchFamily="34" charset="-122"/>
                 <a:cs typeface="Trebuchet MS" pitchFamily="34" charset="-120"/>
               </a:rPr>
-              <a:t>filling</a:t>
+              <a:t>filled</a:t>
             </a:r>
             <a:endParaRPr lang="en-US" sz="1300" dirty="0"/>
           </a:p>
@@ -38619,7 +37230,7 @@
                 <a:ea typeface="Trebuchet MS" pitchFamily="34" charset="-122"/>
                 <a:cs typeface="Trebuchet MS" pitchFamily="34" charset="-120"/>
               </a:rPr>
-              <a:t>filled</a:t>
+              <a:t>overfill</a:t>
             </a:r>
             <a:endParaRPr lang="en-US" sz="1300" dirty="0"/>
           </a:p>
@@ -38817,7 +37428,7 @@
                 <a:ea typeface="Trebuchet MS" pitchFamily="34" charset="-122"/>
                 <a:cs typeface="Trebuchet MS" pitchFamily="34" charset="-120"/>
               </a:rPr>
-              <a:t>unfilled</a:t>
+              <a:t>infill</a:t>
             </a:r>
             <a:endParaRPr lang="en-US" sz="1300" dirty="0"/>
           </a:p>
@@ -39755,7 +38366,7 @@
                 <a:ea typeface="Trebuchet MS" pitchFamily="34" charset="-122"/>
                 <a:cs typeface="Trebuchet MS" pitchFamily="34" charset="-120"/>
               </a:rPr>
-              <a:t>un-</a:t>
+              <a:t>in-</a:t>
             </a:r>
             <a:endParaRPr lang="en-US" sz="1300" dirty="0"/>
           </a:p>
@@ -39908,7 +38519,7 @@
                 <a:ea typeface="Trebuchet MS" pitchFamily="34" charset="-122"/>
                 <a:cs typeface="Trebuchet MS" pitchFamily="34" charset="-120"/>
               </a:rPr>
-              <a:t>in-</a:t>
+              <a:t>under-</a:t>
             </a:r>
             <a:endParaRPr lang="en-US" sz="1300" dirty="0"/>
           </a:p>
@@ -40150,7 +38761,7 @@
                 <a:ea typeface="Trebuchet MS" pitchFamily="34" charset="-122"/>
                 <a:cs typeface="Trebuchet MS" pitchFamily="34" charset="-120"/>
               </a:rPr>
-              <a:t>-s</a:t>
+              <a:t>-able</a:t>
             </a:r>
             <a:endParaRPr lang="en-US" sz="1300" dirty="0"/>
           </a:p>
@@ -41134,7 +39745,7 @@
                 <a:ea typeface="Trebuchet MS" pitchFamily="34" charset="-122"/>
                 <a:cs typeface="Trebuchet MS" pitchFamily="34" charset="-120"/>
               </a:rPr>
-              <a:t>overfill</a:t>
+              <a:t>filling</a:t>
             </a:r>
             <a:endParaRPr lang="en-US" sz="1200" dirty="0"/>
           </a:p>
@@ -41200,7 +39811,7 @@
                 <a:ea typeface="Calibri" pitchFamily="34" charset="-122"/>
                 <a:cs typeface="Calibri" pitchFamily="34" charset="-120"/>
               </a:rPr>
-              <a:t>Describes something that has been made full.</a:t>
+              <a:t>To put too much into something so it overflows.</a:t>
             </a:r>
             <a:endParaRPr lang="en-US" sz="1200" dirty="0"/>
           </a:p>
@@ -41273,7 +39884,7 @@
                 <a:ea typeface="Trebuchet MS" pitchFamily="34" charset="-122"/>
                 <a:cs typeface="Trebuchet MS" pitchFamily="34" charset="-120"/>
               </a:rPr>
-              <a:t>filling</a:t>
+              <a:t>filled</a:t>
             </a:r>
             <a:endParaRPr lang="en-US" sz="1200" dirty="0"/>
           </a:p>
@@ -41339,7 +39950,7 @@
                 <a:ea typeface="Calibri" pitchFamily="34" charset="-122"/>
                 <a:cs typeface="Calibri" pitchFamily="34" charset="-120"/>
               </a:rPr>
-              <a:t>The material used to fill something, like the inside of a sandwich or a tooth.</a:t>
+              <a:t>When something has been made completely full.</a:t>
             </a:r>
             <a:endParaRPr lang="en-US" sz="1200" dirty="0"/>
           </a:p>
@@ -41412,7 +40023,7 @@
                 <a:ea typeface="Trebuchet MS" pitchFamily="34" charset="-122"/>
                 <a:cs typeface="Trebuchet MS" pitchFamily="34" charset="-120"/>
               </a:rPr>
-              <a:t>filled</a:t>
+              <a:t>overfill</a:t>
             </a:r>
             <a:endParaRPr lang="en-US" sz="1200" dirty="0"/>
           </a:p>
@@ -41617,7 +40228,7 @@
                 <a:ea typeface="Calibri" pitchFamily="34" charset="-122"/>
                 <a:cs typeface="Calibri" pitchFamily="34" charset="-120"/>
               </a:rPr>
-              <a:t>Describes a space or container that has not been filled yet.</a:t>
+              <a:t>Material used to fill in a hole or gap in the ground or a building.</a:t>
             </a:r>
             <a:endParaRPr lang="en-US" sz="1200" dirty="0"/>
           </a:p>
@@ -41756,7 +40367,7 @@
                 <a:ea typeface="Calibri" pitchFamily="34" charset="-122"/>
                 <a:cs typeface="Calibri" pitchFamily="34" charset="-120"/>
               </a:rPr>
-              <a:t>The feeling of happiness and satisfaction when something is completed.</a:t>
+              <a:t>A feeling of happiness and satisfaction when you have done something meaningful.</a:t>
             </a:r>
             <a:endParaRPr lang="en-US" sz="1200" dirty="0"/>
           </a:p>
@@ -41829,7 +40440,7 @@
                 <a:ea typeface="Trebuchet MS" pitchFamily="34" charset="-122"/>
                 <a:cs typeface="Trebuchet MS" pitchFamily="34" charset="-120"/>
               </a:rPr>
-              <a:t>unfilled</a:t>
+              <a:t>infill</a:t>
             </a:r>
             <a:endParaRPr lang="en-US" sz="1200" dirty="0"/>
           </a:p>
@@ -41895,7 +40506,7 @@
                 <a:ea typeface="Calibri" pitchFamily="34" charset="-122"/>
                 <a:cs typeface="Calibri" pitchFamily="34" charset="-120"/>
               </a:rPr>
-              <a:t>To put too much into something so it overflows.</a:t>
+              <a:t>Something used to fill a space, like the cream inside a biscuit or a dentist putting material in a tooth.</a:t>
             </a:r>
             <a:endParaRPr lang="en-US" sz="1200" dirty="0"/>
           </a:p>
@@ -42390,7 +41001,7 @@
                 <a:ea typeface="Calibri" pitchFamily="34" charset="-122"/>
                 <a:cs typeface="Calibri" pitchFamily="34" charset="-120"/>
               </a:rPr>
-              <a:t>Please refill your water bottle before we go outside for sport.</a:t>
+              <a:t>Please refill the water jug before the next class begins.</a:t>
             </a:r>
             <a:endParaRPr lang="en-US" sz="1500" dirty="0"/>
           </a:p>
@@ -42554,7 +41165,7 @@
                 <a:ea typeface="Calibri" pitchFamily="34" charset="-122"/>
                 <a:cs typeface="Calibri" pitchFamily="34" charset="-120"/>
               </a:rPr>
-              <a:t>The baker was filling the doughnuts with jam and cream.</a:t>
+              <a:t>The dentist told me I had a filling in one of my back teeth.</a:t>
             </a:r>
             <a:endParaRPr lang="en-US" sz="1500" dirty="0"/>
           </a:p>
@@ -42718,7 +41329,7 @@
                 <a:ea typeface="Calibri" pitchFamily="34" charset="-122"/>
                 <a:cs typeface="Calibri" pitchFamily="34" charset="-120"/>
               </a:rPr>
-              <a:t>Make sure you do not overfill the cup or it will spill everywhere.</a:t>
+              <a:t>The workers used soil to backfill the trench after laying the pipes.</a:t>
             </a:r>
             <a:endParaRPr lang="en-US" sz="1500" dirty="0"/>
           </a:p>

--- a/output/wordlabs-fill-3day.pptx
+++ b/output/wordlabs-fill-3day.pptx
@@ -4240,7 +4240,7 @@
                 <a:ea typeface="Calibri" pitchFamily="34" charset="-122"/>
                 <a:cs typeface="Calibri" pitchFamily="34" charset="-120"/>
               </a:rPr>
-              <a:t>"to make full, occupy"</a:t>
+              <a:t>"to make full"</a:t>
             </a:r>
             <a:endParaRPr lang="en-US" sz="2200" dirty="0"/>
           </a:p>
@@ -4279,7 +4279,7 @@
                 <a:ea typeface="Calibri" pitchFamily="34" charset="-122"/>
                 <a:cs typeface="Calibri" pitchFamily="34" charset="-120"/>
               </a:rPr>
-              <a:t>Origin: Latin: filare</a:t>
+              <a:t>Origin: Anglo-Saxon (Old English) root</a:t>
             </a:r>
             <a:endParaRPr lang="en-US" sz="1300" dirty="0"/>
           </a:p>
@@ -5288,7 +5288,7 @@
                 <a:ea typeface="Calibri" pitchFamily="34" charset="-122"/>
                 <a:cs typeface="Calibri" pitchFamily="34" charset="-120"/>
               </a:rPr>
-              <a:t>Word Labs  •  wordlabs.app  •  Root: 'fill' = to make full, occupy</a:t>
+              <a:t>Word Labs  •  wordlabs.app  •  Root: 'fill' = to make full</a:t>
             </a:r>
             <a:endParaRPr lang="en-US" sz="800" dirty="0"/>
           </a:p>
@@ -5622,7 +5622,7 @@
                 <a:ea typeface="Trebuchet MS" pitchFamily="34" charset="-122"/>
                 <a:cs typeface="Trebuchet MS" pitchFamily="34" charset="-120"/>
               </a:rPr>
-              <a:t>2</a:t>
+              <a:t>0</a:t>
             </a:r>
             <a:pPr algn="ctr" indent="0" marL="0">
               <a:buNone/>
@@ -5636,7 +5636,7 @@
                 <a:ea typeface="Trebuchet MS" pitchFamily="34" charset="-122"/>
                 <a:cs typeface="Trebuchet MS" pitchFamily="34" charset="-120"/>
               </a:rPr>
-              <a:t>  punctuation marks</a:t>
+              <a:t>  punctuation mark</a:t>
             </a:r>
             <a:endParaRPr lang="en-US" sz="2800" dirty="0"/>
           </a:p>
@@ -5928,7 +5928,7 @@
                 <a:ea typeface="Calibri" pitchFamily="34" charset="-122"/>
                 <a:cs typeface="Calibri" pitchFamily="34" charset="-120"/>
               </a:rPr>
-              <a:t>Word Labs  •  wordlabs.app  •  Root: 'fill' = to make full, occupy</a:t>
+              <a:t>Word Labs  •  wordlabs.app  •  Root: 'fill' = to make full</a:t>
             </a:r>
             <a:endParaRPr lang="en-US" sz="800" dirty="0"/>
           </a:p>
@@ -6040,7 +6040,7 @@
                 <a:ea typeface="Calibri" pitchFamily="34" charset="-122"/>
                 <a:cs typeface="Calibri" pitchFamily="34" charset="-120"/>
               </a:rPr>
-              <a:t>Can you </a:t>
+              <a:t>He </a:t>
             </a:r>
             <a:pPr algn="l" indent="0" marL="0">
               <a:buNone/>
@@ -6057,7 +6057,7 @@
                 <a:ea typeface="Calibri" pitchFamily="34" charset="-122"/>
                 <a:cs typeface="Calibri" pitchFamily="34" charset="-120"/>
               </a:rPr>
-              <a:t>refill</a:t>
+              <a:t>refilled</a:t>
             </a:r>
             <a:pPr algn="l" indent="0" marL="0">
               <a:buNone/>
@@ -6071,7 +6071,7 @@
                 <a:ea typeface="Calibri" pitchFamily="34" charset="-122"/>
                 <a:cs typeface="Calibri" pitchFamily="34" charset="-120"/>
               </a:rPr>
-              <a:t> the bottles, and make sure you don't </a:t>
+              <a:t> the printer with fresh paper. The waiter kept </a:t>
             </a:r>
             <a:pPr algn="l" indent="0" marL="0">
               <a:buNone/>
@@ -6088,7 +6088,7 @@
                 <a:ea typeface="Calibri" pitchFamily="34" charset="-122"/>
                 <a:cs typeface="Calibri" pitchFamily="34" charset="-120"/>
               </a:rPr>
-              <a:t>overfill</a:t>
+              <a:t>refilling</a:t>
             </a:r>
             <a:pPr algn="l" indent="0" marL="0">
               <a:buNone/>
@@ -6102,7 +6102,7 @@
                 <a:ea typeface="Calibri" pitchFamily="34" charset="-122"/>
                 <a:cs typeface="Calibri" pitchFamily="34" charset="-120"/>
               </a:rPr>
-              <a:t> them?</a:t>
+              <a:t> our glasses with water.</a:t>
             </a:r>
             <a:endParaRPr lang="en-US" sz="1800" dirty="0"/>
           </a:p>
@@ -6257,7 +6257,7 @@
                 <a:ea typeface="Trebuchet MS" pitchFamily="34" charset="-122"/>
                 <a:cs typeface="Trebuchet MS" pitchFamily="34" charset="-120"/>
               </a:rPr>
-              <a:t>refill</a:t>
+              <a:t>refilled</a:t>
             </a:r>
             <a:endParaRPr lang="en-US" sz="1400" dirty="0"/>
           </a:p>
@@ -6385,7 +6385,7 @@
                 <a:ea typeface="Trebuchet MS" pitchFamily="34" charset="-122"/>
                 <a:cs typeface="Trebuchet MS" pitchFamily="34" charset="-120"/>
               </a:rPr>
-              <a:t>overfill</a:t>
+              <a:t>refilling</a:t>
             </a:r>
             <a:endParaRPr lang="en-US" sz="1400" dirty="0"/>
           </a:p>
@@ -6716,7 +6716,7 @@
                 <a:ea typeface="Calibri" pitchFamily="34" charset="-122"/>
                 <a:cs typeface="Calibri" pitchFamily="34" charset="-120"/>
               </a:rPr>
-              <a:t>Word Labs  •  wordlabs.app  •  Root: 'fill' = to make full, occupy</a:t>
+              <a:t>Word Labs  •  wordlabs.app  •  Root: 'fill' = to make full</a:t>
             </a:r>
             <a:endParaRPr lang="en-US" sz="800" dirty="0"/>
           </a:p>
@@ -6855,7 +6855,7 @@
                 <a:ea typeface="Trebuchet MS" pitchFamily="34" charset="-122"/>
                 <a:cs typeface="Trebuchet MS" pitchFamily="34" charset="-120"/>
               </a:rPr>
-              <a:t>refill</a:t>
+              <a:t>refilled</a:t>
             </a:r>
             <a:endParaRPr lang="en-US" sz="2800" dirty="0"/>
           </a:p>
@@ -7543,7 +7543,7 @@
                 <a:ea typeface="Calibri" pitchFamily="34" charset="-122"/>
                 <a:cs typeface="Calibri" pitchFamily="34" charset="-120"/>
               </a:rPr>
-              <a:t>Word Labs  •  wordlabs.app  •  Root: 'fill' = to make full, occupy</a:t>
+              <a:t>Word Labs  •  wordlabs.app  •  Root: 'fill' = to make full</a:t>
             </a:r>
             <a:endParaRPr lang="en-US" sz="800" dirty="0"/>
           </a:p>
@@ -7682,7 +7682,7 @@
                 <a:ea typeface="Trebuchet MS" pitchFamily="34" charset="-122"/>
                 <a:cs typeface="Trebuchet MS" pitchFamily="34" charset="-120"/>
               </a:rPr>
-              <a:t>refill</a:t>
+              <a:t>refilled</a:t>
             </a:r>
             <a:endParaRPr lang="en-US" sz="2800" dirty="0"/>
           </a:p>
@@ -7762,7 +7762,7 @@
         </p:nvSpPr>
         <p:spPr>
           <a:xfrm>
-            <a:off x="2938272" y="2258568"/>
+            <a:off x="2221992" y="2258568"/>
             <a:ext cx="1828800" cy="292608"/>
           </a:xfrm>
           <a:prstGeom prst="rect">
@@ -7796,7 +7796,7 @@
         </p:nvSpPr>
         <p:spPr>
           <a:xfrm>
-            <a:off x="2938272" y="2258568"/>
+            <a:off x="2221992" y="2258568"/>
             <a:ext cx="1828800" cy="292608"/>
           </a:xfrm>
           <a:prstGeom prst="rect">
@@ -7835,7 +7835,7 @@
         </p:nvSpPr>
         <p:spPr>
           <a:xfrm>
-            <a:off x="2938272" y="2569464"/>
+            <a:off x="2221992" y="2569464"/>
             <a:ext cx="1828800" cy="201168"/>
           </a:xfrm>
           <a:prstGeom prst="rect">
@@ -7874,7 +7874,7 @@
         </p:nvSpPr>
         <p:spPr>
           <a:xfrm>
-            <a:off x="5803392" y="2258568"/>
+            <a:off x="4370832" y="2258568"/>
             <a:ext cx="1828800" cy="292608"/>
           </a:xfrm>
           <a:prstGeom prst="rect">
@@ -7908,7 +7908,7 @@
         </p:nvSpPr>
         <p:spPr>
           <a:xfrm>
-            <a:off x="5803392" y="2258568"/>
+            <a:off x="4370832" y="2258568"/>
             <a:ext cx="1828800" cy="292608"/>
           </a:xfrm>
           <a:prstGeom prst="rect">
@@ -7947,7 +7947,7 @@
         </p:nvSpPr>
         <p:spPr>
           <a:xfrm>
-            <a:off x="5803392" y="2569464"/>
+            <a:off x="4370832" y="2569464"/>
             <a:ext cx="1828800" cy="201168"/>
           </a:xfrm>
           <a:prstGeom prst="rect">
@@ -7986,6 +7986,118 @@
         </p:nvSpPr>
         <p:spPr>
           <a:xfrm>
+            <a:off x="6519672" y="2258568"/>
+            <a:ext cx="1828800" cy="292608"/>
+          </a:xfrm>
+          <a:prstGeom prst="rect">
+            <a:avLst>
+              <a:gd name="adj" fmla="val 25000"/>
+            </a:avLst>
+          </a:prstGeom>
+          <a:solidFill>
+            <a:srgbClr val="FCE7F3"/>
+          </a:solidFill>
+          <a:ln w="19050">
+            <a:solidFill>
+              <a:srgbClr val="DB2777"/>
+            </a:solidFill>
+            <a:prstDash val="solid"/>
+          </a:ln>
+          <a:effectLst>
+            <a:outerShdw sx="100000" sy="100000" kx="0" ky="0" algn="bl" rotWithShape="0" blurRad="101600" dist="38100" dir="8100000">
+              <a:srgbClr val="000000">
+                <a:alpha val="12000"/>
+              </a:srgbClr>
+            </a:outerShdw>
+          </a:effectLst>
+        </p:spPr>
+      </p:sp>
+      <p:sp>
+        <p:nvSpPr>
+          <p:cNvPr id="23" name="Text 21"/>
+          <p:cNvSpPr/>
+          <p:nvPr/>
+        </p:nvSpPr>
+        <p:spPr>
+          <a:xfrm>
+            <a:off x="6519672" y="2258568"/>
+            <a:ext cx="1828800" cy="292608"/>
+          </a:xfrm>
+          <a:prstGeom prst="rect">
+            <a:avLst/>
+          </a:prstGeom>
+          <a:noFill/>
+          <a:ln/>
+        </p:spPr>
+        <p:txBody>
+          <a:bodyPr wrap="square" lIns="0" tIns="0" rIns="0" bIns="0" rtlCol="0" anchor="ctr"/>
+          <a:lstStyle/>
+          <a:p>
+            <a:pPr algn="ctr" indent="0" marL="0">
+              <a:buNone/>
+            </a:pPr>
+            <a:r>
+              <a:rPr lang="en-US" sz="1300" b="1" dirty="0">
+                <a:solidFill>
+                  <a:srgbClr val="9D174D"/>
+                </a:solidFill>
+                <a:latin typeface="Trebuchet MS" pitchFamily="34" charset="0"/>
+                <a:ea typeface="Trebuchet MS" pitchFamily="34" charset="-122"/>
+                <a:cs typeface="Trebuchet MS" pitchFamily="34" charset="-120"/>
+              </a:rPr>
+              <a:t>ed</a:t>
+            </a:r>
+            <a:endParaRPr lang="en-US" sz="1300" dirty="0"/>
+          </a:p>
+        </p:txBody>
+      </p:sp>
+      <p:sp>
+        <p:nvSpPr>
+          <p:cNvPr id="24" name="Text 22"/>
+          <p:cNvSpPr/>
+          <p:nvPr/>
+        </p:nvSpPr>
+        <p:spPr>
+          <a:xfrm>
+            <a:off x="6519672" y="2569464"/>
+            <a:ext cx="1828800" cy="201168"/>
+          </a:xfrm>
+          <a:prstGeom prst="rect">
+            <a:avLst/>
+          </a:prstGeom>
+          <a:noFill/>
+          <a:ln/>
+        </p:spPr>
+        <p:txBody>
+          <a:bodyPr wrap="square" lIns="0" tIns="0" rIns="0" bIns="0" rtlCol="0" anchor="t"/>
+          <a:lstStyle/>
+          <a:p>
+            <a:pPr algn="ctr" indent="0" marL="0">
+              <a:buNone/>
+            </a:pPr>
+            <a:r>
+              <a:rPr lang="en-US" sz="850" dirty="0">
+                <a:solidFill>
+                  <a:srgbClr val="475569"/>
+                </a:solidFill>
+                <a:latin typeface="Calibri" pitchFamily="34" charset="0"/>
+                <a:ea typeface="Calibri" pitchFamily="34" charset="-122"/>
+                <a:cs typeface="Calibri" pitchFamily="34" charset="-120"/>
+              </a:rPr>
+              <a:t>past tense</a:t>
+            </a:r>
+            <a:endParaRPr lang="en-US" sz="850" dirty="0"/>
+          </a:p>
+        </p:txBody>
+      </p:sp>
+      <p:sp>
+        <p:nvSpPr>
+          <p:cNvPr id="25" name="Shape 23"/>
+          <p:cNvSpPr/>
+          <p:nvPr/>
+        </p:nvSpPr>
+        <p:spPr>
+          <a:xfrm>
             <a:off x="365760" y="3273552"/>
             <a:ext cx="1371600" cy="658368"/>
           </a:xfrm>
@@ -8007,7 +8119,7 @@
       </p:sp>
       <p:sp>
         <p:nvSpPr>
-          <p:cNvPr id="23" name="Text 21"/>
+          <p:cNvPr id="26" name="Text 24"/>
           <p:cNvSpPr/>
           <p:nvPr/>
         </p:nvSpPr>
@@ -8046,7 +8158,7 @@
       </p:sp>
       <p:sp>
         <p:nvSpPr>
-          <p:cNvPr id="24" name="Shape 22"/>
+          <p:cNvPr id="27" name="Shape 25"/>
           <p:cNvSpPr/>
           <p:nvPr/>
         </p:nvSpPr>
@@ -8073,7 +8185,7 @@
       </p:sp>
       <p:sp>
         <p:nvSpPr>
-          <p:cNvPr id="25" name="Text 23"/>
+          <p:cNvPr id="28" name="Text 26"/>
           <p:cNvSpPr/>
           <p:nvPr/>
         </p:nvSpPr>
@@ -8112,7 +8224,7 @@
       </p:sp>
       <p:sp>
         <p:nvSpPr>
-          <p:cNvPr id="26" name="Shape 24"/>
+          <p:cNvPr id="29" name="Shape 27"/>
           <p:cNvSpPr/>
           <p:nvPr/>
         </p:nvSpPr>
@@ -8139,7 +8251,7 @@
       </p:sp>
       <p:sp>
         <p:nvSpPr>
-          <p:cNvPr id="27" name="Text 25"/>
+          <p:cNvPr id="30" name="Text 28"/>
           <p:cNvSpPr/>
           <p:nvPr/>
         </p:nvSpPr>
@@ -8178,7 +8290,7 @@
       </p:sp>
       <p:sp>
         <p:nvSpPr>
-          <p:cNvPr id="28" name="Shape 26"/>
+          <p:cNvPr id="31" name="Shape 29"/>
           <p:cNvSpPr/>
           <p:nvPr/>
         </p:nvSpPr>
@@ -8205,7 +8317,7 @@
       </p:sp>
       <p:sp>
         <p:nvSpPr>
-          <p:cNvPr id="29" name="Text 27"/>
+          <p:cNvPr id="32" name="Text 30"/>
           <p:cNvSpPr/>
           <p:nvPr/>
         </p:nvSpPr>
@@ -8528,7 +8640,7 @@
                 <a:ea typeface="Calibri" pitchFamily="34" charset="-122"/>
                 <a:cs typeface="Calibri" pitchFamily="34" charset="-120"/>
               </a:rPr>
-              <a:t>Word Labs  •  wordlabs.app  •  Root: 'fill' = to make full, occupy</a:t>
+              <a:t>Word Labs  •  wordlabs.app  •  Root: 'fill' = to make full</a:t>
             </a:r>
             <a:endParaRPr lang="en-US" sz="800" dirty="0"/>
           </a:p>
@@ -8667,7 +8779,7 @@
                 <a:ea typeface="Trebuchet MS" pitchFamily="34" charset="-122"/>
                 <a:cs typeface="Trebuchet MS" pitchFamily="34" charset="-120"/>
               </a:rPr>
-              <a:t>refill</a:t>
+              <a:t>refilled</a:t>
             </a:r>
             <a:endParaRPr lang="en-US" sz="2800" dirty="0"/>
           </a:p>
@@ -8747,7 +8859,7 @@
         </p:nvSpPr>
         <p:spPr>
           <a:xfrm>
-            <a:off x="2938272" y="2258568"/>
+            <a:off x="2221992" y="2258568"/>
             <a:ext cx="1828800" cy="292608"/>
           </a:xfrm>
           <a:prstGeom prst="rect">
@@ -8781,7 +8893,7 @@
         </p:nvSpPr>
         <p:spPr>
           <a:xfrm>
-            <a:off x="2938272" y="2258568"/>
+            <a:off x="2221992" y="2258568"/>
             <a:ext cx="1828800" cy="292608"/>
           </a:xfrm>
           <a:prstGeom prst="rect">
@@ -8820,7 +8932,7 @@
         </p:nvSpPr>
         <p:spPr>
           <a:xfrm>
-            <a:off x="2938272" y="2569464"/>
+            <a:off x="2221992" y="2569464"/>
             <a:ext cx="1828800" cy="201168"/>
           </a:xfrm>
           <a:prstGeom prst="rect">
@@ -8859,7 +8971,7 @@
         </p:nvSpPr>
         <p:spPr>
           <a:xfrm>
-            <a:off x="5803392" y="2258568"/>
+            <a:off x="4370832" y="2258568"/>
             <a:ext cx="1828800" cy="292608"/>
           </a:xfrm>
           <a:prstGeom prst="rect">
@@ -8893,7 +9005,7 @@
         </p:nvSpPr>
         <p:spPr>
           <a:xfrm>
-            <a:off x="5803392" y="2258568"/>
+            <a:off x="4370832" y="2258568"/>
             <a:ext cx="1828800" cy="292608"/>
           </a:xfrm>
           <a:prstGeom prst="rect">
@@ -8932,7 +9044,7 @@
         </p:nvSpPr>
         <p:spPr>
           <a:xfrm>
-            <a:off x="5803392" y="2569464"/>
+            <a:off x="4370832" y="2569464"/>
             <a:ext cx="1828800" cy="201168"/>
           </a:xfrm>
           <a:prstGeom prst="rect">
@@ -8971,6 +9083,118 @@
         </p:nvSpPr>
         <p:spPr>
           <a:xfrm>
+            <a:off x="6519672" y="2258568"/>
+            <a:ext cx="1828800" cy="292608"/>
+          </a:xfrm>
+          <a:prstGeom prst="rect">
+            <a:avLst>
+              <a:gd name="adj" fmla="val 25000"/>
+            </a:avLst>
+          </a:prstGeom>
+          <a:solidFill>
+            <a:srgbClr val="FCE7F3"/>
+          </a:solidFill>
+          <a:ln w="19050">
+            <a:solidFill>
+              <a:srgbClr val="DB2777"/>
+            </a:solidFill>
+            <a:prstDash val="solid"/>
+          </a:ln>
+          <a:effectLst>
+            <a:outerShdw sx="100000" sy="100000" kx="0" ky="0" algn="bl" rotWithShape="0" blurRad="101600" dist="38100" dir="8100000">
+              <a:srgbClr val="000000">
+                <a:alpha val="12000"/>
+              </a:srgbClr>
+            </a:outerShdw>
+          </a:effectLst>
+        </p:spPr>
+      </p:sp>
+      <p:sp>
+        <p:nvSpPr>
+          <p:cNvPr id="23" name="Text 21"/>
+          <p:cNvSpPr/>
+          <p:nvPr/>
+        </p:nvSpPr>
+        <p:spPr>
+          <a:xfrm>
+            <a:off x="6519672" y="2258568"/>
+            <a:ext cx="1828800" cy="292608"/>
+          </a:xfrm>
+          <a:prstGeom prst="rect">
+            <a:avLst/>
+          </a:prstGeom>
+          <a:noFill/>
+          <a:ln/>
+        </p:spPr>
+        <p:txBody>
+          <a:bodyPr wrap="square" lIns="0" tIns="0" rIns="0" bIns="0" rtlCol="0" anchor="ctr"/>
+          <a:lstStyle/>
+          <a:p>
+            <a:pPr algn="ctr" indent="0" marL="0">
+              <a:buNone/>
+            </a:pPr>
+            <a:r>
+              <a:rPr lang="en-US" sz="1300" b="1" dirty="0">
+                <a:solidFill>
+                  <a:srgbClr val="9D174D"/>
+                </a:solidFill>
+                <a:latin typeface="Trebuchet MS" pitchFamily="34" charset="0"/>
+                <a:ea typeface="Trebuchet MS" pitchFamily="34" charset="-122"/>
+                <a:cs typeface="Trebuchet MS" pitchFamily="34" charset="-120"/>
+              </a:rPr>
+              <a:t>ed</a:t>
+            </a:r>
+            <a:endParaRPr lang="en-US" sz="1300" dirty="0"/>
+          </a:p>
+        </p:txBody>
+      </p:sp>
+      <p:sp>
+        <p:nvSpPr>
+          <p:cNvPr id="24" name="Text 22"/>
+          <p:cNvSpPr/>
+          <p:nvPr/>
+        </p:nvSpPr>
+        <p:spPr>
+          <a:xfrm>
+            <a:off x="6519672" y="2569464"/>
+            <a:ext cx="1828800" cy="201168"/>
+          </a:xfrm>
+          <a:prstGeom prst="rect">
+            <a:avLst/>
+          </a:prstGeom>
+          <a:noFill/>
+          <a:ln/>
+        </p:spPr>
+        <p:txBody>
+          <a:bodyPr wrap="square" lIns="0" tIns="0" rIns="0" bIns="0" rtlCol="0" anchor="t"/>
+          <a:lstStyle/>
+          <a:p>
+            <a:pPr algn="ctr" indent="0" marL="0">
+              <a:buNone/>
+            </a:pPr>
+            <a:r>
+              <a:rPr lang="en-US" sz="850" dirty="0">
+                <a:solidFill>
+                  <a:srgbClr val="475569"/>
+                </a:solidFill>
+                <a:latin typeface="Calibri" pitchFamily="34" charset="0"/>
+                <a:ea typeface="Calibri" pitchFamily="34" charset="-122"/>
+                <a:cs typeface="Calibri" pitchFamily="34" charset="-120"/>
+              </a:rPr>
+              <a:t>past tense</a:t>
+            </a:r>
+            <a:endParaRPr lang="en-US" sz="850" dirty="0"/>
+          </a:p>
+        </p:txBody>
+      </p:sp>
+      <p:sp>
+        <p:nvSpPr>
+          <p:cNvPr id="25" name="Shape 23"/>
+          <p:cNvSpPr/>
+          <p:nvPr/>
+        </p:nvSpPr>
+        <p:spPr>
+          <a:xfrm>
             <a:off x="365760" y="3273552"/>
             <a:ext cx="1371600" cy="658368"/>
           </a:xfrm>
@@ -8992,7 +9216,7 @@
       </p:sp>
       <p:sp>
         <p:nvSpPr>
-          <p:cNvPr id="23" name="Text 21"/>
+          <p:cNvPr id="26" name="Text 24"/>
           <p:cNvSpPr/>
           <p:nvPr/>
         </p:nvSpPr>
@@ -9031,7 +9255,7 @@
       </p:sp>
       <p:sp>
         <p:nvSpPr>
-          <p:cNvPr id="24" name="Shape 22"/>
+          <p:cNvPr id="27" name="Shape 25"/>
           <p:cNvSpPr/>
           <p:nvPr/>
         </p:nvSpPr>
@@ -9058,7 +9282,7 @@
       </p:sp>
       <p:sp>
         <p:nvSpPr>
-          <p:cNvPr id="25" name="Shape 23"/>
+          <p:cNvPr id="28" name="Shape 26"/>
           <p:cNvSpPr/>
           <p:nvPr/>
         </p:nvSpPr>
@@ -9085,7 +9309,7 @@
       </p:sp>
       <p:sp>
         <p:nvSpPr>
-          <p:cNvPr id="26" name="Text 24"/>
+          <p:cNvPr id="29" name="Text 27"/>
           <p:cNvSpPr/>
           <p:nvPr/>
         </p:nvSpPr>
@@ -9124,7 +9348,7 @@
       </p:sp>
       <p:sp>
         <p:nvSpPr>
-          <p:cNvPr id="27" name="Text 25"/>
+          <p:cNvPr id="30" name="Text 28"/>
           <p:cNvSpPr/>
           <p:nvPr/>
         </p:nvSpPr>
@@ -9163,7 +9387,7 @@
       </p:sp>
       <p:sp>
         <p:nvSpPr>
-          <p:cNvPr id="28" name="Shape 26"/>
+          <p:cNvPr id="31" name="Shape 29"/>
           <p:cNvSpPr/>
           <p:nvPr/>
         </p:nvSpPr>
@@ -9190,7 +9414,7 @@
       </p:sp>
       <p:sp>
         <p:nvSpPr>
-          <p:cNvPr id="29" name="Text 27"/>
+          <p:cNvPr id="32" name="Text 30"/>
           <p:cNvSpPr/>
           <p:nvPr/>
         </p:nvSpPr>
@@ -9221,7 +9445,7 @@
                 <a:ea typeface="Trebuchet MS" pitchFamily="34" charset="-122"/>
                 <a:cs typeface="Trebuchet MS" pitchFamily="34" charset="-120"/>
               </a:rPr>
-              <a:t>fill</a:t>
+              <a:t>filled</a:t>
             </a:r>
             <a:endParaRPr lang="en-US" sz="1400" dirty="0"/>
           </a:p>
@@ -9229,7 +9453,7 @@
       </p:sp>
       <p:sp>
         <p:nvSpPr>
-          <p:cNvPr id="30" name="Shape 28"/>
+          <p:cNvPr id="33" name="Shape 31"/>
           <p:cNvSpPr/>
           <p:nvPr/>
         </p:nvSpPr>
@@ -9256,7 +9480,7 @@
       </p:sp>
       <p:sp>
         <p:nvSpPr>
-          <p:cNvPr id="31" name="Text 29"/>
+          <p:cNvPr id="34" name="Text 32"/>
           <p:cNvSpPr/>
           <p:nvPr/>
         </p:nvSpPr>
@@ -9295,7 +9519,7 @@
       </p:sp>
       <p:sp>
         <p:nvSpPr>
-          <p:cNvPr id="32" name="Shape 30"/>
+          <p:cNvPr id="35" name="Shape 33"/>
           <p:cNvSpPr/>
           <p:nvPr/>
         </p:nvSpPr>
@@ -9322,7 +9546,7 @@
       </p:sp>
       <p:sp>
         <p:nvSpPr>
-          <p:cNvPr id="33" name="Text 31"/>
+          <p:cNvPr id="36" name="Text 34"/>
           <p:cNvSpPr/>
           <p:nvPr/>
         </p:nvSpPr>
@@ -9645,7 +9869,7 @@
                 <a:ea typeface="Calibri" pitchFamily="34" charset="-122"/>
                 <a:cs typeface="Calibri" pitchFamily="34" charset="-120"/>
               </a:rPr>
-              <a:t>Word Labs  •  wordlabs.app  •  Root: 'fill' = to make full, occupy</a:t>
+              <a:t>Word Labs  •  wordlabs.app  •  Root: 'fill' = to make full</a:t>
             </a:r>
             <a:endParaRPr lang="en-US" sz="800" dirty="0"/>
           </a:p>
@@ -9784,7 +10008,7 @@
                 <a:ea typeface="Trebuchet MS" pitchFamily="34" charset="-122"/>
                 <a:cs typeface="Trebuchet MS" pitchFamily="34" charset="-120"/>
               </a:rPr>
-              <a:t>refill</a:t>
+              <a:t>refilled</a:t>
             </a:r>
             <a:endParaRPr lang="en-US" sz="2800" dirty="0"/>
           </a:p>
@@ -9864,7 +10088,7 @@
         </p:nvSpPr>
         <p:spPr>
           <a:xfrm>
-            <a:off x="2938272" y="2258568"/>
+            <a:off x="2221992" y="2258568"/>
             <a:ext cx="1828800" cy="292608"/>
           </a:xfrm>
           <a:prstGeom prst="rect">
@@ -9898,7 +10122,7 @@
         </p:nvSpPr>
         <p:spPr>
           <a:xfrm>
-            <a:off x="2938272" y="2258568"/>
+            <a:off x="2221992" y="2258568"/>
             <a:ext cx="1828800" cy="292608"/>
           </a:xfrm>
           <a:prstGeom prst="rect">
@@ -9937,7 +10161,7 @@
         </p:nvSpPr>
         <p:spPr>
           <a:xfrm>
-            <a:off x="2938272" y="2569464"/>
+            <a:off x="2221992" y="2569464"/>
             <a:ext cx="1828800" cy="201168"/>
           </a:xfrm>
           <a:prstGeom prst="rect">
@@ -9976,7 +10200,7 @@
         </p:nvSpPr>
         <p:spPr>
           <a:xfrm>
-            <a:off x="5803392" y="2258568"/>
+            <a:off x="4370832" y="2258568"/>
             <a:ext cx="1828800" cy="292608"/>
           </a:xfrm>
           <a:prstGeom prst="rect">
@@ -10010,7 +10234,7 @@
         </p:nvSpPr>
         <p:spPr>
           <a:xfrm>
-            <a:off x="5803392" y="2258568"/>
+            <a:off x="4370832" y="2258568"/>
             <a:ext cx="1828800" cy="292608"/>
           </a:xfrm>
           <a:prstGeom prst="rect">
@@ -10049,7 +10273,7 @@
         </p:nvSpPr>
         <p:spPr>
           <a:xfrm>
-            <a:off x="5803392" y="2569464"/>
+            <a:off x="4370832" y="2569464"/>
             <a:ext cx="1828800" cy="201168"/>
           </a:xfrm>
           <a:prstGeom prst="rect">
@@ -10088,6 +10312,118 @@
         </p:nvSpPr>
         <p:spPr>
           <a:xfrm>
+            <a:off x="6519672" y="2258568"/>
+            <a:ext cx="1828800" cy="292608"/>
+          </a:xfrm>
+          <a:prstGeom prst="rect">
+            <a:avLst>
+              <a:gd name="adj" fmla="val 25000"/>
+            </a:avLst>
+          </a:prstGeom>
+          <a:solidFill>
+            <a:srgbClr val="FCE7F3"/>
+          </a:solidFill>
+          <a:ln w="19050">
+            <a:solidFill>
+              <a:srgbClr val="DB2777"/>
+            </a:solidFill>
+            <a:prstDash val="solid"/>
+          </a:ln>
+          <a:effectLst>
+            <a:outerShdw sx="100000" sy="100000" kx="0" ky="0" algn="bl" rotWithShape="0" blurRad="101600" dist="38100" dir="8100000">
+              <a:srgbClr val="000000">
+                <a:alpha val="12000"/>
+              </a:srgbClr>
+            </a:outerShdw>
+          </a:effectLst>
+        </p:spPr>
+      </p:sp>
+      <p:sp>
+        <p:nvSpPr>
+          <p:cNvPr id="23" name="Text 21"/>
+          <p:cNvSpPr/>
+          <p:nvPr/>
+        </p:nvSpPr>
+        <p:spPr>
+          <a:xfrm>
+            <a:off x="6519672" y="2258568"/>
+            <a:ext cx="1828800" cy="292608"/>
+          </a:xfrm>
+          <a:prstGeom prst="rect">
+            <a:avLst/>
+          </a:prstGeom>
+          <a:noFill/>
+          <a:ln/>
+        </p:spPr>
+        <p:txBody>
+          <a:bodyPr wrap="square" lIns="0" tIns="0" rIns="0" bIns="0" rtlCol="0" anchor="ctr"/>
+          <a:lstStyle/>
+          <a:p>
+            <a:pPr algn="ctr" indent="0" marL="0">
+              <a:buNone/>
+            </a:pPr>
+            <a:r>
+              <a:rPr lang="en-US" sz="1300" b="1" dirty="0">
+                <a:solidFill>
+                  <a:srgbClr val="9D174D"/>
+                </a:solidFill>
+                <a:latin typeface="Trebuchet MS" pitchFamily="34" charset="0"/>
+                <a:ea typeface="Trebuchet MS" pitchFamily="34" charset="-122"/>
+                <a:cs typeface="Trebuchet MS" pitchFamily="34" charset="-120"/>
+              </a:rPr>
+              <a:t>ed</a:t>
+            </a:r>
+            <a:endParaRPr lang="en-US" sz="1300" dirty="0"/>
+          </a:p>
+        </p:txBody>
+      </p:sp>
+      <p:sp>
+        <p:nvSpPr>
+          <p:cNvPr id="24" name="Text 22"/>
+          <p:cNvSpPr/>
+          <p:nvPr/>
+        </p:nvSpPr>
+        <p:spPr>
+          <a:xfrm>
+            <a:off x="6519672" y="2569464"/>
+            <a:ext cx="1828800" cy="201168"/>
+          </a:xfrm>
+          <a:prstGeom prst="rect">
+            <a:avLst/>
+          </a:prstGeom>
+          <a:noFill/>
+          <a:ln/>
+        </p:spPr>
+        <p:txBody>
+          <a:bodyPr wrap="square" lIns="0" tIns="0" rIns="0" bIns="0" rtlCol="0" anchor="t"/>
+          <a:lstStyle/>
+          <a:p>
+            <a:pPr algn="ctr" indent="0" marL="0">
+              <a:buNone/>
+            </a:pPr>
+            <a:r>
+              <a:rPr lang="en-US" sz="850" dirty="0">
+                <a:solidFill>
+                  <a:srgbClr val="475569"/>
+                </a:solidFill>
+                <a:latin typeface="Calibri" pitchFamily="34" charset="0"/>
+                <a:ea typeface="Calibri" pitchFamily="34" charset="-122"/>
+                <a:cs typeface="Calibri" pitchFamily="34" charset="-120"/>
+              </a:rPr>
+              <a:t>past tense</a:t>
+            </a:r>
+            <a:endParaRPr lang="en-US" sz="850" dirty="0"/>
+          </a:p>
+        </p:txBody>
+      </p:sp>
+      <p:sp>
+        <p:nvSpPr>
+          <p:cNvPr id="25" name="Shape 23"/>
+          <p:cNvSpPr/>
+          <p:nvPr/>
+        </p:nvSpPr>
+        <p:spPr>
+          <a:xfrm>
             <a:off x="365760" y="3273552"/>
             <a:ext cx="1371600" cy="658368"/>
           </a:xfrm>
@@ -10109,7 +10445,7 @@
       </p:sp>
       <p:sp>
         <p:nvSpPr>
-          <p:cNvPr id="23" name="Text 21"/>
+          <p:cNvPr id="26" name="Text 24"/>
           <p:cNvSpPr/>
           <p:nvPr/>
         </p:nvSpPr>
@@ -10148,7 +10484,7 @@
       </p:sp>
       <p:sp>
         <p:nvSpPr>
-          <p:cNvPr id="24" name="Shape 22"/>
+          <p:cNvPr id="27" name="Shape 25"/>
           <p:cNvSpPr/>
           <p:nvPr/>
         </p:nvSpPr>
@@ -10175,7 +10511,7 @@
       </p:sp>
       <p:sp>
         <p:nvSpPr>
-          <p:cNvPr id="25" name="Shape 23"/>
+          <p:cNvPr id="28" name="Shape 26"/>
           <p:cNvSpPr/>
           <p:nvPr/>
         </p:nvSpPr>
@@ -10202,7 +10538,7 @@
       </p:sp>
       <p:sp>
         <p:nvSpPr>
-          <p:cNvPr id="26" name="Text 24"/>
+          <p:cNvPr id="29" name="Text 27"/>
           <p:cNvSpPr/>
           <p:nvPr/>
         </p:nvSpPr>
@@ -10241,7 +10577,7 @@
       </p:sp>
       <p:sp>
         <p:nvSpPr>
-          <p:cNvPr id="27" name="Text 25"/>
+          <p:cNvPr id="30" name="Text 28"/>
           <p:cNvSpPr/>
           <p:nvPr/>
         </p:nvSpPr>
@@ -10280,7 +10616,7 @@
       </p:sp>
       <p:sp>
         <p:nvSpPr>
-          <p:cNvPr id="28" name="Shape 26"/>
+          <p:cNvPr id="31" name="Shape 29"/>
           <p:cNvSpPr/>
           <p:nvPr/>
         </p:nvSpPr>
@@ -10307,7 +10643,7 @@
       </p:sp>
       <p:sp>
         <p:nvSpPr>
-          <p:cNvPr id="29" name="Text 27"/>
+          <p:cNvPr id="32" name="Text 30"/>
           <p:cNvSpPr/>
           <p:nvPr/>
         </p:nvSpPr>
@@ -10338,7 +10674,7 @@
                 <a:ea typeface="Trebuchet MS" pitchFamily="34" charset="-122"/>
                 <a:cs typeface="Trebuchet MS" pitchFamily="34" charset="-120"/>
               </a:rPr>
-              <a:t>fill</a:t>
+              <a:t>filled</a:t>
             </a:r>
             <a:endParaRPr lang="en-US" sz="1400" dirty="0"/>
           </a:p>
@@ -10346,7 +10682,7 @@
       </p:sp>
       <p:sp>
         <p:nvSpPr>
-          <p:cNvPr id="30" name="Shape 28"/>
+          <p:cNvPr id="33" name="Shape 31"/>
           <p:cNvSpPr/>
           <p:nvPr/>
         </p:nvSpPr>
@@ -10373,7 +10709,7 @@
       </p:sp>
       <p:sp>
         <p:nvSpPr>
-          <p:cNvPr id="31" name="Text 29"/>
+          <p:cNvPr id="34" name="Text 32"/>
           <p:cNvSpPr/>
           <p:nvPr/>
         </p:nvSpPr>
@@ -10412,7 +10748,7 @@
       </p:sp>
       <p:sp>
         <p:nvSpPr>
-          <p:cNvPr id="32" name="Shape 30"/>
+          <p:cNvPr id="35" name="Shape 33"/>
           <p:cNvSpPr/>
           <p:nvPr/>
         </p:nvSpPr>
@@ -10439,13 +10775,13 @@
       </p:sp>
       <p:sp>
         <p:nvSpPr>
-          <p:cNvPr id="33" name="Shape 31"/>
-          <p:cNvSpPr/>
-          <p:nvPr/>
-        </p:nvSpPr>
-        <p:spPr>
-          <a:xfrm>
-            <a:off x="2427732" y="4169664"/>
+          <p:cNvPr id="36" name="Shape 34"/>
+          <p:cNvSpPr/>
+          <p:nvPr/>
+        </p:nvSpPr>
+        <p:spPr>
+          <a:xfrm>
+            <a:off x="2124837" y="4169664"/>
             <a:ext cx="685800" cy="475488"/>
           </a:xfrm>
           <a:prstGeom prst="rect">
@@ -10466,13 +10802,13 @@
       </p:sp>
       <p:sp>
         <p:nvSpPr>
-          <p:cNvPr id="34" name="Text 32"/>
-          <p:cNvSpPr/>
-          <p:nvPr/>
-        </p:nvSpPr>
-        <p:spPr>
-          <a:xfrm>
-            <a:off x="2427732" y="4169664"/>
+          <p:cNvPr id="37" name="Text 35"/>
+          <p:cNvSpPr/>
+          <p:nvPr/>
+        </p:nvSpPr>
+        <p:spPr>
+          <a:xfrm>
+            <a:off x="2124837" y="4169664"/>
             <a:ext cx="685800" cy="475488"/>
           </a:xfrm>
           <a:prstGeom prst="rect">
@@ -10505,13 +10841,13 @@
       </p:sp>
       <p:sp>
         <p:nvSpPr>
-          <p:cNvPr id="35" name="Shape 33"/>
-          <p:cNvSpPr/>
-          <p:nvPr/>
-        </p:nvSpPr>
-        <p:spPr>
-          <a:xfrm>
-            <a:off x="3639312" y="4169664"/>
+          <p:cNvPr id="38" name="Shape 36"/>
+          <p:cNvSpPr/>
+          <p:nvPr/>
+        </p:nvSpPr>
+        <p:spPr>
+          <a:xfrm>
+            <a:off x="3033522" y="4169664"/>
             <a:ext cx="685800" cy="475488"/>
           </a:xfrm>
           <a:prstGeom prst="rect">
@@ -10532,13 +10868,13 @@
       </p:sp>
       <p:sp>
         <p:nvSpPr>
-          <p:cNvPr id="36" name="Text 34"/>
-          <p:cNvSpPr/>
-          <p:nvPr/>
-        </p:nvSpPr>
-        <p:spPr>
-          <a:xfrm>
-            <a:off x="3639312" y="4169664"/>
+          <p:cNvPr id="39" name="Text 37"/>
+          <p:cNvSpPr/>
+          <p:nvPr/>
+        </p:nvSpPr>
+        <p:spPr>
+          <a:xfrm>
+            <a:off x="3033522" y="4169664"/>
             <a:ext cx="685800" cy="475488"/>
           </a:xfrm>
           <a:prstGeom prst="rect">
@@ -10571,13 +10907,13 @@
       </p:sp>
       <p:sp>
         <p:nvSpPr>
-          <p:cNvPr id="37" name="Shape 35"/>
-          <p:cNvSpPr/>
-          <p:nvPr/>
-        </p:nvSpPr>
-        <p:spPr>
-          <a:xfrm>
-            <a:off x="4850892" y="4169664"/>
+          <p:cNvPr id="40" name="Shape 38"/>
+          <p:cNvSpPr/>
+          <p:nvPr/>
+        </p:nvSpPr>
+        <p:spPr>
+          <a:xfrm>
+            <a:off x="3942207" y="4169664"/>
             <a:ext cx="685800" cy="475488"/>
           </a:xfrm>
           <a:prstGeom prst="rect">
@@ -10598,13 +10934,13 @@
       </p:sp>
       <p:sp>
         <p:nvSpPr>
-          <p:cNvPr id="38" name="Text 36"/>
-          <p:cNvSpPr/>
-          <p:nvPr/>
-        </p:nvSpPr>
-        <p:spPr>
-          <a:xfrm>
-            <a:off x="4850892" y="4169664"/>
+          <p:cNvPr id="41" name="Text 39"/>
+          <p:cNvSpPr/>
+          <p:nvPr/>
+        </p:nvSpPr>
+        <p:spPr>
+          <a:xfrm>
+            <a:off x="3942207" y="4169664"/>
             <a:ext cx="685800" cy="475488"/>
           </a:xfrm>
           <a:prstGeom prst="rect">
@@ -10637,13 +10973,13 @@
       </p:sp>
       <p:sp>
         <p:nvSpPr>
-          <p:cNvPr id="39" name="Shape 37"/>
-          <p:cNvSpPr/>
-          <p:nvPr/>
-        </p:nvSpPr>
-        <p:spPr>
-          <a:xfrm>
-            <a:off x="6062472" y="4169664"/>
+          <p:cNvPr id="42" name="Shape 40"/>
+          <p:cNvSpPr/>
+          <p:nvPr/>
+        </p:nvSpPr>
+        <p:spPr>
+          <a:xfrm>
+            <a:off x="4850892" y="4169664"/>
             <a:ext cx="685800" cy="475488"/>
           </a:xfrm>
           <a:prstGeom prst="rect">
@@ -10664,13 +11000,13 @@
       </p:sp>
       <p:sp>
         <p:nvSpPr>
-          <p:cNvPr id="40" name="Text 38"/>
-          <p:cNvSpPr/>
-          <p:nvPr/>
-        </p:nvSpPr>
-        <p:spPr>
-          <a:xfrm>
-            <a:off x="6062472" y="4169664"/>
+          <p:cNvPr id="43" name="Text 41"/>
+          <p:cNvSpPr/>
+          <p:nvPr/>
+        </p:nvSpPr>
+        <p:spPr>
+          <a:xfrm>
+            <a:off x="4850892" y="4169664"/>
             <a:ext cx="685800" cy="475488"/>
           </a:xfrm>
           <a:prstGeom prst="rect">
@@ -10703,13 +11039,13 @@
       </p:sp>
       <p:sp>
         <p:nvSpPr>
-          <p:cNvPr id="41" name="Shape 39"/>
-          <p:cNvSpPr/>
-          <p:nvPr/>
-        </p:nvSpPr>
-        <p:spPr>
-          <a:xfrm>
-            <a:off x="7274052" y="4169664"/>
+          <p:cNvPr id="44" name="Shape 42"/>
+          <p:cNvSpPr/>
+          <p:nvPr/>
+        </p:nvSpPr>
+        <p:spPr>
+          <a:xfrm>
+            <a:off x="5759577" y="4169664"/>
             <a:ext cx="685800" cy="475488"/>
           </a:xfrm>
           <a:prstGeom prst="rect">
@@ -10730,13 +11066,13 @@
       </p:sp>
       <p:sp>
         <p:nvSpPr>
-          <p:cNvPr id="42" name="Text 40"/>
-          <p:cNvSpPr/>
-          <p:nvPr/>
-        </p:nvSpPr>
-        <p:spPr>
-          <a:xfrm>
-            <a:off x="7274052" y="4169664"/>
+          <p:cNvPr id="45" name="Text 43"/>
+          <p:cNvSpPr/>
+          <p:nvPr/>
+        </p:nvSpPr>
+        <p:spPr>
+          <a:xfrm>
+            <a:off x="5759577" y="4169664"/>
             <a:ext cx="685800" cy="475488"/>
           </a:xfrm>
           <a:prstGeom prst="rect">
@@ -10762,6 +11098,138 @@
                 <a:cs typeface="Trebuchet MS" pitchFamily="34" charset="-120"/>
               </a:rPr>
               <a:t>ll</a:t>
+            </a:r>
+            <a:endParaRPr lang="en-US" sz="900" dirty="0"/>
+          </a:p>
+        </p:txBody>
+      </p:sp>
+      <p:sp>
+        <p:nvSpPr>
+          <p:cNvPr id="46" name="Shape 44"/>
+          <p:cNvSpPr/>
+          <p:nvPr/>
+        </p:nvSpPr>
+        <p:spPr>
+          <a:xfrm>
+            <a:off x="6668262" y="4169664"/>
+            <a:ext cx="685800" cy="475488"/>
+          </a:xfrm>
+          <a:prstGeom prst="rect">
+            <a:avLst>
+              <a:gd name="adj" fmla="val 7692"/>
+            </a:avLst>
+          </a:prstGeom>
+          <a:solidFill>
+            <a:srgbClr val="FFFFFF"/>
+          </a:solidFill>
+          <a:ln w="12700">
+            <a:solidFill>
+              <a:srgbClr val="DB2777"/>
+            </a:solidFill>
+            <a:prstDash val="solid"/>
+          </a:ln>
+        </p:spPr>
+      </p:sp>
+      <p:sp>
+        <p:nvSpPr>
+          <p:cNvPr id="47" name="Text 45"/>
+          <p:cNvSpPr/>
+          <p:nvPr/>
+        </p:nvSpPr>
+        <p:spPr>
+          <a:xfrm>
+            <a:off x="6668262" y="4169664"/>
+            <a:ext cx="685800" cy="475488"/>
+          </a:xfrm>
+          <a:prstGeom prst="rect">
+            <a:avLst/>
+          </a:prstGeom>
+          <a:noFill/>
+          <a:ln/>
+        </p:spPr>
+        <p:txBody>
+          <a:bodyPr wrap="square" lIns="0" tIns="0" rIns="0" bIns="0" rtlCol="0" anchor="ctr"/>
+          <a:lstStyle/>
+          <a:p>
+            <a:pPr algn="ctr" indent="0" marL="0">
+              <a:buNone/>
+            </a:pPr>
+            <a:r>
+              <a:rPr lang="en-US" sz="900" b="1" dirty="0">
+                <a:solidFill>
+                  <a:srgbClr val="9D174D"/>
+                </a:solidFill>
+                <a:latin typeface="Trebuchet MS" pitchFamily="34" charset="0"/>
+                <a:ea typeface="Trebuchet MS" pitchFamily="34" charset="-122"/>
+                <a:cs typeface="Trebuchet MS" pitchFamily="34" charset="-120"/>
+              </a:rPr>
+              <a:t>e</a:t>
+            </a:r>
+            <a:endParaRPr lang="en-US" sz="900" dirty="0"/>
+          </a:p>
+        </p:txBody>
+      </p:sp>
+      <p:sp>
+        <p:nvSpPr>
+          <p:cNvPr id="48" name="Shape 46"/>
+          <p:cNvSpPr/>
+          <p:nvPr/>
+        </p:nvSpPr>
+        <p:spPr>
+          <a:xfrm>
+            <a:off x="7576947" y="4169664"/>
+            <a:ext cx="685800" cy="475488"/>
+          </a:xfrm>
+          <a:prstGeom prst="rect">
+            <a:avLst>
+              <a:gd name="adj" fmla="val 7692"/>
+            </a:avLst>
+          </a:prstGeom>
+          <a:solidFill>
+            <a:srgbClr val="FFFFFF"/>
+          </a:solidFill>
+          <a:ln w="12700">
+            <a:solidFill>
+              <a:srgbClr val="DB2777"/>
+            </a:solidFill>
+            <a:prstDash val="solid"/>
+          </a:ln>
+        </p:spPr>
+      </p:sp>
+      <p:sp>
+        <p:nvSpPr>
+          <p:cNvPr id="49" name="Text 47"/>
+          <p:cNvSpPr/>
+          <p:nvPr/>
+        </p:nvSpPr>
+        <p:spPr>
+          <a:xfrm>
+            <a:off x="7576947" y="4169664"/>
+            <a:ext cx="685800" cy="475488"/>
+          </a:xfrm>
+          <a:prstGeom prst="rect">
+            <a:avLst/>
+          </a:prstGeom>
+          <a:noFill/>
+          <a:ln/>
+        </p:spPr>
+        <p:txBody>
+          <a:bodyPr wrap="square" lIns="0" tIns="0" rIns="0" bIns="0" rtlCol="0" anchor="ctr"/>
+          <a:lstStyle/>
+          <a:p>
+            <a:pPr algn="ctr" indent="0" marL="0">
+              <a:buNone/>
+            </a:pPr>
+            <a:r>
+              <a:rPr lang="en-US" sz="900" b="1" dirty="0">
+                <a:solidFill>
+                  <a:srgbClr val="9D174D"/>
+                </a:solidFill>
+                <a:latin typeface="Trebuchet MS" pitchFamily="34" charset="0"/>
+                <a:ea typeface="Trebuchet MS" pitchFamily="34" charset="-122"/>
+                <a:cs typeface="Trebuchet MS" pitchFamily="34" charset="-120"/>
+              </a:rPr>
+              <a:t>d</a:t>
             </a:r>
             <a:endParaRPr lang="en-US" sz="900" dirty="0"/>
           </a:p>
@@ -11053,7 +11521,7 @@
                 <a:ea typeface="Calibri" pitchFamily="34" charset="-122"/>
                 <a:cs typeface="Calibri" pitchFamily="34" charset="-120"/>
               </a:rPr>
-              <a:t>Word Labs  •  wordlabs.app  •  Root: 'fill' = to make full, occupy</a:t>
+              <a:t>Word Labs  •  wordlabs.app  •  Root: 'fill' = to make full</a:t>
             </a:r>
             <a:endParaRPr lang="en-US" sz="800" dirty="0"/>
           </a:p>
@@ -11192,7 +11660,7 @@
                 <a:ea typeface="Trebuchet MS" pitchFamily="34" charset="-122"/>
                 <a:cs typeface="Trebuchet MS" pitchFamily="34" charset="-120"/>
               </a:rPr>
-              <a:t>overfill</a:t>
+              <a:t>refilling</a:t>
             </a:r>
             <a:endParaRPr lang="en-US" sz="2800" dirty="0"/>
           </a:p>
@@ -11880,7 +12348,7 @@
                 <a:ea typeface="Calibri" pitchFamily="34" charset="-122"/>
                 <a:cs typeface="Calibri" pitchFamily="34" charset="-120"/>
               </a:rPr>
-              <a:t>Word Labs  •  wordlabs.app  •  Root: 'fill' = to make full, occupy</a:t>
+              <a:t>Word Labs  •  wordlabs.app  •  Root: 'fill' = to make full</a:t>
             </a:r>
             <a:endParaRPr lang="en-US" sz="800" dirty="0"/>
           </a:p>
@@ -12019,7 +12487,7 @@
                 <a:ea typeface="Trebuchet MS" pitchFamily="34" charset="-122"/>
                 <a:cs typeface="Trebuchet MS" pitchFamily="34" charset="-120"/>
               </a:rPr>
-              <a:t>overfill</a:t>
+              <a:t>refilling</a:t>
             </a:r>
             <a:endParaRPr lang="en-US" sz="2800" dirty="0"/>
           </a:p>
@@ -12099,7 +12567,7 @@
         </p:nvSpPr>
         <p:spPr>
           <a:xfrm>
-            <a:off x="2938272" y="2258568"/>
+            <a:off x="2221992" y="2258568"/>
             <a:ext cx="1828800" cy="292608"/>
           </a:xfrm>
           <a:prstGeom prst="rect">
@@ -12133,7 +12601,7 @@
         </p:nvSpPr>
         <p:spPr>
           <a:xfrm>
-            <a:off x="2938272" y="2258568"/>
+            <a:off x="2221992" y="2258568"/>
             <a:ext cx="1828800" cy="292608"/>
           </a:xfrm>
           <a:prstGeom prst="rect">
@@ -12158,7 +12626,7 @@
                 <a:ea typeface="Trebuchet MS" pitchFamily="34" charset="-122"/>
                 <a:cs typeface="Trebuchet MS" pitchFamily="34" charset="-120"/>
               </a:rPr>
-              <a:t>over</a:t>
+              <a:t>re</a:t>
             </a:r>
             <a:endParaRPr lang="en-US" sz="1300" dirty="0"/>
           </a:p>
@@ -12172,7 +12640,7 @@
         </p:nvSpPr>
         <p:spPr>
           <a:xfrm>
-            <a:off x="2938272" y="2569464"/>
+            <a:off x="2221992" y="2569464"/>
             <a:ext cx="1828800" cy="201168"/>
           </a:xfrm>
           <a:prstGeom prst="rect">
@@ -12197,7 +12665,7 @@
                 <a:ea typeface="Calibri" pitchFamily="34" charset="-122"/>
                 <a:cs typeface="Calibri" pitchFamily="34" charset="-120"/>
               </a:rPr>
-              <a:t>too much, above</a:t>
+              <a:t>again</a:t>
             </a:r>
             <a:endParaRPr lang="en-US" sz="850" dirty="0"/>
           </a:p>
@@ -12211,7 +12679,7 @@
         </p:nvSpPr>
         <p:spPr>
           <a:xfrm>
-            <a:off x="5803392" y="2258568"/>
+            <a:off x="4370832" y="2258568"/>
             <a:ext cx="1828800" cy="292608"/>
           </a:xfrm>
           <a:prstGeom prst="rect">
@@ -12245,7 +12713,7 @@
         </p:nvSpPr>
         <p:spPr>
           <a:xfrm>
-            <a:off x="5803392" y="2258568"/>
+            <a:off x="4370832" y="2258568"/>
             <a:ext cx="1828800" cy="292608"/>
           </a:xfrm>
           <a:prstGeom prst="rect">
@@ -12284,7 +12752,7 @@
         </p:nvSpPr>
         <p:spPr>
           <a:xfrm>
-            <a:off x="5803392" y="2569464"/>
+            <a:off x="4370832" y="2569464"/>
             <a:ext cx="1828800" cy="201168"/>
           </a:xfrm>
           <a:prstGeom prst="rect">
@@ -12323,6 +12791,118 @@
         </p:nvSpPr>
         <p:spPr>
           <a:xfrm>
+            <a:off x="6519672" y="2258568"/>
+            <a:ext cx="1828800" cy="292608"/>
+          </a:xfrm>
+          <a:prstGeom prst="rect">
+            <a:avLst>
+              <a:gd name="adj" fmla="val 25000"/>
+            </a:avLst>
+          </a:prstGeom>
+          <a:solidFill>
+            <a:srgbClr val="FCE7F3"/>
+          </a:solidFill>
+          <a:ln w="19050">
+            <a:solidFill>
+              <a:srgbClr val="DB2777"/>
+            </a:solidFill>
+            <a:prstDash val="solid"/>
+          </a:ln>
+          <a:effectLst>
+            <a:outerShdw sx="100000" sy="100000" kx="0" ky="0" algn="bl" rotWithShape="0" blurRad="101600" dist="38100" dir="8100000">
+              <a:srgbClr val="000000">
+                <a:alpha val="12000"/>
+              </a:srgbClr>
+            </a:outerShdw>
+          </a:effectLst>
+        </p:spPr>
+      </p:sp>
+      <p:sp>
+        <p:nvSpPr>
+          <p:cNvPr id="23" name="Text 21"/>
+          <p:cNvSpPr/>
+          <p:nvPr/>
+        </p:nvSpPr>
+        <p:spPr>
+          <a:xfrm>
+            <a:off x="6519672" y="2258568"/>
+            <a:ext cx="1828800" cy="292608"/>
+          </a:xfrm>
+          <a:prstGeom prst="rect">
+            <a:avLst/>
+          </a:prstGeom>
+          <a:noFill/>
+          <a:ln/>
+        </p:spPr>
+        <p:txBody>
+          <a:bodyPr wrap="square" lIns="0" tIns="0" rIns="0" bIns="0" rtlCol="0" anchor="ctr"/>
+          <a:lstStyle/>
+          <a:p>
+            <a:pPr algn="ctr" indent="0" marL="0">
+              <a:buNone/>
+            </a:pPr>
+            <a:r>
+              <a:rPr lang="en-US" sz="1300" b="1" dirty="0">
+                <a:solidFill>
+                  <a:srgbClr val="9D174D"/>
+                </a:solidFill>
+                <a:latin typeface="Trebuchet MS" pitchFamily="34" charset="0"/>
+                <a:ea typeface="Trebuchet MS" pitchFamily="34" charset="-122"/>
+                <a:cs typeface="Trebuchet MS" pitchFamily="34" charset="-120"/>
+              </a:rPr>
+              <a:t>ing</a:t>
+            </a:r>
+            <a:endParaRPr lang="en-US" sz="1300" dirty="0"/>
+          </a:p>
+        </p:txBody>
+      </p:sp>
+      <p:sp>
+        <p:nvSpPr>
+          <p:cNvPr id="24" name="Text 22"/>
+          <p:cNvSpPr/>
+          <p:nvPr/>
+        </p:nvSpPr>
+        <p:spPr>
+          <a:xfrm>
+            <a:off x="6519672" y="2569464"/>
+            <a:ext cx="1828800" cy="201168"/>
+          </a:xfrm>
+          <a:prstGeom prst="rect">
+            <a:avLst/>
+          </a:prstGeom>
+          <a:noFill/>
+          <a:ln/>
+        </p:spPr>
+        <p:txBody>
+          <a:bodyPr wrap="square" lIns="0" tIns="0" rIns="0" bIns="0" rtlCol="0" anchor="t"/>
+          <a:lstStyle/>
+          <a:p>
+            <a:pPr algn="ctr" indent="0" marL="0">
+              <a:buNone/>
+            </a:pPr>
+            <a:r>
+              <a:rPr lang="en-US" sz="850" dirty="0">
+                <a:solidFill>
+                  <a:srgbClr val="475569"/>
+                </a:solidFill>
+                <a:latin typeface="Calibri" pitchFamily="34" charset="0"/>
+                <a:ea typeface="Calibri" pitchFamily="34" charset="-122"/>
+                <a:cs typeface="Calibri" pitchFamily="34" charset="-120"/>
+              </a:rPr>
+              <a:t>happening now</a:t>
+            </a:r>
+            <a:endParaRPr lang="en-US" sz="850" dirty="0"/>
+          </a:p>
+        </p:txBody>
+      </p:sp>
+      <p:sp>
+        <p:nvSpPr>
+          <p:cNvPr id="25" name="Shape 23"/>
+          <p:cNvSpPr/>
+          <p:nvPr/>
+        </p:nvSpPr>
+        <p:spPr>
+          <a:xfrm>
             <a:off x="365760" y="3273552"/>
             <a:ext cx="1371600" cy="658368"/>
           </a:xfrm>
@@ -12344,7 +12924,7 @@
       </p:sp>
       <p:sp>
         <p:nvSpPr>
-          <p:cNvPr id="23" name="Text 21"/>
+          <p:cNvPr id="26" name="Text 24"/>
           <p:cNvSpPr/>
           <p:nvPr/>
         </p:nvSpPr>
@@ -12383,7 +12963,7 @@
       </p:sp>
       <p:sp>
         <p:nvSpPr>
-          <p:cNvPr id="24" name="Shape 22"/>
+          <p:cNvPr id="27" name="Shape 25"/>
           <p:cNvSpPr/>
           <p:nvPr/>
         </p:nvSpPr>
@@ -12410,7 +12990,7 @@
       </p:sp>
       <p:sp>
         <p:nvSpPr>
-          <p:cNvPr id="25" name="Text 23"/>
+          <p:cNvPr id="28" name="Text 26"/>
           <p:cNvSpPr/>
           <p:nvPr/>
         </p:nvSpPr>
@@ -12449,7 +13029,7 @@
       </p:sp>
       <p:sp>
         <p:nvSpPr>
-          <p:cNvPr id="26" name="Shape 24"/>
+          <p:cNvPr id="29" name="Shape 27"/>
           <p:cNvSpPr/>
           <p:nvPr/>
         </p:nvSpPr>
@@ -12476,7 +13056,7 @@
       </p:sp>
       <p:sp>
         <p:nvSpPr>
-          <p:cNvPr id="27" name="Text 25"/>
+          <p:cNvPr id="30" name="Text 28"/>
           <p:cNvSpPr/>
           <p:nvPr/>
         </p:nvSpPr>
@@ -12515,7 +13095,7 @@
       </p:sp>
       <p:sp>
         <p:nvSpPr>
-          <p:cNvPr id="28" name="Shape 26"/>
+          <p:cNvPr id="31" name="Shape 29"/>
           <p:cNvSpPr/>
           <p:nvPr/>
         </p:nvSpPr>
@@ -12542,7 +13122,7 @@
       </p:sp>
       <p:sp>
         <p:nvSpPr>
-          <p:cNvPr id="29" name="Text 27"/>
+          <p:cNvPr id="32" name="Text 30"/>
           <p:cNvSpPr/>
           <p:nvPr/>
         </p:nvSpPr>
@@ -12865,7 +13445,7 @@
                 <a:ea typeface="Calibri" pitchFamily="34" charset="-122"/>
                 <a:cs typeface="Calibri" pitchFamily="34" charset="-120"/>
               </a:rPr>
-              <a:t>Word Labs  •  wordlabs.app  •  Root: 'fill' = to make full, occupy</a:t>
+              <a:t>Word Labs  •  wordlabs.app  •  Root: 'fill' = to make full</a:t>
             </a:r>
             <a:endParaRPr lang="en-US" sz="800" dirty="0"/>
           </a:p>
@@ -13004,7 +13584,7 @@
                 <a:ea typeface="Trebuchet MS" pitchFamily="34" charset="-122"/>
                 <a:cs typeface="Trebuchet MS" pitchFamily="34" charset="-120"/>
               </a:rPr>
-              <a:t>overfill</a:t>
+              <a:t>refilling</a:t>
             </a:r>
             <a:endParaRPr lang="en-US" sz="2800" dirty="0"/>
           </a:p>
@@ -13084,7 +13664,7 @@
         </p:nvSpPr>
         <p:spPr>
           <a:xfrm>
-            <a:off x="2938272" y="2258568"/>
+            <a:off x="2221992" y="2258568"/>
             <a:ext cx="1828800" cy="292608"/>
           </a:xfrm>
           <a:prstGeom prst="rect">
@@ -13118,7 +13698,7 @@
         </p:nvSpPr>
         <p:spPr>
           <a:xfrm>
-            <a:off x="2938272" y="2258568"/>
+            <a:off x="2221992" y="2258568"/>
             <a:ext cx="1828800" cy="292608"/>
           </a:xfrm>
           <a:prstGeom prst="rect">
@@ -13143,7 +13723,7 @@
                 <a:ea typeface="Trebuchet MS" pitchFamily="34" charset="-122"/>
                 <a:cs typeface="Trebuchet MS" pitchFamily="34" charset="-120"/>
               </a:rPr>
-              <a:t>over</a:t>
+              <a:t>re</a:t>
             </a:r>
             <a:endParaRPr lang="en-US" sz="1300" dirty="0"/>
           </a:p>
@@ -13157,7 +13737,7 @@
         </p:nvSpPr>
         <p:spPr>
           <a:xfrm>
-            <a:off x="2938272" y="2569464"/>
+            <a:off x="2221992" y="2569464"/>
             <a:ext cx="1828800" cy="201168"/>
           </a:xfrm>
           <a:prstGeom prst="rect">
@@ -13182,7 +13762,7 @@
                 <a:ea typeface="Calibri" pitchFamily="34" charset="-122"/>
                 <a:cs typeface="Calibri" pitchFamily="34" charset="-120"/>
               </a:rPr>
-              <a:t>too much, above</a:t>
+              <a:t>again</a:t>
             </a:r>
             <a:endParaRPr lang="en-US" sz="850" dirty="0"/>
           </a:p>
@@ -13196,7 +13776,7 @@
         </p:nvSpPr>
         <p:spPr>
           <a:xfrm>
-            <a:off x="5803392" y="2258568"/>
+            <a:off x="4370832" y="2258568"/>
             <a:ext cx="1828800" cy="292608"/>
           </a:xfrm>
           <a:prstGeom prst="rect">
@@ -13230,7 +13810,7 @@
         </p:nvSpPr>
         <p:spPr>
           <a:xfrm>
-            <a:off x="5803392" y="2258568"/>
+            <a:off x="4370832" y="2258568"/>
             <a:ext cx="1828800" cy="292608"/>
           </a:xfrm>
           <a:prstGeom prst="rect">
@@ -13269,7 +13849,7 @@
         </p:nvSpPr>
         <p:spPr>
           <a:xfrm>
-            <a:off x="5803392" y="2569464"/>
+            <a:off x="4370832" y="2569464"/>
             <a:ext cx="1828800" cy="201168"/>
           </a:xfrm>
           <a:prstGeom prst="rect">
@@ -13308,6 +13888,118 @@
         </p:nvSpPr>
         <p:spPr>
           <a:xfrm>
+            <a:off x="6519672" y="2258568"/>
+            <a:ext cx="1828800" cy="292608"/>
+          </a:xfrm>
+          <a:prstGeom prst="rect">
+            <a:avLst>
+              <a:gd name="adj" fmla="val 25000"/>
+            </a:avLst>
+          </a:prstGeom>
+          <a:solidFill>
+            <a:srgbClr val="FCE7F3"/>
+          </a:solidFill>
+          <a:ln w="19050">
+            <a:solidFill>
+              <a:srgbClr val="DB2777"/>
+            </a:solidFill>
+            <a:prstDash val="solid"/>
+          </a:ln>
+          <a:effectLst>
+            <a:outerShdw sx="100000" sy="100000" kx="0" ky="0" algn="bl" rotWithShape="0" blurRad="101600" dist="38100" dir="8100000">
+              <a:srgbClr val="000000">
+                <a:alpha val="12000"/>
+              </a:srgbClr>
+            </a:outerShdw>
+          </a:effectLst>
+        </p:spPr>
+      </p:sp>
+      <p:sp>
+        <p:nvSpPr>
+          <p:cNvPr id="23" name="Text 21"/>
+          <p:cNvSpPr/>
+          <p:nvPr/>
+        </p:nvSpPr>
+        <p:spPr>
+          <a:xfrm>
+            <a:off x="6519672" y="2258568"/>
+            <a:ext cx="1828800" cy="292608"/>
+          </a:xfrm>
+          <a:prstGeom prst="rect">
+            <a:avLst/>
+          </a:prstGeom>
+          <a:noFill/>
+          <a:ln/>
+        </p:spPr>
+        <p:txBody>
+          <a:bodyPr wrap="square" lIns="0" tIns="0" rIns="0" bIns="0" rtlCol="0" anchor="ctr"/>
+          <a:lstStyle/>
+          <a:p>
+            <a:pPr algn="ctr" indent="0" marL="0">
+              <a:buNone/>
+            </a:pPr>
+            <a:r>
+              <a:rPr lang="en-US" sz="1300" b="1" dirty="0">
+                <a:solidFill>
+                  <a:srgbClr val="9D174D"/>
+                </a:solidFill>
+                <a:latin typeface="Trebuchet MS" pitchFamily="34" charset="0"/>
+                <a:ea typeface="Trebuchet MS" pitchFamily="34" charset="-122"/>
+                <a:cs typeface="Trebuchet MS" pitchFamily="34" charset="-120"/>
+              </a:rPr>
+              <a:t>ing</a:t>
+            </a:r>
+            <a:endParaRPr lang="en-US" sz="1300" dirty="0"/>
+          </a:p>
+        </p:txBody>
+      </p:sp>
+      <p:sp>
+        <p:nvSpPr>
+          <p:cNvPr id="24" name="Text 22"/>
+          <p:cNvSpPr/>
+          <p:nvPr/>
+        </p:nvSpPr>
+        <p:spPr>
+          <a:xfrm>
+            <a:off x="6519672" y="2569464"/>
+            <a:ext cx="1828800" cy="201168"/>
+          </a:xfrm>
+          <a:prstGeom prst="rect">
+            <a:avLst/>
+          </a:prstGeom>
+          <a:noFill/>
+          <a:ln/>
+        </p:spPr>
+        <p:txBody>
+          <a:bodyPr wrap="square" lIns="0" tIns="0" rIns="0" bIns="0" rtlCol="0" anchor="t"/>
+          <a:lstStyle/>
+          <a:p>
+            <a:pPr algn="ctr" indent="0" marL="0">
+              <a:buNone/>
+            </a:pPr>
+            <a:r>
+              <a:rPr lang="en-US" sz="850" dirty="0">
+                <a:solidFill>
+                  <a:srgbClr val="475569"/>
+                </a:solidFill>
+                <a:latin typeface="Calibri" pitchFamily="34" charset="0"/>
+                <a:ea typeface="Calibri" pitchFamily="34" charset="-122"/>
+                <a:cs typeface="Calibri" pitchFamily="34" charset="-120"/>
+              </a:rPr>
+              <a:t>happening now</a:t>
+            </a:r>
+            <a:endParaRPr lang="en-US" sz="850" dirty="0"/>
+          </a:p>
+        </p:txBody>
+      </p:sp>
+      <p:sp>
+        <p:nvSpPr>
+          <p:cNvPr id="25" name="Shape 23"/>
+          <p:cNvSpPr/>
+          <p:nvPr/>
+        </p:nvSpPr>
+        <p:spPr>
+          <a:xfrm>
             <a:off x="365760" y="3273552"/>
             <a:ext cx="1371600" cy="658368"/>
           </a:xfrm>
@@ -13329,7 +14021,7 @@
       </p:sp>
       <p:sp>
         <p:nvSpPr>
-          <p:cNvPr id="23" name="Text 21"/>
+          <p:cNvPr id="26" name="Text 24"/>
           <p:cNvSpPr/>
           <p:nvPr/>
         </p:nvSpPr>
@@ -13368,7 +14060,7 @@
       </p:sp>
       <p:sp>
         <p:nvSpPr>
-          <p:cNvPr id="24" name="Shape 22"/>
+          <p:cNvPr id="27" name="Shape 25"/>
           <p:cNvSpPr/>
           <p:nvPr/>
         </p:nvSpPr>
@@ -13395,7 +14087,7 @@
       </p:sp>
       <p:sp>
         <p:nvSpPr>
-          <p:cNvPr id="25" name="Shape 23"/>
+          <p:cNvPr id="28" name="Shape 26"/>
           <p:cNvSpPr/>
           <p:nvPr/>
         </p:nvSpPr>
@@ -13422,7 +14114,7 @@
       </p:sp>
       <p:sp>
         <p:nvSpPr>
-          <p:cNvPr id="26" name="Text 24"/>
+          <p:cNvPr id="29" name="Text 27"/>
           <p:cNvSpPr/>
           <p:nvPr/>
         </p:nvSpPr>
@@ -13453,7 +14145,7 @@
                 <a:ea typeface="Trebuchet MS" pitchFamily="34" charset="-122"/>
                 <a:cs typeface="Trebuchet MS" pitchFamily="34" charset="-120"/>
               </a:rPr>
-              <a:t>o</a:t>
+              <a:t>re</a:t>
             </a:r>
             <a:endParaRPr lang="en-US" sz="1400" dirty="0"/>
           </a:p>
@@ -13461,7 +14153,7 @@
       </p:sp>
       <p:sp>
         <p:nvSpPr>
-          <p:cNvPr id="27" name="Text 25"/>
+          <p:cNvPr id="30" name="Text 28"/>
           <p:cNvSpPr/>
           <p:nvPr/>
         </p:nvSpPr>
@@ -13500,7 +14192,7 @@
       </p:sp>
       <p:sp>
         <p:nvSpPr>
-          <p:cNvPr id="28" name="Shape 26"/>
+          <p:cNvPr id="31" name="Shape 29"/>
           <p:cNvSpPr/>
           <p:nvPr/>
         </p:nvSpPr>
@@ -13527,7 +14219,7 @@
       </p:sp>
       <p:sp>
         <p:nvSpPr>
-          <p:cNvPr id="29" name="Text 27"/>
+          <p:cNvPr id="32" name="Text 30"/>
           <p:cNvSpPr/>
           <p:nvPr/>
         </p:nvSpPr>
@@ -13558,7 +14250,7 @@
                 <a:ea typeface="Trebuchet MS" pitchFamily="34" charset="-122"/>
                 <a:cs typeface="Trebuchet MS" pitchFamily="34" charset="-120"/>
               </a:rPr>
-              <a:t>ver</a:t>
+              <a:t>fill</a:t>
             </a:r>
             <a:endParaRPr lang="en-US" sz="1400" dirty="0"/>
           </a:p>
@@ -13566,7 +14258,7 @@
       </p:sp>
       <p:sp>
         <p:nvSpPr>
-          <p:cNvPr id="30" name="Text 28"/>
+          <p:cNvPr id="33" name="Text 31"/>
           <p:cNvSpPr/>
           <p:nvPr/>
         </p:nvSpPr>
@@ -13605,7 +14297,7 @@
       </p:sp>
       <p:sp>
         <p:nvSpPr>
-          <p:cNvPr id="31" name="Shape 29"/>
+          <p:cNvPr id="34" name="Shape 32"/>
           <p:cNvSpPr/>
           <p:nvPr/>
         </p:nvSpPr>
@@ -13632,7 +14324,7 @@
       </p:sp>
       <p:sp>
         <p:nvSpPr>
-          <p:cNvPr id="32" name="Text 30"/>
+          <p:cNvPr id="35" name="Text 33"/>
           <p:cNvSpPr/>
           <p:nvPr/>
         </p:nvSpPr>
@@ -13663,7 +14355,7 @@
                 <a:ea typeface="Trebuchet MS" pitchFamily="34" charset="-122"/>
                 <a:cs typeface="Trebuchet MS" pitchFamily="34" charset="-120"/>
               </a:rPr>
-              <a:t>fill</a:t>
+              <a:t>ing</a:t>
             </a:r>
             <a:endParaRPr lang="en-US" sz="1400" dirty="0"/>
           </a:p>
@@ -13671,7 +14363,7 @@
       </p:sp>
       <p:sp>
         <p:nvSpPr>
-          <p:cNvPr id="33" name="Shape 31"/>
+          <p:cNvPr id="36" name="Shape 34"/>
           <p:cNvSpPr/>
           <p:nvPr/>
         </p:nvSpPr>
@@ -13698,7 +14390,7 @@
       </p:sp>
       <p:sp>
         <p:nvSpPr>
-          <p:cNvPr id="34" name="Text 32"/>
+          <p:cNvPr id="37" name="Text 35"/>
           <p:cNvSpPr/>
           <p:nvPr/>
         </p:nvSpPr>
@@ -13737,7 +14429,7 @@
       </p:sp>
       <p:sp>
         <p:nvSpPr>
-          <p:cNvPr id="35" name="Shape 33"/>
+          <p:cNvPr id="38" name="Shape 36"/>
           <p:cNvSpPr/>
           <p:nvPr/>
         </p:nvSpPr>
@@ -13764,7 +14456,7 @@
       </p:sp>
       <p:sp>
         <p:nvSpPr>
-          <p:cNvPr id="36" name="Text 34"/>
+          <p:cNvPr id="39" name="Text 37"/>
           <p:cNvSpPr/>
           <p:nvPr/>
         </p:nvSpPr>
@@ -13996,7 +14688,7 @@
                 <a:ea typeface="Calibri" pitchFamily="34" charset="-122"/>
                 <a:cs typeface="Calibri" pitchFamily="34" charset="-120"/>
               </a:rPr>
-              <a:t>Root 'fill' — to make full, occupy</a:t>
+              <a:t>Root 'fill' — to make full</a:t>
             </a:r>
             <a:endParaRPr lang="en-US" sz="1600" dirty="0"/>
           </a:p>
@@ -14352,7 +15044,7 @@
                 <a:ea typeface="Calibri" pitchFamily="34" charset="-122"/>
                 <a:cs typeface="Calibri" pitchFamily="34" charset="-120"/>
               </a:rPr>
-              <a:t>Word Labs  •  wordlabs.app  •  Root: 'fill' = to make full, occupy</a:t>
+              <a:t>Word Labs  •  wordlabs.app  •  Root: 'fill' = to make full</a:t>
             </a:r>
             <a:endParaRPr lang="en-US" sz="800" dirty="0"/>
           </a:p>
@@ -14491,7 +15183,7 @@
                 <a:ea typeface="Trebuchet MS" pitchFamily="34" charset="-122"/>
                 <a:cs typeface="Trebuchet MS" pitchFamily="34" charset="-120"/>
               </a:rPr>
-              <a:t>overfill</a:t>
+              <a:t>refilling</a:t>
             </a:r>
             <a:endParaRPr lang="en-US" sz="2800" dirty="0"/>
           </a:p>
@@ -14571,7 +15263,7 @@
         </p:nvSpPr>
         <p:spPr>
           <a:xfrm>
-            <a:off x="2938272" y="2258568"/>
+            <a:off x="2221992" y="2258568"/>
             <a:ext cx="1828800" cy="292608"/>
           </a:xfrm>
           <a:prstGeom prst="rect">
@@ -14605,7 +15297,7 @@
         </p:nvSpPr>
         <p:spPr>
           <a:xfrm>
-            <a:off x="2938272" y="2258568"/>
+            <a:off x="2221992" y="2258568"/>
             <a:ext cx="1828800" cy="292608"/>
           </a:xfrm>
           <a:prstGeom prst="rect">
@@ -14630,7 +15322,7 @@
                 <a:ea typeface="Trebuchet MS" pitchFamily="34" charset="-122"/>
                 <a:cs typeface="Trebuchet MS" pitchFamily="34" charset="-120"/>
               </a:rPr>
-              <a:t>over</a:t>
+              <a:t>re</a:t>
             </a:r>
             <a:endParaRPr lang="en-US" sz="1300" dirty="0"/>
           </a:p>
@@ -14644,7 +15336,7 @@
         </p:nvSpPr>
         <p:spPr>
           <a:xfrm>
-            <a:off x="2938272" y="2569464"/>
+            <a:off x="2221992" y="2569464"/>
             <a:ext cx="1828800" cy="201168"/>
           </a:xfrm>
           <a:prstGeom prst="rect">
@@ -14669,7 +15361,7 @@
                 <a:ea typeface="Calibri" pitchFamily="34" charset="-122"/>
                 <a:cs typeface="Calibri" pitchFamily="34" charset="-120"/>
               </a:rPr>
-              <a:t>too much, above</a:t>
+              <a:t>again</a:t>
             </a:r>
             <a:endParaRPr lang="en-US" sz="850" dirty="0"/>
           </a:p>
@@ -14683,7 +15375,7 @@
         </p:nvSpPr>
         <p:spPr>
           <a:xfrm>
-            <a:off x="5803392" y="2258568"/>
+            <a:off x="4370832" y="2258568"/>
             <a:ext cx="1828800" cy="292608"/>
           </a:xfrm>
           <a:prstGeom prst="rect">
@@ -14717,7 +15409,7 @@
         </p:nvSpPr>
         <p:spPr>
           <a:xfrm>
-            <a:off x="5803392" y="2258568"/>
+            <a:off x="4370832" y="2258568"/>
             <a:ext cx="1828800" cy="292608"/>
           </a:xfrm>
           <a:prstGeom prst="rect">
@@ -14756,7 +15448,7 @@
         </p:nvSpPr>
         <p:spPr>
           <a:xfrm>
-            <a:off x="5803392" y="2569464"/>
+            <a:off x="4370832" y="2569464"/>
             <a:ext cx="1828800" cy="201168"/>
           </a:xfrm>
           <a:prstGeom prst="rect">
@@ -14795,6 +15487,118 @@
         </p:nvSpPr>
         <p:spPr>
           <a:xfrm>
+            <a:off x="6519672" y="2258568"/>
+            <a:ext cx="1828800" cy="292608"/>
+          </a:xfrm>
+          <a:prstGeom prst="rect">
+            <a:avLst>
+              <a:gd name="adj" fmla="val 25000"/>
+            </a:avLst>
+          </a:prstGeom>
+          <a:solidFill>
+            <a:srgbClr val="FCE7F3"/>
+          </a:solidFill>
+          <a:ln w="19050">
+            <a:solidFill>
+              <a:srgbClr val="DB2777"/>
+            </a:solidFill>
+            <a:prstDash val="solid"/>
+          </a:ln>
+          <a:effectLst>
+            <a:outerShdw sx="100000" sy="100000" kx="0" ky="0" algn="bl" rotWithShape="0" blurRad="101600" dist="38100" dir="8100000">
+              <a:srgbClr val="000000">
+                <a:alpha val="12000"/>
+              </a:srgbClr>
+            </a:outerShdw>
+          </a:effectLst>
+        </p:spPr>
+      </p:sp>
+      <p:sp>
+        <p:nvSpPr>
+          <p:cNvPr id="23" name="Text 21"/>
+          <p:cNvSpPr/>
+          <p:nvPr/>
+        </p:nvSpPr>
+        <p:spPr>
+          <a:xfrm>
+            <a:off x="6519672" y="2258568"/>
+            <a:ext cx="1828800" cy="292608"/>
+          </a:xfrm>
+          <a:prstGeom prst="rect">
+            <a:avLst/>
+          </a:prstGeom>
+          <a:noFill/>
+          <a:ln/>
+        </p:spPr>
+        <p:txBody>
+          <a:bodyPr wrap="square" lIns="0" tIns="0" rIns="0" bIns="0" rtlCol="0" anchor="ctr"/>
+          <a:lstStyle/>
+          <a:p>
+            <a:pPr algn="ctr" indent="0" marL="0">
+              <a:buNone/>
+            </a:pPr>
+            <a:r>
+              <a:rPr lang="en-US" sz="1300" b="1" dirty="0">
+                <a:solidFill>
+                  <a:srgbClr val="9D174D"/>
+                </a:solidFill>
+                <a:latin typeface="Trebuchet MS" pitchFamily="34" charset="0"/>
+                <a:ea typeface="Trebuchet MS" pitchFamily="34" charset="-122"/>
+                <a:cs typeface="Trebuchet MS" pitchFamily="34" charset="-120"/>
+              </a:rPr>
+              <a:t>ing</a:t>
+            </a:r>
+            <a:endParaRPr lang="en-US" sz="1300" dirty="0"/>
+          </a:p>
+        </p:txBody>
+      </p:sp>
+      <p:sp>
+        <p:nvSpPr>
+          <p:cNvPr id="24" name="Text 22"/>
+          <p:cNvSpPr/>
+          <p:nvPr/>
+        </p:nvSpPr>
+        <p:spPr>
+          <a:xfrm>
+            <a:off x="6519672" y="2569464"/>
+            <a:ext cx="1828800" cy="201168"/>
+          </a:xfrm>
+          <a:prstGeom prst="rect">
+            <a:avLst/>
+          </a:prstGeom>
+          <a:noFill/>
+          <a:ln/>
+        </p:spPr>
+        <p:txBody>
+          <a:bodyPr wrap="square" lIns="0" tIns="0" rIns="0" bIns="0" rtlCol="0" anchor="t"/>
+          <a:lstStyle/>
+          <a:p>
+            <a:pPr algn="ctr" indent="0" marL="0">
+              <a:buNone/>
+            </a:pPr>
+            <a:r>
+              <a:rPr lang="en-US" sz="850" dirty="0">
+                <a:solidFill>
+                  <a:srgbClr val="475569"/>
+                </a:solidFill>
+                <a:latin typeface="Calibri" pitchFamily="34" charset="0"/>
+                <a:ea typeface="Calibri" pitchFamily="34" charset="-122"/>
+                <a:cs typeface="Calibri" pitchFamily="34" charset="-120"/>
+              </a:rPr>
+              <a:t>happening now</a:t>
+            </a:r>
+            <a:endParaRPr lang="en-US" sz="850" dirty="0"/>
+          </a:p>
+        </p:txBody>
+      </p:sp>
+      <p:sp>
+        <p:nvSpPr>
+          <p:cNvPr id="25" name="Shape 23"/>
+          <p:cNvSpPr/>
+          <p:nvPr/>
+        </p:nvSpPr>
+        <p:spPr>
+          <a:xfrm>
             <a:off x="365760" y="3273552"/>
             <a:ext cx="1371600" cy="658368"/>
           </a:xfrm>
@@ -14816,7 +15620,7 @@
       </p:sp>
       <p:sp>
         <p:nvSpPr>
-          <p:cNvPr id="23" name="Text 21"/>
+          <p:cNvPr id="26" name="Text 24"/>
           <p:cNvSpPr/>
           <p:nvPr/>
         </p:nvSpPr>
@@ -14855,7 +15659,7 @@
       </p:sp>
       <p:sp>
         <p:nvSpPr>
-          <p:cNvPr id="24" name="Shape 22"/>
+          <p:cNvPr id="27" name="Shape 25"/>
           <p:cNvSpPr/>
           <p:nvPr/>
         </p:nvSpPr>
@@ -14882,7 +15686,7 @@
       </p:sp>
       <p:sp>
         <p:nvSpPr>
-          <p:cNvPr id="25" name="Shape 23"/>
+          <p:cNvPr id="28" name="Shape 26"/>
           <p:cNvSpPr/>
           <p:nvPr/>
         </p:nvSpPr>
@@ -14909,7 +15713,7 @@
       </p:sp>
       <p:sp>
         <p:nvSpPr>
-          <p:cNvPr id="26" name="Text 24"/>
+          <p:cNvPr id="29" name="Text 27"/>
           <p:cNvSpPr/>
           <p:nvPr/>
         </p:nvSpPr>
@@ -14940,7 +15744,7 @@
                 <a:ea typeface="Trebuchet MS" pitchFamily="34" charset="-122"/>
                 <a:cs typeface="Trebuchet MS" pitchFamily="34" charset="-120"/>
               </a:rPr>
-              <a:t>o</a:t>
+              <a:t>re</a:t>
             </a:r>
             <a:endParaRPr lang="en-US" sz="1400" dirty="0"/>
           </a:p>
@@ -14948,7 +15752,7 @@
       </p:sp>
       <p:sp>
         <p:nvSpPr>
-          <p:cNvPr id="27" name="Text 25"/>
+          <p:cNvPr id="30" name="Text 28"/>
           <p:cNvSpPr/>
           <p:nvPr/>
         </p:nvSpPr>
@@ -14987,7 +15791,7 @@
       </p:sp>
       <p:sp>
         <p:nvSpPr>
-          <p:cNvPr id="28" name="Shape 26"/>
+          <p:cNvPr id="31" name="Shape 29"/>
           <p:cNvSpPr/>
           <p:nvPr/>
         </p:nvSpPr>
@@ -15014,7 +15818,7 @@
       </p:sp>
       <p:sp>
         <p:nvSpPr>
-          <p:cNvPr id="29" name="Text 27"/>
+          <p:cNvPr id="32" name="Text 30"/>
           <p:cNvSpPr/>
           <p:nvPr/>
         </p:nvSpPr>
@@ -15045,7 +15849,7 @@
                 <a:ea typeface="Trebuchet MS" pitchFamily="34" charset="-122"/>
                 <a:cs typeface="Trebuchet MS" pitchFamily="34" charset="-120"/>
               </a:rPr>
-              <a:t>ver</a:t>
+              <a:t>fill</a:t>
             </a:r>
             <a:endParaRPr lang="en-US" sz="1400" dirty="0"/>
           </a:p>
@@ -15053,7 +15857,7 @@
       </p:sp>
       <p:sp>
         <p:nvSpPr>
-          <p:cNvPr id="30" name="Text 28"/>
+          <p:cNvPr id="33" name="Text 31"/>
           <p:cNvSpPr/>
           <p:nvPr/>
         </p:nvSpPr>
@@ -15092,7 +15896,7 @@
       </p:sp>
       <p:sp>
         <p:nvSpPr>
-          <p:cNvPr id="31" name="Shape 29"/>
+          <p:cNvPr id="34" name="Shape 32"/>
           <p:cNvSpPr/>
           <p:nvPr/>
         </p:nvSpPr>
@@ -15119,7 +15923,7 @@
       </p:sp>
       <p:sp>
         <p:nvSpPr>
-          <p:cNvPr id="32" name="Text 30"/>
+          <p:cNvPr id="35" name="Text 33"/>
           <p:cNvSpPr/>
           <p:nvPr/>
         </p:nvSpPr>
@@ -15150,7 +15954,7 @@
                 <a:ea typeface="Trebuchet MS" pitchFamily="34" charset="-122"/>
                 <a:cs typeface="Trebuchet MS" pitchFamily="34" charset="-120"/>
               </a:rPr>
-              <a:t>fill</a:t>
+              <a:t>ing</a:t>
             </a:r>
             <a:endParaRPr lang="en-US" sz="1400" dirty="0"/>
           </a:p>
@@ -15158,7 +15962,7 @@
       </p:sp>
       <p:sp>
         <p:nvSpPr>
-          <p:cNvPr id="33" name="Shape 31"/>
+          <p:cNvPr id="36" name="Shape 34"/>
           <p:cNvSpPr/>
           <p:nvPr/>
         </p:nvSpPr>
@@ -15185,7 +15989,7 @@
       </p:sp>
       <p:sp>
         <p:nvSpPr>
-          <p:cNvPr id="34" name="Text 32"/>
+          <p:cNvPr id="37" name="Text 35"/>
           <p:cNvSpPr/>
           <p:nvPr/>
         </p:nvSpPr>
@@ -15224,7 +16028,7 @@
       </p:sp>
       <p:sp>
         <p:nvSpPr>
-          <p:cNvPr id="35" name="Shape 33"/>
+          <p:cNvPr id="38" name="Shape 36"/>
           <p:cNvSpPr/>
           <p:nvPr/>
         </p:nvSpPr>
@@ -15251,13 +16055,13 @@
       </p:sp>
       <p:sp>
         <p:nvSpPr>
-          <p:cNvPr id="36" name="Shape 34"/>
-          <p:cNvSpPr/>
-          <p:nvPr/>
-        </p:nvSpPr>
-        <p:spPr>
-          <a:xfrm>
-            <a:off x="2254649" y="4169664"/>
+          <p:cNvPr id="39" name="Shape 37"/>
+          <p:cNvSpPr/>
+          <p:nvPr/>
+        </p:nvSpPr>
+        <p:spPr>
+          <a:xfrm>
+            <a:off x="2124837" y="4169664"/>
             <a:ext cx="685800" cy="475488"/>
           </a:xfrm>
           <a:prstGeom prst="rect">
@@ -15278,13 +16082,13 @@
       </p:sp>
       <p:sp>
         <p:nvSpPr>
-          <p:cNvPr id="37" name="Text 35"/>
-          <p:cNvSpPr/>
-          <p:nvPr/>
-        </p:nvSpPr>
-        <p:spPr>
-          <a:xfrm>
-            <a:off x="2254649" y="4169664"/>
+          <p:cNvPr id="40" name="Text 38"/>
+          <p:cNvSpPr/>
+          <p:nvPr/>
+        </p:nvSpPr>
+        <p:spPr>
+          <a:xfrm>
+            <a:off x="2124837" y="4169664"/>
             <a:ext cx="685800" cy="475488"/>
           </a:xfrm>
           <a:prstGeom prst="rect">
@@ -15309,7 +16113,7 @@
                 <a:ea typeface="Trebuchet MS" pitchFamily="34" charset="-122"/>
                 <a:cs typeface="Trebuchet MS" pitchFamily="34" charset="-120"/>
               </a:rPr>
-              <a:t>o</a:t>
+              <a:t>r</a:t>
             </a:r>
             <a:endParaRPr lang="en-US" sz="900" dirty="0"/>
           </a:p>
@@ -15317,13 +16121,13 @@
       </p:sp>
       <p:sp>
         <p:nvSpPr>
-          <p:cNvPr id="38" name="Shape 36"/>
-          <p:cNvSpPr/>
-          <p:nvPr/>
-        </p:nvSpPr>
-        <p:spPr>
-          <a:xfrm>
-            <a:off x="3293146" y="4169664"/>
+          <p:cNvPr id="41" name="Shape 39"/>
+          <p:cNvSpPr/>
+          <p:nvPr/>
+        </p:nvSpPr>
+        <p:spPr>
+          <a:xfrm>
+            <a:off x="3033522" y="4169664"/>
             <a:ext cx="685800" cy="475488"/>
           </a:xfrm>
           <a:prstGeom prst="rect">
@@ -15344,13 +16148,13 @@
       </p:sp>
       <p:sp>
         <p:nvSpPr>
-          <p:cNvPr id="39" name="Text 37"/>
-          <p:cNvSpPr/>
-          <p:nvPr/>
-        </p:nvSpPr>
-        <p:spPr>
-          <a:xfrm>
-            <a:off x="3293146" y="4169664"/>
+          <p:cNvPr id="42" name="Text 40"/>
+          <p:cNvSpPr/>
+          <p:nvPr/>
+        </p:nvSpPr>
+        <p:spPr>
+          <a:xfrm>
+            <a:off x="3033522" y="4169664"/>
             <a:ext cx="685800" cy="475488"/>
           </a:xfrm>
           <a:prstGeom prst="rect">
@@ -15375,7 +16179,7 @@
                 <a:ea typeface="Trebuchet MS" pitchFamily="34" charset="-122"/>
                 <a:cs typeface="Trebuchet MS" pitchFamily="34" charset="-120"/>
               </a:rPr>
-              <a:t>v</a:t>
+              <a:t>e</a:t>
             </a:r>
             <a:endParaRPr lang="en-US" sz="900" dirty="0"/>
           </a:p>
@@ -15383,13 +16187,13 @@
       </p:sp>
       <p:sp>
         <p:nvSpPr>
-          <p:cNvPr id="40" name="Shape 38"/>
-          <p:cNvSpPr/>
-          <p:nvPr/>
-        </p:nvSpPr>
-        <p:spPr>
-          <a:xfrm>
-            <a:off x="4331643" y="4169664"/>
+          <p:cNvPr id="43" name="Shape 41"/>
+          <p:cNvSpPr/>
+          <p:nvPr/>
+        </p:nvSpPr>
+        <p:spPr>
+          <a:xfrm>
+            <a:off x="3942207" y="4169664"/>
             <a:ext cx="685800" cy="475488"/>
           </a:xfrm>
           <a:prstGeom prst="rect">
@@ -15410,13 +16214,13 @@
       </p:sp>
       <p:sp>
         <p:nvSpPr>
-          <p:cNvPr id="41" name="Text 39"/>
-          <p:cNvSpPr/>
-          <p:nvPr/>
-        </p:nvSpPr>
-        <p:spPr>
-          <a:xfrm>
-            <a:off x="4331643" y="4169664"/>
+          <p:cNvPr id="44" name="Text 42"/>
+          <p:cNvSpPr/>
+          <p:nvPr/>
+        </p:nvSpPr>
+        <p:spPr>
+          <a:xfrm>
+            <a:off x="3942207" y="4169664"/>
             <a:ext cx="685800" cy="475488"/>
           </a:xfrm>
           <a:prstGeom prst="rect">
@@ -15441,7 +16245,7 @@
                 <a:ea typeface="Trebuchet MS" pitchFamily="34" charset="-122"/>
                 <a:cs typeface="Trebuchet MS" pitchFamily="34" charset="-120"/>
               </a:rPr>
-              <a:t>er</a:t>
+              <a:t>f</a:t>
             </a:r>
             <a:endParaRPr lang="en-US" sz="900" dirty="0"/>
           </a:p>
@@ -15449,13 +16253,13 @@
       </p:sp>
       <p:sp>
         <p:nvSpPr>
-          <p:cNvPr id="42" name="Shape 40"/>
-          <p:cNvSpPr/>
-          <p:nvPr/>
-        </p:nvSpPr>
-        <p:spPr>
-          <a:xfrm>
-            <a:off x="5370141" y="4169664"/>
+          <p:cNvPr id="45" name="Shape 43"/>
+          <p:cNvSpPr/>
+          <p:nvPr/>
+        </p:nvSpPr>
+        <p:spPr>
+          <a:xfrm>
+            <a:off x="4850892" y="4169664"/>
             <a:ext cx="685800" cy="475488"/>
           </a:xfrm>
           <a:prstGeom prst="rect">
@@ -15476,13 +16280,13 @@
       </p:sp>
       <p:sp>
         <p:nvSpPr>
-          <p:cNvPr id="43" name="Text 41"/>
-          <p:cNvSpPr/>
-          <p:nvPr/>
-        </p:nvSpPr>
-        <p:spPr>
-          <a:xfrm>
-            <a:off x="5370141" y="4169664"/>
+          <p:cNvPr id="46" name="Text 44"/>
+          <p:cNvSpPr/>
+          <p:nvPr/>
+        </p:nvSpPr>
+        <p:spPr>
+          <a:xfrm>
+            <a:off x="4850892" y="4169664"/>
             <a:ext cx="685800" cy="475488"/>
           </a:xfrm>
           <a:prstGeom prst="rect">
@@ -15507,7 +16311,7 @@
                 <a:ea typeface="Trebuchet MS" pitchFamily="34" charset="-122"/>
                 <a:cs typeface="Trebuchet MS" pitchFamily="34" charset="-120"/>
               </a:rPr>
-              <a:t>f</a:t>
+              <a:t>i</a:t>
             </a:r>
             <a:endParaRPr lang="en-US" sz="900" dirty="0"/>
           </a:p>
@@ -15515,13 +16319,13 @@
       </p:sp>
       <p:sp>
         <p:nvSpPr>
-          <p:cNvPr id="44" name="Shape 42"/>
-          <p:cNvSpPr/>
-          <p:nvPr/>
-        </p:nvSpPr>
-        <p:spPr>
-          <a:xfrm>
-            <a:off x="6408638" y="4169664"/>
+          <p:cNvPr id="47" name="Shape 45"/>
+          <p:cNvSpPr/>
+          <p:nvPr/>
+        </p:nvSpPr>
+        <p:spPr>
+          <a:xfrm>
+            <a:off x="5759577" y="4169664"/>
             <a:ext cx="685800" cy="475488"/>
           </a:xfrm>
           <a:prstGeom prst="rect">
@@ -15542,13 +16346,13 @@
       </p:sp>
       <p:sp>
         <p:nvSpPr>
-          <p:cNvPr id="45" name="Text 43"/>
-          <p:cNvSpPr/>
-          <p:nvPr/>
-        </p:nvSpPr>
-        <p:spPr>
-          <a:xfrm>
-            <a:off x="6408638" y="4169664"/>
+          <p:cNvPr id="48" name="Text 46"/>
+          <p:cNvSpPr/>
+          <p:nvPr/>
+        </p:nvSpPr>
+        <p:spPr>
+          <a:xfrm>
+            <a:off x="5759577" y="4169664"/>
             <a:ext cx="685800" cy="475488"/>
           </a:xfrm>
           <a:prstGeom prst="rect">
@@ -15573,7 +16377,7 @@
                 <a:ea typeface="Trebuchet MS" pitchFamily="34" charset="-122"/>
                 <a:cs typeface="Trebuchet MS" pitchFamily="34" charset="-120"/>
               </a:rPr>
-              <a:t>i</a:t>
+              <a:t>ll</a:t>
             </a:r>
             <a:endParaRPr lang="en-US" sz="900" dirty="0"/>
           </a:p>
@@ -15581,13 +16385,13 @@
       </p:sp>
       <p:sp>
         <p:nvSpPr>
-          <p:cNvPr id="46" name="Shape 44"/>
-          <p:cNvSpPr/>
-          <p:nvPr/>
-        </p:nvSpPr>
-        <p:spPr>
-          <a:xfrm>
-            <a:off x="7447135" y="4169664"/>
+          <p:cNvPr id="49" name="Shape 47"/>
+          <p:cNvSpPr/>
+          <p:nvPr/>
+        </p:nvSpPr>
+        <p:spPr>
+          <a:xfrm>
+            <a:off x="6668262" y="4169664"/>
             <a:ext cx="685800" cy="475488"/>
           </a:xfrm>
           <a:prstGeom prst="rect">
@@ -15608,13 +16412,13 @@
       </p:sp>
       <p:sp>
         <p:nvSpPr>
-          <p:cNvPr id="47" name="Text 45"/>
-          <p:cNvSpPr/>
-          <p:nvPr/>
-        </p:nvSpPr>
-        <p:spPr>
-          <a:xfrm>
-            <a:off x="7447135" y="4169664"/>
+          <p:cNvPr id="50" name="Text 48"/>
+          <p:cNvSpPr/>
+          <p:nvPr/>
+        </p:nvSpPr>
+        <p:spPr>
+          <a:xfrm>
+            <a:off x="6668262" y="4169664"/>
             <a:ext cx="685800" cy="475488"/>
           </a:xfrm>
           <a:prstGeom prst="rect">
@@ -15639,7 +16443,73 @@
                 <a:ea typeface="Trebuchet MS" pitchFamily="34" charset="-122"/>
                 <a:cs typeface="Trebuchet MS" pitchFamily="34" charset="-120"/>
               </a:rPr>
-              <a:t>ll</a:t>
+              <a:t>i</a:t>
+            </a:r>
+            <a:endParaRPr lang="en-US" sz="900" dirty="0"/>
+          </a:p>
+        </p:txBody>
+      </p:sp>
+      <p:sp>
+        <p:nvSpPr>
+          <p:cNvPr id="51" name="Shape 49"/>
+          <p:cNvSpPr/>
+          <p:nvPr/>
+        </p:nvSpPr>
+        <p:spPr>
+          <a:xfrm>
+            <a:off x="7576947" y="4169664"/>
+            <a:ext cx="685800" cy="475488"/>
+          </a:xfrm>
+          <a:prstGeom prst="rect">
+            <a:avLst>
+              <a:gd name="adj" fmla="val 7692"/>
+            </a:avLst>
+          </a:prstGeom>
+          <a:solidFill>
+            <a:srgbClr val="FFFFFF"/>
+          </a:solidFill>
+          <a:ln w="12700">
+            <a:solidFill>
+              <a:srgbClr val="DB2777"/>
+            </a:solidFill>
+            <a:prstDash val="solid"/>
+          </a:ln>
+        </p:spPr>
+      </p:sp>
+      <p:sp>
+        <p:nvSpPr>
+          <p:cNvPr id="52" name="Text 50"/>
+          <p:cNvSpPr/>
+          <p:nvPr/>
+        </p:nvSpPr>
+        <p:spPr>
+          <a:xfrm>
+            <a:off x="7576947" y="4169664"/>
+            <a:ext cx="685800" cy="475488"/>
+          </a:xfrm>
+          <a:prstGeom prst="rect">
+            <a:avLst/>
+          </a:prstGeom>
+          <a:noFill/>
+          <a:ln/>
+        </p:spPr>
+        <p:txBody>
+          <a:bodyPr wrap="square" lIns="0" tIns="0" rIns="0" bIns="0" rtlCol="0" anchor="ctr"/>
+          <a:lstStyle/>
+          <a:p>
+            <a:pPr algn="ctr" indent="0" marL="0">
+              <a:buNone/>
+            </a:pPr>
+            <a:r>
+              <a:rPr lang="en-US" sz="900" b="1" dirty="0">
+                <a:solidFill>
+                  <a:srgbClr val="9D174D"/>
+                </a:solidFill>
+                <a:latin typeface="Trebuchet MS" pitchFamily="34" charset="0"/>
+                <a:ea typeface="Trebuchet MS" pitchFamily="34" charset="-122"/>
+                <a:cs typeface="Trebuchet MS" pitchFamily="34" charset="-120"/>
+              </a:rPr>
+              <a:t>ng</a:t>
             </a:r>
             <a:endParaRPr lang="en-US" sz="900" dirty="0"/>
           </a:p>
@@ -16213,7 +17083,7 @@
                 <a:ea typeface="Calibri" pitchFamily="34" charset="-122"/>
                 <a:cs typeface="Calibri" pitchFamily="34" charset="-120"/>
               </a:rPr>
-              <a:t>Word Labs  •  wordlabs.app  •  Root: 'fill' = to make full, occupy</a:t>
+              <a:t>Word Labs  •  wordlabs.app  •  Root: 'fill' = to make full</a:t>
             </a:r>
             <a:endParaRPr lang="en-US" sz="800" dirty="0"/>
           </a:p>
@@ -16547,7 +17417,7 @@
                 <a:ea typeface="Trebuchet MS" pitchFamily="34" charset="-122"/>
                 <a:cs typeface="Trebuchet MS" pitchFamily="34" charset="-120"/>
               </a:rPr>
-              <a:t>2</a:t>
+              <a:t>0</a:t>
             </a:r>
             <a:pPr algn="ctr" indent="0" marL="0">
               <a:buNone/>
@@ -16561,7 +17431,7 @@
                 <a:ea typeface="Trebuchet MS" pitchFamily="34" charset="-122"/>
                 <a:cs typeface="Trebuchet MS" pitchFamily="34" charset="-120"/>
               </a:rPr>
-              <a:t>  punctuation marks</a:t>
+              <a:t>  punctuation mark</a:t>
             </a:r>
             <a:endParaRPr lang="en-US" sz="2800" dirty="0"/>
           </a:p>
@@ -16853,7 +17723,7 @@
                 <a:ea typeface="Calibri" pitchFamily="34" charset="-122"/>
                 <a:cs typeface="Calibri" pitchFamily="34" charset="-120"/>
               </a:rPr>
-              <a:t>Word Labs  •  wordlabs.app  •  Root: 'fill' = to make full, occupy</a:t>
+              <a:t>Word Labs  •  wordlabs.app  •  Root: 'fill' = to make full</a:t>
             </a:r>
             <a:endParaRPr lang="en-US" sz="800" dirty="0"/>
           </a:p>
@@ -16965,7 +17835,7 @@
                 <a:ea typeface="Calibri" pitchFamily="34" charset="-122"/>
                 <a:cs typeface="Calibri" pitchFamily="34" charset="-120"/>
               </a:rPr>
-              <a:t>The </a:t>
+              <a:t>Be careful not to </a:t>
             </a:r>
             <a:pPr algn="l" indent="0" marL="0">
               <a:buNone/>
@@ -16982,7 +17852,7 @@
                 <a:ea typeface="Calibri" pitchFamily="34" charset="-122"/>
                 <a:cs typeface="Calibri" pitchFamily="34" charset="-120"/>
               </a:rPr>
-              <a:t>filling</a:t>
+              <a:t>overfill</a:t>
             </a:r>
             <a:pPr algn="l" indent="0" marL="0">
               <a:buNone/>
@@ -16996,7 +17866,7 @@
                 <a:ea typeface="Calibri" pitchFamily="34" charset="-122"/>
                 <a:cs typeface="Calibri" pitchFamily="34" charset="-120"/>
               </a:rPr>
-              <a:t> inside the pie was delicious, and the baker used </a:t>
+              <a:t> the glass or the juice will spill over the top. The </a:t>
             </a:r>
             <a:pPr algn="l" indent="0" marL="0">
               <a:buNone/>
@@ -17013,7 +17883,7 @@
                 <a:ea typeface="Calibri" pitchFamily="34" charset="-122"/>
                 <a:cs typeface="Calibri" pitchFamily="34" charset="-120"/>
               </a:rPr>
-              <a:t>infill</a:t>
+              <a:t>overfilled</a:t>
             </a:r>
             <a:pPr algn="l" indent="0" marL="0">
               <a:buNone/>
@@ -17027,7 +17897,7 @@
                 <a:ea typeface="Calibri" pitchFamily="34" charset="-122"/>
                 <a:cs typeface="Calibri" pitchFamily="34" charset="-120"/>
               </a:rPr>
-              <a:t> pastry to cover the gaps; she was careful not to </a:t>
+              <a:t> bath overflowed onto the bathroom floor. </a:t>
             </a:r>
             <a:pPr algn="l" indent="0" marL="0">
               <a:buNone/>
@@ -17044,7 +17914,7 @@
                 <a:ea typeface="Calibri" pitchFamily="34" charset="-122"/>
                 <a:cs typeface="Calibri" pitchFamily="34" charset="-120"/>
               </a:rPr>
-              <a:t>underfill</a:t>
+              <a:t>Overfilling</a:t>
             </a:r>
             <a:pPr algn="l" indent="0" marL="0">
               <a:buNone/>
@@ -17058,7 +17928,7 @@
                 <a:ea typeface="Calibri" pitchFamily="34" charset="-122"/>
                 <a:cs typeface="Calibri" pitchFamily="34" charset="-120"/>
               </a:rPr>
-              <a:t> it.</a:t>
+              <a:t> the balloon with water made it burst.</a:t>
             </a:r>
             <a:endParaRPr lang="en-US" sz="1800" dirty="0"/>
           </a:p>
@@ -17213,7 +18083,7 @@
                 <a:ea typeface="Trebuchet MS" pitchFamily="34" charset="-122"/>
                 <a:cs typeface="Trebuchet MS" pitchFamily="34" charset="-120"/>
               </a:rPr>
-              <a:t>filling</a:t>
+              <a:t>overfill</a:t>
             </a:r>
             <a:endParaRPr lang="en-US" sz="1400" dirty="0"/>
           </a:p>
@@ -17341,7 +18211,7 @@
                 <a:ea typeface="Trebuchet MS" pitchFamily="34" charset="-122"/>
                 <a:cs typeface="Trebuchet MS" pitchFamily="34" charset="-120"/>
               </a:rPr>
-              <a:t>infill</a:t>
+              <a:t>overfilled</a:t>
             </a:r>
             <a:endParaRPr lang="en-US" sz="1400" dirty="0"/>
           </a:p>
@@ -17469,7 +18339,7 @@
                 <a:ea typeface="Trebuchet MS" pitchFamily="34" charset="-122"/>
                 <a:cs typeface="Trebuchet MS" pitchFamily="34" charset="-120"/>
               </a:rPr>
-              <a:t>underfill</a:t>
+              <a:t>overfilling</a:t>
             </a:r>
             <a:endParaRPr lang="en-US" sz="1400" dirty="0"/>
           </a:p>
@@ -17800,7 +18670,7 @@
                 <a:ea typeface="Calibri" pitchFamily="34" charset="-122"/>
                 <a:cs typeface="Calibri" pitchFamily="34" charset="-120"/>
               </a:rPr>
-              <a:t>Word Labs  •  wordlabs.app  •  Root: 'fill' = to make full, occupy</a:t>
+              <a:t>Word Labs  •  wordlabs.app  •  Root: 'fill' = to make full</a:t>
             </a:r>
             <a:endParaRPr lang="en-US" sz="800" dirty="0"/>
           </a:p>
@@ -17939,7 +18809,7 @@
                 <a:ea typeface="Trebuchet MS" pitchFamily="34" charset="-122"/>
                 <a:cs typeface="Trebuchet MS" pitchFamily="34" charset="-120"/>
               </a:rPr>
-              <a:t>filling</a:t>
+              <a:t>overfill</a:t>
             </a:r>
             <a:endParaRPr lang="en-US" sz="2800" dirty="0"/>
           </a:p>
@@ -18627,7 +19497,7 @@
                 <a:ea typeface="Calibri" pitchFamily="34" charset="-122"/>
                 <a:cs typeface="Calibri" pitchFamily="34" charset="-120"/>
               </a:rPr>
-              <a:t>Word Labs  •  wordlabs.app  •  Root: 'fill' = to make full, occupy</a:t>
+              <a:t>Word Labs  •  wordlabs.app  •  Root: 'fill' = to make full</a:t>
             </a:r>
             <a:endParaRPr lang="en-US" sz="800" dirty="0"/>
           </a:p>
@@ -18766,7 +19636,7 @@
                 <a:ea typeface="Trebuchet MS" pitchFamily="34" charset="-122"/>
                 <a:cs typeface="Trebuchet MS" pitchFamily="34" charset="-120"/>
               </a:rPr>
-              <a:t>filling</a:t>
+              <a:t>overfill</a:t>
             </a:r>
             <a:endParaRPr lang="en-US" sz="2800" dirty="0"/>
           </a:p>
@@ -18855,11 +19725,11 @@
             </a:avLst>
           </a:prstGeom>
           <a:solidFill>
-            <a:srgbClr val="CCFBF1"/>
+            <a:srgbClr val="DDD6FE"/>
           </a:solidFill>
           <a:ln w="19050">
             <a:solidFill>
-              <a:srgbClr val="0D9488"/>
+              <a:srgbClr val="7C3AED"/>
             </a:solidFill>
             <a:prstDash val="solid"/>
           </a:ln>
@@ -18899,13 +19769,13 @@
             <a:r>
               <a:rPr lang="en-US" sz="1300" b="1" dirty="0">
                 <a:solidFill>
-                  <a:srgbClr val="0F766E"/>
+                  <a:srgbClr val="4C1D95"/>
                 </a:solidFill>
                 <a:latin typeface="Trebuchet MS" pitchFamily="34" charset="0"/>
                 <a:ea typeface="Trebuchet MS" pitchFamily="34" charset="-122"/>
                 <a:cs typeface="Trebuchet MS" pitchFamily="34" charset="-120"/>
               </a:rPr>
-              <a:t>fill</a:t>
+              <a:t>over</a:t>
             </a:r>
             <a:endParaRPr lang="en-US" sz="1300" dirty="0"/>
           </a:p>
@@ -18944,7 +19814,7 @@
                 <a:ea typeface="Calibri" pitchFamily="34" charset="-122"/>
                 <a:cs typeface="Calibri" pitchFamily="34" charset="-120"/>
               </a:rPr>
-              <a:t>to make full</a:t>
+              <a:t>too much</a:t>
             </a:r>
             <a:endParaRPr lang="en-US" sz="850" dirty="0"/>
           </a:p>
@@ -18967,11 +19837,11 @@
             </a:avLst>
           </a:prstGeom>
           <a:solidFill>
-            <a:srgbClr val="FCE7F3"/>
+            <a:srgbClr val="CCFBF1"/>
           </a:solidFill>
           <a:ln w="19050">
             <a:solidFill>
-              <a:srgbClr val="DB2777"/>
+              <a:srgbClr val="0D9488"/>
             </a:solidFill>
             <a:prstDash val="solid"/>
           </a:ln>
@@ -19011,13 +19881,13 @@
             <a:r>
               <a:rPr lang="en-US" sz="1300" b="1" dirty="0">
                 <a:solidFill>
-                  <a:srgbClr val="9D174D"/>
+                  <a:srgbClr val="0F766E"/>
                 </a:solidFill>
                 <a:latin typeface="Trebuchet MS" pitchFamily="34" charset="0"/>
                 <a:ea typeface="Trebuchet MS" pitchFamily="34" charset="-122"/>
                 <a:cs typeface="Trebuchet MS" pitchFamily="34" charset="-120"/>
               </a:rPr>
-              <a:t>ing</a:t>
+              <a:t>fill</a:t>
             </a:r>
             <a:endParaRPr lang="en-US" sz="1300" dirty="0"/>
           </a:p>
@@ -19056,7 +19926,7 @@
                 <a:ea typeface="Calibri" pitchFamily="34" charset="-122"/>
                 <a:cs typeface="Calibri" pitchFamily="34" charset="-120"/>
               </a:rPr>
-              <a:t>action or thing doing</a:t>
+              <a:t>to make full</a:t>
             </a:r>
             <a:endParaRPr lang="en-US" sz="850" dirty="0"/>
           </a:p>
@@ -19612,7 +20482,7 @@
                 <a:ea typeface="Calibri" pitchFamily="34" charset="-122"/>
                 <a:cs typeface="Calibri" pitchFamily="34" charset="-120"/>
               </a:rPr>
-              <a:t>Word Labs  •  wordlabs.app  •  Root: 'fill' = to make full, occupy</a:t>
+              <a:t>Word Labs  •  wordlabs.app  •  Root: 'fill' = to make full</a:t>
             </a:r>
             <a:endParaRPr lang="en-US" sz="800" dirty="0"/>
           </a:p>
@@ -19751,7 +20621,7 @@
                 <a:ea typeface="Trebuchet MS" pitchFamily="34" charset="-122"/>
                 <a:cs typeface="Trebuchet MS" pitchFamily="34" charset="-120"/>
               </a:rPr>
-              <a:t>filling</a:t>
+              <a:t>overfill</a:t>
             </a:r>
             <a:endParaRPr lang="en-US" sz="2800" dirty="0"/>
           </a:p>
@@ -19840,11 +20710,11 @@
             </a:avLst>
           </a:prstGeom>
           <a:solidFill>
-            <a:srgbClr val="CCFBF1"/>
+            <a:srgbClr val="DDD6FE"/>
           </a:solidFill>
           <a:ln w="19050">
             <a:solidFill>
-              <a:srgbClr val="0D9488"/>
+              <a:srgbClr val="7C3AED"/>
             </a:solidFill>
             <a:prstDash val="solid"/>
           </a:ln>
@@ -19884,13 +20754,13 @@
             <a:r>
               <a:rPr lang="en-US" sz="1300" b="1" dirty="0">
                 <a:solidFill>
-                  <a:srgbClr val="0F766E"/>
+                  <a:srgbClr val="4C1D95"/>
                 </a:solidFill>
                 <a:latin typeface="Trebuchet MS" pitchFamily="34" charset="0"/>
                 <a:ea typeface="Trebuchet MS" pitchFamily="34" charset="-122"/>
                 <a:cs typeface="Trebuchet MS" pitchFamily="34" charset="-120"/>
               </a:rPr>
-              <a:t>fill</a:t>
+              <a:t>over</a:t>
             </a:r>
             <a:endParaRPr lang="en-US" sz="1300" dirty="0"/>
           </a:p>
@@ -19929,7 +20799,7 @@
                 <a:ea typeface="Calibri" pitchFamily="34" charset="-122"/>
                 <a:cs typeface="Calibri" pitchFamily="34" charset="-120"/>
               </a:rPr>
-              <a:t>to make full</a:t>
+              <a:t>too much</a:t>
             </a:r>
             <a:endParaRPr lang="en-US" sz="850" dirty="0"/>
           </a:p>
@@ -19952,11 +20822,11 @@
             </a:avLst>
           </a:prstGeom>
           <a:solidFill>
-            <a:srgbClr val="FCE7F3"/>
+            <a:srgbClr val="CCFBF1"/>
           </a:solidFill>
           <a:ln w="19050">
             <a:solidFill>
-              <a:srgbClr val="DB2777"/>
+              <a:srgbClr val="0D9488"/>
             </a:solidFill>
             <a:prstDash val="solid"/>
           </a:ln>
@@ -19996,13 +20866,13 @@
             <a:r>
               <a:rPr lang="en-US" sz="1300" b="1" dirty="0">
                 <a:solidFill>
-                  <a:srgbClr val="9D174D"/>
+                  <a:srgbClr val="0F766E"/>
                 </a:solidFill>
                 <a:latin typeface="Trebuchet MS" pitchFamily="34" charset="0"/>
                 <a:ea typeface="Trebuchet MS" pitchFamily="34" charset="-122"/>
                 <a:cs typeface="Trebuchet MS" pitchFamily="34" charset="-120"/>
               </a:rPr>
-              <a:t>ing</a:t>
+              <a:t>fill</a:t>
             </a:r>
             <a:endParaRPr lang="en-US" sz="1300" dirty="0"/>
           </a:p>
@@ -20041,7 +20911,7 @@
                 <a:ea typeface="Calibri" pitchFamily="34" charset="-122"/>
                 <a:cs typeface="Calibri" pitchFamily="34" charset="-120"/>
               </a:rPr>
-              <a:t>action or thing doing</a:t>
+              <a:t>to make full</a:t>
             </a:r>
             <a:endParaRPr lang="en-US" sz="850" dirty="0"/>
           </a:p>
@@ -20148,7 +21018,7 @@
         </p:nvSpPr>
         <p:spPr>
           <a:xfrm>
-            <a:off x="2999232" y="3364992"/>
+            <a:off x="2313432" y="3364992"/>
             <a:ext cx="1645920" cy="475488"/>
           </a:xfrm>
           <a:prstGeom prst="rect">
@@ -20175,7 +21045,7 @@
         </p:nvSpPr>
         <p:spPr>
           <a:xfrm>
-            <a:off x="2999232" y="3364992"/>
+            <a:off x="2313432" y="3364992"/>
             <a:ext cx="1645920" cy="475488"/>
           </a:xfrm>
           <a:prstGeom prst="rect">
@@ -20200,7 +21070,7 @@
                 <a:ea typeface="Trebuchet MS" pitchFamily="34" charset="-122"/>
                 <a:cs typeface="Trebuchet MS" pitchFamily="34" charset="-120"/>
               </a:rPr>
-              <a:t>fill</a:t>
+              <a:t>o</a:t>
             </a:r>
             <a:endParaRPr lang="en-US" sz="1400" dirty="0"/>
           </a:p>
@@ -20214,8 +21084,8 @@
         </p:nvSpPr>
         <p:spPr>
           <a:xfrm>
-            <a:off x="4645152" y="3364992"/>
-            <a:ext cx="1097280" cy="475488"/>
+            <a:off x="3959352" y="3364992"/>
+            <a:ext cx="411480" cy="475488"/>
           </a:xfrm>
           <a:prstGeom prst="rect">
             <a:avLst/>
@@ -20253,7 +21123,7 @@
         </p:nvSpPr>
         <p:spPr>
           <a:xfrm>
-            <a:off x="5742432" y="3364992"/>
+            <a:off x="4370832" y="3364992"/>
             <a:ext cx="1645920" cy="475488"/>
           </a:xfrm>
           <a:prstGeom prst="rect">
@@ -20280,7 +21150,7 @@
         </p:nvSpPr>
         <p:spPr>
           <a:xfrm>
-            <a:off x="5742432" y="3364992"/>
+            <a:off x="4370832" y="3364992"/>
             <a:ext cx="1645920" cy="475488"/>
           </a:xfrm>
           <a:prstGeom prst="rect">
@@ -20305,7 +21175,7 @@
                 <a:ea typeface="Trebuchet MS" pitchFamily="34" charset="-122"/>
                 <a:cs typeface="Trebuchet MS" pitchFamily="34" charset="-120"/>
               </a:rPr>
-              <a:t>ing</a:t>
+              <a:t>ver</a:t>
             </a:r>
             <a:endParaRPr lang="en-US" sz="1400" dirty="0"/>
           </a:p>
@@ -20313,7 +21183,112 @@
       </p:sp>
       <p:sp>
         <p:nvSpPr>
-          <p:cNvPr id="30" name="Shape 28"/>
+          <p:cNvPr id="30" name="Text 28"/>
+          <p:cNvSpPr/>
+          <p:nvPr/>
+        </p:nvSpPr>
+        <p:spPr>
+          <a:xfrm>
+            <a:off x="6016752" y="3364992"/>
+            <a:ext cx="411480" cy="475488"/>
+          </a:xfrm>
+          <a:prstGeom prst="rect">
+            <a:avLst/>
+          </a:prstGeom>
+          <a:noFill/>
+          <a:ln/>
+        </p:spPr>
+        <p:txBody>
+          <a:bodyPr wrap="square" lIns="0" tIns="0" rIns="0" bIns="0" rtlCol="0" anchor="ctr"/>
+          <a:lstStyle/>
+          <a:p>
+            <a:pPr algn="ctr" indent="0" marL="0">
+              <a:buNone/>
+            </a:pPr>
+            <a:r>
+              <a:rPr lang="en-US" sz="1600" b="1" dirty="0">
+                <a:solidFill>
+                  <a:srgbClr val="0D9488"/>
+                </a:solidFill>
+                <a:latin typeface="Trebuchet MS" pitchFamily="34" charset="0"/>
+                <a:ea typeface="Trebuchet MS" pitchFamily="34" charset="-122"/>
+                <a:cs typeface="Trebuchet MS" pitchFamily="34" charset="-120"/>
+              </a:rPr>
+              <a:t>·</a:t>
+            </a:r>
+            <a:endParaRPr lang="en-US" sz="1600" dirty="0"/>
+          </a:p>
+        </p:txBody>
+      </p:sp>
+      <p:sp>
+        <p:nvSpPr>
+          <p:cNvPr id="31" name="Shape 29"/>
+          <p:cNvSpPr/>
+          <p:nvPr/>
+        </p:nvSpPr>
+        <p:spPr>
+          <a:xfrm>
+            <a:off x="6428232" y="3364992"/>
+            <a:ext cx="1645920" cy="475488"/>
+          </a:xfrm>
+          <a:prstGeom prst="rect">
+            <a:avLst>
+              <a:gd name="adj" fmla="val 9615"/>
+            </a:avLst>
+          </a:prstGeom>
+          <a:solidFill>
+            <a:srgbClr val="FFFFFF"/>
+          </a:solidFill>
+          <a:ln w="12700">
+            <a:solidFill>
+              <a:srgbClr val="0D9488"/>
+            </a:solidFill>
+            <a:prstDash val="solid"/>
+          </a:ln>
+        </p:spPr>
+      </p:sp>
+      <p:sp>
+        <p:nvSpPr>
+          <p:cNvPr id="32" name="Text 30"/>
+          <p:cNvSpPr/>
+          <p:nvPr/>
+        </p:nvSpPr>
+        <p:spPr>
+          <a:xfrm>
+            <a:off x="6428232" y="3364992"/>
+            <a:ext cx="1645920" cy="475488"/>
+          </a:xfrm>
+          <a:prstGeom prst="rect">
+            <a:avLst/>
+          </a:prstGeom>
+          <a:noFill/>
+          <a:ln/>
+        </p:spPr>
+        <p:txBody>
+          <a:bodyPr wrap="square" lIns="0" tIns="0" rIns="0" bIns="0" rtlCol="0" anchor="ctr"/>
+          <a:lstStyle/>
+          <a:p>
+            <a:pPr algn="ctr" indent="0" marL="0">
+              <a:buNone/>
+            </a:pPr>
+            <a:r>
+              <a:rPr lang="en-US" sz="1400" b="1" dirty="0">
+                <a:solidFill>
+                  <a:srgbClr val="0D9488"/>
+                </a:solidFill>
+                <a:latin typeface="Trebuchet MS" pitchFamily="34" charset="0"/>
+                <a:ea typeface="Trebuchet MS" pitchFamily="34" charset="-122"/>
+                <a:cs typeface="Trebuchet MS" pitchFamily="34" charset="-120"/>
+              </a:rPr>
+              <a:t>fill</a:t>
+            </a:r>
+            <a:endParaRPr lang="en-US" sz="1400" dirty="0"/>
+          </a:p>
+        </p:txBody>
+      </p:sp>
+      <p:sp>
+        <p:nvSpPr>
+          <p:cNvPr id="33" name="Shape 31"/>
           <p:cNvSpPr/>
           <p:nvPr/>
         </p:nvSpPr>
@@ -20340,7 +21315,7 @@
       </p:sp>
       <p:sp>
         <p:nvSpPr>
-          <p:cNvPr id="31" name="Text 29"/>
+          <p:cNvPr id="34" name="Text 32"/>
           <p:cNvSpPr/>
           <p:nvPr/>
         </p:nvSpPr>
@@ -20379,7 +21354,7 @@
       </p:sp>
       <p:sp>
         <p:nvSpPr>
-          <p:cNvPr id="32" name="Shape 30"/>
+          <p:cNvPr id="35" name="Shape 33"/>
           <p:cNvSpPr/>
           <p:nvPr/>
         </p:nvSpPr>
@@ -20406,7 +21381,7 @@
       </p:sp>
       <p:sp>
         <p:nvSpPr>
-          <p:cNvPr id="33" name="Text 31"/>
+          <p:cNvPr id="36" name="Text 34"/>
           <p:cNvSpPr/>
           <p:nvPr/>
         </p:nvSpPr>
@@ -20729,7 +21704,7 @@
                 <a:ea typeface="Calibri" pitchFamily="34" charset="-122"/>
                 <a:cs typeface="Calibri" pitchFamily="34" charset="-120"/>
               </a:rPr>
-              <a:t>Word Labs  •  wordlabs.app  •  Root: 'fill' = to make full, occupy</a:t>
+              <a:t>Word Labs  •  wordlabs.app  •  Root: 'fill' = to make full</a:t>
             </a:r>
             <a:endParaRPr lang="en-US" sz="800" dirty="0"/>
           </a:p>
@@ -20868,7 +21843,7 @@
                 <a:ea typeface="Trebuchet MS" pitchFamily="34" charset="-122"/>
                 <a:cs typeface="Trebuchet MS" pitchFamily="34" charset="-120"/>
               </a:rPr>
-              <a:t>filling</a:t>
+              <a:t>overfill</a:t>
             </a:r>
             <a:endParaRPr lang="en-US" sz="2800" dirty="0"/>
           </a:p>
@@ -20957,11 +21932,11 @@
             </a:avLst>
           </a:prstGeom>
           <a:solidFill>
-            <a:srgbClr val="CCFBF1"/>
+            <a:srgbClr val="DDD6FE"/>
           </a:solidFill>
           <a:ln w="19050">
             <a:solidFill>
-              <a:srgbClr val="0D9488"/>
+              <a:srgbClr val="7C3AED"/>
             </a:solidFill>
             <a:prstDash val="solid"/>
           </a:ln>
@@ -21001,13 +21976,13 @@
             <a:r>
               <a:rPr lang="en-US" sz="1300" b="1" dirty="0">
                 <a:solidFill>
-                  <a:srgbClr val="0F766E"/>
+                  <a:srgbClr val="4C1D95"/>
                 </a:solidFill>
                 <a:latin typeface="Trebuchet MS" pitchFamily="34" charset="0"/>
                 <a:ea typeface="Trebuchet MS" pitchFamily="34" charset="-122"/>
                 <a:cs typeface="Trebuchet MS" pitchFamily="34" charset="-120"/>
               </a:rPr>
-              <a:t>fill</a:t>
+              <a:t>over</a:t>
             </a:r>
             <a:endParaRPr lang="en-US" sz="1300" dirty="0"/>
           </a:p>
@@ -21046,7 +22021,7 @@
                 <a:ea typeface="Calibri" pitchFamily="34" charset="-122"/>
                 <a:cs typeface="Calibri" pitchFamily="34" charset="-120"/>
               </a:rPr>
-              <a:t>to make full</a:t>
+              <a:t>too much</a:t>
             </a:r>
             <a:endParaRPr lang="en-US" sz="850" dirty="0"/>
           </a:p>
@@ -21069,11 +22044,11 @@
             </a:avLst>
           </a:prstGeom>
           <a:solidFill>
-            <a:srgbClr val="FCE7F3"/>
+            <a:srgbClr val="CCFBF1"/>
           </a:solidFill>
           <a:ln w="19050">
             <a:solidFill>
-              <a:srgbClr val="DB2777"/>
+              <a:srgbClr val="0D9488"/>
             </a:solidFill>
             <a:prstDash val="solid"/>
           </a:ln>
@@ -21113,13 +22088,13 @@
             <a:r>
               <a:rPr lang="en-US" sz="1300" b="1" dirty="0">
                 <a:solidFill>
-                  <a:srgbClr val="9D174D"/>
+                  <a:srgbClr val="0F766E"/>
                 </a:solidFill>
                 <a:latin typeface="Trebuchet MS" pitchFamily="34" charset="0"/>
                 <a:ea typeface="Trebuchet MS" pitchFamily="34" charset="-122"/>
                 <a:cs typeface="Trebuchet MS" pitchFamily="34" charset="-120"/>
               </a:rPr>
-              <a:t>ing</a:t>
+              <a:t>fill</a:t>
             </a:r>
             <a:endParaRPr lang="en-US" sz="1300" dirty="0"/>
           </a:p>
@@ -21158,7 +22133,7 @@
                 <a:ea typeface="Calibri" pitchFamily="34" charset="-122"/>
                 <a:cs typeface="Calibri" pitchFamily="34" charset="-120"/>
               </a:rPr>
-              <a:t>action or thing doing</a:t>
+              <a:t>to make full</a:t>
             </a:r>
             <a:endParaRPr lang="en-US" sz="850" dirty="0"/>
           </a:p>
@@ -21265,7 +22240,7 @@
         </p:nvSpPr>
         <p:spPr>
           <a:xfrm>
-            <a:off x="2999232" y="3364992"/>
+            <a:off x="2313432" y="3364992"/>
             <a:ext cx="1645920" cy="475488"/>
           </a:xfrm>
           <a:prstGeom prst="rect">
@@ -21292,7 +22267,7 @@
         </p:nvSpPr>
         <p:spPr>
           <a:xfrm>
-            <a:off x="2999232" y="3364992"/>
+            <a:off x="2313432" y="3364992"/>
             <a:ext cx="1645920" cy="475488"/>
           </a:xfrm>
           <a:prstGeom prst="rect">
@@ -21317,7 +22292,7 @@
                 <a:ea typeface="Trebuchet MS" pitchFamily="34" charset="-122"/>
                 <a:cs typeface="Trebuchet MS" pitchFamily="34" charset="-120"/>
               </a:rPr>
-              <a:t>fill</a:t>
+              <a:t>o</a:t>
             </a:r>
             <a:endParaRPr lang="en-US" sz="1400" dirty="0"/>
           </a:p>
@@ -21331,8 +22306,8 @@
         </p:nvSpPr>
         <p:spPr>
           <a:xfrm>
-            <a:off x="4645152" y="3364992"/>
-            <a:ext cx="1097280" cy="475488"/>
+            <a:off x="3959352" y="3364992"/>
+            <a:ext cx="411480" cy="475488"/>
           </a:xfrm>
           <a:prstGeom prst="rect">
             <a:avLst/>
@@ -21370,7 +22345,7 @@
         </p:nvSpPr>
         <p:spPr>
           <a:xfrm>
-            <a:off x="5742432" y="3364992"/>
+            <a:off x="4370832" y="3364992"/>
             <a:ext cx="1645920" cy="475488"/>
           </a:xfrm>
           <a:prstGeom prst="rect">
@@ -21397,7 +22372,7 @@
         </p:nvSpPr>
         <p:spPr>
           <a:xfrm>
-            <a:off x="5742432" y="3364992"/>
+            <a:off x="4370832" y="3364992"/>
             <a:ext cx="1645920" cy="475488"/>
           </a:xfrm>
           <a:prstGeom prst="rect">
@@ -21422,7 +22397,7 @@
                 <a:ea typeface="Trebuchet MS" pitchFamily="34" charset="-122"/>
                 <a:cs typeface="Trebuchet MS" pitchFamily="34" charset="-120"/>
               </a:rPr>
-              <a:t>ing</a:t>
+              <a:t>ver</a:t>
             </a:r>
             <a:endParaRPr lang="en-US" sz="1400" dirty="0"/>
           </a:p>
@@ -21430,7 +22405,112 @@
       </p:sp>
       <p:sp>
         <p:nvSpPr>
-          <p:cNvPr id="30" name="Shape 28"/>
+          <p:cNvPr id="30" name="Text 28"/>
+          <p:cNvSpPr/>
+          <p:nvPr/>
+        </p:nvSpPr>
+        <p:spPr>
+          <a:xfrm>
+            <a:off x="6016752" y="3364992"/>
+            <a:ext cx="411480" cy="475488"/>
+          </a:xfrm>
+          <a:prstGeom prst="rect">
+            <a:avLst/>
+          </a:prstGeom>
+          <a:noFill/>
+          <a:ln/>
+        </p:spPr>
+        <p:txBody>
+          <a:bodyPr wrap="square" lIns="0" tIns="0" rIns="0" bIns="0" rtlCol="0" anchor="ctr"/>
+          <a:lstStyle/>
+          <a:p>
+            <a:pPr algn="ctr" indent="0" marL="0">
+              <a:buNone/>
+            </a:pPr>
+            <a:r>
+              <a:rPr lang="en-US" sz="1600" b="1" dirty="0">
+                <a:solidFill>
+                  <a:srgbClr val="0D9488"/>
+                </a:solidFill>
+                <a:latin typeface="Trebuchet MS" pitchFamily="34" charset="0"/>
+                <a:ea typeface="Trebuchet MS" pitchFamily="34" charset="-122"/>
+                <a:cs typeface="Trebuchet MS" pitchFamily="34" charset="-120"/>
+              </a:rPr>
+              <a:t>·</a:t>
+            </a:r>
+            <a:endParaRPr lang="en-US" sz="1600" dirty="0"/>
+          </a:p>
+        </p:txBody>
+      </p:sp>
+      <p:sp>
+        <p:nvSpPr>
+          <p:cNvPr id="31" name="Shape 29"/>
+          <p:cNvSpPr/>
+          <p:nvPr/>
+        </p:nvSpPr>
+        <p:spPr>
+          <a:xfrm>
+            <a:off x="6428232" y="3364992"/>
+            <a:ext cx="1645920" cy="475488"/>
+          </a:xfrm>
+          <a:prstGeom prst="rect">
+            <a:avLst>
+              <a:gd name="adj" fmla="val 9615"/>
+            </a:avLst>
+          </a:prstGeom>
+          <a:solidFill>
+            <a:srgbClr val="FFFFFF"/>
+          </a:solidFill>
+          <a:ln w="12700">
+            <a:solidFill>
+              <a:srgbClr val="0D9488"/>
+            </a:solidFill>
+            <a:prstDash val="solid"/>
+          </a:ln>
+        </p:spPr>
+      </p:sp>
+      <p:sp>
+        <p:nvSpPr>
+          <p:cNvPr id="32" name="Text 30"/>
+          <p:cNvSpPr/>
+          <p:nvPr/>
+        </p:nvSpPr>
+        <p:spPr>
+          <a:xfrm>
+            <a:off x="6428232" y="3364992"/>
+            <a:ext cx="1645920" cy="475488"/>
+          </a:xfrm>
+          <a:prstGeom prst="rect">
+            <a:avLst/>
+          </a:prstGeom>
+          <a:noFill/>
+          <a:ln/>
+        </p:spPr>
+        <p:txBody>
+          <a:bodyPr wrap="square" lIns="0" tIns="0" rIns="0" bIns="0" rtlCol="0" anchor="ctr"/>
+          <a:lstStyle/>
+          <a:p>
+            <a:pPr algn="ctr" indent="0" marL="0">
+              <a:buNone/>
+            </a:pPr>
+            <a:r>
+              <a:rPr lang="en-US" sz="1400" b="1" dirty="0">
+                <a:solidFill>
+                  <a:srgbClr val="0D9488"/>
+                </a:solidFill>
+                <a:latin typeface="Trebuchet MS" pitchFamily="34" charset="0"/>
+                <a:ea typeface="Trebuchet MS" pitchFamily="34" charset="-122"/>
+                <a:cs typeface="Trebuchet MS" pitchFamily="34" charset="-120"/>
+              </a:rPr>
+              <a:t>fill</a:t>
+            </a:r>
+            <a:endParaRPr lang="en-US" sz="1400" dirty="0"/>
+          </a:p>
+        </p:txBody>
+      </p:sp>
+      <p:sp>
+        <p:nvSpPr>
+          <p:cNvPr id="33" name="Shape 31"/>
           <p:cNvSpPr/>
           <p:nvPr/>
         </p:nvSpPr>
@@ -21457,7 +22537,7 @@
       </p:sp>
       <p:sp>
         <p:nvSpPr>
-          <p:cNvPr id="31" name="Text 29"/>
+          <p:cNvPr id="34" name="Text 32"/>
           <p:cNvSpPr/>
           <p:nvPr/>
         </p:nvSpPr>
@@ -21496,7 +22576,7 @@
       </p:sp>
       <p:sp>
         <p:nvSpPr>
-          <p:cNvPr id="32" name="Shape 30"/>
+          <p:cNvPr id="35" name="Shape 33"/>
           <p:cNvSpPr/>
           <p:nvPr/>
         </p:nvSpPr>
@@ -21523,13 +22603,13 @@
       </p:sp>
       <p:sp>
         <p:nvSpPr>
-          <p:cNvPr id="33" name="Shape 31"/>
-          <p:cNvSpPr/>
-          <p:nvPr/>
-        </p:nvSpPr>
-        <p:spPr>
-          <a:xfrm>
-            <a:off x="2427732" y="4169664"/>
+          <p:cNvPr id="36" name="Shape 34"/>
+          <p:cNvSpPr/>
+          <p:nvPr/>
+        </p:nvSpPr>
+        <p:spPr>
+          <a:xfrm>
+            <a:off x="2254649" y="4169664"/>
             <a:ext cx="685800" cy="475488"/>
           </a:xfrm>
           <a:prstGeom prst="rect">
@@ -21550,13 +22630,13 @@
       </p:sp>
       <p:sp>
         <p:nvSpPr>
-          <p:cNvPr id="34" name="Text 32"/>
-          <p:cNvSpPr/>
-          <p:nvPr/>
-        </p:nvSpPr>
-        <p:spPr>
-          <a:xfrm>
-            <a:off x="2427732" y="4169664"/>
+          <p:cNvPr id="37" name="Text 35"/>
+          <p:cNvSpPr/>
+          <p:nvPr/>
+        </p:nvSpPr>
+        <p:spPr>
+          <a:xfrm>
+            <a:off x="2254649" y="4169664"/>
             <a:ext cx="685800" cy="475488"/>
           </a:xfrm>
           <a:prstGeom prst="rect">
@@ -21581,7 +22661,7 @@
                 <a:ea typeface="Trebuchet MS" pitchFamily="34" charset="-122"/>
                 <a:cs typeface="Trebuchet MS" pitchFamily="34" charset="-120"/>
               </a:rPr>
-              <a:t>f</a:t>
+              <a:t>o</a:t>
             </a:r>
             <a:endParaRPr lang="en-US" sz="900" dirty="0"/>
           </a:p>
@@ -21589,13 +22669,13 @@
       </p:sp>
       <p:sp>
         <p:nvSpPr>
-          <p:cNvPr id="35" name="Shape 33"/>
-          <p:cNvSpPr/>
-          <p:nvPr/>
-        </p:nvSpPr>
-        <p:spPr>
-          <a:xfrm>
-            <a:off x="3639312" y="4169664"/>
+          <p:cNvPr id="38" name="Shape 36"/>
+          <p:cNvSpPr/>
+          <p:nvPr/>
+        </p:nvSpPr>
+        <p:spPr>
+          <a:xfrm>
+            <a:off x="3293146" y="4169664"/>
             <a:ext cx="685800" cy="475488"/>
           </a:xfrm>
           <a:prstGeom prst="rect">
@@ -21616,13 +22696,13 @@
       </p:sp>
       <p:sp>
         <p:nvSpPr>
-          <p:cNvPr id="36" name="Text 34"/>
-          <p:cNvSpPr/>
-          <p:nvPr/>
-        </p:nvSpPr>
-        <p:spPr>
-          <a:xfrm>
-            <a:off x="3639312" y="4169664"/>
+          <p:cNvPr id="39" name="Text 37"/>
+          <p:cNvSpPr/>
+          <p:nvPr/>
+        </p:nvSpPr>
+        <p:spPr>
+          <a:xfrm>
+            <a:off x="3293146" y="4169664"/>
             <a:ext cx="685800" cy="475488"/>
           </a:xfrm>
           <a:prstGeom prst="rect">
@@ -21647,7 +22727,7 @@
                 <a:ea typeface="Trebuchet MS" pitchFamily="34" charset="-122"/>
                 <a:cs typeface="Trebuchet MS" pitchFamily="34" charset="-120"/>
               </a:rPr>
-              <a:t>i</a:t>
+              <a:t>v</a:t>
             </a:r>
             <a:endParaRPr lang="en-US" sz="900" dirty="0"/>
           </a:p>
@@ -21655,13 +22735,13 @@
       </p:sp>
       <p:sp>
         <p:nvSpPr>
-          <p:cNvPr id="37" name="Shape 35"/>
-          <p:cNvSpPr/>
-          <p:nvPr/>
-        </p:nvSpPr>
-        <p:spPr>
-          <a:xfrm>
-            <a:off x="4850892" y="4169664"/>
+          <p:cNvPr id="40" name="Shape 38"/>
+          <p:cNvSpPr/>
+          <p:nvPr/>
+        </p:nvSpPr>
+        <p:spPr>
+          <a:xfrm>
+            <a:off x="4331643" y="4169664"/>
             <a:ext cx="685800" cy="475488"/>
           </a:xfrm>
           <a:prstGeom prst="rect">
@@ -21682,13 +22762,13 @@
       </p:sp>
       <p:sp>
         <p:nvSpPr>
-          <p:cNvPr id="38" name="Text 36"/>
-          <p:cNvSpPr/>
-          <p:nvPr/>
-        </p:nvSpPr>
-        <p:spPr>
-          <a:xfrm>
-            <a:off x="4850892" y="4169664"/>
+          <p:cNvPr id="41" name="Text 39"/>
+          <p:cNvSpPr/>
+          <p:nvPr/>
+        </p:nvSpPr>
+        <p:spPr>
+          <a:xfrm>
+            <a:off x="4331643" y="4169664"/>
             <a:ext cx="685800" cy="475488"/>
           </a:xfrm>
           <a:prstGeom prst="rect">
@@ -21713,7 +22793,7 @@
                 <a:ea typeface="Trebuchet MS" pitchFamily="34" charset="-122"/>
                 <a:cs typeface="Trebuchet MS" pitchFamily="34" charset="-120"/>
               </a:rPr>
-              <a:t>ll</a:t>
+              <a:t>er</a:t>
             </a:r>
             <a:endParaRPr lang="en-US" sz="900" dirty="0"/>
           </a:p>
@@ -21721,13 +22801,13 @@
       </p:sp>
       <p:sp>
         <p:nvSpPr>
-          <p:cNvPr id="39" name="Shape 37"/>
-          <p:cNvSpPr/>
-          <p:nvPr/>
-        </p:nvSpPr>
-        <p:spPr>
-          <a:xfrm>
-            <a:off x="6062472" y="4169664"/>
+          <p:cNvPr id="42" name="Shape 40"/>
+          <p:cNvSpPr/>
+          <p:nvPr/>
+        </p:nvSpPr>
+        <p:spPr>
+          <a:xfrm>
+            <a:off x="5370141" y="4169664"/>
             <a:ext cx="685800" cy="475488"/>
           </a:xfrm>
           <a:prstGeom prst="rect">
@@ -21748,13 +22828,13 @@
       </p:sp>
       <p:sp>
         <p:nvSpPr>
-          <p:cNvPr id="40" name="Text 38"/>
-          <p:cNvSpPr/>
-          <p:nvPr/>
-        </p:nvSpPr>
-        <p:spPr>
-          <a:xfrm>
-            <a:off x="6062472" y="4169664"/>
+          <p:cNvPr id="43" name="Text 41"/>
+          <p:cNvSpPr/>
+          <p:nvPr/>
+        </p:nvSpPr>
+        <p:spPr>
+          <a:xfrm>
+            <a:off x="5370141" y="4169664"/>
             <a:ext cx="685800" cy="475488"/>
           </a:xfrm>
           <a:prstGeom prst="rect">
@@ -21779,7 +22859,7 @@
                 <a:ea typeface="Trebuchet MS" pitchFamily="34" charset="-122"/>
                 <a:cs typeface="Trebuchet MS" pitchFamily="34" charset="-120"/>
               </a:rPr>
-              <a:t>i</a:t>
+              <a:t>f</a:t>
             </a:r>
             <a:endParaRPr lang="en-US" sz="900" dirty="0"/>
           </a:p>
@@ -21787,13 +22867,13 @@
       </p:sp>
       <p:sp>
         <p:nvSpPr>
-          <p:cNvPr id="41" name="Shape 39"/>
-          <p:cNvSpPr/>
-          <p:nvPr/>
-        </p:nvSpPr>
-        <p:spPr>
-          <a:xfrm>
-            <a:off x="7274052" y="4169664"/>
+          <p:cNvPr id="44" name="Shape 42"/>
+          <p:cNvSpPr/>
+          <p:nvPr/>
+        </p:nvSpPr>
+        <p:spPr>
+          <a:xfrm>
+            <a:off x="6408638" y="4169664"/>
             <a:ext cx="685800" cy="475488"/>
           </a:xfrm>
           <a:prstGeom prst="rect">
@@ -21814,13 +22894,13 @@
       </p:sp>
       <p:sp>
         <p:nvSpPr>
-          <p:cNvPr id="42" name="Text 40"/>
-          <p:cNvSpPr/>
-          <p:nvPr/>
-        </p:nvSpPr>
-        <p:spPr>
-          <a:xfrm>
-            <a:off x="7274052" y="4169664"/>
+          <p:cNvPr id="45" name="Text 43"/>
+          <p:cNvSpPr/>
+          <p:nvPr/>
+        </p:nvSpPr>
+        <p:spPr>
+          <a:xfrm>
+            <a:off x="6408638" y="4169664"/>
             <a:ext cx="685800" cy="475488"/>
           </a:xfrm>
           <a:prstGeom prst="rect">
@@ -21845,7 +22925,73 @@
                 <a:ea typeface="Trebuchet MS" pitchFamily="34" charset="-122"/>
                 <a:cs typeface="Trebuchet MS" pitchFamily="34" charset="-120"/>
               </a:rPr>
-              <a:t>ng</a:t>
+              <a:t>i</a:t>
+            </a:r>
+            <a:endParaRPr lang="en-US" sz="900" dirty="0"/>
+          </a:p>
+        </p:txBody>
+      </p:sp>
+      <p:sp>
+        <p:nvSpPr>
+          <p:cNvPr id="46" name="Shape 44"/>
+          <p:cNvSpPr/>
+          <p:nvPr/>
+        </p:nvSpPr>
+        <p:spPr>
+          <a:xfrm>
+            <a:off x="7447135" y="4169664"/>
+            <a:ext cx="685800" cy="475488"/>
+          </a:xfrm>
+          <a:prstGeom prst="rect">
+            <a:avLst>
+              <a:gd name="adj" fmla="val 7692"/>
+            </a:avLst>
+          </a:prstGeom>
+          <a:solidFill>
+            <a:srgbClr val="FFFFFF"/>
+          </a:solidFill>
+          <a:ln w="12700">
+            <a:solidFill>
+              <a:srgbClr val="DB2777"/>
+            </a:solidFill>
+            <a:prstDash val="solid"/>
+          </a:ln>
+        </p:spPr>
+      </p:sp>
+      <p:sp>
+        <p:nvSpPr>
+          <p:cNvPr id="47" name="Text 45"/>
+          <p:cNvSpPr/>
+          <p:nvPr/>
+        </p:nvSpPr>
+        <p:spPr>
+          <a:xfrm>
+            <a:off x="7447135" y="4169664"/>
+            <a:ext cx="685800" cy="475488"/>
+          </a:xfrm>
+          <a:prstGeom prst="rect">
+            <a:avLst/>
+          </a:prstGeom>
+          <a:noFill/>
+          <a:ln/>
+        </p:spPr>
+        <p:txBody>
+          <a:bodyPr wrap="square" lIns="0" tIns="0" rIns="0" bIns="0" rtlCol="0" anchor="ctr"/>
+          <a:lstStyle/>
+          <a:p>
+            <a:pPr algn="ctr" indent="0" marL="0">
+              <a:buNone/>
+            </a:pPr>
+            <a:r>
+              <a:rPr lang="en-US" sz="900" b="1" dirty="0">
+                <a:solidFill>
+                  <a:srgbClr val="9D174D"/>
+                </a:solidFill>
+                <a:latin typeface="Trebuchet MS" pitchFamily="34" charset="0"/>
+                <a:ea typeface="Trebuchet MS" pitchFamily="34" charset="-122"/>
+                <a:cs typeface="Trebuchet MS" pitchFamily="34" charset="-120"/>
+              </a:rPr>
+              <a:t>ll</a:t>
             </a:r>
             <a:endParaRPr lang="en-US" sz="900" dirty="0"/>
           </a:p>
@@ -22137,7 +23283,7 @@
                 <a:ea typeface="Calibri" pitchFamily="34" charset="-122"/>
                 <a:cs typeface="Calibri" pitchFamily="34" charset="-120"/>
               </a:rPr>
-              <a:t>Word Labs  •  wordlabs.app  •  Root: 'fill' = to make full, occupy</a:t>
+              <a:t>Word Labs  •  wordlabs.app  •  Root: 'fill' = to make full</a:t>
             </a:r>
             <a:endParaRPr lang="en-US" sz="800" dirty="0"/>
           </a:p>
@@ -22276,7 +23422,7 @@
                 <a:ea typeface="Trebuchet MS" pitchFamily="34" charset="-122"/>
                 <a:cs typeface="Trebuchet MS" pitchFamily="34" charset="-120"/>
               </a:rPr>
-              <a:t>infill</a:t>
+              <a:t>overfilled</a:t>
             </a:r>
             <a:endParaRPr lang="en-US" sz="2800" dirty="0"/>
           </a:p>
@@ -22964,7 +24110,7 @@
                 <a:ea typeface="Calibri" pitchFamily="34" charset="-122"/>
                 <a:cs typeface="Calibri" pitchFamily="34" charset="-120"/>
               </a:rPr>
-              <a:t>Word Labs  •  wordlabs.app  •  Root: 'fill' = to make full, occupy</a:t>
+              <a:t>Word Labs  •  wordlabs.app  •  Root: 'fill' = to make full</a:t>
             </a:r>
             <a:endParaRPr lang="en-US" sz="800" dirty="0"/>
           </a:p>
@@ -23103,7 +24249,7 @@
                 <a:ea typeface="Trebuchet MS" pitchFamily="34" charset="-122"/>
                 <a:cs typeface="Trebuchet MS" pitchFamily="34" charset="-120"/>
               </a:rPr>
-              <a:t>infill</a:t>
+              <a:t>overfilled</a:t>
             </a:r>
             <a:endParaRPr lang="en-US" sz="2800" dirty="0"/>
           </a:p>
@@ -23183,7 +24329,7 @@
         </p:nvSpPr>
         <p:spPr>
           <a:xfrm>
-            <a:off x="2938272" y="2258568"/>
+            <a:off x="2221992" y="2258568"/>
             <a:ext cx="1828800" cy="292608"/>
           </a:xfrm>
           <a:prstGeom prst="rect">
@@ -23217,7 +24363,7 @@
         </p:nvSpPr>
         <p:spPr>
           <a:xfrm>
-            <a:off x="2938272" y="2258568"/>
+            <a:off x="2221992" y="2258568"/>
             <a:ext cx="1828800" cy="292608"/>
           </a:xfrm>
           <a:prstGeom prst="rect">
@@ -23242,7 +24388,7 @@
                 <a:ea typeface="Trebuchet MS" pitchFamily="34" charset="-122"/>
                 <a:cs typeface="Trebuchet MS" pitchFamily="34" charset="-120"/>
               </a:rPr>
-              <a:t>in</a:t>
+              <a:t>over</a:t>
             </a:r>
             <a:endParaRPr lang="en-US" sz="1300" dirty="0"/>
           </a:p>
@@ -23256,7 +24402,7 @@
         </p:nvSpPr>
         <p:spPr>
           <a:xfrm>
-            <a:off x="2938272" y="2569464"/>
+            <a:off x="2221992" y="2569464"/>
             <a:ext cx="1828800" cy="201168"/>
           </a:xfrm>
           <a:prstGeom prst="rect">
@@ -23281,7 +24427,7 @@
                 <a:ea typeface="Calibri" pitchFamily="34" charset="-122"/>
                 <a:cs typeface="Calibri" pitchFamily="34" charset="-120"/>
               </a:rPr>
-              <a:t>into, within</a:t>
+              <a:t>too much</a:t>
             </a:r>
             <a:endParaRPr lang="en-US" sz="850" dirty="0"/>
           </a:p>
@@ -23295,7 +24441,7 @@
         </p:nvSpPr>
         <p:spPr>
           <a:xfrm>
-            <a:off x="5803392" y="2258568"/>
+            <a:off x="4370832" y="2258568"/>
             <a:ext cx="1828800" cy="292608"/>
           </a:xfrm>
           <a:prstGeom prst="rect">
@@ -23329,7 +24475,7 @@
         </p:nvSpPr>
         <p:spPr>
           <a:xfrm>
-            <a:off x="5803392" y="2258568"/>
+            <a:off x="4370832" y="2258568"/>
             <a:ext cx="1828800" cy="292608"/>
           </a:xfrm>
           <a:prstGeom prst="rect">
@@ -23368,7 +24514,7 @@
         </p:nvSpPr>
         <p:spPr>
           <a:xfrm>
-            <a:off x="5803392" y="2569464"/>
+            <a:off x="4370832" y="2569464"/>
             <a:ext cx="1828800" cy="201168"/>
           </a:xfrm>
           <a:prstGeom prst="rect">
@@ -23407,6 +24553,118 @@
         </p:nvSpPr>
         <p:spPr>
           <a:xfrm>
+            <a:off x="6519672" y="2258568"/>
+            <a:ext cx="1828800" cy="292608"/>
+          </a:xfrm>
+          <a:prstGeom prst="rect">
+            <a:avLst>
+              <a:gd name="adj" fmla="val 25000"/>
+            </a:avLst>
+          </a:prstGeom>
+          <a:solidFill>
+            <a:srgbClr val="FCE7F3"/>
+          </a:solidFill>
+          <a:ln w="19050">
+            <a:solidFill>
+              <a:srgbClr val="DB2777"/>
+            </a:solidFill>
+            <a:prstDash val="solid"/>
+          </a:ln>
+          <a:effectLst>
+            <a:outerShdw sx="100000" sy="100000" kx="0" ky="0" algn="bl" rotWithShape="0" blurRad="101600" dist="38100" dir="8100000">
+              <a:srgbClr val="000000">
+                <a:alpha val="12000"/>
+              </a:srgbClr>
+            </a:outerShdw>
+          </a:effectLst>
+        </p:spPr>
+      </p:sp>
+      <p:sp>
+        <p:nvSpPr>
+          <p:cNvPr id="23" name="Text 21"/>
+          <p:cNvSpPr/>
+          <p:nvPr/>
+        </p:nvSpPr>
+        <p:spPr>
+          <a:xfrm>
+            <a:off x="6519672" y="2258568"/>
+            <a:ext cx="1828800" cy="292608"/>
+          </a:xfrm>
+          <a:prstGeom prst="rect">
+            <a:avLst/>
+          </a:prstGeom>
+          <a:noFill/>
+          <a:ln/>
+        </p:spPr>
+        <p:txBody>
+          <a:bodyPr wrap="square" lIns="0" tIns="0" rIns="0" bIns="0" rtlCol="0" anchor="ctr"/>
+          <a:lstStyle/>
+          <a:p>
+            <a:pPr algn="ctr" indent="0" marL="0">
+              <a:buNone/>
+            </a:pPr>
+            <a:r>
+              <a:rPr lang="en-US" sz="1300" b="1" dirty="0">
+                <a:solidFill>
+                  <a:srgbClr val="9D174D"/>
+                </a:solidFill>
+                <a:latin typeface="Trebuchet MS" pitchFamily="34" charset="0"/>
+                <a:ea typeface="Trebuchet MS" pitchFamily="34" charset="-122"/>
+                <a:cs typeface="Trebuchet MS" pitchFamily="34" charset="-120"/>
+              </a:rPr>
+              <a:t>ed</a:t>
+            </a:r>
+            <a:endParaRPr lang="en-US" sz="1300" dirty="0"/>
+          </a:p>
+        </p:txBody>
+      </p:sp>
+      <p:sp>
+        <p:nvSpPr>
+          <p:cNvPr id="24" name="Text 22"/>
+          <p:cNvSpPr/>
+          <p:nvPr/>
+        </p:nvSpPr>
+        <p:spPr>
+          <a:xfrm>
+            <a:off x="6519672" y="2569464"/>
+            <a:ext cx="1828800" cy="201168"/>
+          </a:xfrm>
+          <a:prstGeom prst="rect">
+            <a:avLst/>
+          </a:prstGeom>
+          <a:noFill/>
+          <a:ln/>
+        </p:spPr>
+        <p:txBody>
+          <a:bodyPr wrap="square" lIns="0" tIns="0" rIns="0" bIns="0" rtlCol="0" anchor="t"/>
+          <a:lstStyle/>
+          <a:p>
+            <a:pPr algn="ctr" indent="0" marL="0">
+              <a:buNone/>
+            </a:pPr>
+            <a:r>
+              <a:rPr lang="en-US" sz="850" dirty="0">
+                <a:solidFill>
+                  <a:srgbClr val="475569"/>
+                </a:solidFill>
+                <a:latin typeface="Calibri" pitchFamily="34" charset="0"/>
+                <a:ea typeface="Calibri" pitchFamily="34" charset="-122"/>
+                <a:cs typeface="Calibri" pitchFamily="34" charset="-120"/>
+              </a:rPr>
+              <a:t>past tense</a:t>
+            </a:r>
+            <a:endParaRPr lang="en-US" sz="850" dirty="0"/>
+          </a:p>
+        </p:txBody>
+      </p:sp>
+      <p:sp>
+        <p:nvSpPr>
+          <p:cNvPr id="25" name="Shape 23"/>
+          <p:cNvSpPr/>
+          <p:nvPr/>
+        </p:nvSpPr>
+        <p:spPr>
+          <a:xfrm>
             <a:off x="365760" y="3273552"/>
             <a:ext cx="1371600" cy="658368"/>
           </a:xfrm>
@@ -23428,7 +24686,7 @@
       </p:sp>
       <p:sp>
         <p:nvSpPr>
-          <p:cNvPr id="23" name="Text 21"/>
+          <p:cNvPr id="26" name="Text 24"/>
           <p:cNvSpPr/>
           <p:nvPr/>
         </p:nvSpPr>
@@ -23467,7 +24725,7 @@
       </p:sp>
       <p:sp>
         <p:nvSpPr>
-          <p:cNvPr id="24" name="Shape 22"/>
+          <p:cNvPr id="27" name="Shape 25"/>
           <p:cNvSpPr/>
           <p:nvPr/>
         </p:nvSpPr>
@@ -23494,7 +24752,7 @@
       </p:sp>
       <p:sp>
         <p:nvSpPr>
-          <p:cNvPr id="25" name="Text 23"/>
+          <p:cNvPr id="28" name="Text 26"/>
           <p:cNvSpPr/>
           <p:nvPr/>
         </p:nvSpPr>
@@ -23533,7 +24791,7 @@
       </p:sp>
       <p:sp>
         <p:nvSpPr>
-          <p:cNvPr id="26" name="Shape 24"/>
+          <p:cNvPr id="29" name="Shape 27"/>
           <p:cNvSpPr/>
           <p:nvPr/>
         </p:nvSpPr>
@@ -23560,7 +24818,7 @@
       </p:sp>
       <p:sp>
         <p:nvSpPr>
-          <p:cNvPr id="27" name="Text 25"/>
+          <p:cNvPr id="30" name="Text 28"/>
           <p:cNvSpPr/>
           <p:nvPr/>
         </p:nvSpPr>
@@ -23599,7 +24857,7 @@
       </p:sp>
       <p:sp>
         <p:nvSpPr>
-          <p:cNvPr id="28" name="Shape 26"/>
+          <p:cNvPr id="31" name="Shape 29"/>
           <p:cNvSpPr/>
           <p:nvPr/>
         </p:nvSpPr>
@@ -23626,7 +24884,7 @@
       </p:sp>
       <p:sp>
         <p:nvSpPr>
-          <p:cNvPr id="29" name="Text 27"/>
+          <p:cNvPr id="32" name="Text 30"/>
           <p:cNvSpPr/>
           <p:nvPr/>
         </p:nvSpPr>
@@ -23949,7 +25207,7 @@
                 <a:ea typeface="Calibri" pitchFamily="34" charset="-122"/>
                 <a:cs typeface="Calibri" pitchFamily="34" charset="-120"/>
               </a:rPr>
-              <a:t>Word Labs  •  wordlabs.app  •  Root: 'fill' = to make full, occupy</a:t>
+              <a:t>Word Labs  •  wordlabs.app  •  Root: 'fill' = to make full</a:t>
             </a:r>
             <a:endParaRPr lang="en-US" sz="800" dirty="0"/>
           </a:p>
@@ -24022,7 +25280,7 @@
                 <a:ea typeface="Trebuchet MS" pitchFamily="34" charset="-122"/>
                 <a:cs typeface="Trebuchet MS" pitchFamily="34" charset="-120"/>
               </a:rPr>
-              <a:t>We are learning that the root 'fill' means 'to make full, occupy'.</a:t>
+              <a:t>We are learning that the root 'fill' means 'to make full'.</a:t>
             </a:r>
             <a:endParaRPr lang="en-US" sz="2000" dirty="0"/>
           </a:p>
@@ -24668,7 +25926,7 @@
                 <a:ea typeface="Calibri" pitchFamily="34" charset="-122"/>
                 <a:cs typeface="Calibri" pitchFamily="34" charset="-120"/>
               </a:rPr>
-              <a:t>Word Labs  •  wordlabs.app  •  Root: 'fill' = to make full, occupy</a:t>
+              <a:t>Word Labs  •  wordlabs.app  •  Root: 'fill' = to make full</a:t>
             </a:r>
             <a:endParaRPr lang="en-US" sz="800" dirty="0"/>
           </a:p>
@@ -24807,7 +26065,7 @@
                 <a:ea typeface="Trebuchet MS" pitchFamily="34" charset="-122"/>
                 <a:cs typeface="Trebuchet MS" pitchFamily="34" charset="-120"/>
               </a:rPr>
-              <a:t>infill</a:t>
+              <a:t>overfilled</a:t>
             </a:r>
             <a:endParaRPr lang="en-US" sz="2800" dirty="0"/>
           </a:p>
@@ -24887,7 +26145,7 @@
         </p:nvSpPr>
         <p:spPr>
           <a:xfrm>
-            <a:off x="2938272" y="2258568"/>
+            <a:off x="2221992" y="2258568"/>
             <a:ext cx="1828800" cy="292608"/>
           </a:xfrm>
           <a:prstGeom prst="rect">
@@ -24921,7 +26179,7 @@
         </p:nvSpPr>
         <p:spPr>
           <a:xfrm>
-            <a:off x="2938272" y="2258568"/>
+            <a:off x="2221992" y="2258568"/>
             <a:ext cx="1828800" cy="292608"/>
           </a:xfrm>
           <a:prstGeom prst="rect">
@@ -24946,7 +26204,7 @@
                 <a:ea typeface="Trebuchet MS" pitchFamily="34" charset="-122"/>
                 <a:cs typeface="Trebuchet MS" pitchFamily="34" charset="-120"/>
               </a:rPr>
-              <a:t>in</a:t>
+              <a:t>over</a:t>
             </a:r>
             <a:endParaRPr lang="en-US" sz="1300" dirty="0"/>
           </a:p>
@@ -24960,7 +26218,7 @@
         </p:nvSpPr>
         <p:spPr>
           <a:xfrm>
-            <a:off x="2938272" y="2569464"/>
+            <a:off x="2221992" y="2569464"/>
             <a:ext cx="1828800" cy="201168"/>
           </a:xfrm>
           <a:prstGeom prst="rect">
@@ -24985,7 +26243,7 @@
                 <a:ea typeface="Calibri" pitchFamily="34" charset="-122"/>
                 <a:cs typeface="Calibri" pitchFamily="34" charset="-120"/>
               </a:rPr>
-              <a:t>into, within</a:t>
+              <a:t>too much</a:t>
             </a:r>
             <a:endParaRPr lang="en-US" sz="850" dirty="0"/>
           </a:p>
@@ -24999,7 +26257,7 @@
         </p:nvSpPr>
         <p:spPr>
           <a:xfrm>
-            <a:off x="5803392" y="2258568"/>
+            <a:off x="4370832" y="2258568"/>
             <a:ext cx="1828800" cy="292608"/>
           </a:xfrm>
           <a:prstGeom prst="rect">
@@ -25033,7 +26291,7 @@
         </p:nvSpPr>
         <p:spPr>
           <a:xfrm>
-            <a:off x="5803392" y="2258568"/>
+            <a:off x="4370832" y="2258568"/>
             <a:ext cx="1828800" cy="292608"/>
           </a:xfrm>
           <a:prstGeom prst="rect">
@@ -25072,7 +26330,7 @@
         </p:nvSpPr>
         <p:spPr>
           <a:xfrm>
-            <a:off x="5803392" y="2569464"/>
+            <a:off x="4370832" y="2569464"/>
             <a:ext cx="1828800" cy="201168"/>
           </a:xfrm>
           <a:prstGeom prst="rect">
@@ -25111,6 +26369,118 @@
         </p:nvSpPr>
         <p:spPr>
           <a:xfrm>
+            <a:off x="6519672" y="2258568"/>
+            <a:ext cx="1828800" cy="292608"/>
+          </a:xfrm>
+          <a:prstGeom prst="rect">
+            <a:avLst>
+              <a:gd name="adj" fmla="val 25000"/>
+            </a:avLst>
+          </a:prstGeom>
+          <a:solidFill>
+            <a:srgbClr val="FCE7F3"/>
+          </a:solidFill>
+          <a:ln w="19050">
+            <a:solidFill>
+              <a:srgbClr val="DB2777"/>
+            </a:solidFill>
+            <a:prstDash val="solid"/>
+          </a:ln>
+          <a:effectLst>
+            <a:outerShdw sx="100000" sy="100000" kx="0" ky="0" algn="bl" rotWithShape="0" blurRad="101600" dist="38100" dir="8100000">
+              <a:srgbClr val="000000">
+                <a:alpha val="12000"/>
+              </a:srgbClr>
+            </a:outerShdw>
+          </a:effectLst>
+        </p:spPr>
+      </p:sp>
+      <p:sp>
+        <p:nvSpPr>
+          <p:cNvPr id="23" name="Text 21"/>
+          <p:cNvSpPr/>
+          <p:nvPr/>
+        </p:nvSpPr>
+        <p:spPr>
+          <a:xfrm>
+            <a:off x="6519672" y="2258568"/>
+            <a:ext cx="1828800" cy="292608"/>
+          </a:xfrm>
+          <a:prstGeom prst="rect">
+            <a:avLst/>
+          </a:prstGeom>
+          <a:noFill/>
+          <a:ln/>
+        </p:spPr>
+        <p:txBody>
+          <a:bodyPr wrap="square" lIns="0" tIns="0" rIns="0" bIns="0" rtlCol="0" anchor="ctr"/>
+          <a:lstStyle/>
+          <a:p>
+            <a:pPr algn="ctr" indent="0" marL="0">
+              <a:buNone/>
+            </a:pPr>
+            <a:r>
+              <a:rPr lang="en-US" sz="1300" b="1" dirty="0">
+                <a:solidFill>
+                  <a:srgbClr val="9D174D"/>
+                </a:solidFill>
+                <a:latin typeface="Trebuchet MS" pitchFamily="34" charset="0"/>
+                <a:ea typeface="Trebuchet MS" pitchFamily="34" charset="-122"/>
+                <a:cs typeface="Trebuchet MS" pitchFamily="34" charset="-120"/>
+              </a:rPr>
+              <a:t>ed</a:t>
+            </a:r>
+            <a:endParaRPr lang="en-US" sz="1300" dirty="0"/>
+          </a:p>
+        </p:txBody>
+      </p:sp>
+      <p:sp>
+        <p:nvSpPr>
+          <p:cNvPr id="24" name="Text 22"/>
+          <p:cNvSpPr/>
+          <p:nvPr/>
+        </p:nvSpPr>
+        <p:spPr>
+          <a:xfrm>
+            <a:off x="6519672" y="2569464"/>
+            <a:ext cx="1828800" cy="201168"/>
+          </a:xfrm>
+          <a:prstGeom prst="rect">
+            <a:avLst/>
+          </a:prstGeom>
+          <a:noFill/>
+          <a:ln/>
+        </p:spPr>
+        <p:txBody>
+          <a:bodyPr wrap="square" lIns="0" tIns="0" rIns="0" bIns="0" rtlCol="0" anchor="t"/>
+          <a:lstStyle/>
+          <a:p>
+            <a:pPr algn="ctr" indent="0" marL="0">
+              <a:buNone/>
+            </a:pPr>
+            <a:r>
+              <a:rPr lang="en-US" sz="850" dirty="0">
+                <a:solidFill>
+                  <a:srgbClr val="475569"/>
+                </a:solidFill>
+                <a:latin typeface="Calibri" pitchFamily="34" charset="0"/>
+                <a:ea typeface="Calibri" pitchFamily="34" charset="-122"/>
+                <a:cs typeface="Calibri" pitchFamily="34" charset="-120"/>
+              </a:rPr>
+              <a:t>past tense</a:t>
+            </a:r>
+            <a:endParaRPr lang="en-US" sz="850" dirty="0"/>
+          </a:p>
+        </p:txBody>
+      </p:sp>
+      <p:sp>
+        <p:nvSpPr>
+          <p:cNvPr id="25" name="Shape 23"/>
+          <p:cNvSpPr/>
+          <p:nvPr/>
+        </p:nvSpPr>
+        <p:spPr>
+          <a:xfrm>
             <a:off x="365760" y="3273552"/>
             <a:ext cx="1371600" cy="658368"/>
           </a:xfrm>
@@ -25132,7 +26502,7 @@
       </p:sp>
       <p:sp>
         <p:nvSpPr>
-          <p:cNvPr id="23" name="Text 21"/>
+          <p:cNvPr id="26" name="Text 24"/>
           <p:cNvSpPr/>
           <p:nvPr/>
         </p:nvSpPr>
@@ -25171,7 +26541,7 @@
       </p:sp>
       <p:sp>
         <p:nvSpPr>
-          <p:cNvPr id="24" name="Shape 22"/>
+          <p:cNvPr id="27" name="Shape 25"/>
           <p:cNvSpPr/>
           <p:nvPr/>
         </p:nvSpPr>
@@ -25198,13 +26568,13 @@
       </p:sp>
       <p:sp>
         <p:nvSpPr>
-          <p:cNvPr id="25" name="Shape 23"/>
-          <p:cNvSpPr/>
-          <p:nvPr/>
-        </p:nvSpPr>
-        <p:spPr>
-          <a:xfrm>
-            <a:off x="2999232" y="3364992"/>
+          <p:cNvPr id="28" name="Shape 26"/>
+          <p:cNvSpPr/>
+          <p:nvPr/>
+        </p:nvSpPr>
+        <p:spPr>
+          <a:xfrm>
+            <a:off x="2313432" y="3364992"/>
             <a:ext cx="1645920" cy="475488"/>
           </a:xfrm>
           <a:prstGeom prst="rect">
@@ -25225,13 +26595,13 @@
       </p:sp>
       <p:sp>
         <p:nvSpPr>
-          <p:cNvPr id="26" name="Text 24"/>
-          <p:cNvSpPr/>
-          <p:nvPr/>
-        </p:nvSpPr>
-        <p:spPr>
-          <a:xfrm>
-            <a:off x="2999232" y="3364992"/>
+          <p:cNvPr id="29" name="Text 27"/>
+          <p:cNvSpPr/>
+          <p:nvPr/>
+        </p:nvSpPr>
+        <p:spPr>
+          <a:xfrm>
+            <a:off x="2313432" y="3364992"/>
             <a:ext cx="1645920" cy="475488"/>
           </a:xfrm>
           <a:prstGeom prst="rect">
@@ -25256,7 +26626,7 @@
                 <a:ea typeface="Trebuchet MS" pitchFamily="34" charset="-122"/>
                 <a:cs typeface="Trebuchet MS" pitchFamily="34" charset="-120"/>
               </a:rPr>
-              <a:t>in</a:t>
+              <a:t>o</a:t>
             </a:r>
             <a:endParaRPr lang="en-US" sz="1400" dirty="0"/>
           </a:p>
@@ -25264,14 +26634,14 @@
       </p:sp>
       <p:sp>
         <p:nvSpPr>
-          <p:cNvPr id="27" name="Text 25"/>
-          <p:cNvSpPr/>
-          <p:nvPr/>
-        </p:nvSpPr>
-        <p:spPr>
-          <a:xfrm>
-            <a:off x="4645152" y="3364992"/>
-            <a:ext cx="1097280" cy="475488"/>
+          <p:cNvPr id="30" name="Text 28"/>
+          <p:cNvSpPr/>
+          <p:nvPr/>
+        </p:nvSpPr>
+        <p:spPr>
+          <a:xfrm>
+            <a:off x="3959352" y="3364992"/>
+            <a:ext cx="411480" cy="475488"/>
           </a:xfrm>
           <a:prstGeom prst="rect">
             <a:avLst/>
@@ -25303,13 +26673,13 @@
       </p:sp>
       <p:sp>
         <p:nvSpPr>
-          <p:cNvPr id="28" name="Shape 26"/>
-          <p:cNvSpPr/>
-          <p:nvPr/>
-        </p:nvSpPr>
-        <p:spPr>
-          <a:xfrm>
-            <a:off x="5742432" y="3364992"/>
+          <p:cNvPr id="31" name="Shape 29"/>
+          <p:cNvSpPr/>
+          <p:nvPr/>
+        </p:nvSpPr>
+        <p:spPr>
+          <a:xfrm>
+            <a:off x="4370832" y="3364992"/>
             <a:ext cx="1645920" cy="475488"/>
           </a:xfrm>
           <a:prstGeom prst="rect">
@@ -25330,13 +26700,13 @@
       </p:sp>
       <p:sp>
         <p:nvSpPr>
-          <p:cNvPr id="29" name="Text 27"/>
-          <p:cNvSpPr/>
-          <p:nvPr/>
-        </p:nvSpPr>
-        <p:spPr>
-          <a:xfrm>
-            <a:off x="5742432" y="3364992"/>
+          <p:cNvPr id="32" name="Text 30"/>
+          <p:cNvSpPr/>
+          <p:nvPr/>
+        </p:nvSpPr>
+        <p:spPr>
+          <a:xfrm>
+            <a:off x="4370832" y="3364992"/>
             <a:ext cx="1645920" cy="475488"/>
           </a:xfrm>
           <a:prstGeom prst="rect">
@@ -25361,7 +26731,7 @@
                 <a:ea typeface="Trebuchet MS" pitchFamily="34" charset="-122"/>
                 <a:cs typeface="Trebuchet MS" pitchFamily="34" charset="-120"/>
               </a:rPr>
-              <a:t>fill</a:t>
+              <a:t>ver</a:t>
             </a:r>
             <a:endParaRPr lang="en-US" sz="1400" dirty="0"/>
           </a:p>
@@ -25369,7 +26739,112 @@
       </p:sp>
       <p:sp>
         <p:nvSpPr>
-          <p:cNvPr id="30" name="Shape 28"/>
+          <p:cNvPr id="33" name="Text 31"/>
+          <p:cNvSpPr/>
+          <p:nvPr/>
+        </p:nvSpPr>
+        <p:spPr>
+          <a:xfrm>
+            <a:off x="6016752" y="3364992"/>
+            <a:ext cx="411480" cy="475488"/>
+          </a:xfrm>
+          <a:prstGeom prst="rect">
+            <a:avLst/>
+          </a:prstGeom>
+          <a:noFill/>
+          <a:ln/>
+        </p:spPr>
+        <p:txBody>
+          <a:bodyPr wrap="square" lIns="0" tIns="0" rIns="0" bIns="0" rtlCol="0" anchor="ctr"/>
+          <a:lstStyle/>
+          <a:p>
+            <a:pPr algn="ctr" indent="0" marL="0">
+              <a:buNone/>
+            </a:pPr>
+            <a:r>
+              <a:rPr lang="en-US" sz="1600" b="1" dirty="0">
+                <a:solidFill>
+                  <a:srgbClr val="0D9488"/>
+                </a:solidFill>
+                <a:latin typeface="Trebuchet MS" pitchFamily="34" charset="0"/>
+                <a:ea typeface="Trebuchet MS" pitchFamily="34" charset="-122"/>
+                <a:cs typeface="Trebuchet MS" pitchFamily="34" charset="-120"/>
+              </a:rPr>
+              <a:t>·</a:t>
+            </a:r>
+            <a:endParaRPr lang="en-US" sz="1600" dirty="0"/>
+          </a:p>
+        </p:txBody>
+      </p:sp>
+      <p:sp>
+        <p:nvSpPr>
+          <p:cNvPr id="34" name="Shape 32"/>
+          <p:cNvSpPr/>
+          <p:nvPr/>
+        </p:nvSpPr>
+        <p:spPr>
+          <a:xfrm>
+            <a:off x="6428232" y="3364992"/>
+            <a:ext cx="1645920" cy="475488"/>
+          </a:xfrm>
+          <a:prstGeom prst="rect">
+            <a:avLst>
+              <a:gd name="adj" fmla="val 9615"/>
+            </a:avLst>
+          </a:prstGeom>
+          <a:solidFill>
+            <a:srgbClr val="FFFFFF"/>
+          </a:solidFill>
+          <a:ln w="12700">
+            <a:solidFill>
+              <a:srgbClr val="0D9488"/>
+            </a:solidFill>
+            <a:prstDash val="solid"/>
+          </a:ln>
+        </p:spPr>
+      </p:sp>
+      <p:sp>
+        <p:nvSpPr>
+          <p:cNvPr id="35" name="Text 33"/>
+          <p:cNvSpPr/>
+          <p:nvPr/>
+        </p:nvSpPr>
+        <p:spPr>
+          <a:xfrm>
+            <a:off x="6428232" y="3364992"/>
+            <a:ext cx="1645920" cy="475488"/>
+          </a:xfrm>
+          <a:prstGeom prst="rect">
+            <a:avLst/>
+          </a:prstGeom>
+          <a:noFill/>
+          <a:ln/>
+        </p:spPr>
+        <p:txBody>
+          <a:bodyPr wrap="square" lIns="0" tIns="0" rIns="0" bIns="0" rtlCol="0" anchor="ctr"/>
+          <a:lstStyle/>
+          <a:p>
+            <a:pPr algn="ctr" indent="0" marL="0">
+              <a:buNone/>
+            </a:pPr>
+            <a:r>
+              <a:rPr lang="en-US" sz="1400" b="1" dirty="0">
+                <a:solidFill>
+                  <a:srgbClr val="0D9488"/>
+                </a:solidFill>
+                <a:latin typeface="Trebuchet MS" pitchFamily="34" charset="0"/>
+                <a:ea typeface="Trebuchet MS" pitchFamily="34" charset="-122"/>
+                <a:cs typeface="Trebuchet MS" pitchFamily="34" charset="-120"/>
+              </a:rPr>
+              <a:t>filled</a:t>
+            </a:r>
+            <a:endParaRPr lang="en-US" sz="1400" dirty="0"/>
+          </a:p>
+        </p:txBody>
+      </p:sp>
+      <p:sp>
+        <p:nvSpPr>
+          <p:cNvPr id="36" name="Shape 34"/>
           <p:cNvSpPr/>
           <p:nvPr/>
         </p:nvSpPr>
@@ -25396,7 +26871,7 @@
       </p:sp>
       <p:sp>
         <p:nvSpPr>
-          <p:cNvPr id="31" name="Text 29"/>
+          <p:cNvPr id="37" name="Text 35"/>
           <p:cNvSpPr/>
           <p:nvPr/>
         </p:nvSpPr>
@@ -25435,7 +26910,7 @@
       </p:sp>
       <p:sp>
         <p:nvSpPr>
-          <p:cNvPr id="32" name="Shape 30"/>
+          <p:cNvPr id="38" name="Shape 36"/>
           <p:cNvSpPr/>
           <p:nvPr/>
         </p:nvSpPr>
@@ -25462,7 +26937,7 @@
       </p:sp>
       <p:sp>
         <p:nvSpPr>
-          <p:cNvPr id="33" name="Text 31"/>
+          <p:cNvPr id="39" name="Text 37"/>
           <p:cNvSpPr/>
           <p:nvPr/>
         </p:nvSpPr>
@@ -25785,7 +27260,7 @@
                 <a:ea typeface="Calibri" pitchFamily="34" charset="-122"/>
                 <a:cs typeface="Calibri" pitchFamily="34" charset="-120"/>
               </a:rPr>
-              <a:t>Word Labs  •  wordlabs.app  •  Root: 'fill' = to make full, occupy</a:t>
+              <a:t>Word Labs  •  wordlabs.app  •  Root: 'fill' = to make full</a:t>
             </a:r>
             <a:endParaRPr lang="en-US" sz="800" dirty="0"/>
           </a:p>
@@ -25924,7 +27399,7 @@
                 <a:ea typeface="Trebuchet MS" pitchFamily="34" charset="-122"/>
                 <a:cs typeface="Trebuchet MS" pitchFamily="34" charset="-120"/>
               </a:rPr>
-              <a:t>infill</a:t>
+              <a:t>overfilled</a:t>
             </a:r>
             <a:endParaRPr lang="en-US" sz="2800" dirty="0"/>
           </a:p>
@@ -26004,7 +27479,7 @@
         </p:nvSpPr>
         <p:spPr>
           <a:xfrm>
-            <a:off x="2938272" y="2258568"/>
+            <a:off x="2221992" y="2258568"/>
             <a:ext cx="1828800" cy="292608"/>
           </a:xfrm>
           <a:prstGeom prst="rect">
@@ -26038,7 +27513,7 @@
         </p:nvSpPr>
         <p:spPr>
           <a:xfrm>
-            <a:off x="2938272" y="2258568"/>
+            <a:off x="2221992" y="2258568"/>
             <a:ext cx="1828800" cy="292608"/>
           </a:xfrm>
           <a:prstGeom prst="rect">
@@ -26063,7 +27538,7 @@
                 <a:ea typeface="Trebuchet MS" pitchFamily="34" charset="-122"/>
                 <a:cs typeface="Trebuchet MS" pitchFamily="34" charset="-120"/>
               </a:rPr>
-              <a:t>in</a:t>
+              <a:t>over</a:t>
             </a:r>
             <a:endParaRPr lang="en-US" sz="1300" dirty="0"/>
           </a:p>
@@ -26077,7 +27552,7 @@
         </p:nvSpPr>
         <p:spPr>
           <a:xfrm>
-            <a:off x="2938272" y="2569464"/>
+            <a:off x="2221992" y="2569464"/>
             <a:ext cx="1828800" cy="201168"/>
           </a:xfrm>
           <a:prstGeom prst="rect">
@@ -26102,7 +27577,7 @@
                 <a:ea typeface="Calibri" pitchFamily="34" charset="-122"/>
                 <a:cs typeface="Calibri" pitchFamily="34" charset="-120"/>
               </a:rPr>
-              <a:t>into, within</a:t>
+              <a:t>too much</a:t>
             </a:r>
             <a:endParaRPr lang="en-US" sz="850" dirty="0"/>
           </a:p>
@@ -26116,7 +27591,7 @@
         </p:nvSpPr>
         <p:spPr>
           <a:xfrm>
-            <a:off x="5803392" y="2258568"/>
+            <a:off x="4370832" y="2258568"/>
             <a:ext cx="1828800" cy="292608"/>
           </a:xfrm>
           <a:prstGeom prst="rect">
@@ -26150,7 +27625,7 @@
         </p:nvSpPr>
         <p:spPr>
           <a:xfrm>
-            <a:off x="5803392" y="2258568"/>
+            <a:off x="4370832" y="2258568"/>
             <a:ext cx="1828800" cy="292608"/>
           </a:xfrm>
           <a:prstGeom prst="rect">
@@ -26189,7 +27664,7 @@
         </p:nvSpPr>
         <p:spPr>
           <a:xfrm>
-            <a:off x="5803392" y="2569464"/>
+            <a:off x="4370832" y="2569464"/>
             <a:ext cx="1828800" cy="201168"/>
           </a:xfrm>
           <a:prstGeom prst="rect">
@@ -26228,6 +27703,118 @@
         </p:nvSpPr>
         <p:spPr>
           <a:xfrm>
+            <a:off x="6519672" y="2258568"/>
+            <a:ext cx="1828800" cy="292608"/>
+          </a:xfrm>
+          <a:prstGeom prst="rect">
+            <a:avLst>
+              <a:gd name="adj" fmla="val 25000"/>
+            </a:avLst>
+          </a:prstGeom>
+          <a:solidFill>
+            <a:srgbClr val="FCE7F3"/>
+          </a:solidFill>
+          <a:ln w="19050">
+            <a:solidFill>
+              <a:srgbClr val="DB2777"/>
+            </a:solidFill>
+            <a:prstDash val="solid"/>
+          </a:ln>
+          <a:effectLst>
+            <a:outerShdw sx="100000" sy="100000" kx="0" ky="0" algn="bl" rotWithShape="0" blurRad="101600" dist="38100" dir="8100000">
+              <a:srgbClr val="000000">
+                <a:alpha val="12000"/>
+              </a:srgbClr>
+            </a:outerShdw>
+          </a:effectLst>
+        </p:spPr>
+      </p:sp>
+      <p:sp>
+        <p:nvSpPr>
+          <p:cNvPr id="23" name="Text 21"/>
+          <p:cNvSpPr/>
+          <p:nvPr/>
+        </p:nvSpPr>
+        <p:spPr>
+          <a:xfrm>
+            <a:off x="6519672" y="2258568"/>
+            <a:ext cx="1828800" cy="292608"/>
+          </a:xfrm>
+          <a:prstGeom prst="rect">
+            <a:avLst/>
+          </a:prstGeom>
+          <a:noFill/>
+          <a:ln/>
+        </p:spPr>
+        <p:txBody>
+          <a:bodyPr wrap="square" lIns="0" tIns="0" rIns="0" bIns="0" rtlCol="0" anchor="ctr"/>
+          <a:lstStyle/>
+          <a:p>
+            <a:pPr algn="ctr" indent="0" marL="0">
+              <a:buNone/>
+            </a:pPr>
+            <a:r>
+              <a:rPr lang="en-US" sz="1300" b="1" dirty="0">
+                <a:solidFill>
+                  <a:srgbClr val="9D174D"/>
+                </a:solidFill>
+                <a:latin typeface="Trebuchet MS" pitchFamily="34" charset="0"/>
+                <a:ea typeface="Trebuchet MS" pitchFamily="34" charset="-122"/>
+                <a:cs typeface="Trebuchet MS" pitchFamily="34" charset="-120"/>
+              </a:rPr>
+              <a:t>ed</a:t>
+            </a:r>
+            <a:endParaRPr lang="en-US" sz="1300" dirty="0"/>
+          </a:p>
+        </p:txBody>
+      </p:sp>
+      <p:sp>
+        <p:nvSpPr>
+          <p:cNvPr id="24" name="Text 22"/>
+          <p:cNvSpPr/>
+          <p:nvPr/>
+        </p:nvSpPr>
+        <p:spPr>
+          <a:xfrm>
+            <a:off x="6519672" y="2569464"/>
+            <a:ext cx="1828800" cy="201168"/>
+          </a:xfrm>
+          <a:prstGeom prst="rect">
+            <a:avLst/>
+          </a:prstGeom>
+          <a:noFill/>
+          <a:ln/>
+        </p:spPr>
+        <p:txBody>
+          <a:bodyPr wrap="square" lIns="0" tIns="0" rIns="0" bIns="0" rtlCol="0" anchor="t"/>
+          <a:lstStyle/>
+          <a:p>
+            <a:pPr algn="ctr" indent="0" marL="0">
+              <a:buNone/>
+            </a:pPr>
+            <a:r>
+              <a:rPr lang="en-US" sz="850" dirty="0">
+                <a:solidFill>
+                  <a:srgbClr val="475569"/>
+                </a:solidFill>
+                <a:latin typeface="Calibri" pitchFamily="34" charset="0"/>
+                <a:ea typeface="Calibri" pitchFamily="34" charset="-122"/>
+                <a:cs typeface="Calibri" pitchFamily="34" charset="-120"/>
+              </a:rPr>
+              <a:t>past tense</a:t>
+            </a:r>
+            <a:endParaRPr lang="en-US" sz="850" dirty="0"/>
+          </a:p>
+        </p:txBody>
+      </p:sp>
+      <p:sp>
+        <p:nvSpPr>
+          <p:cNvPr id="25" name="Shape 23"/>
+          <p:cNvSpPr/>
+          <p:nvPr/>
+        </p:nvSpPr>
+        <p:spPr>
+          <a:xfrm>
             <a:off x="365760" y="3273552"/>
             <a:ext cx="1371600" cy="658368"/>
           </a:xfrm>
@@ -26249,7 +27836,7 @@
       </p:sp>
       <p:sp>
         <p:nvSpPr>
-          <p:cNvPr id="23" name="Text 21"/>
+          <p:cNvPr id="26" name="Text 24"/>
           <p:cNvSpPr/>
           <p:nvPr/>
         </p:nvSpPr>
@@ -26288,7 +27875,7 @@
       </p:sp>
       <p:sp>
         <p:nvSpPr>
-          <p:cNvPr id="24" name="Shape 22"/>
+          <p:cNvPr id="27" name="Shape 25"/>
           <p:cNvSpPr/>
           <p:nvPr/>
         </p:nvSpPr>
@@ -26315,13 +27902,13 @@
       </p:sp>
       <p:sp>
         <p:nvSpPr>
-          <p:cNvPr id="25" name="Shape 23"/>
-          <p:cNvSpPr/>
-          <p:nvPr/>
-        </p:nvSpPr>
-        <p:spPr>
-          <a:xfrm>
-            <a:off x="2999232" y="3364992"/>
+          <p:cNvPr id="28" name="Shape 26"/>
+          <p:cNvSpPr/>
+          <p:nvPr/>
+        </p:nvSpPr>
+        <p:spPr>
+          <a:xfrm>
+            <a:off x="2313432" y="3364992"/>
             <a:ext cx="1645920" cy="475488"/>
           </a:xfrm>
           <a:prstGeom prst="rect">
@@ -26342,13 +27929,13 @@
       </p:sp>
       <p:sp>
         <p:nvSpPr>
-          <p:cNvPr id="26" name="Text 24"/>
-          <p:cNvSpPr/>
-          <p:nvPr/>
-        </p:nvSpPr>
-        <p:spPr>
-          <a:xfrm>
-            <a:off x="2999232" y="3364992"/>
+          <p:cNvPr id="29" name="Text 27"/>
+          <p:cNvSpPr/>
+          <p:nvPr/>
+        </p:nvSpPr>
+        <p:spPr>
+          <a:xfrm>
+            <a:off x="2313432" y="3364992"/>
             <a:ext cx="1645920" cy="475488"/>
           </a:xfrm>
           <a:prstGeom prst="rect">
@@ -26373,7 +27960,7 @@
                 <a:ea typeface="Trebuchet MS" pitchFamily="34" charset="-122"/>
                 <a:cs typeface="Trebuchet MS" pitchFamily="34" charset="-120"/>
               </a:rPr>
-              <a:t>in</a:t>
+              <a:t>o</a:t>
             </a:r>
             <a:endParaRPr lang="en-US" sz="1400" dirty="0"/>
           </a:p>
@@ -26381,14 +27968,14 @@
       </p:sp>
       <p:sp>
         <p:nvSpPr>
-          <p:cNvPr id="27" name="Text 25"/>
-          <p:cNvSpPr/>
-          <p:nvPr/>
-        </p:nvSpPr>
-        <p:spPr>
-          <a:xfrm>
-            <a:off x="4645152" y="3364992"/>
-            <a:ext cx="1097280" cy="475488"/>
+          <p:cNvPr id="30" name="Text 28"/>
+          <p:cNvSpPr/>
+          <p:nvPr/>
+        </p:nvSpPr>
+        <p:spPr>
+          <a:xfrm>
+            <a:off x="3959352" y="3364992"/>
+            <a:ext cx="411480" cy="475488"/>
           </a:xfrm>
           <a:prstGeom prst="rect">
             <a:avLst/>
@@ -26420,13 +28007,13 @@
       </p:sp>
       <p:sp>
         <p:nvSpPr>
-          <p:cNvPr id="28" name="Shape 26"/>
-          <p:cNvSpPr/>
-          <p:nvPr/>
-        </p:nvSpPr>
-        <p:spPr>
-          <a:xfrm>
-            <a:off x="5742432" y="3364992"/>
+          <p:cNvPr id="31" name="Shape 29"/>
+          <p:cNvSpPr/>
+          <p:nvPr/>
+        </p:nvSpPr>
+        <p:spPr>
+          <a:xfrm>
+            <a:off x="4370832" y="3364992"/>
             <a:ext cx="1645920" cy="475488"/>
           </a:xfrm>
           <a:prstGeom prst="rect">
@@ -26447,13 +28034,13 @@
       </p:sp>
       <p:sp>
         <p:nvSpPr>
-          <p:cNvPr id="29" name="Text 27"/>
-          <p:cNvSpPr/>
-          <p:nvPr/>
-        </p:nvSpPr>
-        <p:spPr>
-          <a:xfrm>
-            <a:off x="5742432" y="3364992"/>
+          <p:cNvPr id="32" name="Text 30"/>
+          <p:cNvSpPr/>
+          <p:nvPr/>
+        </p:nvSpPr>
+        <p:spPr>
+          <a:xfrm>
+            <a:off x="4370832" y="3364992"/>
             <a:ext cx="1645920" cy="475488"/>
           </a:xfrm>
           <a:prstGeom prst="rect">
@@ -26478,7 +28065,7 @@
                 <a:ea typeface="Trebuchet MS" pitchFamily="34" charset="-122"/>
                 <a:cs typeface="Trebuchet MS" pitchFamily="34" charset="-120"/>
               </a:rPr>
-              <a:t>fill</a:t>
+              <a:t>ver</a:t>
             </a:r>
             <a:endParaRPr lang="en-US" sz="1400" dirty="0"/>
           </a:p>
@@ -26486,7 +28073,112 @@
       </p:sp>
       <p:sp>
         <p:nvSpPr>
-          <p:cNvPr id="30" name="Shape 28"/>
+          <p:cNvPr id="33" name="Text 31"/>
+          <p:cNvSpPr/>
+          <p:nvPr/>
+        </p:nvSpPr>
+        <p:spPr>
+          <a:xfrm>
+            <a:off x="6016752" y="3364992"/>
+            <a:ext cx="411480" cy="475488"/>
+          </a:xfrm>
+          <a:prstGeom prst="rect">
+            <a:avLst/>
+          </a:prstGeom>
+          <a:noFill/>
+          <a:ln/>
+        </p:spPr>
+        <p:txBody>
+          <a:bodyPr wrap="square" lIns="0" tIns="0" rIns="0" bIns="0" rtlCol="0" anchor="ctr"/>
+          <a:lstStyle/>
+          <a:p>
+            <a:pPr algn="ctr" indent="0" marL="0">
+              <a:buNone/>
+            </a:pPr>
+            <a:r>
+              <a:rPr lang="en-US" sz="1600" b="1" dirty="0">
+                <a:solidFill>
+                  <a:srgbClr val="0D9488"/>
+                </a:solidFill>
+                <a:latin typeface="Trebuchet MS" pitchFamily="34" charset="0"/>
+                <a:ea typeface="Trebuchet MS" pitchFamily="34" charset="-122"/>
+                <a:cs typeface="Trebuchet MS" pitchFamily="34" charset="-120"/>
+              </a:rPr>
+              <a:t>·</a:t>
+            </a:r>
+            <a:endParaRPr lang="en-US" sz="1600" dirty="0"/>
+          </a:p>
+        </p:txBody>
+      </p:sp>
+      <p:sp>
+        <p:nvSpPr>
+          <p:cNvPr id="34" name="Shape 32"/>
+          <p:cNvSpPr/>
+          <p:nvPr/>
+        </p:nvSpPr>
+        <p:spPr>
+          <a:xfrm>
+            <a:off x="6428232" y="3364992"/>
+            <a:ext cx="1645920" cy="475488"/>
+          </a:xfrm>
+          <a:prstGeom prst="rect">
+            <a:avLst>
+              <a:gd name="adj" fmla="val 9615"/>
+            </a:avLst>
+          </a:prstGeom>
+          <a:solidFill>
+            <a:srgbClr val="FFFFFF"/>
+          </a:solidFill>
+          <a:ln w="12700">
+            <a:solidFill>
+              <a:srgbClr val="0D9488"/>
+            </a:solidFill>
+            <a:prstDash val="solid"/>
+          </a:ln>
+        </p:spPr>
+      </p:sp>
+      <p:sp>
+        <p:nvSpPr>
+          <p:cNvPr id="35" name="Text 33"/>
+          <p:cNvSpPr/>
+          <p:nvPr/>
+        </p:nvSpPr>
+        <p:spPr>
+          <a:xfrm>
+            <a:off x="6428232" y="3364992"/>
+            <a:ext cx="1645920" cy="475488"/>
+          </a:xfrm>
+          <a:prstGeom prst="rect">
+            <a:avLst/>
+          </a:prstGeom>
+          <a:noFill/>
+          <a:ln/>
+        </p:spPr>
+        <p:txBody>
+          <a:bodyPr wrap="square" lIns="0" tIns="0" rIns="0" bIns="0" rtlCol="0" anchor="ctr"/>
+          <a:lstStyle/>
+          <a:p>
+            <a:pPr algn="ctr" indent="0" marL="0">
+              <a:buNone/>
+            </a:pPr>
+            <a:r>
+              <a:rPr lang="en-US" sz="1400" b="1" dirty="0">
+                <a:solidFill>
+                  <a:srgbClr val="0D9488"/>
+                </a:solidFill>
+                <a:latin typeface="Trebuchet MS" pitchFamily="34" charset="0"/>
+                <a:ea typeface="Trebuchet MS" pitchFamily="34" charset="-122"/>
+                <a:cs typeface="Trebuchet MS" pitchFamily="34" charset="-120"/>
+              </a:rPr>
+              <a:t>filled</a:t>
+            </a:r>
+            <a:endParaRPr lang="en-US" sz="1400" dirty="0"/>
+          </a:p>
+        </p:txBody>
+      </p:sp>
+      <p:sp>
+        <p:nvSpPr>
+          <p:cNvPr id="36" name="Shape 34"/>
           <p:cNvSpPr/>
           <p:nvPr/>
         </p:nvSpPr>
@@ -26513,7 +28205,7 @@
       </p:sp>
       <p:sp>
         <p:nvSpPr>
-          <p:cNvPr id="31" name="Text 29"/>
+          <p:cNvPr id="37" name="Text 35"/>
           <p:cNvSpPr/>
           <p:nvPr/>
         </p:nvSpPr>
@@ -26552,7 +28244,7 @@
       </p:sp>
       <p:sp>
         <p:nvSpPr>
-          <p:cNvPr id="32" name="Shape 30"/>
+          <p:cNvPr id="38" name="Shape 36"/>
           <p:cNvSpPr/>
           <p:nvPr/>
         </p:nvSpPr>
@@ -26579,13 +28271,13 @@
       </p:sp>
       <p:sp>
         <p:nvSpPr>
-          <p:cNvPr id="33" name="Shape 31"/>
-          <p:cNvSpPr/>
-          <p:nvPr/>
-        </p:nvSpPr>
-        <p:spPr>
-          <a:xfrm>
-            <a:off x="2427732" y="4169664"/>
+          <p:cNvPr id="39" name="Shape 37"/>
+          <p:cNvSpPr/>
+          <p:nvPr/>
+        </p:nvSpPr>
+        <p:spPr>
+          <a:xfrm>
+            <a:off x="2124837" y="4169664"/>
             <a:ext cx="685800" cy="475488"/>
           </a:xfrm>
           <a:prstGeom prst="rect">
@@ -26606,13 +28298,13 @@
       </p:sp>
       <p:sp>
         <p:nvSpPr>
-          <p:cNvPr id="34" name="Text 32"/>
-          <p:cNvSpPr/>
-          <p:nvPr/>
-        </p:nvSpPr>
-        <p:spPr>
-          <a:xfrm>
-            <a:off x="2427732" y="4169664"/>
+          <p:cNvPr id="40" name="Text 38"/>
+          <p:cNvSpPr/>
+          <p:nvPr/>
+        </p:nvSpPr>
+        <p:spPr>
+          <a:xfrm>
+            <a:off x="2124837" y="4169664"/>
             <a:ext cx="685800" cy="475488"/>
           </a:xfrm>
           <a:prstGeom prst="rect">
@@ -26637,7 +28329,7 @@
                 <a:ea typeface="Trebuchet MS" pitchFamily="34" charset="-122"/>
                 <a:cs typeface="Trebuchet MS" pitchFamily="34" charset="-120"/>
               </a:rPr>
-              <a:t>i</a:t>
+              <a:t>o</a:t>
             </a:r>
             <a:endParaRPr lang="en-US" sz="900" dirty="0"/>
           </a:p>
@@ -26645,13 +28337,13 @@
       </p:sp>
       <p:sp>
         <p:nvSpPr>
-          <p:cNvPr id="35" name="Shape 33"/>
-          <p:cNvSpPr/>
-          <p:nvPr/>
-        </p:nvSpPr>
-        <p:spPr>
-          <a:xfrm>
-            <a:off x="3639312" y="4169664"/>
+          <p:cNvPr id="41" name="Shape 39"/>
+          <p:cNvSpPr/>
+          <p:nvPr/>
+        </p:nvSpPr>
+        <p:spPr>
+          <a:xfrm>
+            <a:off x="3033522" y="4169664"/>
             <a:ext cx="685800" cy="475488"/>
           </a:xfrm>
           <a:prstGeom prst="rect">
@@ -26672,13 +28364,13 @@
       </p:sp>
       <p:sp>
         <p:nvSpPr>
-          <p:cNvPr id="36" name="Text 34"/>
-          <p:cNvSpPr/>
-          <p:nvPr/>
-        </p:nvSpPr>
-        <p:spPr>
-          <a:xfrm>
-            <a:off x="3639312" y="4169664"/>
+          <p:cNvPr id="42" name="Text 40"/>
+          <p:cNvSpPr/>
+          <p:nvPr/>
+        </p:nvSpPr>
+        <p:spPr>
+          <a:xfrm>
+            <a:off x="3033522" y="4169664"/>
             <a:ext cx="685800" cy="475488"/>
           </a:xfrm>
           <a:prstGeom prst="rect">
@@ -26703,7 +28395,7 @@
                 <a:ea typeface="Trebuchet MS" pitchFamily="34" charset="-122"/>
                 <a:cs typeface="Trebuchet MS" pitchFamily="34" charset="-120"/>
               </a:rPr>
-              <a:t>n</a:t>
+              <a:t>v</a:t>
             </a:r>
             <a:endParaRPr lang="en-US" sz="900" dirty="0"/>
           </a:p>
@@ -26711,13 +28403,13 @@
       </p:sp>
       <p:sp>
         <p:nvSpPr>
-          <p:cNvPr id="37" name="Shape 35"/>
-          <p:cNvSpPr/>
-          <p:nvPr/>
-        </p:nvSpPr>
-        <p:spPr>
-          <a:xfrm>
-            <a:off x="4850892" y="4169664"/>
+          <p:cNvPr id="43" name="Shape 41"/>
+          <p:cNvSpPr/>
+          <p:nvPr/>
+        </p:nvSpPr>
+        <p:spPr>
+          <a:xfrm>
+            <a:off x="3942207" y="4169664"/>
             <a:ext cx="685800" cy="475488"/>
           </a:xfrm>
           <a:prstGeom prst="rect">
@@ -26738,13 +28430,13 @@
       </p:sp>
       <p:sp>
         <p:nvSpPr>
-          <p:cNvPr id="38" name="Text 36"/>
-          <p:cNvSpPr/>
-          <p:nvPr/>
-        </p:nvSpPr>
-        <p:spPr>
-          <a:xfrm>
-            <a:off x="4850892" y="4169664"/>
+          <p:cNvPr id="44" name="Text 42"/>
+          <p:cNvSpPr/>
+          <p:nvPr/>
+        </p:nvSpPr>
+        <p:spPr>
+          <a:xfrm>
+            <a:off x="3942207" y="4169664"/>
             <a:ext cx="685800" cy="475488"/>
           </a:xfrm>
           <a:prstGeom prst="rect">
@@ -26769,7 +28461,7 @@
                 <a:ea typeface="Trebuchet MS" pitchFamily="34" charset="-122"/>
                 <a:cs typeface="Trebuchet MS" pitchFamily="34" charset="-120"/>
               </a:rPr>
-              <a:t>f</a:t>
+              <a:t>er</a:t>
             </a:r>
             <a:endParaRPr lang="en-US" sz="900" dirty="0"/>
           </a:p>
@@ -26777,13 +28469,13 @@
       </p:sp>
       <p:sp>
         <p:nvSpPr>
-          <p:cNvPr id="39" name="Shape 37"/>
-          <p:cNvSpPr/>
-          <p:nvPr/>
-        </p:nvSpPr>
-        <p:spPr>
-          <a:xfrm>
-            <a:off x="6062472" y="4169664"/>
+          <p:cNvPr id="45" name="Shape 43"/>
+          <p:cNvSpPr/>
+          <p:nvPr/>
+        </p:nvSpPr>
+        <p:spPr>
+          <a:xfrm>
+            <a:off x="4850892" y="4169664"/>
             <a:ext cx="685800" cy="475488"/>
           </a:xfrm>
           <a:prstGeom prst="rect">
@@ -26804,13 +28496,13 @@
       </p:sp>
       <p:sp>
         <p:nvSpPr>
-          <p:cNvPr id="40" name="Text 38"/>
-          <p:cNvSpPr/>
-          <p:nvPr/>
-        </p:nvSpPr>
-        <p:spPr>
-          <a:xfrm>
-            <a:off x="6062472" y="4169664"/>
+          <p:cNvPr id="46" name="Text 44"/>
+          <p:cNvSpPr/>
+          <p:nvPr/>
+        </p:nvSpPr>
+        <p:spPr>
+          <a:xfrm>
+            <a:off x="4850892" y="4169664"/>
             <a:ext cx="685800" cy="475488"/>
           </a:xfrm>
           <a:prstGeom prst="rect">
@@ -26835,7 +28527,7 @@
                 <a:ea typeface="Trebuchet MS" pitchFamily="34" charset="-122"/>
                 <a:cs typeface="Trebuchet MS" pitchFamily="34" charset="-120"/>
               </a:rPr>
-              <a:t>i</a:t>
+              <a:t>f</a:t>
             </a:r>
             <a:endParaRPr lang="en-US" sz="900" dirty="0"/>
           </a:p>
@@ -26843,13 +28535,13 @@
       </p:sp>
       <p:sp>
         <p:nvSpPr>
-          <p:cNvPr id="41" name="Shape 39"/>
-          <p:cNvSpPr/>
-          <p:nvPr/>
-        </p:nvSpPr>
-        <p:spPr>
-          <a:xfrm>
-            <a:off x="7274052" y="4169664"/>
+          <p:cNvPr id="47" name="Shape 45"/>
+          <p:cNvSpPr/>
+          <p:nvPr/>
+        </p:nvSpPr>
+        <p:spPr>
+          <a:xfrm>
+            <a:off x="5759577" y="4169664"/>
             <a:ext cx="685800" cy="475488"/>
           </a:xfrm>
           <a:prstGeom prst="rect">
@@ -26870,13 +28562,13 @@
       </p:sp>
       <p:sp>
         <p:nvSpPr>
-          <p:cNvPr id="42" name="Text 40"/>
-          <p:cNvSpPr/>
-          <p:nvPr/>
-        </p:nvSpPr>
-        <p:spPr>
-          <a:xfrm>
-            <a:off x="7274052" y="4169664"/>
+          <p:cNvPr id="48" name="Text 46"/>
+          <p:cNvSpPr/>
+          <p:nvPr/>
+        </p:nvSpPr>
+        <p:spPr>
+          <a:xfrm>
+            <a:off x="5759577" y="4169664"/>
             <a:ext cx="685800" cy="475488"/>
           </a:xfrm>
           <a:prstGeom prst="rect">
@@ -26901,7 +28593,139 @@
                 <a:ea typeface="Trebuchet MS" pitchFamily="34" charset="-122"/>
                 <a:cs typeface="Trebuchet MS" pitchFamily="34" charset="-120"/>
               </a:rPr>
+              <a:t>i</a:t>
+            </a:r>
+            <a:endParaRPr lang="en-US" sz="900" dirty="0"/>
+          </a:p>
+        </p:txBody>
+      </p:sp>
+      <p:sp>
+        <p:nvSpPr>
+          <p:cNvPr id="49" name="Shape 47"/>
+          <p:cNvSpPr/>
+          <p:nvPr/>
+        </p:nvSpPr>
+        <p:spPr>
+          <a:xfrm>
+            <a:off x="6668262" y="4169664"/>
+            <a:ext cx="685800" cy="475488"/>
+          </a:xfrm>
+          <a:prstGeom prst="rect">
+            <a:avLst>
+              <a:gd name="adj" fmla="val 7692"/>
+            </a:avLst>
+          </a:prstGeom>
+          <a:solidFill>
+            <a:srgbClr val="FFFFFF"/>
+          </a:solidFill>
+          <a:ln w="12700">
+            <a:solidFill>
+              <a:srgbClr val="DB2777"/>
+            </a:solidFill>
+            <a:prstDash val="solid"/>
+          </a:ln>
+        </p:spPr>
+      </p:sp>
+      <p:sp>
+        <p:nvSpPr>
+          <p:cNvPr id="50" name="Text 48"/>
+          <p:cNvSpPr/>
+          <p:nvPr/>
+        </p:nvSpPr>
+        <p:spPr>
+          <a:xfrm>
+            <a:off x="6668262" y="4169664"/>
+            <a:ext cx="685800" cy="475488"/>
+          </a:xfrm>
+          <a:prstGeom prst="rect">
+            <a:avLst/>
+          </a:prstGeom>
+          <a:noFill/>
+          <a:ln/>
+        </p:spPr>
+        <p:txBody>
+          <a:bodyPr wrap="square" lIns="0" tIns="0" rIns="0" bIns="0" rtlCol="0" anchor="ctr"/>
+          <a:lstStyle/>
+          <a:p>
+            <a:pPr algn="ctr" indent="0" marL="0">
+              <a:buNone/>
+            </a:pPr>
+            <a:r>
+              <a:rPr lang="en-US" sz="900" b="1" dirty="0">
+                <a:solidFill>
+                  <a:srgbClr val="9D174D"/>
+                </a:solidFill>
+                <a:latin typeface="Trebuchet MS" pitchFamily="34" charset="0"/>
+                <a:ea typeface="Trebuchet MS" pitchFamily="34" charset="-122"/>
+                <a:cs typeface="Trebuchet MS" pitchFamily="34" charset="-120"/>
+              </a:rPr>
               <a:t>ll</a:t>
+            </a:r>
+            <a:endParaRPr lang="en-US" sz="900" dirty="0"/>
+          </a:p>
+        </p:txBody>
+      </p:sp>
+      <p:sp>
+        <p:nvSpPr>
+          <p:cNvPr id="51" name="Shape 49"/>
+          <p:cNvSpPr/>
+          <p:nvPr/>
+        </p:nvSpPr>
+        <p:spPr>
+          <a:xfrm>
+            <a:off x="7576947" y="4169664"/>
+            <a:ext cx="685800" cy="475488"/>
+          </a:xfrm>
+          <a:prstGeom prst="rect">
+            <a:avLst>
+              <a:gd name="adj" fmla="val 7692"/>
+            </a:avLst>
+          </a:prstGeom>
+          <a:solidFill>
+            <a:srgbClr val="FFFFFF"/>
+          </a:solidFill>
+          <a:ln w="12700">
+            <a:solidFill>
+              <a:srgbClr val="DB2777"/>
+            </a:solidFill>
+            <a:prstDash val="solid"/>
+          </a:ln>
+        </p:spPr>
+      </p:sp>
+      <p:sp>
+        <p:nvSpPr>
+          <p:cNvPr id="52" name="Text 50"/>
+          <p:cNvSpPr/>
+          <p:nvPr/>
+        </p:nvSpPr>
+        <p:spPr>
+          <a:xfrm>
+            <a:off x="7576947" y="4169664"/>
+            <a:ext cx="685800" cy="475488"/>
+          </a:xfrm>
+          <a:prstGeom prst="rect">
+            <a:avLst/>
+          </a:prstGeom>
+          <a:noFill/>
+          <a:ln/>
+        </p:spPr>
+        <p:txBody>
+          <a:bodyPr wrap="square" lIns="0" tIns="0" rIns="0" bIns="0" rtlCol="0" anchor="ctr"/>
+          <a:lstStyle/>
+          <a:p>
+            <a:pPr algn="ctr" indent="0" marL="0">
+              <a:buNone/>
+            </a:pPr>
+            <a:r>
+              <a:rPr lang="en-US" sz="900" b="1" dirty="0">
+                <a:solidFill>
+                  <a:srgbClr val="9D174D"/>
+                </a:solidFill>
+                <a:latin typeface="Trebuchet MS" pitchFamily="34" charset="0"/>
+                <a:ea typeface="Trebuchet MS" pitchFamily="34" charset="-122"/>
+                <a:cs typeface="Trebuchet MS" pitchFamily="34" charset="-120"/>
+              </a:rPr>
+              <a:t>ed</a:t>
             </a:r>
             <a:endParaRPr lang="en-US" sz="900" dirty="0"/>
           </a:p>
@@ -27193,7 +29017,7 @@
                 <a:ea typeface="Calibri" pitchFamily="34" charset="-122"/>
                 <a:cs typeface="Calibri" pitchFamily="34" charset="-120"/>
               </a:rPr>
-              <a:t>Word Labs  •  wordlabs.app  •  Root: 'fill' = to make full, occupy</a:t>
+              <a:t>Word Labs  •  wordlabs.app  •  Root: 'fill' = to make full</a:t>
             </a:r>
             <a:endParaRPr lang="en-US" sz="800" dirty="0"/>
           </a:p>
@@ -27332,7 +29156,7 @@
                 <a:ea typeface="Trebuchet MS" pitchFamily="34" charset="-122"/>
                 <a:cs typeface="Trebuchet MS" pitchFamily="34" charset="-120"/>
               </a:rPr>
-              <a:t>underfill</a:t>
+              <a:t>overfilling</a:t>
             </a:r>
             <a:endParaRPr lang="en-US" sz="2800" dirty="0"/>
           </a:p>
@@ -28020,7 +29844,7 @@
                 <a:ea typeface="Calibri" pitchFamily="34" charset="-122"/>
                 <a:cs typeface="Calibri" pitchFamily="34" charset="-120"/>
               </a:rPr>
-              <a:t>Word Labs  •  wordlabs.app  •  Root: 'fill' = to make full, occupy</a:t>
+              <a:t>Word Labs  •  wordlabs.app  •  Root: 'fill' = to make full</a:t>
             </a:r>
             <a:endParaRPr lang="en-US" sz="800" dirty="0"/>
           </a:p>
@@ -28159,7 +29983,7 @@
                 <a:ea typeface="Trebuchet MS" pitchFamily="34" charset="-122"/>
                 <a:cs typeface="Trebuchet MS" pitchFamily="34" charset="-120"/>
               </a:rPr>
-              <a:t>underfill</a:t>
+              <a:t>overfilling</a:t>
             </a:r>
             <a:endParaRPr lang="en-US" sz="2800" dirty="0"/>
           </a:p>
@@ -28239,7 +30063,7 @@
         </p:nvSpPr>
         <p:spPr>
           <a:xfrm>
-            <a:off x="2938272" y="2258568"/>
+            <a:off x="2221992" y="2258568"/>
             <a:ext cx="1828800" cy="292608"/>
           </a:xfrm>
           <a:prstGeom prst="rect">
@@ -28273,7 +30097,7 @@
         </p:nvSpPr>
         <p:spPr>
           <a:xfrm>
-            <a:off x="2938272" y="2258568"/>
+            <a:off x="2221992" y="2258568"/>
             <a:ext cx="1828800" cy="292608"/>
           </a:xfrm>
           <a:prstGeom prst="rect">
@@ -28298,7 +30122,7 @@
                 <a:ea typeface="Trebuchet MS" pitchFamily="34" charset="-122"/>
                 <a:cs typeface="Trebuchet MS" pitchFamily="34" charset="-120"/>
               </a:rPr>
-              <a:t>under</a:t>
+              <a:t>over</a:t>
             </a:r>
             <a:endParaRPr lang="en-US" sz="1300" dirty="0"/>
           </a:p>
@@ -28312,7 +30136,7 @@
         </p:nvSpPr>
         <p:spPr>
           <a:xfrm>
-            <a:off x="2938272" y="2569464"/>
+            <a:off x="2221992" y="2569464"/>
             <a:ext cx="1828800" cy="201168"/>
           </a:xfrm>
           <a:prstGeom prst="rect">
@@ -28337,7 +30161,7 @@
                 <a:ea typeface="Calibri" pitchFamily="34" charset="-122"/>
                 <a:cs typeface="Calibri" pitchFamily="34" charset="-120"/>
               </a:rPr>
-              <a:t>below, not enough</a:t>
+              <a:t>too much</a:t>
             </a:r>
             <a:endParaRPr lang="en-US" sz="850" dirty="0"/>
           </a:p>
@@ -28351,7 +30175,7 @@
         </p:nvSpPr>
         <p:spPr>
           <a:xfrm>
-            <a:off x="5803392" y="2258568"/>
+            <a:off x="4370832" y="2258568"/>
             <a:ext cx="1828800" cy="292608"/>
           </a:xfrm>
           <a:prstGeom prst="rect">
@@ -28385,7 +30209,7 @@
         </p:nvSpPr>
         <p:spPr>
           <a:xfrm>
-            <a:off x="5803392" y="2258568"/>
+            <a:off x="4370832" y="2258568"/>
             <a:ext cx="1828800" cy="292608"/>
           </a:xfrm>
           <a:prstGeom prst="rect">
@@ -28424,7 +30248,7 @@
         </p:nvSpPr>
         <p:spPr>
           <a:xfrm>
-            <a:off x="5803392" y="2569464"/>
+            <a:off x="4370832" y="2569464"/>
             <a:ext cx="1828800" cy="201168"/>
           </a:xfrm>
           <a:prstGeom prst="rect">
@@ -28463,6 +30287,118 @@
         </p:nvSpPr>
         <p:spPr>
           <a:xfrm>
+            <a:off x="6519672" y="2258568"/>
+            <a:ext cx="1828800" cy="292608"/>
+          </a:xfrm>
+          <a:prstGeom prst="rect">
+            <a:avLst>
+              <a:gd name="adj" fmla="val 25000"/>
+            </a:avLst>
+          </a:prstGeom>
+          <a:solidFill>
+            <a:srgbClr val="FCE7F3"/>
+          </a:solidFill>
+          <a:ln w="19050">
+            <a:solidFill>
+              <a:srgbClr val="DB2777"/>
+            </a:solidFill>
+            <a:prstDash val="solid"/>
+          </a:ln>
+          <a:effectLst>
+            <a:outerShdw sx="100000" sy="100000" kx="0" ky="0" algn="bl" rotWithShape="0" blurRad="101600" dist="38100" dir="8100000">
+              <a:srgbClr val="000000">
+                <a:alpha val="12000"/>
+              </a:srgbClr>
+            </a:outerShdw>
+          </a:effectLst>
+        </p:spPr>
+      </p:sp>
+      <p:sp>
+        <p:nvSpPr>
+          <p:cNvPr id="23" name="Text 21"/>
+          <p:cNvSpPr/>
+          <p:nvPr/>
+        </p:nvSpPr>
+        <p:spPr>
+          <a:xfrm>
+            <a:off x="6519672" y="2258568"/>
+            <a:ext cx="1828800" cy="292608"/>
+          </a:xfrm>
+          <a:prstGeom prst="rect">
+            <a:avLst/>
+          </a:prstGeom>
+          <a:noFill/>
+          <a:ln/>
+        </p:spPr>
+        <p:txBody>
+          <a:bodyPr wrap="square" lIns="0" tIns="0" rIns="0" bIns="0" rtlCol="0" anchor="ctr"/>
+          <a:lstStyle/>
+          <a:p>
+            <a:pPr algn="ctr" indent="0" marL="0">
+              <a:buNone/>
+            </a:pPr>
+            <a:r>
+              <a:rPr lang="en-US" sz="1300" b="1" dirty="0">
+                <a:solidFill>
+                  <a:srgbClr val="9D174D"/>
+                </a:solidFill>
+                <a:latin typeface="Trebuchet MS" pitchFamily="34" charset="0"/>
+                <a:ea typeface="Trebuchet MS" pitchFamily="34" charset="-122"/>
+                <a:cs typeface="Trebuchet MS" pitchFamily="34" charset="-120"/>
+              </a:rPr>
+              <a:t>ing</a:t>
+            </a:r>
+            <a:endParaRPr lang="en-US" sz="1300" dirty="0"/>
+          </a:p>
+        </p:txBody>
+      </p:sp>
+      <p:sp>
+        <p:nvSpPr>
+          <p:cNvPr id="24" name="Text 22"/>
+          <p:cNvSpPr/>
+          <p:nvPr/>
+        </p:nvSpPr>
+        <p:spPr>
+          <a:xfrm>
+            <a:off x="6519672" y="2569464"/>
+            <a:ext cx="1828800" cy="201168"/>
+          </a:xfrm>
+          <a:prstGeom prst="rect">
+            <a:avLst/>
+          </a:prstGeom>
+          <a:noFill/>
+          <a:ln/>
+        </p:spPr>
+        <p:txBody>
+          <a:bodyPr wrap="square" lIns="0" tIns="0" rIns="0" bIns="0" rtlCol="0" anchor="t"/>
+          <a:lstStyle/>
+          <a:p>
+            <a:pPr algn="ctr" indent="0" marL="0">
+              <a:buNone/>
+            </a:pPr>
+            <a:r>
+              <a:rPr lang="en-US" sz="850" dirty="0">
+                <a:solidFill>
+                  <a:srgbClr val="475569"/>
+                </a:solidFill>
+                <a:latin typeface="Calibri" pitchFamily="34" charset="0"/>
+                <a:ea typeface="Calibri" pitchFamily="34" charset="-122"/>
+                <a:cs typeface="Calibri" pitchFamily="34" charset="-120"/>
+              </a:rPr>
+              <a:t>happening now</a:t>
+            </a:r>
+            <a:endParaRPr lang="en-US" sz="850" dirty="0"/>
+          </a:p>
+        </p:txBody>
+      </p:sp>
+      <p:sp>
+        <p:nvSpPr>
+          <p:cNvPr id="25" name="Shape 23"/>
+          <p:cNvSpPr/>
+          <p:nvPr/>
+        </p:nvSpPr>
+        <p:spPr>
+          <a:xfrm>
             <a:off x="365760" y="3273552"/>
             <a:ext cx="1371600" cy="658368"/>
           </a:xfrm>
@@ -28484,7 +30420,7 @@
       </p:sp>
       <p:sp>
         <p:nvSpPr>
-          <p:cNvPr id="23" name="Text 21"/>
+          <p:cNvPr id="26" name="Text 24"/>
           <p:cNvSpPr/>
           <p:nvPr/>
         </p:nvSpPr>
@@ -28523,7 +30459,7 @@
       </p:sp>
       <p:sp>
         <p:nvSpPr>
-          <p:cNvPr id="24" name="Shape 22"/>
+          <p:cNvPr id="27" name="Shape 25"/>
           <p:cNvSpPr/>
           <p:nvPr/>
         </p:nvSpPr>
@@ -28550,7 +30486,7 @@
       </p:sp>
       <p:sp>
         <p:nvSpPr>
-          <p:cNvPr id="25" name="Text 23"/>
+          <p:cNvPr id="28" name="Text 26"/>
           <p:cNvSpPr/>
           <p:nvPr/>
         </p:nvSpPr>
@@ -28589,7 +30525,7 @@
       </p:sp>
       <p:sp>
         <p:nvSpPr>
-          <p:cNvPr id="26" name="Shape 24"/>
+          <p:cNvPr id="29" name="Shape 27"/>
           <p:cNvSpPr/>
           <p:nvPr/>
         </p:nvSpPr>
@@ -28616,7 +30552,7 @@
       </p:sp>
       <p:sp>
         <p:nvSpPr>
-          <p:cNvPr id="27" name="Text 25"/>
+          <p:cNvPr id="30" name="Text 28"/>
           <p:cNvSpPr/>
           <p:nvPr/>
         </p:nvSpPr>
@@ -28655,7 +30591,7 @@
       </p:sp>
       <p:sp>
         <p:nvSpPr>
-          <p:cNvPr id="28" name="Shape 26"/>
+          <p:cNvPr id="31" name="Shape 29"/>
           <p:cNvSpPr/>
           <p:nvPr/>
         </p:nvSpPr>
@@ -28682,7 +30618,7 @@
       </p:sp>
       <p:sp>
         <p:nvSpPr>
-          <p:cNvPr id="29" name="Text 27"/>
+          <p:cNvPr id="32" name="Text 30"/>
           <p:cNvSpPr/>
           <p:nvPr/>
         </p:nvSpPr>
@@ -29005,7 +30941,7 @@
                 <a:ea typeface="Calibri" pitchFamily="34" charset="-122"/>
                 <a:cs typeface="Calibri" pitchFamily="34" charset="-120"/>
               </a:rPr>
-              <a:t>Word Labs  •  wordlabs.app  •  Root: 'fill' = to make full, occupy</a:t>
+              <a:t>Word Labs  •  wordlabs.app  •  Root: 'fill' = to make full</a:t>
             </a:r>
             <a:endParaRPr lang="en-US" sz="800" dirty="0"/>
           </a:p>
@@ -29144,7 +31080,7 @@
                 <a:ea typeface="Trebuchet MS" pitchFamily="34" charset="-122"/>
                 <a:cs typeface="Trebuchet MS" pitchFamily="34" charset="-120"/>
               </a:rPr>
-              <a:t>underfill</a:t>
+              <a:t>overfilling</a:t>
             </a:r>
             <a:endParaRPr lang="en-US" sz="2800" dirty="0"/>
           </a:p>
@@ -29224,7 +31160,7 @@
         </p:nvSpPr>
         <p:spPr>
           <a:xfrm>
-            <a:off x="2938272" y="2258568"/>
+            <a:off x="2221992" y="2258568"/>
             <a:ext cx="1828800" cy="292608"/>
           </a:xfrm>
           <a:prstGeom prst="rect">
@@ -29258,7 +31194,7 @@
         </p:nvSpPr>
         <p:spPr>
           <a:xfrm>
-            <a:off x="2938272" y="2258568"/>
+            <a:off x="2221992" y="2258568"/>
             <a:ext cx="1828800" cy="292608"/>
           </a:xfrm>
           <a:prstGeom prst="rect">
@@ -29283,7 +31219,7 @@
                 <a:ea typeface="Trebuchet MS" pitchFamily="34" charset="-122"/>
                 <a:cs typeface="Trebuchet MS" pitchFamily="34" charset="-120"/>
               </a:rPr>
-              <a:t>under</a:t>
+              <a:t>over</a:t>
             </a:r>
             <a:endParaRPr lang="en-US" sz="1300" dirty="0"/>
           </a:p>
@@ -29297,7 +31233,7 @@
         </p:nvSpPr>
         <p:spPr>
           <a:xfrm>
-            <a:off x="2938272" y="2569464"/>
+            <a:off x="2221992" y="2569464"/>
             <a:ext cx="1828800" cy="201168"/>
           </a:xfrm>
           <a:prstGeom prst="rect">
@@ -29322,7 +31258,7 @@
                 <a:ea typeface="Calibri" pitchFamily="34" charset="-122"/>
                 <a:cs typeface="Calibri" pitchFamily="34" charset="-120"/>
               </a:rPr>
-              <a:t>below, not enough</a:t>
+              <a:t>too much</a:t>
             </a:r>
             <a:endParaRPr lang="en-US" sz="850" dirty="0"/>
           </a:p>
@@ -29336,7 +31272,7 @@
         </p:nvSpPr>
         <p:spPr>
           <a:xfrm>
-            <a:off x="5803392" y="2258568"/>
+            <a:off x="4370832" y="2258568"/>
             <a:ext cx="1828800" cy="292608"/>
           </a:xfrm>
           <a:prstGeom prst="rect">
@@ -29370,7 +31306,7 @@
         </p:nvSpPr>
         <p:spPr>
           <a:xfrm>
-            <a:off x="5803392" y="2258568"/>
+            <a:off x="4370832" y="2258568"/>
             <a:ext cx="1828800" cy="292608"/>
           </a:xfrm>
           <a:prstGeom prst="rect">
@@ -29409,7 +31345,7 @@
         </p:nvSpPr>
         <p:spPr>
           <a:xfrm>
-            <a:off x="5803392" y="2569464"/>
+            <a:off x="4370832" y="2569464"/>
             <a:ext cx="1828800" cy="201168"/>
           </a:xfrm>
           <a:prstGeom prst="rect">
@@ -29448,6 +31384,118 @@
         </p:nvSpPr>
         <p:spPr>
           <a:xfrm>
+            <a:off x="6519672" y="2258568"/>
+            <a:ext cx="1828800" cy="292608"/>
+          </a:xfrm>
+          <a:prstGeom prst="rect">
+            <a:avLst>
+              <a:gd name="adj" fmla="val 25000"/>
+            </a:avLst>
+          </a:prstGeom>
+          <a:solidFill>
+            <a:srgbClr val="FCE7F3"/>
+          </a:solidFill>
+          <a:ln w="19050">
+            <a:solidFill>
+              <a:srgbClr val="DB2777"/>
+            </a:solidFill>
+            <a:prstDash val="solid"/>
+          </a:ln>
+          <a:effectLst>
+            <a:outerShdw sx="100000" sy="100000" kx="0" ky="0" algn="bl" rotWithShape="0" blurRad="101600" dist="38100" dir="8100000">
+              <a:srgbClr val="000000">
+                <a:alpha val="12000"/>
+              </a:srgbClr>
+            </a:outerShdw>
+          </a:effectLst>
+        </p:spPr>
+      </p:sp>
+      <p:sp>
+        <p:nvSpPr>
+          <p:cNvPr id="23" name="Text 21"/>
+          <p:cNvSpPr/>
+          <p:nvPr/>
+        </p:nvSpPr>
+        <p:spPr>
+          <a:xfrm>
+            <a:off x="6519672" y="2258568"/>
+            <a:ext cx="1828800" cy="292608"/>
+          </a:xfrm>
+          <a:prstGeom prst="rect">
+            <a:avLst/>
+          </a:prstGeom>
+          <a:noFill/>
+          <a:ln/>
+        </p:spPr>
+        <p:txBody>
+          <a:bodyPr wrap="square" lIns="0" tIns="0" rIns="0" bIns="0" rtlCol="0" anchor="ctr"/>
+          <a:lstStyle/>
+          <a:p>
+            <a:pPr algn="ctr" indent="0" marL="0">
+              <a:buNone/>
+            </a:pPr>
+            <a:r>
+              <a:rPr lang="en-US" sz="1300" b="1" dirty="0">
+                <a:solidFill>
+                  <a:srgbClr val="9D174D"/>
+                </a:solidFill>
+                <a:latin typeface="Trebuchet MS" pitchFamily="34" charset="0"/>
+                <a:ea typeface="Trebuchet MS" pitchFamily="34" charset="-122"/>
+                <a:cs typeface="Trebuchet MS" pitchFamily="34" charset="-120"/>
+              </a:rPr>
+              <a:t>ing</a:t>
+            </a:r>
+            <a:endParaRPr lang="en-US" sz="1300" dirty="0"/>
+          </a:p>
+        </p:txBody>
+      </p:sp>
+      <p:sp>
+        <p:nvSpPr>
+          <p:cNvPr id="24" name="Text 22"/>
+          <p:cNvSpPr/>
+          <p:nvPr/>
+        </p:nvSpPr>
+        <p:spPr>
+          <a:xfrm>
+            <a:off x="6519672" y="2569464"/>
+            <a:ext cx="1828800" cy="201168"/>
+          </a:xfrm>
+          <a:prstGeom prst="rect">
+            <a:avLst/>
+          </a:prstGeom>
+          <a:noFill/>
+          <a:ln/>
+        </p:spPr>
+        <p:txBody>
+          <a:bodyPr wrap="square" lIns="0" tIns="0" rIns="0" bIns="0" rtlCol="0" anchor="t"/>
+          <a:lstStyle/>
+          <a:p>
+            <a:pPr algn="ctr" indent="0" marL="0">
+              <a:buNone/>
+            </a:pPr>
+            <a:r>
+              <a:rPr lang="en-US" sz="850" dirty="0">
+                <a:solidFill>
+                  <a:srgbClr val="475569"/>
+                </a:solidFill>
+                <a:latin typeface="Calibri" pitchFamily="34" charset="0"/>
+                <a:ea typeface="Calibri" pitchFamily="34" charset="-122"/>
+                <a:cs typeface="Calibri" pitchFamily="34" charset="-120"/>
+              </a:rPr>
+              <a:t>happening now</a:t>
+            </a:r>
+            <a:endParaRPr lang="en-US" sz="850" dirty="0"/>
+          </a:p>
+        </p:txBody>
+      </p:sp>
+      <p:sp>
+        <p:nvSpPr>
+          <p:cNvPr id="25" name="Shape 23"/>
+          <p:cNvSpPr/>
+          <p:nvPr/>
+        </p:nvSpPr>
+        <p:spPr>
+          <a:xfrm>
             <a:off x="365760" y="3273552"/>
             <a:ext cx="1371600" cy="658368"/>
           </a:xfrm>
@@ -29469,7 +31517,7 @@
       </p:sp>
       <p:sp>
         <p:nvSpPr>
-          <p:cNvPr id="23" name="Text 21"/>
+          <p:cNvPr id="26" name="Text 24"/>
           <p:cNvSpPr/>
           <p:nvPr/>
         </p:nvSpPr>
@@ -29508,7 +31556,7 @@
       </p:sp>
       <p:sp>
         <p:nvSpPr>
-          <p:cNvPr id="24" name="Shape 22"/>
+          <p:cNvPr id="27" name="Shape 25"/>
           <p:cNvSpPr/>
           <p:nvPr/>
         </p:nvSpPr>
@@ -29535,14 +31583,14 @@
       </p:sp>
       <p:sp>
         <p:nvSpPr>
-          <p:cNvPr id="25" name="Shape 23"/>
-          <p:cNvSpPr/>
-          <p:nvPr/>
-        </p:nvSpPr>
-        <p:spPr>
-          <a:xfrm>
-            <a:off x="2313432" y="3364992"/>
-            <a:ext cx="1645920" cy="475488"/>
+          <p:cNvPr id="28" name="Shape 26"/>
+          <p:cNvSpPr/>
+          <p:nvPr/>
+        </p:nvSpPr>
+        <p:spPr>
+          <a:xfrm>
+            <a:off x="1975104" y="3364992"/>
+            <a:ext cx="1554480" cy="475488"/>
           </a:xfrm>
           <a:prstGeom prst="rect">
             <a:avLst>
@@ -29562,14 +31610,14 @@
       </p:sp>
       <p:sp>
         <p:nvSpPr>
-          <p:cNvPr id="26" name="Text 24"/>
-          <p:cNvSpPr/>
-          <p:nvPr/>
-        </p:nvSpPr>
-        <p:spPr>
-          <a:xfrm>
-            <a:off x="2313432" y="3364992"/>
-            <a:ext cx="1645920" cy="475488"/>
+          <p:cNvPr id="29" name="Text 27"/>
+          <p:cNvSpPr/>
+          <p:nvPr/>
+        </p:nvSpPr>
+        <p:spPr>
+          <a:xfrm>
+            <a:off x="1975104" y="3364992"/>
+            <a:ext cx="1554480" cy="475488"/>
           </a:xfrm>
           <a:prstGeom prst="rect">
             <a:avLst/>
@@ -29593,7 +31641,7 @@
                 <a:ea typeface="Trebuchet MS" pitchFamily="34" charset="-122"/>
                 <a:cs typeface="Trebuchet MS" pitchFamily="34" charset="-120"/>
               </a:rPr>
-              <a:t>un</a:t>
+              <a:t>o</a:t>
             </a:r>
             <a:endParaRPr lang="en-US" sz="1400" dirty="0"/>
           </a:p>
@@ -29601,14 +31649,14 @@
       </p:sp>
       <p:sp>
         <p:nvSpPr>
-          <p:cNvPr id="27" name="Text 25"/>
-          <p:cNvSpPr/>
-          <p:nvPr/>
-        </p:nvSpPr>
-        <p:spPr>
-          <a:xfrm>
-            <a:off x="3959352" y="3364992"/>
-            <a:ext cx="411480" cy="475488"/>
+          <p:cNvPr id="30" name="Text 28"/>
+          <p:cNvSpPr/>
+          <p:nvPr/>
+        </p:nvSpPr>
+        <p:spPr>
+          <a:xfrm>
+            <a:off x="3529584" y="3364992"/>
+            <a:ext cx="73152" cy="475488"/>
           </a:xfrm>
           <a:prstGeom prst="rect">
             <a:avLst/>
@@ -29640,14 +31688,14 @@
       </p:sp>
       <p:sp>
         <p:nvSpPr>
-          <p:cNvPr id="28" name="Shape 26"/>
-          <p:cNvSpPr/>
-          <p:nvPr/>
-        </p:nvSpPr>
-        <p:spPr>
-          <a:xfrm>
-            <a:off x="4370832" y="3364992"/>
-            <a:ext cx="1645920" cy="475488"/>
+          <p:cNvPr id="31" name="Shape 29"/>
+          <p:cNvSpPr/>
+          <p:nvPr/>
+        </p:nvSpPr>
+        <p:spPr>
+          <a:xfrm>
+            <a:off x="3602736" y="3364992"/>
+            <a:ext cx="1554480" cy="475488"/>
           </a:xfrm>
           <a:prstGeom prst="rect">
             <a:avLst>
@@ -29667,14 +31715,14 @@
       </p:sp>
       <p:sp>
         <p:nvSpPr>
-          <p:cNvPr id="29" name="Text 27"/>
-          <p:cNvSpPr/>
-          <p:nvPr/>
-        </p:nvSpPr>
-        <p:spPr>
-          <a:xfrm>
-            <a:off x="4370832" y="3364992"/>
-            <a:ext cx="1645920" cy="475488"/>
+          <p:cNvPr id="32" name="Text 30"/>
+          <p:cNvSpPr/>
+          <p:nvPr/>
+        </p:nvSpPr>
+        <p:spPr>
+          <a:xfrm>
+            <a:off x="3602736" y="3364992"/>
+            <a:ext cx="1554480" cy="475488"/>
           </a:xfrm>
           <a:prstGeom prst="rect">
             <a:avLst/>
@@ -29698,7 +31746,7 @@
                 <a:ea typeface="Trebuchet MS" pitchFamily="34" charset="-122"/>
                 <a:cs typeface="Trebuchet MS" pitchFamily="34" charset="-120"/>
               </a:rPr>
-              <a:t>der</a:t>
+              <a:t>ver</a:t>
             </a:r>
             <a:endParaRPr lang="en-US" sz="1400" dirty="0"/>
           </a:p>
@@ -29706,14 +31754,14 @@
       </p:sp>
       <p:sp>
         <p:nvSpPr>
-          <p:cNvPr id="30" name="Text 28"/>
-          <p:cNvSpPr/>
-          <p:nvPr/>
-        </p:nvSpPr>
-        <p:spPr>
-          <a:xfrm>
-            <a:off x="6016752" y="3364992"/>
-            <a:ext cx="411480" cy="475488"/>
+          <p:cNvPr id="33" name="Text 31"/>
+          <p:cNvSpPr/>
+          <p:nvPr/>
+        </p:nvSpPr>
+        <p:spPr>
+          <a:xfrm>
+            <a:off x="5157216" y="3364992"/>
+            <a:ext cx="73152" cy="475488"/>
           </a:xfrm>
           <a:prstGeom prst="rect">
             <a:avLst/>
@@ -29745,14 +31793,14 @@
       </p:sp>
       <p:sp>
         <p:nvSpPr>
-          <p:cNvPr id="31" name="Shape 29"/>
-          <p:cNvSpPr/>
-          <p:nvPr/>
-        </p:nvSpPr>
-        <p:spPr>
-          <a:xfrm>
-            <a:off x="6428232" y="3364992"/>
-            <a:ext cx="1645920" cy="475488"/>
+          <p:cNvPr id="34" name="Shape 32"/>
+          <p:cNvSpPr/>
+          <p:nvPr/>
+        </p:nvSpPr>
+        <p:spPr>
+          <a:xfrm>
+            <a:off x="5230368" y="3364992"/>
+            <a:ext cx="1554480" cy="475488"/>
           </a:xfrm>
           <a:prstGeom prst="rect">
             <a:avLst>
@@ -29772,14 +31820,14 @@
       </p:sp>
       <p:sp>
         <p:nvSpPr>
-          <p:cNvPr id="32" name="Text 30"/>
-          <p:cNvSpPr/>
-          <p:nvPr/>
-        </p:nvSpPr>
-        <p:spPr>
-          <a:xfrm>
-            <a:off x="6428232" y="3364992"/>
-            <a:ext cx="1645920" cy="475488"/>
+          <p:cNvPr id="35" name="Text 33"/>
+          <p:cNvSpPr/>
+          <p:nvPr/>
+        </p:nvSpPr>
+        <p:spPr>
+          <a:xfrm>
+            <a:off x="5230368" y="3364992"/>
+            <a:ext cx="1554480" cy="475488"/>
           </a:xfrm>
           <a:prstGeom prst="rect">
             <a:avLst/>
@@ -29811,7 +31859,112 @@
       </p:sp>
       <p:sp>
         <p:nvSpPr>
-          <p:cNvPr id="33" name="Shape 31"/>
+          <p:cNvPr id="36" name="Text 34"/>
+          <p:cNvSpPr/>
+          <p:nvPr/>
+        </p:nvSpPr>
+        <p:spPr>
+          <a:xfrm>
+            <a:off x="6784848" y="3364992"/>
+            <a:ext cx="73152" cy="475488"/>
+          </a:xfrm>
+          <a:prstGeom prst="rect">
+            <a:avLst/>
+          </a:prstGeom>
+          <a:noFill/>
+          <a:ln/>
+        </p:spPr>
+        <p:txBody>
+          <a:bodyPr wrap="square" lIns="0" tIns="0" rIns="0" bIns="0" rtlCol="0" anchor="ctr"/>
+          <a:lstStyle/>
+          <a:p>
+            <a:pPr algn="ctr" indent="0" marL="0">
+              <a:buNone/>
+            </a:pPr>
+            <a:r>
+              <a:rPr lang="en-US" sz="1600" b="1" dirty="0">
+                <a:solidFill>
+                  <a:srgbClr val="0D9488"/>
+                </a:solidFill>
+                <a:latin typeface="Trebuchet MS" pitchFamily="34" charset="0"/>
+                <a:ea typeface="Trebuchet MS" pitchFamily="34" charset="-122"/>
+                <a:cs typeface="Trebuchet MS" pitchFamily="34" charset="-120"/>
+              </a:rPr>
+              <a:t>·</a:t>
+            </a:r>
+            <a:endParaRPr lang="en-US" sz="1600" dirty="0"/>
+          </a:p>
+        </p:txBody>
+      </p:sp>
+      <p:sp>
+        <p:nvSpPr>
+          <p:cNvPr id="37" name="Shape 35"/>
+          <p:cNvSpPr/>
+          <p:nvPr/>
+        </p:nvSpPr>
+        <p:spPr>
+          <a:xfrm>
+            <a:off x="6858000" y="3364992"/>
+            <a:ext cx="1554480" cy="475488"/>
+          </a:xfrm>
+          <a:prstGeom prst="rect">
+            <a:avLst>
+              <a:gd name="adj" fmla="val 9615"/>
+            </a:avLst>
+          </a:prstGeom>
+          <a:solidFill>
+            <a:srgbClr val="FFFFFF"/>
+          </a:solidFill>
+          <a:ln w="12700">
+            <a:solidFill>
+              <a:srgbClr val="0D9488"/>
+            </a:solidFill>
+            <a:prstDash val="solid"/>
+          </a:ln>
+        </p:spPr>
+      </p:sp>
+      <p:sp>
+        <p:nvSpPr>
+          <p:cNvPr id="38" name="Text 36"/>
+          <p:cNvSpPr/>
+          <p:nvPr/>
+        </p:nvSpPr>
+        <p:spPr>
+          <a:xfrm>
+            <a:off x="6858000" y="3364992"/>
+            <a:ext cx="1554480" cy="475488"/>
+          </a:xfrm>
+          <a:prstGeom prst="rect">
+            <a:avLst/>
+          </a:prstGeom>
+          <a:noFill/>
+          <a:ln/>
+        </p:spPr>
+        <p:txBody>
+          <a:bodyPr wrap="square" lIns="0" tIns="0" rIns="0" bIns="0" rtlCol="0" anchor="ctr"/>
+          <a:lstStyle/>
+          <a:p>
+            <a:pPr algn="ctr" indent="0" marL="0">
+              <a:buNone/>
+            </a:pPr>
+            <a:r>
+              <a:rPr lang="en-US" sz="1400" b="1" dirty="0">
+                <a:solidFill>
+                  <a:srgbClr val="0D9488"/>
+                </a:solidFill>
+                <a:latin typeface="Trebuchet MS" pitchFamily="34" charset="0"/>
+                <a:ea typeface="Trebuchet MS" pitchFamily="34" charset="-122"/>
+                <a:cs typeface="Trebuchet MS" pitchFamily="34" charset="-120"/>
+              </a:rPr>
+              <a:t>ing</a:t>
+            </a:r>
+            <a:endParaRPr lang="en-US" sz="1400" dirty="0"/>
+          </a:p>
+        </p:txBody>
+      </p:sp>
+      <p:sp>
+        <p:nvSpPr>
+          <p:cNvPr id="39" name="Shape 37"/>
           <p:cNvSpPr/>
           <p:nvPr/>
         </p:nvSpPr>
@@ -29838,7 +31991,7 @@
       </p:sp>
       <p:sp>
         <p:nvSpPr>
-          <p:cNvPr id="34" name="Text 32"/>
+          <p:cNvPr id="40" name="Text 38"/>
           <p:cNvSpPr/>
           <p:nvPr/>
         </p:nvSpPr>
@@ -29877,7 +32030,7 @@
       </p:sp>
       <p:sp>
         <p:nvSpPr>
-          <p:cNvPr id="35" name="Shape 33"/>
+          <p:cNvPr id="41" name="Shape 39"/>
           <p:cNvSpPr/>
           <p:nvPr/>
         </p:nvSpPr>
@@ -29904,7 +32057,7 @@
       </p:sp>
       <p:sp>
         <p:nvSpPr>
-          <p:cNvPr id="36" name="Text 34"/>
+          <p:cNvPr id="42" name="Text 40"/>
           <p:cNvSpPr/>
           <p:nvPr/>
         </p:nvSpPr>
@@ -30227,7 +32380,7 @@
                 <a:ea typeface="Calibri" pitchFamily="34" charset="-122"/>
                 <a:cs typeface="Calibri" pitchFamily="34" charset="-120"/>
               </a:rPr>
-              <a:t>Word Labs  •  wordlabs.app  •  Root: 'fill' = to make full, occupy</a:t>
+              <a:t>Word Labs  •  wordlabs.app  •  Root: 'fill' = to make full</a:t>
             </a:r>
             <a:endParaRPr lang="en-US" sz="800" dirty="0"/>
           </a:p>
@@ -30366,7 +32519,7 @@
                 <a:ea typeface="Trebuchet MS" pitchFamily="34" charset="-122"/>
                 <a:cs typeface="Trebuchet MS" pitchFamily="34" charset="-120"/>
               </a:rPr>
-              <a:t>underfill</a:t>
+              <a:t>overfilling</a:t>
             </a:r>
             <a:endParaRPr lang="en-US" sz="2800" dirty="0"/>
           </a:p>
@@ -30446,7 +32599,7 @@
         </p:nvSpPr>
         <p:spPr>
           <a:xfrm>
-            <a:off x="2938272" y="2258568"/>
+            <a:off x="2221992" y="2258568"/>
             <a:ext cx="1828800" cy="292608"/>
           </a:xfrm>
           <a:prstGeom prst="rect">
@@ -30480,7 +32633,7 @@
         </p:nvSpPr>
         <p:spPr>
           <a:xfrm>
-            <a:off x="2938272" y="2258568"/>
+            <a:off x="2221992" y="2258568"/>
             <a:ext cx="1828800" cy="292608"/>
           </a:xfrm>
           <a:prstGeom prst="rect">
@@ -30505,7 +32658,7 @@
                 <a:ea typeface="Trebuchet MS" pitchFamily="34" charset="-122"/>
                 <a:cs typeface="Trebuchet MS" pitchFamily="34" charset="-120"/>
               </a:rPr>
-              <a:t>under</a:t>
+              <a:t>over</a:t>
             </a:r>
             <a:endParaRPr lang="en-US" sz="1300" dirty="0"/>
           </a:p>
@@ -30519,7 +32672,7 @@
         </p:nvSpPr>
         <p:spPr>
           <a:xfrm>
-            <a:off x="2938272" y="2569464"/>
+            <a:off x="2221992" y="2569464"/>
             <a:ext cx="1828800" cy="201168"/>
           </a:xfrm>
           <a:prstGeom prst="rect">
@@ -30544,7 +32697,7 @@
                 <a:ea typeface="Calibri" pitchFamily="34" charset="-122"/>
                 <a:cs typeface="Calibri" pitchFamily="34" charset="-120"/>
               </a:rPr>
-              <a:t>below, not enough</a:t>
+              <a:t>too much</a:t>
             </a:r>
             <a:endParaRPr lang="en-US" sz="850" dirty="0"/>
           </a:p>
@@ -30558,7 +32711,7 @@
         </p:nvSpPr>
         <p:spPr>
           <a:xfrm>
-            <a:off x="5803392" y="2258568"/>
+            <a:off x="4370832" y="2258568"/>
             <a:ext cx="1828800" cy="292608"/>
           </a:xfrm>
           <a:prstGeom prst="rect">
@@ -30592,7 +32745,7 @@
         </p:nvSpPr>
         <p:spPr>
           <a:xfrm>
-            <a:off x="5803392" y="2258568"/>
+            <a:off x="4370832" y="2258568"/>
             <a:ext cx="1828800" cy="292608"/>
           </a:xfrm>
           <a:prstGeom prst="rect">
@@ -30631,7 +32784,7 @@
         </p:nvSpPr>
         <p:spPr>
           <a:xfrm>
-            <a:off x="5803392" y="2569464"/>
+            <a:off x="4370832" y="2569464"/>
             <a:ext cx="1828800" cy="201168"/>
           </a:xfrm>
           <a:prstGeom prst="rect">
@@ -30670,6 +32823,118 @@
         </p:nvSpPr>
         <p:spPr>
           <a:xfrm>
+            <a:off x="6519672" y="2258568"/>
+            <a:ext cx="1828800" cy="292608"/>
+          </a:xfrm>
+          <a:prstGeom prst="rect">
+            <a:avLst>
+              <a:gd name="adj" fmla="val 25000"/>
+            </a:avLst>
+          </a:prstGeom>
+          <a:solidFill>
+            <a:srgbClr val="FCE7F3"/>
+          </a:solidFill>
+          <a:ln w="19050">
+            <a:solidFill>
+              <a:srgbClr val="DB2777"/>
+            </a:solidFill>
+            <a:prstDash val="solid"/>
+          </a:ln>
+          <a:effectLst>
+            <a:outerShdw sx="100000" sy="100000" kx="0" ky="0" algn="bl" rotWithShape="0" blurRad="101600" dist="38100" dir="8100000">
+              <a:srgbClr val="000000">
+                <a:alpha val="12000"/>
+              </a:srgbClr>
+            </a:outerShdw>
+          </a:effectLst>
+        </p:spPr>
+      </p:sp>
+      <p:sp>
+        <p:nvSpPr>
+          <p:cNvPr id="23" name="Text 21"/>
+          <p:cNvSpPr/>
+          <p:nvPr/>
+        </p:nvSpPr>
+        <p:spPr>
+          <a:xfrm>
+            <a:off x="6519672" y="2258568"/>
+            <a:ext cx="1828800" cy="292608"/>
+          </a:xfrm>
+          <a:prstGeom prst="rect">
+            <a:avLst/>
+          </a:prstGeom>
+          <a:noFill/>
+          <a:ln/>
+        </p:spPr>
+        <p:txBody>
+          <a:bodyPr wrap="square" lIns="0" tIns="0" rIns="0" bIns="0" rtlCol="0" anchor="ctr"/>
+          <a:lstStyle/>
+          <a:p>
+            <a:pPr algn="ctr" indent="0" marL="0">
+              <a:buNone/>
+            </a:pPr>
+            <a:r>
+              <a:rPr lang="en-US" sz="1300" b="1" dirty="0">
+                <a:solidFill>
+                  <a:srgbClr val="9D174D"/>
+                </a:solidFill>
+                <a:latin typeface="Trebuchet MS" pitchFamily="34" charset="0"/>
+                <a:ea typeface="Trebuchet MS" pitchFamily="34" charset="-122"/>
+                <a:cs typeface="Trebuchet MS" pitchFamily="34" charset="-120"/>
+              </a:rPr>
+              <a:t>ing</a:t>
+            </a:r>
+            <a:endParaRPr lang="en-US" sz="1300" dirty="0"/>
+          </a:p>
+        </p:txBody>
+      </p:sp>
+      <p:sp>
+        <p:nvSpPr>
+          <p:cNvPr id="24" name="Text 22"/>
+          <p:cNvSpPr/>
+          <p:nvPr/>
+        </p:nvSpPr>
+        <p:spPr>
+          <a:xfrm>
+            <a:off x="6519672" y="2569464"/>
+            <a:ext cx="1828800" cy="201168"/>
+          </a:xfrm>
+          <a:prstGeom prst="rect">
+            <a:avLst/>
+          </a:prstGeom>
+          <a:noFill/>
+          <a:ln/>
+        </p:spPr>
+        <p:txBody>
+          <a:bodyPr wrap="square" lIns="0" tIns="0" rIns="0" bIns="0" rtlCol="0" anchor="t"/>
+          <a:lstStyle/>
+          <a:p>
+            <a:pPr algn="ctr" indent="0" marL="0">
+              <a:buNone/>
+            </a:pPr>
+            <a:r>
+              <a:rPr lang="en-US" sz="850" dirty="0">
+                <a:solidFill>
+                  <a:srgbClr val="475569"/>
+                </a:solidFill>
+                <a:latin typeface="Calibri" pitchFamily="34" charset="0"/>
+                <a:ea typeface="Calibri" pitchFamily="34" charset="-122"/>
+                <a:cs typeface="Calibri" pitchFamily="34" charset="-120"/>
+              </a:rPr>
+              <a:t>happening now</a:t>
+            </a:r>
+            <a:endParaRPr lang="en-US" sz="850" dirty="0"/>
+          </a:p>
+        </p:txBody>
+      </p:sp>
+      <p:sp>
+        <p:nvSpPr>
+          <p:cNvPr id="25" name="Shape 23"/>
+          <p:cNvSpPr/>
+          <p:nvPr/>
+        </p:nvSpPr>
+        <p:spPr>
+          <a:xfrm>
             <a:off x="365760" y="3273552"/>
             <a:ext cx="1371600" cy="658368"/>
           </a:xfrm>
@@ -30691,7 +32956,7 @@
       </p:sp>
       <p:sp>
         <p:nvSpPr>
-          <p:cNvPr id="23" name="Text 21"/>
+          <p:cNvPr id="26" name="Text 24"/>
           <p:cNvSpPr/>
           <p:nvPr/>
         </p:nvSpPr>
@@ -30730,7 +32995,7 @@
       </p:sp>
       <p:sp>
         <p:nvSpPr>
-          <p:cNvPr id="24" name="Shape 22"/>
+          <p:cNvPr id="27" name="Shape 25"/>
           <p:cNvSpPr/>
           <p:nvPr/>
         </p:nvSpPr>
@@ -30757,14 +33022,14 @@
       </p:sp>
       <p:sp>
         <p:nvSpPr>
-          <p:cNvPr id="25" name="Shape 23"/>
-          <p:cNvSpPr/>
-          <p:nvPr/>
-        </p:nvSpPr>
-        <p:spPr>
-          <a:xfrm>
-            <a:off x="2313432" y="3364992"/>
-            <a:ext cx="1645920" cy="475488"/>
+          <p:cNvPr id="28" name="Shape 26"/>
+          <p:cNvSpPr/>
+          <p:nvPr/>
+        </p:nvSpPr>
+        <p:spPr>
+          <a:xfrm>
+            <a:off x="1975104" y="3364992"/>
+            <a:ext cx="1554480" cy="475488"/>
           </a:xfrm>
           <a:prstGeom prst="rect">
             <a:avLst>
@@ -30784,14 +33049,14 @@
       </p:sp>
       <p:sp>
         <p:nvSpPr>
-          <p:cNvPr id="26" name="Text 24"/>
-          <p:cNvSpPr/>
-          <p:nvPr/>
-        </p:nvSpPr>
-        <p:spPr>
-          <a:xfrm>
-            <a:off x="2313432" y="3364992"/>
-            <a:ext cx="1645920" cy="475488"/>
+          <p:cNvPr id="29" name="Text 27"/>
+          <p:cNvSpPr/>
+          <p:nvPr/>
+        </p:nvSpPr>
+        <p:spPr>
+          <a:xfrm>
+            <a:off x="1975104" y="3364992"/>
+            <a:ext cx="1554480" cy="475488"/>
           </a:xfrm>
           <a:prstGeom prst="rect">
             <a:avLst/>
@@ -30815,7 +33080,7 @@
                 <a:ea typeface="Trebuchet MS" pitchFamily="34" charset="-122"/>
                 <a:cs typeface="Trebuchet MS" pitchFamily="34" charset="-120"/>
               </a:rPr>
-              <a:t>un</a:t>
+              <a:t>o</a:t>
             </a:r>
             <a:endParaRPr lang="en-US" sz="1400" dirty="0"/>
           </a:p>
@@ -30823,14 +33088,14 @@
       </p:sp>
       <p:sp>
         <p:nvSpPr>
-          <p:cNvPr id="27" name="Text 25"/>
-          <p:cNvSpPr/>
-          <p:nvPr/>
-        </p:nvSpPr>
-        <p:spPr>
-          <a:xfrm>
-            <a:off x="3959352" y="3364992"/>
-            <a:ext cx="411480" cy="475488"/>
+          <p:cNvPr id="30" name="Text 28"/>
+          <p:cNvSpPr/>
+          <p:nvPr/>
+        </p:nvSpPr>
+        <p:spPr>
+          <a:xfrm>
+            <a:off x="3529584" y="3364992"/>
+            <a:ext cx="73152" cy="475488"/>
           </a:xfrm>
           <a:prstGeom prst="rect">
             <a:avLst/>
@@ -30862,14 +33127,14 @@
       </p:sp>
       <p:sp>
         <p:nvSpPr>
-          <p:cNvPr id="28" name="Shape 26"/>
-          <p:cNvSpPr/>
-          <p:nvPr/>
-        </p:nvSpPr>
-        <p:spPr>
-          <a:xfrm>
-            <a:off x="4370832" y="3364992"/>
-            <a:ext cx="1645920" cy="475488"/>
+          <p:cNvPr id="31" name="Shape 29"/>
+          <p:cNvSpPr/>
+          <p:nvPr/>
+        </p:nvSpPr>
+        <p:spPr>
+          <a:xfrm>
+            <a:off x="3602736" y="3364992"/>
+            <a:ext cx="1554480" cy="475488"/>
           </a:xfrm>
           <a:prstGeom prst="rect">
             <a:avLst>
@@ -30889,14 +33154,14 @@
       </p:sp>
       <p:sp>
         <p:nvSpPr>
-          <p:cNvPr id="29" name="Text 27"/>
-          <p:cNvSpPr/>
-          <p:nvPr/>
-        </p:nvSpPr>
-        <p:spPr>
-          <a:xfrm>
-            <a:off x="4370832" y="3364992"/>
-            <a:ext cx="1645920" cy="475488"/>
+          <p:cNvPr id="32" name="Text 30"/>
+          <p:cNvSpPr/>
+          <p:nvPr/>
+        </p:nvSpPr>
+        <p:spPr>
+          <a:xfrm>
+            <a:off x="3602736" y="3364992"/>
+            <a:ext cx="1554480" cy="475488"/>
           </a:xfrm>
           <a:prstGeom prst="rect">
             <a:avLst/>
@@ -30920,7 +33185,7 @@
                 <a:ea typeface="Trebuchet MS" pitchFamily="34" charset="-122"/>
                 <a:cs typeface="Trebuchet MS" pitchFamily="34" charset="-120"/>
               </a:rPr>
-              <a:t>der</a:t>
+              <a:t>ver</a:t>
             </a:r>
             <a:endParaRPr lang="en-US" sz="1400" dirty="0"/>
           </a:p>
@@ -30928,14 +33193,14 @@
       </p:sp>
       <p:sp>
         <p:nvSpPr>
-          <p:cNvPr id="30" name="Text 28"/>
-          <p:cNvSpPr/>
-          <p:nvPr/>
-        </p:nvSpPr>
-        <p:spPr>
-          <a:xfrm>
-            <a:off x="6016752" y="3364992"/>
-            <a:ext cx="411480" cy="475488"/>
+          <p:cNvPr id="33" name="Text 31"/>
+          <p:cNvSpPr/>
+          <p:nvPr/>
+        </p:nvSpPr>
+        <p:spPr>
+          <a:xfrm>
+            <a:off x="5157216" y="3364992"/>
+            <a:ext cx="73152" cy="475488"/>
           </a:xfrm>
           <a:prstGeom prst="rect">
             <a:avLst/>
@@ -30967,14 +33232,14 @@
       </p:sp>
       <p:sp>
         <p:nvSpPr>
-          <p:cNvPr id="31" name="Shape 29"/>
-          <p:cNvSpPr/>
-          <p:nvPr/>
-        </p:nvSpPr>
-        <p:spPr>
-          <a:xfrm>
-            <a:off x="6428232" y="3364992"/>
-            <a:ext cx="1645920" cy="475488"/>
+          <p:cNvPr id="34" name="Shape 32"/>
+          <p:cNvSpPr/>
+          <p:nvPr/>
+        </p:nvSpPr>
+        <p:spPr>
+          <a:xfrm>
+            <a:off x="5230368" y="3364992"/>
+            <a:ext cx="1554480" cy="475488"/>
           </a:xfrm>
           <a:prstGeom prst="rect">
             <a:avLst>
@@ -30994,14 +33259,14 @@
       </p:sp>
       <p:sp>
         <p:nvSpPr>
-          <p:cNvPr id="32" name="Text 30"/>
-          <p:cNvSpPr/>
-          <p:nvPr/>
-        </p:nvSpPr>
-        <p:spPr>
-          <a:xfrm>
-            <a:off x="6428232" y="3364992"/>
-            <a:ext cx="1645920" cy="475488"/>
+          <p:cNvPr id="35" name="Text 33"/>
+          <p:cNvSpPr/>
+          <p:nvPr/>
+        </p:nvSpPr>
+        <p:spPr>
+          <a:xfrm>
+            <a:off x="5230368" y="3364992"/>
+            <a:ext cx="1554480" cy="475488"/>
           </a:xfrm>
           <a:prstGeom prst="rect">
             <a:avLst/>
@@ -31033,7 +33298,112 @@
       </p:sp>
       <p:sp>
         <p:nvSpPr>
-          <p:cNvPr id="33" name="Shape 31"/>
+          <p:cNvPr id="36" name="Text 34"/>
+          <p:cNvSpPr/>
+          <p:nvPr/>
+        </p:nvSpPr>
+        <p:spPr>
+          <a:xfrm>
+            <a:off x="6784848" y="3364992"/>
+            <a:ext cx="73152" cy="475488"/>
+          </a:xfrm>
+          <a:prstGeom prst="rect">
+            <a:avLst/>
+          </a:prstGeom>
+          <a:noFill/>
+          <a:ln/>
+        </p:spPr>
+        <p:txBody>
+          <a:bodyPr wrap="square" lIns="0" tIns="0" rIns="0" bIns="0" rtlCol="0" anchor="ctr"/>
+          <a:lstStyle/>
+          <a:p>
+            <a:pPr algn="ctr" indent="0" marL="0">
+              <a:buNone/>
+            </a:pPr>
+            <a:r>
+              <a:rPr lang="en-US" sz="1600" b="1" dirty="0">
+                <a:solidFill>
+                  <a:srgbClr val="0D9488"/>
+                </a:solidFill>
+                <a:latin typeface="Trebuchet MS" pitchFamily="34" charset="0"/>
+                <a:ea typeface="Trebuchet MS" pitchFamily="34" charset="-122"/>
+                <a:cs typeface="Trebuchet MS" pitchFamily="34" charset="-120"/>
+              </a:rPr>
+              <a:t>·</a:t>
+            </a:r>
+            <a:endParaRPr lang="en-US" sz="1600" dirty="0"/>
+          </a:p>
+        </p:txBody>
+      </p:sp>
+      <p:sp>
+        <p:nvSpPr>
+          <p:cNvPr id="37" name="Shape 35"/>
+          <p:cNvSpPr/>
+          <p:nvPr/>
+        </p:nvSpPr>
+        <p:spPr>
+          <a:xfrm>
+            <a:off x="6858000" y="3364992"/>
+            <a:ext cx="1554480" cy="475488"/>
+          </a:xfrm>
+          <a:prstGeom prst="rect">
+            <a:avLst>
+              <a:gd name="adj" fmla="val 9615"/>
+            </a:avLst>
+          </a:prstGeom>
+          <a:solidFill>
+            <a:srgbClr val="FFFFFF"/>
+          </a:solidFill>
+          <a:ln w="12700">
+            <a:solidFill>
+              <a:srgbClr val="0D9488"/>
+            </a:solidFill>
+            <a:prstDash val="solid"/>
+          </a:ln>
+        </p:spPr>
+      </p:sp>
+      <p:sp>
+        <p:nvSpPr>
+          <p:cNvPr id="38" name="Text 36"/>
+          <p:cNvSpPr/>
+          <p:nvPr/>
+        </p:nvSpPr>
+        <p:spPr>
+          <a:xfrm>
+            <a:off x="6858000" y="3364992"/>
+            <a:ext cx="1554480" cy="475488"/>
+          </a:xfrm>
+          <a:prstGeom prst="rect">
+            <a:avLst/>
+          </a:prstGeom>
+          <a:noFill/>
+          <a:ln/>
+        </p:spPr>
+        <p:txBody>
+          <a:bodyPr wrap="square" lIns="0" tIns="0" rIns="0" bIns="0" rtlCol="0" anchor="ctr"/>
+          <a:lstStyle/>
+          <a:p>
+            <a:pPr algn="ctr" indent="0" marL="0">
+              <a:buNone/>
+            </a:pPr>
+            <a:r>
+              <a:rPr lang="en-US" sz="1400" b="1" dirty="0">
+                <a:solidFill>
+                  <a:srgbClr val="0D9488"/>
+                </a:solidFill>
+                <a:latin typeface="Trebuchet MS" pitchFamily="34" charset="0"/>
+                <a:ea typeface="Trebuchet MS" pitchFamily="34" charset="-122"/>
+                <a:cs typeface="Trebuchet MS" pitchFamily="34" charset="-120"/>
+              </a:rPr>
+              <a:t>ing</a:t>
+            </a:r>
+            <a:endParaRPr lang="en-US" sz="1400" dirty="0"/>
+          </a:p>
+        </p:txBody>
+      </p:sp>
+      <p:sp>
+        <p:nvSpPr>
+          <p:cNvPr id="39" name="Shape 37"/>
           <p:cNvSpPr/>
           <p:nvPr/>
         </p:nvSpPr>
@@ -31060,7 +33430,7 @@
       </p:sp>
       <p:sp>
         <p:nvSpPr>
-          <p:cNvPr id="34" name="Text 32"/>
+          <p:cNvPr id="40" name="Text 38"/>
           <p:cNvSpPr/>
           <p:nvPr/>
         </p:nvSpPr>
@@ -31099,7 +33469,7 @@
       </p:sp>
       <p:sp>
         <p:nvSpPr>
-          <p:cNvPr id="35" name="Shape 33"/>
+          <p:cNvPr id="41" name="Shape 39"/>
           <p:cNvSpPr/>
           <p:nvPr/>
         </p:nvSpPr>
@@ -31126,13 +33496,13 @@
       </p:sp>
       <p:sp>
         <p:nvSpPr>
-          <p:cNvPr id="36" name="Shape 34"/>
-          <p:cNvSpPr/>
-          <p:nvPr/>
-        </p:nvSpPr>
-        <p:spPr>
-          <a:xfrm>
-            <a:off x="2124837" y="4169664"/>
+          <p:cNvPr id="42" name="Shape 40"/>
+          <p:cNvSpPr/>
+          <p:nvPr/>
+        </p:nvSpPr>
+        <p:spPr>
+          <a:xfrm>
+            <a:off x="2023872" y="4169664"/>
             <a:ext cx="685800" cy="475488"/>
           </a:xfrm>
           <a:prstGeom prst="rect">
@@ -31153,13 +33523,13 @@
       </p:sp>
       <p:sp>
         <p:nvSpPr>
-          <p:cNvPr id="37" name="Text 35"/>
-          <p:cNvSpPr/>
-          <p:nvPr/>
-        </p:nvSpPr>
-        <p:spPr>
-          <a:xfrm>
-            <a:off x="2124837" y="4169664"/>
+          <p:cNvPr id="43" name="Text 41"/>
+          <p:cNvSpPr/>
+          <p:nvPr/>
+        </p:nvSpPr>
+        <p:spPr>
+          <a:xfrm>
+            <a:off x="2023872" y="4169664"/>
             <a:ext cx="685800" cy="475488"/>
           </a:xfrm>
           <a:prstGeom prst="rect">
@@ -31184,7 +33554,7 @@
                 <a:ea typeface="Trebuchet MS" pitchFamily="34" charset="-122"/>
                 <a:cs typeface="Trebuchet MS" pitchFamily="34" charset="-120"/>
               </a:rPr>
-              <a:t>u</a:t>
+              <a:t>o</a:t>
             </a:r>
             <a:endParaRPr lang="en-US" sz="900" dirty="0"/>
           </a:p>
@@ -31192,13 +33562,13 @@
       </p:sp>
       <p:sp>
         <p:nvSpPr>
-          <p:cNvPr id="38" name="Shape 36"/>
-          <p:cNvSpPr/>
-          <p:nvPr/>
-        </p:nvSpPr>
-        <p:spPr>
-          <a:xfrm>
-            <a:off x="3033522" y="4169664"/>
+          <p:cNvPr id="44" name="Shape 42"/>
+          <p:cNvSpPr/>
+          <p:nvPr/>
+        </p:nvSpPr>
+        <p:spPr>
+          <a:xfrm>
+            <a:off x="2831592" y="4169664"/>
             <a:ext cx="685800" cy="475488"/>
           </a:xfrm>
           <a:prstGeom prst="rect">
@@ -31219,13 +33589,13 @@
       </p:sp>
       <p:sp>
         <p:nvSpPr>
-          <p:cNvPr id="39" name="Text 37"/>
-          <p:cNvSpPr/>
-          <p:nvPr/>
-        </p:nvSpPr>
-        <p:spPr>
-          <a:xfrm>
-            <a:off x="3033522" y="4169664"/>
+          <p:cNvPr id="45" name="Text 43"/>
+          <p:cNvSpPr/>
+          <p:nvPr/>
+        </p:nvSpPr>
+        <p:spPr>
+          <a:xfrm>
+            <a:off x="2831592" y="4169664"/>
             <a:ext cx="685800" cy="475488"/>
           </a:xfrm>
           <a:prstGeom prst="rect">
@@ -31250,7 +33620,7 @@
                 <a:ea typeface="Trebuchet MS" pitchFamily="34" charset="-122"/>
                 <a:cs typeface="Trebuchet MS" pitchFamily="34" charset="-120"/>
               </a:rPr>
-              <a:t>n</a:t>
+              <a:t>v</a:t>
             </a:r>
             <a:endParaRPr lang="en-US" sz="900" dirty="0"/>
           </a:p>
@@ -31258,13 +33628,13 @@
       </p:sp>
       <p:sp>
         <p:nvSpPr>
-          <p:cNvPr id="40" name="Shape 38"/>
-          <p:cNvSpPr/>
-          <p:nvPr/>
-        </p:nvSpPr>
-        <p:spPr>
-          <a:xfrm>
-            <a:off x="3942207" y="4169664"/>
+          <p:cNvPr id="46" name="Shape 44"/>
+          <p:cNvSpPr/>
+          <p:nvPr/>
+        </p:nvSpPr>
+        <p:spPr>
+          <a:xfrm>
+            <a:off x="3639312" y="4169664"/>
             <a:ext cx="685800" cy="475488"/>
           </a:xfrm>
           <a:prstGeom prst="rect">
@@ -31285,13 +33655,13 @@
       </p:sp>
       <p:sp>
         <p:nvSpPr>
-          <p:cNvPr id="41" name="Text 39"/>
-          <p:cNvSpPr/>
-          <p:nvPr/>
-        </p:nvSpPr>
-        <p:spPr>
-          <a:xfrm>
-            <a:off x="3942207" y="4169664"/>
+          <p:cNvPr id="47" name="Text 45"/>
+          <p:cNvSpPr/>
+          <p:nvPr/>
+        </p:nvSpPr>
+        <p:spPr>
+          <a:xfrm>
+            <a:off x="3639312" y="4169664"/>
             <a:ext cx="685800" cy="475488"/>
           </a:xfrm>
           <a:prstGeom prst="rect">
@@ -31316,7 +33686,7 @@
                 <a:ea typeface="Trebuchet MS" pitchFamily="34" charset="-122"/>
                 <a:cs typeface="Trebuchet MS" pitchFamily="34" charset="-120"/>
               </a:rPr>
-              <a:t>d</a:t>
+              <a:t>er</a:t>
             </a:r>
             <a:endParaRPr lang="en-US" sz="900" dirty="0"/>
           </a:p>
@@ -31324,13 +33694,13 @@
       </p:sp>
       <p:sp>
         <p:nvSpPr>
-          <p:cNvPr id="42" name="Shape 40"/>
-          <p:cNvSpPr/>
-          <p:nvPr/>
-        </p:nvSpPr>
-        <p:spPr>
-          <a:xfrm>
-            <a:off x="4850892" y="4169664"/>
+          <p:cNvPr id="48" name="Shape 46"/>
+          <p:cNvSpPr/>
+          <p:nvPr/>
+        </p:nvSpPr>
+        <p:spPr>
+          <a:xfrm>
+            <a:off x="4447032" y="4169664"/>
             <a:ext cx="685800" cy="475488"/>
           </a:xfrm>
           <a:prstGeom prst="rect">
@@ -31351,13 +33721,13 @@
       </p:sp>
       <p:sp>
         <p:nvSpPr>
-          <p:cNvPr id="43" name="Text 41"/>
-          <p:cNvSpPr/>
-          <p:nvPr/>
-        </p:nvSpPr>
-        <p:spPr>
-          <a:xfrm>
-            <a:off x="4850892" y="4169664"/>
+          <p:cNvPr id="49" name="Text 47"/>
+          <p:cNvSpPr/>
+          <p:nvPr/>
+        </p:nvSpPr>
+        <p:spPr>
+          <a:xfrm>
+            <a:off x="4447032" y="4169664"/>
             <a:ext cx="685800" cy="475488"/>
           </a:xfrm>
           <a:prstGeom prst="rect">
@@ -31382,7 +33752,7 @@
                 <a:ea typeface="Trebuchet MS" pitchFamily="34" charset="-122"/>
                 <a:cs typeface="Trebuchet MS" pitchFamily="34" charset="-120"/>
               </a:rPr>
-              <a:t>er</a:t>
+              <a:t>f</a:t>
             </a:r>
             <a:endParaRPr lang="en-US" sz="900" dirty="0"/>
           </a:p>
@@ -31390,13 +33760,13 @@
       </p:sp>
       <p:sp>
         <p:nvSpPr>
-          <p:cNvPr id="44" name="Shape 42"/>
-          <p:cNvSpPr/>
-          <p:nvPr/>
-        </p:nvSpPr>
-        <p:spPr>
-          <a:xfrm>
-            <a:off x="5759577" y="4169664"/>
+          <p:cNvPr id="50" name="Shape 48"/>
+          <p:cNvSpPr/>
+          <p:nvPr/>
+        </p:nvSpPr>
+        <p:spPr>
+          <a:xfrm>
+            <a:off x="5254752" y="4169664"/>
             <a:ext cx="685800" cy="475488"/>
           </a:xfrm>
           <a:prstGeom prst="rect">
@@ -31417,13 +33787,13 @@
       </p:sp>
       <p:sp>
         <p:nvSpPr>
-          <p:cNvPr id="45" name="Text 43"/>
-          <p:cNvSpPr/>
-          <p:nvPr/>
-        </p:nvSpPr>
-        <p:spPr>
-          <a:xfrm>
-            <a:off x="5759577" y="4169664"/>
+          <p:cNvPr id="51" name="Text 49"/>
+          <p:cNvSpPr/>
+          <p:nvPr/>
+        </p:nvSpPr>
+        <p:spPr>
+          <a:xfrm>
+            <a:off x="5254752" y="4169664"/>
             <a:ext cx="685800" cy="475488"/>
           </a:xfrm>
           <a:prstGeom prst="rect">
@@ -31448,7 +33818,7 @@
                 <a:ea typeface="Trebuchet MS" pitchFamily="34" charset="-122"/>
                 <a:cs typeface="Trebuchet MS" pitchFamily="34" charset="-120"/>
               </a:rPr>
-              <a:t>f</a:t>
+              <a:t>i</a:t>
             </a:r>
             <a:endParaRPr lang="en-US" sz="900" dirty="0"/>
           </a:p>
@@ -31456,13 +33826,13 @@
       </p:sp>
       <p:sp>
         <p:nvSpPr>
-          <p:cNvPr id="46" name="Shape 44"/>
-          <p:cNvSpPr/>
-          <p:nvPr/>
-        </p:nvSpPr>
-        <p:spPr>
-          <a:xfrm>
-            <a:off x="6668262" y="4169664"/>
+          <p:cNvPr id="52" name="Shape 50"/>
+          <p:cNvSpPr/>
+          <p:nvPr/>
+        </p:nvSpPr>
+        <p:spPr>
+          <a:xfrm>
+            <a:off x="6062472" y="4169664"/>
             <a:ext cx="685800" cy="475488"/>
           </a:xfrm>
           <a:prstGeom prst="rect">
@@ -31483,13 +33853,13 @@
       </p:sp>
       <p:sp>
         <p:nvSpPr>
-          <p:cNvPr id="47" name="Text 45"/>
-          <p:cNvSpPr/>
-          <p:nvPr/>
-        </p:nvSpPr>
-        <p:spPr>
-          <a:xfrm>
-            <a:off x="6668262" y="4169664"/>
+          <p:cNvPr id="53" name="Text 51"/>
+          <p:cNvSpPr/>
+          <p:nvPr/>
+        </p:nvSpPr>
+        <p:spPr>
+          <a:xfrm>
+            <a:off x="6062472" y="4169664"/>
             <a:ext cx="685800" cy="475488"/>
           </a:xfrm>
           <a:prstGeom prst="rect">
@@ -31514,7 +33884,7 @@
                 <a:ea typeface="Trebuchet MS" pitchFamily="34" charset="-122"/>
                 <a:cs typeface="Trebuchet MS" pitchFamily="34" charset="-120"/>
               </a:rPr>
-              <a:t>i</a:t>
+              <a:t>ll</a:t>
             </a:r>
             <a:endParaRPr lang="en-US" sz="900" dirty="0"/>
           </a:p>
@@ -31522,13 +33892,13 @@
       </p:sp>
       <p:sp>
         <p:nvSpPr>
-          <p:cNvPr id="48" name="Shape 46"/>
-          <p:cNvSpPr/>
-          <p:nvPr/>
-        </p:nvSpPr>
-        <p:spPr>
-          <a:xfrm>
-            <a:off x="7576947" y="4169664"/>
+          <p:cNvPr id="54" name="Shape 52"/>
+          <p:cNvSpPr/>
+          <p:nvPr/>
+        </p:nvSpPr>
+        <p:spPr>
+          <a:xfrm>
+            <a:off x="6870192" y="4169664"/>
             <a:ext cx="685800" cy="475488"/>
           </a:xfrm>
           <a:prstGeom prst="rect">
@@ -31549,13 +33919,13 @@
       </p:sp>
       <p:sp>
         <p:nvSpPr>
-          <p:cNvPr id="49" name="Text 47"/>
-          <p:cNvSpPr/>
-          <p:nvPr/>
-        </p:nvSpPr>
-        <p:spPr>
-          <a:xfrm>
-            <a:off x="7576947" y="4169664"/>
+          <p:cNvPr id="55" name="Text 53"/>
+          <p:cNvSpPr/>
+          <p:nvPr/>
+        </p:nvSpPr>
+        <p:spPr>
+          <a:xfrm>
+            <a:off x="6870192" y="4169664"/>
             <a:ext cx="685800" cy="475488"/>
           </a:xfrm>
           <a:prstGeom prst="rect">
@@ -31580,7 +33950,73 @@
                 <a:ea typeface="Trebuchet MS" pitchFamily="34" charset="-122"/>
                 <a:cs typeface="Trebuchet MS" pitchFamily="34" charset="-120"/>
               </a:rPr>
-              <a:t>ll</a:t>
+              <a:t>i</a:t>
+            </a:r>
+            <a:endParaRPr lang="en-US" sz="900" dirty="0"/>
+          </a:p>
+        </p:txBody>
+      </p:sp>
+      <p:sp>
+        <p:nvSpPr>
+          <p:cNvPr id="56" name="Shape 54"/>
+          <p:cNvSpPr/>
+          <p:nvPr/>
+        </p:nvSpPr>
+        <p:spPr>
+          <a:xfrm>
+            <a:off x="7677912" y="4169664"/>
+            <a:ext cx="685800" cy="475488"/>
+          </a:xfrm>
+          <a:prstGeom prst="rect">
+            <a:avLst>
+              <a:gd name="adj" fmla="val 7692"/>
+            </a:avLst>
+          </a:prstGeom>
+          <a:solidFill>
+            <a:srgbClr val="FFFFFF"/>
+          </a:solidFill>
+          <a:ln w="12700">
+            <a:solidFill>
+              <a:srgbClr val="DB2777"/>
+            </a:solidFill>
+            <a:prstDash val="solid"/>
+          </a:ln>
+        </p:spPr>
+      </p:sp>
+      <p:sp>
+        <p:nvSpPr>
+          <p:cNvPr id="57" name="Text 55"/>
+          <p:cNvSpPr/>
+          <p:nvPr/>
+        </p:nvSpPr>
+        <p:spPr>
+          <a:xfrm>
+            <a:off x="7677912" y="4169664"/>
+            <a:ext cx="685800" cy="475488"/>
+          </a:xfrm>
+          <a:prstGeom prst="rect">
+            <a:avLst/>
+          </a:prstGeom>
+          <a:noFill/>
+          <a:ln/>
+        </p:spPr>
+        <p:txBody>
+          <a:bodyPr wrap="square" lIns="0" tIns="0" rIns="0" bIns="0" rtlCol="0" anchor="ctr"/>
+          <a:lstStyle/>
+          <a:p>
+            <a:pPr algn="ctr" indent="0" marL="0">
+              <a:buNone/>
+            </a:pPr>
+            <a:r>
+              <a:rPr lang="en-US" sz="900" b="1" dirty="0">
+                <a:solidFill>
+                  <a:srgbClr val="9D174D"/>
+                </a:solidFill>
+                <a:latin typeface="Trebuchet MS" pitchFamily="34" charset="0"/>
+                <a:ea typeface="Trebuchet MS" pitchFamily="34" charset="-122"/>
+                <a:cs typeface="Trebuchet MS" pitchFamily="34" charset="-120"/>
+              </a:rPr>
+              <a:t>ng</a:t>
             </a:r>
             <a:endParaRPr lang="en-US" sz="900" dirty="0"/>
           </a:p>
@@ -31872,7 +34308,7 @@
                 <a:ea typeface="Calibri" pitchFamily="34" charset="-122"/>
                 <a:cs typeface="Calibri" pitchFamily="34" charset="-120"/>
               </a:rPr>
-              <a:t>Word Labs  •  wordlabs.app  •  Root: 'fill' = to make full, occupy</a:t>
+              <a:t>Word Labs  •  wordlabs.app  •  Root: 'fill' = to make full</a:t>
             </a:r>
             <a:endParaRPr lang="en-US" sz="800" dirty="0"/>
           </a:p>
@@ -33041,7 +35477,7 @@
                 <a:ea typeface="Calibri" pitchFamily="34" charset="-122"/>
                 <a:cs typeface="Calibri" pitchFamily="34" charset="-120"/>
               </a:rPr>
-              <a:t>Word Labs  •  wordlabs.app  •  Root: 'fill' = to make full, occupy</a:t>
+              <a:t>Word Labs  •  wordlabs.app  •  Root: 'fill' = to make full</a:t>
             </a:r>
             <a:endParaRPr lang="en-US" sz="800" dirty="0"/>
           </a:p>
@@ -33342,7 +35778,7 @@
                 <a:ea typeface="Trebuchet MS" pitchFamily="34" charset="-122"/>
                 <a:cs typeface="Trebuchet MS" pitchFamily="34" charset="-120"/>
               </a:rPr>
-              <a:t>re-</a:t>
+              <a:t>over-</a:t>
             </a:r>
             <a:endParaRPr lang="en-US" sz="1300" dirty="0"/>
           </a:p>
@@ -33534,7 +35970,7 @@
                 <a:ea typeface="Trebuchet MS" pitchFamily="34" charset="-122"/>
                 <a:cs typeface="Trebuchet MS" pitchFamily="34" charset="-120"/>
               </a:rPr>
-              <a:t>over-</a:t>
+              <a:t>re-</a:t>
             </a:r>
             <a:endParaRPr lang="en-US" sz="1300" dirty="0"/>
           </a:p>
@@ -33623,7 +36059,7 @@
                 <a:ea typeface="Trebuchet MS" pitchFamily="34" charset="-122"/>
                 <a:cs typeface="Trebuchet MS" pitchFamily="34" charset="-120"/>
               </a:rPr>
-              <a:t>-ing</a:t>
+              <a:t>-er</a:t>
             </a:r>
             <a:endParaRPr lang="en-US" sz="1300" dirty="0"/>
           </a:p>
@@ -33644,7 +36080,7 @@
             <a:avLst/>
           </a:prstGeom>
           <a:solidFill>
-            <a:srgbClr val="DDD6FE"/>
+            <a:srgbClr val="F8FAFC"/>
           </a:solidFill>
           <a:ln w="12700">
             <a:solidFill>
@@ -33656,14 +36092,64 @@
       </p:sp>
       <p:sp>
         <p:nvSpPr>
-          <p:cNvPr id="29" name="Text 27"/>
-          <p:cNvSpPr/>
-          <p:nvPr/>
-        </p:nvSpPr>
-        <p:spPr>
-          <a:xfrm>
-            <a:off x="365760" y="2404872"/>
-            <a:ext cx="2468880" cy="402336"/>
+          <p:cNvPr id="29" name="Shape 27"/>
+          <p:cNvSpPr/>
+          <p:nvPr/>
+        </p:nvSpPr>
+        <p:spPr>
+          <a:xfrm>
+            <a:off x="2971800" y="2404872"/>
+            <a:ext cx="2834640" cy="402336"/>
+          </a:xfrm>
+          <a:prstGeom prst="rect">
+            <a:avLst/>
+          </a:prstGeom>
+          <a:solidFill>
+            <a:srgbClr val="F8FAFC"/>
+          </a:solidFill>
+          <a:ln w="12700">
+            <a:solidFill>
+              <a:srgbClr val="E2E8F0"/>
+            </a:solidFill>
+            <a:prstDash val="solid"/>
+          </a:ln>
+        </p:spPr>
+      </p:sp>
+      <p:sp>
+        <p:nvSpPr>
+          <p:cNvPr id="30" name="Shape 28"/>
+          <p:cNvSpPr/>
+          <p:nvPr/>
+        </p:nvSpPr>
+        <p:spPr>
+          <a:xfrm>
+            <a:off x="5943600" y="2404872"/>
+            <a:ext cx="2834640" cy="402336"/>
+          </a:xfrm>
+          <a:prstGeom prst="rect">
+            <a:avLst/>
+          </a:prstGeom>
+          <a:solidFill>
+            <a:srgbClr val="FCE7F3"/>
+          </a:solidFill>
+          <a:ln w="12700">
+            <a:solidFill>
+              <a:srgbClr val="E2E8F0"/>
+            </a:solidFill>
+            <a:prstDash val="solid"/>
+          </a:ln>
+        </p:spPr>
+      </p:sp>
+      <p:sp>
+        <p:nvSpPr>
+          <p:cNvPr id="31" name="Text 29"/>
+          <p:cNvSpPr/>
+          <p:nvPr/>
+        </p:nvSpPr>
+        <p:spPr>
+          <a:xfrm>
+            <a:off x="5943600" y="2404872"/>
+            <a:ext cx="2834640" cy="402336"/>
           </a:xfrm>
           <a:prstGeom prst="rect">
             <a:avLst/>
@@ -33681,13 +36167,13 @@
             <a:r>
               <a:rPr lang="en-US" sz="1300" b="1" dirty="0">
                 <a:solidFill>
-                  <a:srgbClr val="4C1D95"/>
+                  <a:srgbClr val="9D174D"/>
                 </a:solidFill>
                 <a:latin typeface="Trebuchet MS" pitchFamily="34" charset="0"/>
                 <a:ea typeface="Trebuchet MS" pitchFamily="34" charset="-122"/>
                 <a:cs typeface="Trebuchet MS" pitchFamily="34" charset="-120"/>
               </a:rPr>
-              <a:t>in-</a:t>
+              <a:t>-ing</a:t>
             </a:r>
             <a:endParaRPr lang="en-US" sz="1300" dirty="0"/>
           </a:p>
@@ -33695,20 +36181,45 @@
       </p:sp>
       <p:sp>
         <p:nvSpPr>
-          <p:cNvPr id="30" name="Shape 28"/>
-          <p:cNvSpPr/>
-          <p:nvPr/>
-        </p:nvSpPr>
-        <p:spPr>
-          <a:xfrm>
-            <a:off x="2971800" y="2404872"/>
+          <p:cNvPr id="32" name="Shape 30"/>
+          <p:cNvSpPr/>
+          <p:nvPr/>
+        </p:nvSpPr>
+        <p:spPr>
+          <a:xfrm>
+            <a:off x="365760" y="2825496"/>
+            <a:ext cx="2468880" cy="402336"/>
+          </a:xfrm>
+          <a:prstGeom prst="rect">
+            <a:avLst/>
+          </a:prstGeom>
+          <a:solidFill>
+            <a:srgbClr val="F1F5F9"/>
+          </a:solidFill>
+          <a:ln w="12700">
+            <a:solidFill>
+              <a:srgbClr val="E2E8F0"/>
+            </a:solidFill>
+            <a:prstDash val="solid"/>
+          </a:ln>
+        </p:spPr>
+      </p:sp>
+      <p:sp>
+        <p:nvSpPr>
+          <p:cNvPr id="33" name="Shape 31"/>
+          <p:cNvSpPr/>
+          <p:nvPr/>
+        </p:nvSpPr>
+        <p:spPr>
+          <a:xfrm>
+            <a:off x="2971800" y="2825496"/>
             <a:ext cx="2834640" cy="402336"/>
           </a:xfrm>
           <a:prstGeom prst="rect">
             <a:avLst/>
           </a:prstGeom>
           <a:solidFill>
-            <a:srgbClr val="F8FAFC"/>
+            <a:srgbClr val="F1F5F9"/>
           </a:solidFill>
           <a:ln w="12700">
             <a:solidFill>
@@ -33720,13 +36231,13 @@
       </p:sp>
       <p:sp>
         <p:nvSpPr>
-          <p:cNvPr id="31" name="Shape 29"/>
-          <p:cNvSpPr/>
-          <p:nvPr/>
-        </p:nvSpPr>
-        <p:spPr>
-          <a:xfrm>
-            <a:off x="5943600" y="2404872"/>
+          <p:cNvPr id="34" name="Shape 32"/>
+          <p:cNvSpPr/>
+          <p:nvPr/>
+        </p:nvSpPr>
+        <p:spPr>
+          <a:xfrm>
+            <a:off x="5943600" y="2825496"/>
             <a:ext cx="2834640" cy="402336"/>
           </a:xfrm>
           <a:prstGeom prst="rect">
@@ -33745,13 +36256,13 @@
       </p:sp>
       <p:sp>
         <p:nvSpPr>
-          <p:cNvPr id="32" name="Text 30"/>
-          <p:cNvSpPr/>
-          <p:nvPr/>
-        </p:nvSpPr>
-        <p:spPr>
-          <a:xfrm>
-            <a:off x="5943600" y="2404872"/>
+          <p:cNvPr id="35" name="Text 33"/>
+          <p:cNvSpPr/>
+          <p:nvPr/>
+        </p:nvSpPr>
+        <p:spPr>
+          <a:xfrm>
+            <a:off x="5943600" y="2825496"/>
             <a:ext cx="2834640" cy="402336"/>
           </a:xfrm>
           <a:prstGeom prst="rect">
@@ -33776,7 +36287,7 @@
                 <a:ea typeface="Trebuchet MS" pitchFamily="34" charset="-122"/>
                 <a:cs typeface="Trebuchet MS" pitchFamily="34" charset="-120"/>
               </a:rPr>
-              <a:t>-er</a:t>
+              <a:t>-s</a:t>
             </a:r>
             <a:endParaRPr lang="en-US" sz="1300" dirty="0"/>
           </a:p>
@@ -33784,245 +36295,174 @@
       </p:sp>
       <p:sp>
         <p:nvSpPr>
-          <p:cNvPr id="33" name="Shape 31"/>
-          <p:cNvSpPr/>
-          <p:nvPr/>
-        </p:nvSpPr>
-        <p:spPr>
-          <a:xfrm>
-            <a:off x="365760" y="2825496"/>
-            <a:ext cx="2468880" cy="402336"/>
-          </a:xfrm>
-          <a:prstGeom prst="rect">
-            <a:avLst/>
-          </a:prstGeom>
-          <a:solidFill>
-            <a:srgbClr val="DDD6FE"/>
-          </a:solidFill>
-          <a:ln w="12700">
-            <a:solidFill>
-              <a:srgbClr val="E2E8F0"/>
-            </a:solidFill>
-            <a:prstDash val="solid"/>
-          </a:ln>
-        </p:spPr>
-      </p:sp>
-      <p:sp>
-        <p:nvSpPr>
-          <p:cNvPr id="34" name="Text 32"/>
-          <p:cNvSpPr/>
-          <p:nvPr/>
-        </p:nvSpPr>
-        <p:spPr>
-          <a:xfrm>
-            <a:off x="365760" y="2825496"/>
-            <a:ext cx="2468880" cy="402336"/>
-          </a:xfrm>
-          <a:prstGeom prst="rect">
-            <a:avLst/>
-          </a:prstGeom>
-          <a:noFill/>
-          <a:ln/>
-        </p:spPr>
-        <p:txBody>
-          <a:bodyPr wrap="square" lIns="0" tIns="0" rIns="0" bIns="0" rtlCol="0" anchor="ctr"/>
-          <a:lstStyle/>
-          <a:p>
-            <a:pPr algn="ctr" indent="0" marL="0">
-              <a:buNone/>
-            </a:pPr>
-            <a:r>
-              <a:rPr lang="en-US" sz="1300" b="1" dirty="0">
-                <a:solidFill>
-                  <a:srgbClr val="4C1D95"/>
+          <p:cNvPr id="36" name="Text 34"/>
+          <p:cNvSpPr/>
+          <p:nvPr/>
+        </p:nvSpPr>
+        <p:spPr>
+          <a:xfrm>
+            <a:off x="365760" y="3611880"/>
+            <a:ext cx="1828800" cy="347472"/>
+          </a:xfrm>
+          <a:prstGeom prst="rect">
+            <a:avLst/>
+          </a:prstGeom>
+          <a:noFill/>
+          <a:ln/>
+        </p:spPr>
+        <p:txBody>
+          <a:bodyPr wrap="square" lIns="0" tIns="0" rIns="0" bIns="0" rtlCol="0" anchor="ctr"/>
+          <a:lstStyle/>
+          <a:p>
+            <a:pPr algn="l" indent="0" marL="0">
+              <a:buNone/>
+            </a:pPr>
+            <a:r>
+              <a:rPr lang="en-US" sz="1200" b="1" dirty="0">
+                <a:solidFill>
+                  <a:srgbClr val="0F172A"/>
                 </a:solidFill>
                 <a:latin typeface="Trebuchet MS" pitchFamily="34" charset="0"/>
                 <a:ea typeface="Trebuchet MS" pitchFamily="34" charset="-122"/>
                 <a:cs typeface="Trebuchet MS" pitchFamily="34" charset="-120"/>
               </a:rPr>
-              <a:t>under-</a:t>
-            </a:r>
-            <a:endParaRPr lang="en-US" sz="1300" dirty="0"/>
-          </a:p>
-        </p:txBody>
-      </p:sp>
-      <p:sp>
-        <p:nvSpPr>
-          <p:cNvPr id="35" name="Shape 33"/>
-          <p:cNvSpPr/>
-          <p:nvPr/>
-        </p:nvSpPr>
-        <p:spPr>
-          <a:xfrm>
-            <a:off x="2971800" y="2825496"/>
-            <a:ext cx="2834640" cy="402336"/>
-          </a:xfrm>
-          <a:prstGeom prst="rect">
-            <a:avLst/>
-          </a:prstGeom>
-          <a:solidFill>
-            <a:srgbClr val="F1F5F9"/>
-          </a:solidFill>
-          <a:ln w="12700">
-            <a:solidFill>
-              <a:srgbClr val="E2E8F0"/>
-            </a:solidFill>
-            <a:prstDash val="solid"/>
-          </a:ln>
-        </p:spPr>
-      </p:sp>
-      <p:sp>
-        <p:nvSpPr>
-          <p:cNvPr id="36" name="Shape 34"/>
-          <p:cNvSpPr/>
-          <p:nvPr/>
-        </p:nvSpPr>
-        <p:spPr>
-          <a:xfrm>
-            <a:off x="5943600" y="2825496"/>
-            <a:ext cx="2834640" cy="402336"/>
-          </a:xfrm>
-          <a:prstGeom prst="rect">
-            <a:avLst/>
-          </a:prstGeom>
-          <a:solidFill>
-            <a:srgbClr val="FCE7F3"/>
-          </a:solidFill>
-          <a:ln w="12700">
-            <a:solidFill>
-              <a:srgbClr val="E2E8F0"/>
-            </a:solidFill>
-            <a:prstDash val="solid"/>
-          </a:ln>
-        </p:spPr>
-      </p:sp>
-      <p:sp>
-        <p:nvSpPr>
-          <p:cNvPr id="37" name="Text 35"/>
-          <p:cNvSpPr/>
-          <p:nvPr/>
-        </p:nvSpPr>
-        <p:spPr>
-          <a:xfrm>
-            <a:off x="5943600" y="2825496"/>
-            <a:ext cx="2834640" cy="402336"/>
-          </a:xfrm>
-          <a:prstGeom prst="rect">
-            <a:avLst/>
-          </a:prstGeom>
-          <a:noFill/>
-          <a:ln/>
-        </p:spPr>
-        <p:txBody>
-          <a:bodyPr wrap="square" lIns="0" tIns="0" rIns="0" bIns="0" rtlCol="0" anchor="ctr"/>
-          <a:lstStyle/>
-          <a:p>
-            <a:pPr algn="ctr" indent="0" marL="0">
-              <a:buNone/>
-            </a:pPr>
-            <a:r>
-              <a:rPr lang="en-US" sz="1300" b="1" dirty="0">
-                <a:solidFill>
-                  <a:srgbClr val="9D174D"/>
+              <a:t>Sample words:</a:t>
+            </a:r>
+            <a:endParaRPr lang="en-US" sz="1200" dirty="0"/>
+          </a:p>
+        </p:txBody>
+      </p:sp>
+      <p:sp>
+        <p:nvSpPr>
+          <p:cNvPr id="37" name="Shape 35"/>
+          <p:cNvSpPr/>
+          <p:nvPr/>
+        </p:nvSpPr>
+        <p:spPr>
+          <a:xfrm>
+            <a:off x="365760" y="4023360"/>
+            <a:ext cx="2011680" cy="402336"/>
+          </a:xfrm>
+          <a:prstGeom prst="rect">
+            <a:avLst>
+              <a:gd name="adj" fmla="val 13636"/>
+            </a:avLst>
+          </a:prstGeom>
+          <a:solidFill>
+            <a:srgbClr val="EEF2FF"/>
+          </a:solidFill>
+          <a:ln w="12700">
+            <a:solidFill>
+              <a:srgbClr val="6366F1"/>
+            </a:solidFill>
+            <a:prstDash val="solid"/>
+          </a:ln>
+        </p:spPr>
+      </p:sp>
+      <p:sp>
+        <p:nvSpPr>
+          <p:cNvPr id="38" name="Text 36"/>
+          <p:cNvSpPr/>
+          <p:nvPr/>
+        </p:nvSpPr>
+        <p:spPr>
+          <a:xfrm>
+            <a:off x="365760" y="4023360"/>
+            <a:ext cx="2011680" cy="402336"/>
+          </a:xfrm>
+          <a:prstGeom prst="rect">
+            <a:avLst/>
+          </a:prstGeom>
+          <a:noFill/>
+          <a:ln/>
+        </p:spPr>
+        <p:txBody>
+          <a:bodyPr wrap="square" lIns="0" tIns="0" rIns="0" bIns="0" rtlCol="0" anchor="ctr"/>
+          <a:lstStyle/>
+          <a:p>
+            <a:pPr algn="ctr" indent="0" marL="0">
+              <a:buNone/>
+            </a:pPr>
+            <a:r>
+              <a:rPr lang="en-US" sz="1200" b="1" dirty="0">
+                <a:solidFill>
+                  <a:srgbClr val="4338CA"/>
                 </a:solidFill>
                 <a:latin typeface="Trebuchet MS" pitchFamily="34" charset="0"/>
                 <a:ea typeface="Trebuchet MS" pitchFamily="34" charset="-122"/>
                 <a:cs typeface="Trebuchet MS" pitchFamily="34" charset="-120"/>
               </a:rPr>
-              <a:t>-ment</a:t>
-            </a:r>
-            <a:endParaRPr lang="en-US" sz="1300" dirty="0"/>
-          </a:p>
-        </p:txBody>
-      </p:sp>
-      <p:sp>
-        <p:nvSpPr>
-          <p:cNvPr id="38" name="Shape 36"/>
-          <p:cNvSpPr/>
-          <p:nvPr/>
-        </p:nvSpPr>
-        <p:spPr>
-          <a:xfrm>
-            <a:off x="365760" y="3246120"/>
-            <a:ext cx="2468880" cy="402336"/>
-          </a:xfrm>
-          <a:prstGeom prst="rect">
-            <a:avLst/>
-          </a:prstGeom>
-          <a:solidFill>
-            <a:srgbClr val="DDD6FE"/>
-          </a:solidFill>
-          <a:ln w="12700">
-            <a:solidFill>
-              <a:srgbClr val="E2E8F0"/>
-            </a:solidFill>
-            <a:prstDash val="solid"/>
-          </a:ln>
-        </p:spPr>
-      </p:sp>
-      <p:sp>
-        <p:nvSpPr>
-          <p:cNvPr id="39" name="Text 37"/>
-          <p:cNvSpPr/>
-          <p:nvPr/>
-        </p:nvSpPr>
-        <p:spPr>
-          <a:xfrm>
-            <a:off x="365760" y="3246120"/>
-            <a:ext cx="2468880" cy="402336"/>
-          </a:xfrm>
-          <a:prstGeom prst="rect">
-            <a:avLst/>
-          </a:prstGeom>
-          <a:noFill/>
-          <a:ln/>
-        </p:spPr>
-        <p:txBody>
-          <a:bodyPr wrap="square" lIns="0" tIns="0" rIns="0" bIns="0" rtlCol="0" anchor="ctr"/>
-          <a:lstStyle/>
-          <a:p>
-            <a:pPr algn="ctr" indent="0" marL="0">
-              <a:buNone/>
-            </a:pPr>
-            <a:r>
-              <a:rPr lang="en-US" sz="1300" b="1" dirty="0">
-                <a:solidFill>
-                  <a:srgbClr val="4C1D95"/>
+              <a:t>fill</a:t>
+            </a:r>
+            <a:endParaRPr lang="en-US" sz="1200" dirty="0"/>
+          </a:p>
+        </p:txBody>
+      </p:sp>
+      <p:sp>
+        <p:nvSpPr>
+          <p:cNvPr id="39" name="Shape 37"/>
+          <p:cNvSpPr/>
+          <p:nvPr/>
+        </p:nvSpPr>
+        <p:spPr>
+          <a:xfrm>
+            <a:off x="2542032" y="4023360"/>
+            <a:ext cx="2011680" cy="402336"/>
+          </a:xfrm>
+          <a:prstGeom prst="rect">
+            <a:avLst>
+              <a:gd name="adj" fmla="val 13636"/>
+            </a:avLst>
+          </a:prstGeom>
+          <a:solidFill>
+            <a:srgbClr val="EEF2FF"/>
+          </a:solidFill>
+          <a:ln w="12700">
+            <a:solidFill>
+              <a:srgbClr val="6366F1"/>
+            </a:solidFill>
+            <a:prstDash val="solid"/>
+          </a:ln>
+        </p:spPr>
+      </p:sp>
+      <p:sp>
+        <p:nvSpPr>
+          <p:cNvPr id="40" name="Text 38"/>
+          <p:cNvSpPr/>
+          <p:nvPr/>
+        </p:nvSpPr>
+        <p:spPr>
+          <a:xfrm>
+            <a:off x="2542032" y="4023360"/>
+            <a:ext cx="2011680" cy="402336"/>
+          </a:xfrm>
+          <a:prstGeom prst="rect">
+            <a:avLst/>
+          </a:prstGeom>
+          <a:noFill/>
+          <a:ln/>
+        </p:spPr>
+        <p:txBody>
+          <a:bodyPr wrap="square" lIns="0" tIns="0" rIns="0" bIns="0" rtlCol="0" anchor="ctr"/>
+          <a:lstStyle/>
+          <a:p>
+            <a:pPr algn="ctr" indent="0" marL="0">
+              <a:buNone/>
+            </a:pPr>
+            <a:r>
+              <a:rPr lang="en-US" sz="1200" b="1" dirty="0">
+                <a:solidFill>
+                  <a:srgbClr val="4338CA"/>
                 </a:solidFill>
                 <a:latin typeface="Trebuchet MS" pitchFamily="34" charset="0"/>
                 <a:ea typeface="Trebuchet MS" pitchFamily="34" charset="-122"/>
                 <a:cs typeface="Trebuchet MS" pitchFamily="34" charset="-120"/>
               </a:rPr>
-              <a:t>back-</a:t>
-            </a:r>
-            <a:endParaRPr lang="en-US" sz="1300" dirty="0"/>
-          </a:p>
-        </p:txBody>
-      </p:sp>
-      <p:sp>
-        <p:nvSpPr>
-          <p:cNvPr id="40" name="Shape 38"/>
-          <p:cNvSpPr/>
-          <p:nvPr/>
-        </p:nvSpPr>
-        <p:spPr>
-          <a:xfrm>
-            <a:off x="2971800" y="3246120"/>
-            <a:ext cx="2834640" cy="402336"/>
-          </a:xfrm>
-          <a:prstGeom prst="rect">
-            <a:avLst/>
-          </a:prstGeom>
-          <a:solidFill>
-            <a:srgbClr val="F8FAFC"/>
-          </a:solidFill>
-          <a:ln w="12700">
-            <a:solidFill>
-              <a:srgbClr val="E2E8F0"/>
-            </a:solidFill>
-            <a:prstDash val="solid"/>
-          </a:ln>
-        </p:spPr>
+              <a:t>fills</a:t>
+            </a:r>
+            <a:endParaRPr lang="en-US" sz="1200" dirty="0"/>
+          </a:p>
+        </p:txBody>
       </p:sp>
       <p:sp>
         <p:nvSpPr>
@@ -34032,18 +36472,20 @@
         </p:nvSpPr>
         <p:spPr>
           <a:xfrm>
-            <a:off x="5943600" y="3246120"/>
-            <a:ext cx="2834640" cy="402336"/>
-          </a:xfrm>
-          <a:prstGeom prst="rect">
-            <a:avLst/>
-          </a:prstGeom>
-          <a:solidFill>
-            <a:srgbClr val="FCE7F3"/>
-          </a:solidFill>
-          <a:ln w="12700">
-            <a:solidFill>
-              <a:srgbClr val="E2E8F0"/>
+            <a:off x="4718304" y="4023360"/>
+            <a:ext cx="2011680" cy="402336"/>
+          </a:xfrm>
+          <a:prstGeom prst="rect">
+            <a:avLst>
+              <a:gd name="adj" fmla="val 13636"/>
+            </a:avLst>
+          </a:prstGeom>
+          <a:solidFill>
+            <a:srgbClr val="EEF2FF"/>
+          </a:solidFill>
+          <a:ln w="12700">
+            <a:solidFill>
+              <a:srgbClr val="6366F1"/>
             </a:solidFill>
             <a:prstDash val="solid"/>
           </a:ln>
@@ -34057,71 +36499,98 @@
         </p:nvSpPr>
         <p:spPr>
           <a:xfrm>
-            <a:off x="5943600" y="3246120"/>
-            <a:ext cx="2834640" cy="402336"/>
-          </a:xfrm>
-          <a:prstGeom prst="rect">
-            <a:avLst/>
-          </a:prstGeom>
-          <a:noFill/>
-          <a:ln/>
-        </p:spPr>
-        <p:txBody>
-          <a:bodyPr wrap="square" lIns="0" tIns="0" rIns="0" bIns="0" rtlCol="0" anchor="ctr"/>
-          <a:lstStyle/>
-          <a:p>
-            <a:pPr algn="ctr" indent="0" marL="0">
-              <a:buNone/>
-            </a:pPr>
-            <a:r>
-              <a:rPr lang="en-US" sz="1300" b="1" dirty="0">
-                <a:solidFill>
-                  <a:srgbClr val="9D174D"/>
+            <a:off x="4718304" y="4023360"/>
+            <a:ext cx="2011680" cy="402336"/>
+          </a:xfrm>
+          <a:prstGeom prst="rect">
+            <a:avLst/>
+          </a:prstGeom>
+          <a:noFill/>
+          <a:ln/>
+        </p:spPr>
+        <p:txBody>
+          <a:bodyPr wrap="square" lIns="0" tIns="0" rIns="0" bIns="0" rtlCol="0" anchor="ctr"/>
+          <a:lstStyle/>
+          <a:p>
+            <a:pPr algn="ctr" indent="0" marL="0">
+              <a:buNone/>
+            </a:pPr>
+            <a:r>
+              <a:rPr lang="en-US" sz="1200" b="1" dirty="0">
+                <a:solidFill>
+                  <a:srgbClr val="4338CA"/>
                 </a:solidFill>
                 <a:latin typeface="Trebuchet MS" pitchFamily="34" charset="0"/>
                 <a:ea typeface="Trebuchet MS" pitchFamily="34" charset="-122"/>
                 <a:cs typeface="Trebuchet MS" pitchFamily="34" charset="-120"/>
               </a:rPr>
-              <a:t>-able</a:t>
-            </a:r>
-            <a:endParaRPr lang="en-US" sz="1300" dirty="0"/>
-          </a:p>
-        </p:txBody>
-      </p:sp>
-      <p:sp>
-        <p:nvSpPr>
-          <p:cNvPr id="43" name="Text 41"/>
-          <p:cNvSpPr/>
-          <p:nvPr/>
-        </p:nvSpPr>
-        <p:spPr>
-          <a:xfrm>
-            <a:off x="365760" y="3611880"/>
-            <a:ext cx="1828800" cy="347472"/>
-          </a:xfrm>
-          <a:prstGeom prst="rect">
-            <a:avLst/>
-          </a:prstGeom>
-          <a:noFill/>
-          <a:ln/>
-        </p:spPr>
-        <p:txBody>
-          <a:bodyPr wrap="square" lIns="0" tIns="0" rIns="0" bIns="0" rtlCol="0" anchor="ctr"/>
-          <a:lstStyle/>
-          <a:p>
-            <a:pPr algn="l" indent="0" marL="0">
+              <a:t>filled</a:t>
+            </a:r>
+            <a:endParaRPr lang="en-US" sz="1200" dirty="0"/>
+          </a:p>
+        </p:txBody>
+      </p:sp>
+      <p:sp>
+        <p:nvSpPr>
+          <p:cNvPr id="43" name="Shape 41"/>
+          <p:cNvSpPr/>
+          <p:nvPr/>
+        </p:nvSpPr>
+        <p:spPr>
+          <a:xfrm>
+            <a:off x="6894576" y="4023360"/>
+            <a:ext cx="2011680" cy="402336"/>
+          </a:xfrm>
+          <a:prstGeom prst="rect">
+            <a:avLst>
+              <a:gd name="adj" fmla="val 13636"/>
+            </a:avLst>
+          </a:prstGeom>
+          <a:solidFill>
+            <a:srgbClr val="EEF2FF"/>
+          </a:solidFill>
+          <a:ln w="12700">
+            <a:solidFill>
+              <a:srgbClr val="6366F1"/>
+            </a:solidFill>
+            <a:prstDash val="solid"/>
+          </a:ln>
+        </p:spPr>
+      </p:sp>
+      <p:sp>
+        <p:nvSpPr>
+          <p:cNvPr id="44" name="Text 42"/>
+          <p:cNvSpPr/>
+          <p:nvPr/>
+        </p:nvSpPr>
+        <p:spPr>
+          <a:xfrm>
+            <a:off x="6894576" y="4023360"/>
+            <a:ext cx="2011680" cy="402336"/>
+          </a:xfrm>
+          <a:prstGeom prst="rect">
+            <a:avLst/>
+          </a:prstGeom>
+          <a:noFill/>
+          <a:ln/>
+        </p:spPr>
+        <p:txBody>
+          <a:bodyPr wrap="square" lIns="0" tIns="0" rIns="0" bIns="0" rtlCol="0" anchor="ctr"/>
+          <a:lstStyle/>
+          <a:p>
+            <a:pPr algn="ctr" indent="0" marL="0">
               <a:buNone/>
             </a:pPr>
             <a:r>
               <a:rPr lang="en-US" sz="1200" b="1" dirty="0">
                 <a:solidFill>
-                  <a:srgbClr val="0F172A"/>
+                  <a:srgbClr val="4338CA"/>
                 </a:solidFill>
                 <a:latin typeface="Trebuchet MS" pitchFamily="34" charset="0"/>
                 <a:ea typeface="Trebuchet MS" pitchFamily="34" charset="-122"/>
                 <a:cs typeface="Trebuchet MS" pitchFamily="34" charset="-120"/>
               </a:rPr>
-              <a:t>Sample words:</a:t>
+              <a:t>filler</a:t>
             </a:r>
             <a:endParaRPr lang="en-US" sz="1200" dirty="0"/>
           </a:p>
@@ -34129,13 +36598,13 @@
       </p:sp>
       <p:sp>
         <p:nvSpPr>
-          <p:cNvPr id="44" name="Shape 42"/>
-          <p:cNvSpPr/>
-          <p:nvPr/>
-        </p:nvSpPr>
-        <p:spPr>
-          <a:xfrm>
-            <a:off x="365760" y="4023360"/>
+          <p:cNvPr id="45" name="Shape 43"/>
+          <p:cNvSpPr/>
+          <p:nvPr/>
+        </p:nvSpPr>
+        <p:spPr>
+          <a:xfrm>
+            <a:off x="365760" y="4498848"/>
             <a:ext cx="2011680" cy="402336"/>
           </a:xfrm>
           <a:prstGeom prst="rect">
@@ -34156,13 +36625,13 @@
       </p:sp>
       <p:sp>
         <p:nvSpPr>
-          <p:cNvPr id="45" name="Text 43"/>
-          <p:cNvSpPr/>
-          <p:nvPr/>
-        </p:nvSpPr>
-        <p:spPr>
-          <a:xfrm>
-            <a:off x="365760" y="4023360"/>
+          <p:cNvPr id="46" name="Text 44"/>
+          <p:cNvSpPr/>
+          <p:nvPr/>
+        </p:nvSpPr>
+        <p:spPr>
+          <a:xfrm>
+            <a:off x="365760" y="4498848"/>
             <a:ext cx="2011680" cy="402336"/>
           </a:xfrm>
           <a:prstGeom prst="rect">
@@ -34195,13 +36664,13 @@
       </p:sp>
       <p:sp>
         <p:nvSpPr>
-          <p:cNvPr id="46" name="Shape 44"/>
-          <p:cNvSpPr/>
-          <p:nvPr/>
-        </p:nvSpPr>
-        <p:spPr>
-          <a:xfrm>
-            <a:off x="2542032" y="4023360"/>
+          <p:cNvPr id="47" name="Shape 45"/>
+          <p:cNvSpPr/>
+          <p:nvPr/>
+        </p:nvSpPr>
+        <p:spPr>
+          <a:xfrm>
+            <a:off x="2542032" y="4498848"/>
             <a:ext cx="2011680" cy="402336"/>
           </a:xfrm>
           <a:prstGeom prst="rect">
@@ -34222,13 +36691,13 @@
       </p:sp>
       <p:sp>
         <p:nvSpPr>
-          <p:cNvPr id="47" name="Text 45"/>
-          <p:cNvSpPr/>
-          <p:nvPr/>
-        </p:nvSpPr>
-        <p:spPr>
-          <a:xfrm>
-            <a:off x="2542032" y="4023360"/>
+          <p:cNvPr id="48" name="Text 46"/>
+          <p:cNvSpPr/>
+          <p:nvPr/>
+        </p:nvSpPr>
+        <p:spPr>
+          <a:xfrm>
+            <a:off x="2542032" y="4498848"/>
             <a:ext cx="2011680" cy="402336"/>
           </a:xfrm>
           <a:prstGeom prst="rect">
@@ -34253,7 +36722,7 @@
                 <a:ea typeface="Trebuchet MS" pitchFamily="34" charset="-122"/>
                 <a:cs typeface="Trebuchet MS" pitchFamily="34" charset="-120"/>
               </a:rPr>
-              <a:t>filling</a:t>
+              <a:t>fillers</a:t>
             </a:r>
             <a:endParaRPr lang="en-US" sz="1200" dirty="0"/>
           </a:p>
@@ -34261,13 +36730,13 @@
       </p:sp>
       <p:sp>
         <p:nvSpPr>
-          <p:cNvPr id="48" name="Shape 46"/>
-          <p:cNvSpPr/>
-          <p:nvPr/>
-        </p:nvSpPr>
-        <p:spPr>
-          <a:xfrm>
-            <a:off x="4718304" y="4023360"/>
+          <p:cNvPr id="49" name="Shape 47"/>
+          <p:cNvSpPr/>
+          <p:nvPr/>
+        </p:nvSpPr>
+        <p:spPr>
+          <a:xfrm>
+            <a:off x="4718304" y="4498848"/>
             <a:ext cx="2011680" cy="402336"/>
           </a:xfrm>
           <a:prstGeom prst="rect">
@@ -34288,13 +36757,13 @@
       </p:sp>
       <p:sp>
         <p:nvSpPr>
-          <p:cNvPr id="49" name="Text 47"/>
-          <p:cNvSpPr/>
-          <p:nvPr/>
-        </p:nvSpPr>
-        <p:spPr>
-          <a:xfrm>
-            <a:off x="4718304" y="4023360"/>
+          <p:cNvPr id="50" name="Text 48"/>
+          <p:cNvSpPr/>
+          <p:nvPr/>
+        </p:nvSpPr>
+        <p:spPr>
+          <a:xfrm>
+            <a:off x="4718304" y="4498848"/>
             <a:ext cx="2011680" cy="402336"/>
           </a:xfrm>
           <a:prstGeom prst="rect">
@@ -34319,337 +36788,7 @@
                 <a:ea typeface="Trebuchet MS" pitchFamily="34" charset="-122"/>
                 <a:cs typeface="Trebuchet MS" pitchFamily="34" charset="-120"/>
               </a:rPr>
-              <a:t>filled</a:t>
-            </a:r>
-            <a:endParaRPr lang="en-US" sz="1200" dirty="0"/>
-          </a:p>
-        </p:txBody>
-      </p:sp>
-      <p:sp>
-        <p:nvSpPr>
-          <p:cNvPr id="50" name="Shape 48"/>
-          <p:cNvSpPr/>
-          <p:nvPr/>
-        </p:nvSpPr>
-        <p:spPr>
-          <a:xfrm>
-            <a:off x="6894576" y="4023360"/>
-            <a:ext cx="2011680" cy="402336"/>
-          </a:xfrm>
-          <a:prstGeom prst="rect">
-            <a:avLst>
-              <a:gd name="adj" fmla="val 13636"/>
-            </a:avLst>
-          </a:prstGeom>
-          <a:solidFill>
-            <a:srgbClr val="EEF2FF"/>
-          </a:solidFill>
-          <a:ln w="12700">
-            <a:solidFill>
-              <a:srgbClr val="6366F1"/>
-            </a:solidFill>
-            <a:prstDash val="solid"/>
-          </a:ln>
-        </p:spPr>
-      </p:sp>
-      <p:sp>
-        <p:nvSpPr>
-          <p:cNvPr id="51" name="Text 49"/>
-          <p:cNvSpPr/>
-          <p:nvPr/>
-        </p:nvSpPr>
-        <p:spPr>
-          <a:xfrm>
-            <a:off x="6894576" y="4023360"/>
-            <a:ext cx="2011680" cy="402336"/>
-          </a:xfrm>
-          <a:prstGeom prst="rect">
-            <a:avLst/>
-          </a:prstGeom>
-          <a:noFill/>
-          <a:ln/>
-        </p:spPr>
-        <p:txBody>
-          <a:bodyPr wrap="square" lIns="0" tIns="0" rIns="0" bIns="0" rtlCol="0" anchor="ctr"/>
-          <a:lstStyle/>
-          <a:p>
-            <a:pPr algn="ctr" indent="0" marL="0">
-              <a:buNone/>
-            </a:pPr>
-            <a:r>
-              <a:rPr lang="en-US" sz="1200" b="1" dirty="0">
-                <a:solidFill>
-                  <a:srgbClr val="4338CA"/>
-                </a:solidFill>
-                <a:latin typeface="Trebuchet MS" pitchFamily="34" charset="0"/>
-                <a:ea typeface="Trebuchet MS" pitchFamily="34" charset="-122"/>
-                <a:cs typeface="Trebuchet MS" pitchFamily="34" charset="-120"/>
-              </a:rPr>
-              <a:t>overfill</a:t>
-            </a:r>
-            <a:endParaRPr lang="en-US" sz="1200" dirty="0"/>
-          </a:p>
-        </p:txBody>
-      </p:sp>
-      <p:sp>
-        <p:nvSpPr>
-          <p:cNvPr id="52" name="Shape 50"/>
-          <p:cNvSpPr/>
-          <p:nvPr/>
-        </p:nvSpPr>
-        <p:spPr>
-          <a:xfrm>
-            <a:off x="365760" y="4498848"/>
-            <a:ext cx="2011680" cy="402336"/>
-          </a:xfrm>
-          <a:prstGeom prst="rect">
-            <a:avLst>
-              <a:gd name="adj" fmla="val 13636"/>
-            </a:avLst>
-          </a:prstGeom>
-          <a:solidFill>
-            <a:srgbClr val="EEF2FF"/>
-          </a:solidFill>
-          <a:ln w="12700">
-            <a:solidFill>
-              <a:srgbClr val="6366F1"/>
-            </a:solidFill>
-            <a:prstDash val="solid"/>
-          </a:ln>
-        </p:spPr>
-      </p:sp>
-      <p:sp>
-        <p:nvSpPr>
-          <p:cNvPr id="53" name="Text 51"/>
-          <p:cNvSpPr/>
-          <p:nvPr/>
-        </p:nvSpPr>
-        <p:spPr>
-          <a:xfrm>
-            <a:off x="365760" y="4498848"/>
-            <a:ext cx="2011680" cy="402336"/>
-          </a:xfrm>
-          <a:prstGeom prst="rect">
-            <a:avLst/>
-          </a:prstGeom>
-          <a:noFill/>
-          <a:ln/>
-        </p:spPr>
-        <p:txBody>
-          <a:bodyPr wrap="square" lIns="0" tIns="0" rIns="0" bIns="0" rtlCol="0" anchor="ctr"/>
-          <a:lstStyle/>
-          <a:p>
-            <a:pPr algn="ctr" indent="0" marL="0">
-              <a:buNone/>
-            </a:pPr>
-            <a:r>
-              <a:rPr lang="en-US" sz="1200" b="1" dirty="0">
-                <a:solidFill>
-                  <a:srgbClr val="4338CA"/>
-                </a:solidFill>
-                <a:latin typeface="Trebuchet MS" pitchFamily="34" charset="0"/>
-                <a:ea typeface="Trebuchet MS" pitchFamily="34" charset="-122"/>
-                <a:cs typeface="Trebuchet MS" pitchFamily="34" charset="-120"/>
-              </a:rPr>
-              <a:t>filler</a:t>
-            </a:r>
-            <a:endParaRPr lang="en-US" sz="1200" dirty="0"/>
-          </a:p>
-        </p:txBody>
-      </p:sp>
-      <p:sp>
-        <p:nvSpPr>
-          <p:cNvPr id="54" name="Shape 52"/>
-          <p:cNvSpPr/>
-          <p:nvPr/>
-        </p:nvSpPr>
-        <p:spPr>
-          <a:xfrm>
-            <a:off x="2542032" y="4498848"/>
-            <a:ext cx="2011680" cy="402336"/>
-          </a:xfrm>
-          <a:prstGeom prst="rect">
-            <a:avLst>
-              <a:gd name="adj" fmla="val 13636"/>
-            </a:avLst>
-          </a:prstGeom>
-          <a:solidFill>
-            <a:srgbClr val="EEF2FF"/>
-          </a:solidFill>
-          <a:ln w="12700">
-            <a:solidFill>
-              <a:srgbClr val="6366F1"/>
-            </a:solidFill>
-            <a:prstDash val="solid"/>
-          </a:ln>
-        </p:spPr>
-      </p:sp>
-      <p:sp>
-        <p:nvSpPr>
-          <p:cNvPr id="55" name="Text 53"/>
-          <p:cNvSpPr/>
-          <p:nvPr/>
-        </p:nvSpPr>
-        <p:spPr>
-          <a:xfrm>
-            <a:off x="2542032" y="4498848"/>
-            <a:ext cx="2011680" cy="402336"/>
-          </a:xfrm>
-          <a:prstGeom prst="rect">
-            <a:avLst/>
-          </a:prstGeom>
-          <a:noFill/>
-          <a:ln/>
-        </p:spPr>
-        <p:txBody>
-          <a:bodyPr wrap="square" lIns="0" tIns="0" rIns="0" bIns="0" rtlCol="0" anchor="ctr"/>
-          <a:lstStyle/>
-          <a:p>
-            <a:pPr algn="ctr" indent="0" marL="0">
-              <a:buNone/>
-            </a:pPr>
-            <a:r>
-              <a:rPr lang="en-US" sz="1200" b="1" dirty="0">
-                <a:solidFill>
-                  <a:srgbClr val="4338CA"/>
-                </a:solidFill>
-                <a:latin typeface="Trebuchet MS" pitchFamily="34" charset="0"/>
-                <a:ea typeface="Trebuchet MS" pitchFamily="34" charset="-122"/>
-                <a:cs typeface="Trebuchet MS" pitchFamily="34" charset="-120"/>
-              </a:rPr>
-              <a:t>fulfilment</a:t>
-            </a:r>
-            <a:endParaRPr lang="en-US" sz="1200" dirty="0"/>
-          </a:p>
-        </p:txBody>
-      </p:sp>
-      <p:sp>
-        <p:nvSpPr>
-          <p:cNvPr id="56" name="Shape 54"/>
-          <p:cNvSpPr/>
-          <p:nvPr/>
-        </p:nvSpPr>
-        <p:spPr>
-          <a:xfrm>
-            <a:off x="4718304" y="4498848"/>
-            <a:ext cx="2011680" cy="402336"/>
-          </a:xfrm>
-          <a:prstGeom prst="rect">
-            <a:avLst>
-              <a:gd name="adj" fmla="val 13636"/>
-            </a:avLst>
-          </a:prstGeom>
-          <a:solidFill>
-            <a:srgbClr val="EEF2FF"/>
-          </a:solidFill>
-          <a:ln w="12700">
-            <a:solidFill>
-              <a:srgbClr val="6366F1"/>
-            </a:solidFill>
-            <a:prstDash val="solid"/>
-          </a:ln>
-        </p:spPr>
-      </p:sp>
-      <p:sp>
-        <p:nvSpPr>
-          <p:cNvPr id="57" name="Text 55"/>
-          <p:cNvSpPr/>
-          <p:nvPr/>
-        </p:nvSpPr>
-        <p:spPr>
-          <a:xfrm>
-            <a:off x="4718304" y="4498848"/>
-            <a:ext cx="2011680" cy="402336"/>
-          </a:xfrm>
-          <a:prstGeom prst="rect">
-            <a:avLst/>
-          </a:prstGeom>
-          <a:noFill/>
-          <a:ln/>
-        </p:spPr>
-        <p:txBody>
-          <a:bodyPr wrap="square" lIns="0" tIns="0" rIns="0" bIns="0" rtlCol="0" anchor="ctr"/>
-          <a:lstStyle/>
-          <a:p>
-            <a:pPr algn="ctr" indent="0" marL="0">
-              <a:buNone/>
-            </a:pPr>
-            <a:r>
-              <a:rPr lang="en-US" sz="1200" b="1" dirty="0">
-                <a:solidFill>
-                  <a:srgbClr val="4338CA"/>
-                </a:solidFill>
-                <a:latin typeface="Trebuchet MS" pitchFamily="34" charset="0"/>
-                <a:ea typeface="Trebuchet MS" pitchFamily="34" charset="-122"/>
-                <a:cs typeface="Trebuchet MS" pitchFamily="34" charset="-120"/>
-              </a:rPr>
-              <a:t>infill</a:t>
-            </a:r>
-            <a:endParaRPr lang="en-US" sz="1200" dirty="0"/>
-          </a:p>
-        </p:txBody>
-      </p:sp>
-      <p:sp>
-        <p:nvSpPr>
-          <p:cNvPr id="58" name="Shape 56"/>
-          <p:cNvSpPr/>
-          <p:nvPr/>
-        </p:nvSpPr>
-        <p:spPr>
-          <a:xfrm>
-            <a:off x="6894576" y="4498848"/>
-            <a:ext cx="2011680" cy="402336"/>
-          </a:xfrm>
-          <a:prstGeom prst="rect">
-            <a:avLst>
-              <a:gd name="adj" fmla="val 13636"/>
-            </a:avLst>
-          </a:prstGeom>
-          <a:solidFill>
-            <a:srgbClr val="EEF2FF"/>
-          </a:solidFill>
-          <a:ln w="12700">
-            <a:solidFill>
-              <a:srgbClr val="6366F1"/>
-            </a:solidFill>
-            <a:prstDash val="solid"/>
-          </a:ln>
-        </p:spPr>
-      </p:sp>
-      <p:sp>
-        <p:nvSpPr>
-          <p:cNvPr id="59" name="Text 57"/>
-          <p:cNvSpPr/>
-          <p:nvPr/>
-        </p:nvSpPr>
-        <p:spPr>
-          <a:xfrm>
-            <a:off x="6894576" y="4498848"/>
-            <a:ext cx="2011680" cy="402336"/>
-          </a:xfrm>
-          <a:prstGeom prst="rect">
-            <a:avLst/>
-          </a:prstGeom>
-          <a:noFill/>
-          <a:ln/>
-        </p:spPr>
-        <p:txBody>
-          <a:bodyPr wrap="square" lIns="0" tIns="0" rIns="0" bIns="0" rtlCol="0" anchor="ctr"/>
-          <a:lstStyle/>
-          <a:p>
-            <a:pPr algn="ctr" indent="0" marL="0">
-              <a:buNone/>
-            </a:pPr>
-            <a:r>
-              <a:rPr lang="en-US" sz="1200" b="1" dirty="0">
-                <a:solidFill>
-                  <a:srgbClr val="4338CA"/>
-                </a:solidFill>
-                <a:latin typeface="Trebuchet MS" pitchFamily="34" charset="0"/>
-                <a:ea typeface="Trebuchet MS" pitchFamily="34" charset="-122"/>
-                <a:cs typeface="Trebuchet MS" pitchFamily="34" charset="-120"/>
-              </a:rPr>
-              <a:t>backfill</a:t>
+              <a:t>filling</a:t>
             </a:r>
             <a:endParaRPr lang="en-US" sz="1200" dirty="0"/>
           </a:p>
@@ -34941,7 +37080,7 @@
                 <a:ea typeface="Calibri" pitchFamily="34" charset="-122"/>
                 <a:cs typeface="Calibri" pitchFamily="34" charset="-120"/>
               </a:rPr>
-              <a:t>Word Labs  •  wordlabs.app  •  Root: 'fill' = to make full, occupy</a:t>
+              <a:t>Word Labs  •  wordlabs.app  •  Root: 'fill' = to make full</a:t>
             </a:r>
             <a:endParaRPr lang="en-US" sz="800" dirty="0"/>
           </a:p>
@@ -35105,7 +37244,7 @@
                 <a:ea typeface="Calibri" pitchFamily="34" charset="-122"/>
                 <a:cs typeface="Calibri" pitchFamily="34" charset="-120"/>
               </a:rPr>
-              <a:t>The core part of a word carrying its basic meaning. For example, 'fill' means 'to make full, occupy'.</a:t>
+              <a:t>The core part of a word carrying its basic meaning. For example, 'fill' means 'to make full'.</a:t>
             </a:r>
             <a:endParaRPr lang="en-US" sz="1350" dirty="0"/>
           </a:p>
@@ -35725,7 +37864,7 @@
                 <a:ea typeface="Calibri" pitchFamily="34" charset="-122"/>
                 <a:cs typeface="Calibri" pitchFamily="34" charset="-120"/>
               </a:rPr>
-              <a:t>Word Labs  •  wordlabs.app  •  Root: 'fill' = to make full, occupy</a:t>
+              <a:t>Word Labs  •  wordlabs.app  •  Root: 'fill' = to make full</a:t>
             </a:r>
             <a:endParaRPr lang="en-US" sz="800" dirty="0"/>
           </a:p>
@@ -35837,7 +37976,7 @@
                 <a:ea typeface="Calibri" pitchFamily="34" charset="-122"/>
                 <a:cs typeface="Calibri" pitchFamily="34" charset="-120"/>
               </a:rPr>
-              <a:t>1.  The root 'fill' comes from a Greek word.</a:t>
+              <a:t>1.  'fills' means 'makes something full (used with he, she, or it)'.</a:t>
             </a:r>
             <a:endParaRPr lang="en-US" sz="1300" dirty="0"/>
           </a:p>
@@ -35860,11 +37999,11 @@
             </a:avLst>
           </a:prstGeom>
           <a:solidFill>
-            <a:srgbClr val="FEE2E2"/>
-          </a:solidFill>
-          <a:ln w="12700">
-            <a:solidFill>
-              <a:srgbClr val="DC2626"/>
+            <a:srgbClr val="DCFCE7"/>
+          </a:solidFill>
+          <a:ln w="12700">
+            <a:solidFill>
+              <a:srgbClr val="16A34A"/>
             </a:solidFill>
             <a:prstDash val="solid"/>
           </a:ln>
@@ -35897,13 +38036,13 @@
             <a:r>
               <a:rPr lang="en-US" sz="1100" b="1" dirty="0">
                 <a:solidFill>
-                  <a:srgbClr val="DC2626"/>
+                  <a:srgbClr val="16A34A"/>
                 </a:solidFill>
                 <a:latin typeface="Trebuchet MS" pitchFamily="34" charset="0"/>
                 <a:ea typeface="Trebuchet MS" pitchFamily="34" charset="-122"/>
                 <a:cs typeface="Trebuchet MS" pitchFamily="34" charset="-120"/>
               </a:rPr>
-              <a:t>FALSE</a:t>
+              <a:t>TRUE</a:t>
             </a:r>
             <a:endParaRPr lang="en-US" sz="1100" dirty="0"/>
           </a:p>
@@ -35976,7 +38115,7 @@
                 <a:ea typeface="Calibri" pitchFamily="34" charset="-122"/>
                 <a:cs typeface="Calibri" pitchFamily="34" charset="-120"/>
               </a:rPr>
-              <a:t>2.  Adding the prefix 're' to 'fill' creates a word meaning to fill again.</a:t>
+              <a:t>2.  'fill' means 'to make something full'.</a:t>
             </a:r>
             <a:endParaRPr lang="en-US" sz="1300" dirty="0"/>
           </a:p>
@@ -36115,7 +38254,7 @@
                 <a:ea typeface="Calibri" pitchFamily="34" charset="-122"/>
                 <a:cs typeface="Calibri" pitchFamily="34" charset="-120"/>
               </a:rPr>
-              <a:t>3.  The suffix '-ment' in 'fulfilment' means to do again.</a:t>
+              <a:t>3.  'fills' means 'empties something out'.</a:t>
             </a:r>
             <a:endParaRPr lang="en-US" sz="1300" dirty="0"/>
           </a:p>
@@ -36254,7 +38393,7 @@
                 <a:ea typeface="Calibri" pitchFamily="34" charset="-122"/>
                 <a:cs typeface="Calibri" pitchFamily="34" charset="-120"/>
               </a:rPr>
-              <a:t>4.  The word 'refill' contains the root 'fill' meaning to make full.</a:t>
+              <a:t>4.  'fill' means 'to make something empty'.</a:t>
             </a:r>
             <a:endParaRPr lang="en-US" sz="1300" dirty="0"/>
           </a:p>
@@ -36277,11 +38416,11 @@
             </a:avLst>
           </a:prstGeom>
           <a:solidFill>
-            <a:srgbClr val="DCFCE7"/>
-          </a:solidFill>
-          <a:ln w="12700">
-            <a:solidFill>
-              <a:srgbClr val="16A34A"/>
+            <a:srgbClr val="FEE2E2"/>
+          </a:solidFill>
+          <a:ln w="12700">
+            <a:solidFill>
+              <a:srgbClr val="DC2626"/>
             </a:solidFill>
             <a:prstDash val="solid"/>
           </a:ln>
@@ -36314,13 +38453,13 @@
             <a:r>
               <a:rPr lang="en-US" sz="1100" b="1" dirty="0">
                 <a:solidFill>
-                  <a:srgbClr val="16A34A"/>
+                  <a:srgbClr val="DC2626"/>
                 </a:solidFill>
                 <a:latin typeface="Trebuchet MS" pitchFamily="34" charset="0"/>
                 <a:ea typeface="Trebuchet MS" pitchFamily="34" charset="-122"/>
                 <a:cs typeface="Trebuchet MS" pitchFamily="34" charset="-120"/>
               </a:rPr>
-              <a:t>TRUE</a:t>
+              <a:t>FALSE</a:t>
             </a:r>
             <a:endParaRPr lang="en-US" sz="1100" dirty="0"/>
           </a:p>
@@ -36393,7 +38532,7 @@
                 <a:ea typeface="Calibri" pitchFamily="34" charset="-122"/>
                 <a:cs typeface="Calibri" pitchFamily="34" charset="-120"/>
               </a:rPr>
-              <a:t>5.  The word 'overfill' means to put too much into something.</a:t>
+              <a:t>5.  'fill' means 'to make full'.</a:t>
             </a:r>
             <a:endParaRPr lang="en-US" sz="1300" dirty="0"/>
           </a:p>
@@ -36751,7 +38890,7 @@
                 <a:ea typeface="Calibri" pitchFamily="34" charset="-122"/>
                 <a:cs typeface="Calibri" pitchFamily="34" charset="-120"/>
               </a:rPr>
-              <a:t>Word Labs  •  wordlabs.app  •  Root: 'fill' = to make full, occupy</a:t>
+              <a:t>Word Labs  •  wordlabs.app  •  Root: 'fill' = to make full</a:t>
             </a:r>
             <a:endParaRPr lang="en-US" sz="800" dirty="0"/>
           </a:p>
@@ -36888,7 +39027,7 @@
                 <a:ea typeface="Trebuchet MS" pitchFamily="34" charset="-122"/>
                 <a:cs typeface="Trebuchet MS" pitchFamily="34" charset="-120"/>
               </a:rPr>
-              <a:t>to make full, occupy</a:t>
+              <a:t>to make full</a:t>
             </a:r>
             <a:endParaRPr lang="en-US" sz="2000" dirty="0"/>
           </a:p>
@@ -36927,7 +39066,7 @@
                 <a:ea typeface="Calibri" pitchFamily="34" charset="-122"/>
                 <a:cs typeface="Calibri" pitchFamily="34" charset="-120"/>
               </a:rPr>
-              <a:t>Origin: Latin: filare</a:t>
+              <a:t>Origin: Anglo-Saxon (Old English) root</a:t>
             </a:r>
             <a:endParaRPr lang="en-US" sz="1100" dirty="0"/>
           </a:p>
@@ -37032,7 +39171,7 @@
                 <a:ea typeface="Trebuchet MS" pitchFamily="34" charset="-122"/>
                 <a:cs typeface="Trebuchet MS" pitchFamily="34" charset="-120"/>
               </a:rPr>
-              <a:t>refill</a:t>
+              <a:t>fill</a:t>
             </a:r>
             <a:endParaRPr lang="en-US" sz="1300" dirty="0"/>
           </a:p>
@@ -37098,7 +39237,7 @@
                 <a:ea typeface="Trebuchet MS" pitchFamily="34" charset="-122"/>
                 <a:cs typeface="Trebuchet MS" pitchFamily="34" charset="-120"/>
               </a:rPr>
-              <a:t>filling</a:t>
+              <a:t>fills</a:t>
             </a:r>
             <a:endParaRPr lang="en-US" sz="1300" dirty="0"/>
           </a:p>
@@ -37230,7 +39369,7 @@
                 <a:ea typeface="Trebuchet MS" pitchFamily="34" charset="-122"/>
                 <a:cs typeface="Trebuchet MS" pitchFamily="34" charset="-120"/>
               </a:rPr>
-              <a:t>overfill</a:t>
+              <a:t>filler</a:t>
             </a:r>
             <a:endParaRPr lang="en-US" sz="1300" dirty="0"/>
           </a:p>
@@ -37296,7 +39435,7 @@
                 <a:ea typeface="Trebuchet MS" pitchFamily="34" charset="-122"/>
                 <a:cs typeface="Trebuchet MS" pitchFamily="34" charset="-120"/>
               </a:rPr>
-              <a:t>filler</a:t>
+              <a:t>refill</a:t>
             </a:r>
             <a:endParaRPr lang="en-US" sz="1300" dirty="0"/>
           </a:p>
@@ -37362,7 +39501,7 @@
                 <a:ea typeface="Trebuchet MS" pitchFamily="34" charset="-122"/>
                 <a:cs typeface="Trebuchet MS" pitchFamily="34" charset="-120"/>
               </a:rPr>
-              <a:t>fulfilment</a:t>
+              <a:t>fillers</a:t>
             </a:r>
             <a:endParaRPr lang="en-US" sz="1300" dirty="0"/>
           </a:p>
@@ -37428,7 +39567,7 @@
                 <a:ea typeface="Trebuchet MS" pitchFamily="34" charset="-122"/>
                 <a:cs typeface="Trebuchet MS" pitchFamily="34" charset="-120"/>
               </a:rPr>
-              <a:t>infill</a:t>
+              <a:t>filling</a:t>
             </a:r>
             <a:endParaRPr lang="en-US" sz="1300" dirty="0"/>
           </a:p>
@@ -37720,7 +39859,7 @@
                 <a:ea typeface="Calibri" pitchFamily="34" charset="-122"/>
                 <a:cs typeface="Calibri" pitchFamily="34" charset="-120"/>
               </a:rPr>
-              <a:t>Word Labs  •  wordlabs.app  •  Root: 'fill' = to make full, occupy</a:t>
+              <a:t>Word Labs  •  wordlabs.app  •  Root: 'fill' = to make full</a:t>
             </a:r>
             <a:endParaRPr lang="en-US" sz="800" dirty="0"/>
           </a:p>
@@ -38021,7 +40160,7 @@
                 <a:ea typeface="Trebuchet MS" pitchFamily="34" charset="-122"/>
                 <a:cs typeface="Trebuchet MS" pitchFamily="34" charset="-120"/>
               </a:rPr>
-              <a:t>re-</a:t>
+              <a:t>over-</a:t>
             </a:r>
             <a:endParaRPr lang="en-US" sz="1300" dirty="0"/>
           </a:p>
@@ -38213,7 +40352,7 @@
                 <a:ea typeface="Trebuchet MS" pitchFamily="34" charset="-122"/>
                 <a:cs typeface="Trebuchet MS" pitchFamily="34" charset="-120"/>
               </a:rPr>
-              <a:t>over-</a:t>
+              <a:t>re-</a:t>
             </a:r>
             <a:endParaRPr lang="en-US" sz="1300" dirty="0"/>
           </a:p>
@@ -38302,7 +40441,7 @@
                 <a:ea typeface="Trebuchet MS" pitchFamily="34" charset="-122"/>
                 <a:cs typeface="Trebuchet MS" pitchFamily="34" charset="-120"/>
               </a:rPr>
-              <a:t>-ing</a:t>
+              <a:t>-er</a:t>
             </a:r>
             <a:endParaRPr lang="en-US" sz="1300" dirty="0"/>
           </a:p>
@@ -38323,7 +40462,7 @@
             <a:avLst/>
           </a:prstGeom>
           <a:solidFill>
-            <a:srgbClr val="DDD6FE"/>
+            <a:srgbClr val="F8FAFC"/>
           </a:solidFill>
           <a:ln w="12700">
             <a:solidFill>
@@ -38335,18 +40474,68 @@
       </p:sp>
       <p:sp>
         <p:nvSpPr>
-          <p:cNvPr id="29" name="Text 27"/>
-          <p:cNvSpPr/>
-          <p:nvPr/>
-        </p:nvSpPr>
-        <p:spPr>
-          <a:xfrm>
-            <a:off x="640080" y="2670048"/>
+          <p:cNvPr id="29" name="Shape 27"/>
+          <p:cNvSpPr/>
+          <p:nvPr/>
+        </p:nvSpPr>
+        <p:spPr>
+          <a:xfrm>
+            <a:off x="3291840" y="2670048"/>
+            <a:ext cx="1645920" cy="420624"/>
+          </a:xfrm>
+          <a:prstGeom prst="rect">
+            <a:avLst/>
+          </a:prstGeom>
+          <a:solidFill>
+            <a:srgbClr val="F8FAFC"/>
+          </a:solidFill>
+          <a:ln w="12700">
+            <a:solidFill>
+              <a:srgbClr val="E5E7EB"/>
+            </a:solidFill>
+            <a:prstDash val="solid"/>
+          </a:ln>
+        </p:spPr>
+      </p:sp>
+      <p:sp>
+        <p:nvSpPr>
+          <p:cNvPr id="30" name="Shape 28"/>
+          <p:cNvSpPr/>
+          <p:nvPr/>
+        </p:nvSpPr>
+        <p:spPr>
+          <a:xfrm>
+            <a:off x="5943600" y="2670048"/>
             <a:ext cx="1463040" cy="420624"/>
           </a:xfrm>
           <a:prstGeom prst="rect">
             <a:avLst/>
           </a:prstGeom>
+          <a:solidFill>
+            <a:srgbClr val="FCE7F3"/>
+          </a:solidFill>
+          <a:ln w="12700">
+            <a:solidFill>
+              <a:srgbClr val="E5E7EB"/>
+            </a:solidFill>
+            <a:prstDash val="solid"/>
+          </a:ln>
+        </p:spPr>
+      </p:sp>
+      <p:sp>
+        <p:nvSpPr>
+          <p:cNvPr id="31" name="Text 29"/>
+          <p:cNvSpPr/>
+          <p:nvPr/>
+        </p:nvSpPr>
+        <p:spPr>
+          <a:xfrm>
+            <a:off x="5943600" y="2670048"/>
+            <a:ext cx="1463040" cy="420624"/>
+          </a:xfrm>
+          <a:prstGeom prst="rect">
+            <a:avLst/>
+          </a:prstGeom>
           <a:noFill/>
           <a:ln/>
         </p:spPr>
@@ -38360,13 +40549,13 @@
             <a:r>
               <a:rPr lang="en-US" sz="1300" b="1" dirty="0">
                 <a:solidFill>
-                  <a:srgbClr val="4C1D95"/>
+                  <a:srgbClr val="9D174D"/>
                 </a:solidFill>
                 <a:latin typeface="Trebuchet MS" pitchFamily="34" charset="0"/>
                 <a:ea typeface="Trebuchet MS" pitchFamily="34" charset="-122"/>
                 <a:cs typeface="Trebuchet MS" pitchFamily="34" charset="-120"/>
               </a:rPr>
-              <a:t>in-</a:t>
+              <a:t>-ing</a:t>
             </a:r>
             <a:endParaRPr lang="en-US" sz="1300" dirty="0"/>
           </a:p>
@@ -38374,20 +40563,45 @@
       </p:sp>
       <p:sp>
         <p:nvSpPr>
-          <p:cNvPr id="30" name="Shape 28"/>
-          <p:cNvSpPr/>
-          <p:nvPr/>
-        </p:nvSpPr>
-        <p:spPr>
-          <a:xfrm>
-            <a:off x="3291840" y="2670048"/>
+          <p:cNvPr id="32" name="Shape 30"/>
+          <p:cNvSpPr/>
+          <p:nvPr/>
+        </p:nvSpPr>
+        <p:spPr>
+          <a:xfrm>
+            <a:off x="640080" y="3127248"/>
+            <a:ext cx="1463040" cy="420624"/>
+          </a:xfrm>
+          <a:prstGeom prst="rect">
+            <a:avLst/>
+          </a:prstGeom>
+          <a:solidFill>
+            <a:srgbClr val="F1F5F9"/>
+          </a:solidFill>
+          <a:ln w="12700">
+            <a:solidFill>
+              <a:srgbClr val="E5E7EB"/>
+            </a:solidFill>
+            <a:prstDash val="solid"/>
+          </a:ln>
+        </p:spPr>
+      </p:sp>
+      <p:sp>
+        <p:nvSpPr>
+          <p:cNvPr id="33" name="Shape 31"/>
+          <p:cNvSpPr/>
+          <p:nvPr/>
+        </p:nvSpPr>
+        <p:spPr>
+          <a:xfrm>
+            <a:off x="3291840" y="3127248"/>
             <a:ext cx="1645920" cy="420624"/>
           </a:xfrm>
           <a:prstGeom prst="rect">
             <a:avLst/>
           </a:prstGeom>
           <a:solidFill>
-            <a:srgbClr val="F8FAFC"/>
+            <a:srgbClr val="F1F5F9"/>
           </a:solidFill>
           <a:ln w="12700">
             <a:solidFill>
@@ -38399,13 +40613,13 @@
       </p:sp>
       <p:sp>
         <p:nvSpPr>
-          <p:cNvPr id="31" name="Shape 29"/>
-          <p:cNvSpPr/>
-          <p:nvPr/>
-        </p:nvSpPr>
-        <p:spPr>
-          <a:xfrm>
-            <a:off x="5943600" y="2670048"/>
+          <p:cNvPr id="34" name="Shape 32"/>
+          <p:cNvSpPr/>
+          <p:nvPr/>
+        </p:nvSpPr>
+        <p:spPr>
+          <a:xfrm>
+            <a:off x="5943600" y="3127248"/>
             <a:ext cx="1463040" cy="420624"/>
           </a:xfrm>
           <a:prstGeom prst="rect">
@@ -38424,13 +40638,13 @@
       </p:sp>
       <p:sp>
         <p:nvSpPr>
-          <p:cNvPr id="32" name="Text 30"/>
-          <p:cNvSpPr/>
-          <p:nvPr/>
-        </p:nvSpPr>
-        <p:spPr>
-          <a:xfrm>
-            <a:off x="5943600" y="2670048"/>
+          <p:cNvPr id="35" name="Text 33"/>
+          <p:cNvSpPr/>
+          <p:nvPr/>
+        </p:nvSpPr>
+        <p:spPr>
+          <a:xfrm>
+            <a:off x="5943600" y="3127248"/>
             <a:ext cx="1463040" cy="420624"/>
           </a:xfrm>
           <a:prstGeom prst="rect">
@@ -38455,7 +40669,7 @@
                 <a:ea typeface="Trebuchet MS" pitchFamily="34" charset="-122"/>
                 <a:cs typeface="Trebuchet MS" pitchFamily="34" charset="-120"/>
               </a:rPr>
-              <a:t>-er</a:t>
+              <a:t>-s</a:t>
             </a:r>
             <a:endParaRPr lang="en-US" sz="1300" dirty="0"/>
           </a:p>
@@ -38463,319 +40677,13 @@
       </p:sp>
       <p:sp>
         <p:nvSpPr>
-          <p:cNvPr id="33" name="Shape 31"/>
-          <p:cNvSpPr/>
-          <p:nvPr/>
-        </p:nvSpPr>
-        <p:spPr>
-          <a:xfrm>
-            <a:off x="640080" y="3127248"/>
-            <a:ext cx="1463040" cy="420624"/>
-          </a:xfrm>
-          <a:prstGeom prst="rect">
-            <a:avLst/>
-          </a:prstGeom>
-          <a:solidFill>
-            <a:srgbClr val="DDD6FE"/>
-          </a:solidFill>
-          <a:ln w="12700">
-            <a:solidFill>
-              <a:srgbClr val="E5E7EB"/>
-            </a:solidFill>
-            <a:prstDash val="solid"/>
-          </a:ln>
-        </p:spPr>
-      </p:sp>
-      <p:sp>
-        <p:nvSpPr>
-          <p:cNvPr id="34" name="Text 32"/>
-          <p:cNvSpPr/>
-          <p:nvPr/>
-        </p:nvSpPr>
-        <p:spPr>
-          <a:xfrm>
-            <a:off x="640080" y="3127248"/>
-            <a:ext cx="1463040" cy="420624"/>
-          </a:xfrm>
-          <a:prstGeom prst="rect">
-            <a:avLst/>
-          </a:prstGeom>
-          <a:noFill/>
-          <a:ln/>
-        </p:spPr>
-        <p:txBody>
-          <a:bodyPr wrap="square" lIns="0" tIns="0" rIns="0" bIns="0" rtlCol="0" anchor="ctr"/>
-          <a:lstStyle/>
-          <a:p>
-            <a:pPr algn="ctr" indent="0" marL="0">
-              <a:buNone/>
-            </a:pPr>
-            <a:r>
-              <a:rPr lang="en-US" sz="1300" b="1" dirty="0">
-                <a:solidFill>
-                  <a:srgbClr val="4C1D95"/>
-                </a:solidFill>
-                <a:latin typeface="Trebuchet MS" pitchFamily="34" charset="0"/>
-                <a:ea typeface="Trebuchet MS" pitchFamily="34" charset="-122"/>
-                <a:cs typeface="Trebuchet MS" pitchFamily="34" charset="-120"/>
-              </a:rPr>
-              <a:t>under-</a:t>
-            </a:r>
-            <a:endParaRPr lang="en-US" sz="1300" dirty="0"/>
-          </a:p>
-        </p:txBody>
-      </p:sp>
-      <p:sp>
-        <p:nvSpPr>
-          <p:cNvPr id="35" name="Shape 33"/>
-          <p:cNvSpPr/>
-          <p:nvPr/>
-        </p:nvSpPr>
-        <p:spPr>
-          <a:xfrm>
-            <a:off x="3291840" y="3127248"/>
-            <a:ext cx="1645920" cy="420624"/>
-          </a:xfrm>
-          <a:prstGeom prst="rect">
-            <a:avLst/>
-          </a:prstGeom>
-          <a:solidFill>
-            <a:srgbClr val="F1F5F9"/>
-          </a:solidFill>
-          <a:ln w="12700">
-            <a:solidFill>
-              <a:srgbClr val="E5E7EB"/>
-            </a:solidFill>
-            <a:prstDash val="solid"/>
-          </a:ln>
-        </p:spPr>
-      </p:sp>
-      <p:sp>
-        <p:nvSpPr>
-          <p:cNvPr id="36" name="Shape 34"/>
-          <p:cNvSpPr/>
-          <p:nvPr/>
-        </p:nvSpPr>
-        <p:spPr>
-          <a:xfrm>
-            <a:off x="5943600" y="3127248"/>
-            <a:ext cx="1463040" cy="420624"/>
-          </a:xfrm>
-          <a:prstGeom prst="rect">
-            <a:avLst/>
-          </a:prstGeom>
-          <a:solidFill>
-            <a:srgbClr val="FCE7F3"/>
-          </a:solidFill>
-          <a:ln w="12700">
-            <a:solidFill>
-              <a:srgbClr val="E5E7EB"/>
-            </a:solidFill>
-            <a:prstDash val="solid"/>
-          </a:ln>
-        </p:spPr>
-      </p:sp>
-      <p:sp>
-        <p:nvSpPr>
-          <p:cNvPr id="37" name="Text 35"/>
-          <p:cNvSpPr/>
-          <p:nvPr/>
-        </p:nvSpPr>
-        <p:spPr>
-          <a:xfrm>
-            <a:off x="5943600" y="3127248"/>
-            <a:ext cx="1463040" cy="420624"/>
-          </a:xfrm>
-          <a:prstGeom prst="rect">
-            <a:avLst/>
-          </a:prstGeom>
-          <a:noFill/>
-          <a:ln/>
-        </p:spPr>
-        <p:txBody>
-          <a:bodyPr wrap="square" lIns="0" tIns="0" rIns="0" bIns="0" rtlCol="0" anchor="ctr"/>
-          <a:lstStyle/>
-          <a:p>
-            <a:pPr algn="ctr" indent="0" marL="0">
-              <a:buNone/>
-            </a:pPr>
-            <a:r>
-              <a:rPr lang="en-US" sz="1300" b="1" dirty="0">
-                <a:solidFill>
-                  <a:srgbClr val="9D174D"/>
-                </a:solidFill>
-                <a:latin typeface="Trebuchet MS" pitchFamily="34" charset="0"/>
-                <a:ea typeface="Trebuchet MS" pitchFamily="34" charset="-122"/>
-                <a:cs typeface="Trebuchet MS" pitchFamily="34" charset="-120"/>
-              </a:rPr>
-              <a:t>-ment</a:t>
-            </a:r>
-            <a:endParaRPr lang="en-US" sz="1300" dirty="0"/>
-          </a:p>
-        </p:txBody>
-      </p:sp>
-      <p:sp>
-        <p:nvSpPr>
-          <p:cNvPr id="38" name="Shape 36"/>
-          <p:cNvSpPr/>
-          <p:nvPr/>
-        </p:nvSpPr>
-        <p:spPr>
-          <a:xfrm>
-            <a:off x="640080" y="3584448"/>
-            <a:ext cx="1463040" cy="420624"/>
-          </a:xfrm>
-          <a:prstGeom prst="rect">
-            <a:avLst/>
-          </a:prstGeom>
-          <a:solidFill>
-            <a:srgbClr val="DDD6FE"/>
-          </a:solidFill>
-          <a:ln w="12700">
-            <a:solidFill>
-              <a:srgbClr val="E5E7EB"/>
-            </a:solidFill>
-            <a:prstDash val="solid"/>
-          </a:ln>
-        </p:spPr>
-      </p:sp>
-      <p:sp>
-        <p:nvSpPr>
-          <p:cNvPr id="39" name="Text 37"/>
-          <p:cNvSpPr/>
-          <p:nvPr/>
-        </p:nvSpPr>
-        <p:spPr>
-          <a:xfrm>
-            <a:off x="640080" y="3584448"/>
-            <a:ext cx="1463040" cy="420624"/>
-          </a:xfrm>
-          <a:prstGeom prst="rect">
-            <a:avLst/>
-          </a:prstGeom>
-          <a:noFill/>
-          <a:ln/>
-        </p:spPr>
-        <p:txBody>
-          <a:bodyPr wrap="square" lIns="0" tIns="0" rIns="0" bIns="0" rtlCol="0" anchor="ctr"/>
-          <a:lstStyle/>
-          <a:p>
-            <a:pPr algn="ctr" indent="0" marL="0">
-              <a:buNone/>
-            </a:pPr>
-            <a:r>
-              <a:rPr lang="en-US" sz="1300" b="1" dirty="0">
-                <a:solidFill>
-                  <a:srgbClr val="4C1D95"/>
-                </a:solidFill>
-                <a:latin typeface="Trebuchet MS" pitchFamily="34" charset="0"/>
-                <a:ea typeface="Trebuchet MS" pitchFamily="34" charset="-122"/>
-                <a:cs typeface="Trebuchet MS" pitchFamily="34" charset="-120"/>
-              </a:rPr>
-              <a:t>back-</a:t>
-            </a:r>
-            <a:endParaRPr lang="en-US" sz="1300" dirty="0"/>
-          </a:p>
-        </p:txBody>
-      </p:sp>
-      <p:sp>
-        <p:nvSpPr>
-          <p:cNvPr id="40" name="Shape 38"/>
-          <p:cNvSpPr/>
-          <p:nvPr/>
-        </p:nvSpPr>
-        <p:spPr>
-          <a:xfrm>
-            <a:off x="3291840" y="3584448"/>
-            <a:ext cx="1645920" cy="420624"/>
-          </a:xfrm>
-          <a:prstGeom prst="rect">
-            <a:avLst/>
-          </a:prstGeom>
-          <a:solidFill>
-            <a:srgbClr val="F8FAFC"/>
-          </a:solidFill>
-          <a:ln w="12700">
-            <a:solidFill>
-              <a:srgbClr val="E5E7EB"/>
-            </a:solidFill>
-            <a:prstDash val="solid"/>
-          </a:ln>
-        </p:spPr>
-      </p:sp>
-      <p:sp>
-        <p:nvSpPr>
-          <p:cNvPr id="41" name="Shape 39"/>
-          <p:cNvSpPr/>
-          <p:nvPr/>
-        </p:nvSpPr>
-        <p:spPr>
-          <a:xfrm>
-            <a:off x="5943600" y="3584448"/>
-            <a:ext cx="1463040" cy="420624"/>
-          </a:xfrm>
-          <a:prstGeom prst="rect">
-            <a:avLst/>
-          </a:prstGeom>
-          <a:solidFill>
-            <a:srgbClr val="FCE7F3"/>
-          </a:solidFill>
-          <a:ln w="12700">
-            <a:solidFill>
-              <a:srgbClr val="E5E7EB"/>
-            </a:solidFill>
-            <a:prstDash val="solid"/>
-          </a:ln>
-        </p:spPr>
-      </p:sp>
-      <p:sp>
-        <p:nvSpPr>
-          <p:cNvPr id="42" name="Text 40"/>
-          <p:cNvSpPr/>
-          <p:nvPr/>
-        </p:nvSpPr>
-        <p:spPr>
-          <a:xfrm>
-            <a:off x="5943600" y="3584448"/>
-            <a:ext cx="1463040" cy="420624"/>
-          </a:xfrm>
-          <a:prstGeom prst="rect">
-            <a:avLst/>
-          </a:prstGeom>
-          <a:noFill/>
-          <a:ln/>
-        </p:spPr>
-        <p:txBody>
-          <a:bodyPr wrap="square" lIns="0" tIns="0" rIns="0" bIns="0" rtlCol="0" anchor="ctr"/>
-          <a:lstStyle/>
-          <a:p>
-            <a:pPr algn="ctr" indent="0" marL="0">
-              <a:buNone/>
-            </a:pPr>
-            <a:r>
-              <a:rPr lang="en-US" sz="1300" b="1" dirty="0">
-                <a:solidFill>
-                  <a:srgbClr val="9D174D"/>
-                </a:solidFill>
-                <a:latin typeface="Trebuchet MS" pitchFamily="34" charset="0"/>
-                <a:ea typeface="Trebuchet MS" pitchFamily="34" charset="-122"/>
-                <a:cs typeface="Trebuchet MS" pitchFamily="34" charset="-120"/>
-              </a:rPr>
-              <a:t>-able</a:t>
-            </a:r>
-            <a:endParaRPr lang="en-US" sz="1300" dirty="0"/>
-          </a:p>
-        </p:txBody>
-      </p:sp>
-      <p:sp>
-        <p:nvSpPr>
-          <p:cNvPr id="43" name="Text 41"/>
-          <p:cNvSpPr/>
-          <p:nvPr/>
-        </p:nvSpPr>
-        <p:spPr>
-          <a:xfrm>
-            <a:off x="365760" y="4178808"/>
+          <p:cNvPr id="36" name="Text 34"/>
+          <p:cNvSpPr/>
+          <p:nvPr/>
+        </p:nvSpPr>
+        <p:spPr>
+          <a:xfrm>
+            <a:off x="365760" y="3721608"/>
             <a:ext cx="1097280" cy="420624"/>
           </a:xfrm>
           <a:prstGeom prst="rect">
@@ -38808,14 +40716,14 @@
       </p:sp>
       <p:sp>
         <p:nvSpPr>
-          <p:cNvPr id="44" name="Shape 42"/>
-          <p:cNvSpPr/>
-          <p:nvPr/>
-        </p:nvSpPr>
-        <p:spPr>
-          <a:xfrm>
-            <a:off x="1508760" y="4178808"/>
-            <a:ext cx="822960" cy="420624"/>
+          <p:cNvPr id="37" name="Shape 35"/>
+          <p:cNvSpPr/>
+          <p:nvPr/>
+        </p:nvSpPr>
+        <p:spPr>
+          <a:xfrm>
+            <a:off x="1508760" y="3721608"/>
+            <a:ext cx="1097280" cy="420624"/>
           </a:xfrm>
           <a:prstGeom prst="rect">
             <a:avLst>
@@ -38842,14 +40750,14 @@
       </p:sp>
       <p:sp>
         <p:nvSpPr>
-          <p:cNvPr id="45" name="Text 43"/>
-          <p:cNvSpPr/>
-          <p:nvPr/>
-        </p:nvSpPr>
-        <p:spPr>
-          <a:xfrm>
-            <a:off x="1508760" y="4178808"/>
-            <a:ext cx="822960" cy="420624"/>
+          <p:cNvPr id="38" name="Text 36"/>
+          <p:cNvSpPr/>
+          <p:nvPr/>
+        </p:nvSpPr>
+        <p:spPr>
+          <a:xfrm>
+            <a:off x="1508760" y="3721608"/>
+            <a:ext cx="1097280" cy="420624"/>
           </a:xfrm>
           <a:prstGeom prst="rect">
             <a:avLst/>
@@ -38873,7 +40781,7 @@
                 <a:ea typeface="Trebuchet MS" pitchFamily="34" charset="-122"/>
                 <a:cs typeface="Trebuchet MS" pitchFamily="34" charset="-120"/>
               </a:rPr>
-              <a:t>re-</a:t>
+              <a:t>over-</a:t>
             </a:r>
             <a:endParaRPr lang="en-US" sz="1300" dirty="0"/>
           </a:p>
@@ -38881,13 +40789,13 @@
       </p:sp>
       <p:sp>
         <p:nvSpPr>
-          <p:cNvPr id="46" name="Text 44"/>
-          <p:cNvSpPr/>
-          <p:nvPr/>
-        </p:nvSpPr>
-        <p:spPr>
-          <a:xfrm>
-            <a:off x="2359152" y="4178808"/>
+          <p:cNvPr id="39" name="Text 37"/>
+          <p:cNvSpPr/>
+          <p:nvPr/>
+        </p:nvSpPr>
+        <p:spPr>
+          <a:xfrm>
+            <a:off x="2633472" y="3721608"/>
             <a:ext cx="320040" cy="420624"/>
           </a:xfrm>
           <a:prstGeom prst="rect">
@@ -38920,13 +40828,13 @@
       </p:sp>
       <p:sp>
         <p:nvSpPr>
-          <p:cNvPr id="47" name="Shape 45"/>
-          <p:cNvSpPr/>
-          <p:nvPr/>
-        </p:nvSpPr>
-        <p:spPr>
-          <a:xfrm>
-            <a:off x="2706624" y="4178808"/>
+          <p:cNvPr id="40" name="Shape 38"/>
+          <p:cNvSpPr/>
+          <p:nvPr/>
+        </p:nvSpPr>
+        <p:spPr>
+          <a:xfrm>
+            <a:off x="2980944" y="3721608"/>
             <a:ext cx="1243584" cy="420624"/>
           </a:xfrm>
           <a:prstGeom prst="rect">
@@ -38954,13 +40862,13 @@
       </p:sp>
       <p:sp>
         <p:nvSpPr>
-          <p:cNvPr id="48" name="Text 46"/>
-          <p:cNvSpPr/>
-          <p:nvPr/>
-        </p:nvSpPr>
-        <p:spPr>
-          <a:xfrm>
-            <a:off x="2706624" y="4178808"/>
+          <p:cNvPr id="41" name="Text 39"/>
+          <p:cNvSpPr/>
+          <p:nvPr/>
+        </p:nvSpPr>
+        <p:spPr>
+          <a:xfrm>
+            <a:off x="2980944" y="3721608"/>
             <a:ext cx="1243584" cy="420624"/>
           </a:xfrm>
           <a:prstGeom prst="rect">
@@ -38993,13 +40901,13 @@
       </p:sp>
       <p:sp>
         <p:nvSpPr>
-          <p:cNvPr id="49" name="Text 47"/>
-          <p:cNvSpPr/>
-          <p:nvPr/>
-        </p:nvSpPr>
-        <p:spPr>
-          <a:xfrm>
-            <a:off x="3977640" y="4178808"/>
+          <p:cNvPr id="42" name="Text 40"/>
+          <p:cNvSpPr/>
+          <p:nvPr/>
+        </p:nvSpPr>
+        <p:spPr>
+          <a:xfrm>
+            <a:off x="4251960" y="3721608"/>
             <a:ext cx="320040" cy="420624"/>
           </a:xfrm>
           <a:prstGeom prst="rect">
@@ -39032,13 +40940,13 @@
       </p:sp>
       <p:sp>
         <p:nvSpPr>
-          <p:cNvPr id="50" name="Shape 48"/>
-          <p:cNvSpPr/>
-          <p:nvPr/>
-        </p:nvSpPr>
-        <p:spPr>
-          <a:xfrm>
-            <a:off x="4325112" y="4178808"/>
+          <p:cNvPr id="43" name="Shape 41"/>
+          <p:cNvSpPr/>
+          <p:nvPr/>
+        </p:nvSpPr>
+        <p:spPr>
+          <a:xfrm>
+            <a:off x="4599432" y="3721608"/>
             <a:ext cx="822960" cy="420624"/>
           </a:xfrm>
           <a:prstGeom prst="rect">
@@ -39066,13 +40974,13 @@
       </p:sp>
       <p:sp>
         <p:nvSpPr>
-          <p:cNvPr id="51" name="Text 49"/>
-          <p:cNvSpPr/>
-          <p:nvPr/>
-        </p:nvSpPr>
-        <p:spPr>
-          <a:xfrm>
-            <a:off x="4325112" y="4178808"/>
+          <p:cNvPr id="44" name="Text 42"/>
+          <p:cNvSpPr/>
+          <p:nvPr/>
+        </p:nvSpPr>
+        <p:spPr>
+          <a:xfrm>
+            <a:off x="4599432" y="3721608"/>
             <a:ext cx="822960" cy="420624"/>
           </a:xfrm>
           <a:prstGeom prst="rect">
@@ -39105,13 +41013,13 @@
       </p:sp>
       <p:sp>
         <p:nvSpPr>
-          <p:cNvPr id="52" name="Text 50"/>
-          <p:cNvSpPr/>
-          <p:nvPr/>
-        </p:nvSpPr>
-        <p:spPr>
-          <a:xfrm>
-            <a:off x="5221224" y="4178808"/>
+          <p:cNvPr id="45" name="Text 43"/>
+          <p:cNvSpPr/>
+          <p:nvPr/>
+        </p:nvSpPr>
+        <p:spPr>
+          <a:xfrm>
+            <a:off x="5495544" y="3721608"/>
             <a:ext cx="365760" cy="420624"/>
           </a:xfrm>
           <a:prstGeom prst="rect">
@@ -39144,13 +41052,13 @@
       </p:sp>
       <p:sp>
         <p:nvSpPr>
-          <p:cNvPr id="53" name="Shape 51"/>
-          <p:cNvSpPr/>
-          <p:nvPr/>
-        </p:nvSpPr>
-        <p:spPr>
-          <a:xfrm>
-            <a:off x="5632704" y="4178808"/>
+          <p:cNvPr id="46" name="Shape 44"/>
+          <p:cNvSpPr/>
+          <p:nvPr/>
+        </p:nvSpPr>
+        <p:spPr>
+          <a:xfrm>
+            <a:off x="5907024" y="3721608"/>
             <a:ext cx="2194560" cy="420624"/>
           </a:xfrm>
           <a:prstGeom prst="rect">
@@ -39171,13 +41079,13 @@
       </p:sp>
       <p:sp>
         <p:nvSpPr>
-          <p:cNvPr id="54" name="Text 52"/>
-          <p:cNvSpPr/>
-          <p:nvPr/>
-        </p:nvSpPr>
-        <p:spPr>
-          <a:xfrm>
-            <a:off x="5632704" y="4178808"/>
+          <p:cNvPr id="47" name="Text 45"/>
+          <p:cNvSpPr/>
+          <p:nvPr/>
+        </p:nvSpPr>
+        <p:spPr>
+          <a:xfrm>
+            <a:off x="5907024" y="3721608"/>
             <a:ext cx="2194560" cy="420624"/>
           </a:xfrm>
           <a:prstGeom prst="rect">
@@ -39202,7 +41110,7 @@
                 <a:ea typeface="Trebuchet MS" pitchFamily="34" charset="-122"/>
                 <a:cs typeface="Trebuchet MS" pitchFamily="34" charset="-120"/>
               </a:rPr>
-              <a:t>refill</a:t>
+              <a:t>fill</a:t>
             </a:r>
             <a:endParaRPr lang="en-US" sz="1400" dirty="0"/>
           </a:p>
@@ -39494,7 +41402,7 @@
                 <a:ea typeface="Calibri" pitchFamily="34" charset="-122"/>
                 <a:cs typeface="Calibri" pitchFamily="34" charset="-120"/>
               </a:rPr>
-              <a:t>Word Labs  •  wordlabs.app  •  Root: 'fill' = to make full, occupy</a:t>
+              <a:t>Word Labs  •  wordlabs.app  •  Root: 'fill' = to make full</a:t>
             </a:r>
             <a:endParaRPr lang="en-US" sz="800" dirty="0"/>
           </a:p>
@@ -39606,7 +41514,7 @@
                 <a:ea typeface="Trebuchet MS" pitchFamily="34" charset="-122"/>
                 <a:cs typeface="Trebuchet MS" pitchFamily="34" charset="-120"/>
               </a:rPr>
-              <a:t>refill</a:t>
+              <a:t>fill</a:t>
             </a:r>
             <a:endParaRPr lang="en-US" sz="1200" dirty="0"/>
           </a:p>
@@ -39672,7 +41580,7 @@
                 <a:ea typeface="Calibri" pitchFamily="34" charset="-122"/>
                 <a:cs typeface="Calibri" pitchFamily="34" charset="-120"/>
               </a:rPr>
-              <a:t>To fill something up again after it has been emptied.</a:t>
+              <a:t>to make something full</a:t>
             </a:r>
             <a:endParaRPr lang="en-US" sz="1200" dirty="0"/>
           </a:p>
@@ -39745,7 +41653,7 @@
                 <a:ea typeface="Trebuchet MS" pitchFamily="34" charset="-122"/>
                 <a:cs typeface="Trebuchet MS" pitchFamily="34" charset="-120"/>
               </a:rPr>
-              <a:t>filling</a:t>
+              <a:t>fills</a:t>
             </a:r>
             <a:endParaRPr lang="en-US" sz="1200" dirty="0"/>
           </a:p>
@@ -39811,7 +41719,7 @@
                 <a:ea typeface="Calibri" pitchFamily="34" charset="-122"/>
                 <a:cs typeface="Calibri" pitchFamily="34" charset="-120"/>
               </a:rPr>
-              <a:t>To put too much into something so it overflows.</a:t>
+              <a:t>something used to fill a gap or space</a:t>
             </a:r>
             <a:endParaRPr lang="en-US" sz="1200" dirty="0"/>
           </a:p>
@@ -39950,7 +41858,7 @@
                 <a:ea typeface="Calibri" pitchFamily="34" charset="-122"/>
                 <a:cs typeface="Calibri" pitchFamily="34" charset="-120"/>
               </a:rPr>
-              <a:t>When something has been made completely full.</a:t>
+              <a:t>made full of something</a:t>
             </a:r>
             <a:endParaRPr lang="en-US" sz="1200" dirty="0"/>
           </a:p>
@@ -40023,7 +41931,7 @@
                 <a:ea typeface="Trebuchet MS" pitchFamily="34" charset="-122"/>
                 <a:cs typeface="Trebuchet MS" pitchFamily="34" charset="-120"/>
               </a:rPr>
-              <a:t>overfill</a:t>
+              <a:t>filler</a:t>
             </a:r>
             <a:endParaRPr lang="en-US" sz="1200" dirty="0"/>
           </a:p>
@@ -40089,7 +41997,7 @@
                 <a:ea typeface="Calibri" pitchFamily="34" charset="-122"/>
                 <a:cs typeface="Calibri" pitchFamily="34" charset="-120"/>
               </a:rPr>
-              <a:t>Something used to fill a gap or empty space.</a:t>
+              <a:t>to fill something again once it is empty</a:t>
             </a:r>
             <a:endParaRPr lang="en-US" sz="1200" dirty="0"/>
           </a:p>
@@ -40162,7 +42070,7 @@
                 <a:ea typeface="Trebuchet MS" pitchFamily="34" charset="-122"/>
                 <a:cs typeface="Trebuchet MS" pitchFamily="34" charset="-120"/>
               </a:rPr>
-              <a:t>filler</a:t>
+              <a:t>refill</a:t>
             </a:r>
             <a:endParaRPr lang="en-US" sz="1200" dirty="0"/>
           </a:p>
@@ -40228,7 +42136,7 @@
                 <a:ea typeface="Calibri" pitchFamily="34" charset="-122"/>
                 <a:cs typeface="Calibri" pitchFamily="34" charset="-120"/>
               </a:rPr>
-              <a:t>Material used to fill in a hole or gap in the ground or a building.</a:t>
+              <a:t>the act of making something full, or the substance inside something</a:t>
             </a:r>
             <a:endParaRPr lang="en-US" sz="1200" dirty="0"/>
           </a:p>
@@ -40301,7 +42209,7 @@
                 <a:ea typeface="Trebuchet MS" pitchFamily="34" charset="-122"/>
                 <a:cs typeface="Trebuchet MS" pitchFamily="34" charset="-120"/>
               </a:rPr>
-              <a:t>fulfilment</a:t>
+              <a:t>fillers</a:t>
             </a:r>
             <a:endParaRPr lang="en-US" sz="1200" dirty="0"/>
           </a:p>
@@ -40367,7 +42275,7 @@
                 <a:ea typeface="Calibri" pitchFamily="34" charset="-122"/>
                 <a:cs typeface="Calibri" pitchFamily="34" charset="-120"/>
               </a:rPr>
-              <a:t>A feeling of happiness and satisfaction when you have done something meaningful.</a:t>
+              <a:t>things used to fill gaps or spaces</a:t>
             </a:r>
             <a:endParaRPr lang="en-US" sz="1200" dirty="0"/>
           </a:p>
@@ -40440,7 +42348,7 @@
                 <a:ea typeface="Trebuchet MS" pitchFamily="34" charset="-122"/>
                 <a:cs typeface="Trebuchet MS" pitchFamily="34" charset="-120"/>
               </a:rPr>
-              <a:t>infill</a:t>
+              <a:t>filling</a:t>
             </a:r>
             <a:endParaRPr lang="en-US" sz="1200" dirty="0"/>
           </a:p>
@@ -40506,7 +42414,7 @@
                 <a:ea typeface="Calibri" pitchFamily="34" charset="-122"/>
                 <a:cs typeface="Calibri" pitchFamily="34" charset="-120"/>
               </a:rPr>
-              <a:t>Something used to fill a space, like the cream inside a biscuit or a dentist putting material in a tooth.</a:t>
+              <a:t>makes something full (used with he, she, or it)</a:t>
             </a:r>
             <a:endParaRPr lang="en-US" sz="1200" dirty="0"/>
           </a:p>
@@ -40798,7 +42706,7 @@
                 <a:ea typeface="Calibri" pitchFamily="34" charset="-122"/>
                 <a:cs typeface="Calibri" pitchFamily="34" charset="-120"/>
               </a:rPr>
-              <a:t>Word Labs  •  wordlabs.app  •  Root: 'fill' = to make full, occupy</a:t>
+              <a:t>Word Labs  •  wordlabs.app  •  Root: 'fill' = to make full</a:t>
             </a:r>
             <a:endParaRPr lang="en-US" sz="800" dirty="0"/>
           </a:p>
@@ -41001,7 +42909,7 @@
                 <a:ea typeface="Calibri" pitchFamily="34" charset="-122"/>
                 <a:cs typeface="Calibri" pitchFamily="34" charset="-120"/>
               </a:rPr>
-              <a:t>Please refill the water jug before the next class begins.</a:t>
+              <a:t>Please fill the jug with water.</a:t>
             </a:r>
             <a:endParaRPr lang="en-US" sz="1500" dirty="0"/>
           </a:p>
@@ -41165,7 +43073,7 @@
                 <a:ea typeface="Calibri" pitchFamily="34" charset="-122"/>
                 <a:cs typeface="Calibri" pitchFamily="34" charset="-120"/>
               </a:rPr>
-              <a:t>The dentist told me I had a filling in one of my back teeth.</a:t>
+              <a:t>The tap fills the bath in five minutes.</a:t>
             </a:r>
             <a:endParaRPr lang="en-US" sz="1500" dirty="0"/>
           </a:p>
@@ -41329,7 +43237,7 @@
                 <a:ea typeface="Calibri" pitchFamily="34" charset="-122"/>
                 <a:cs typeface="Calibri" pitchFamily="34" charset="-120"/>
               </a:rPr>
-              <a:t>The workers used soil to backfill the trench after laying the pipes.</a:t>
+              <a:t>The jar was filled with sweets.</a:t>
             </a:r>
             <a:endParaRPr lang="en-US" sz="1500" dirty="0"/>
           </a:p>
